--- a/Progression_P6/P6-L09_Mock_Papers_2_and_4.pptx
+++ b/Progression_P6/P6-L09_Mock_Papers_2_and_4.pptx
@@ -1,6 +1,6 @@
 
 <file path=ppt/presentation.xml><?xml version="1.0" encoding="utf-8"?>
-<p:presentation xmlns:a="http://schemas.openxmlformats.org/drawingml/2006/main" xmlns:r="http://schemas.openxmlformats.org/officeDocument/2006/relationships" xmlns:p="http://schemas.openxmlformats.org/presentationml/2006/main" saveSubsetFonts="1" autoCompressPictures="0">
+<p:presentation xmlns:a="http://schemas.openxmlformats.org/drawingml/2006/main" xmlns:r="http://schemas.openxmlformats.org/officeDocument/2006/relationships" xmlns:p="http://schemas.openxmlformats.org/presentationml/2006/main" embedTrueTypeFonts="1" saveSubsetFonts="1" autoCompressPictures="0">
   <p:sldMasterIdLst>
     <p:sldMasterId id="2147483648" r:id="rId1"/>
   </p:sldMasterIdLst>
@@ -36,6 +36,13 @@
   </p:notesMasterIdLst>
   <p:sldSz cx="12192000" cy="6858000"/>
   <p:notesSz cx="6858000" cy="12192000"/>
+  <p:embeddedFontLst>
+    <p:embeddedFont>
+      <p:font typeface="Amiri" pitchFamily="2" charset="-78"/>
+      <p:regular r:id="rIdFont1"/>
+      <p:bold r:id="rIdFont2"/>
+    </p:embeddedFont>
+  </p:embeddedFontLst>
   <p:defaultTextStyle>
     <a:lvl1pPr marL="0" algn="l" defTabSz="914400" rtl="0" eaLnBrk="1" latinLnBrk="0" hangingPunct="1">
       <a:defRPr sz="1800" kern="1200">
@@ -392,8 +399,7 @@
           <a:schemeClr val="tx1"/>
         </a:solidFill>
         <a:latin typeface="+mn-lt"/>
-        <a:ea typeface="+mn-ea"/>
-        <a:cs typeface="+mn-cs"/>
+        <a:cs typeface="Amiri" pitchFamily="2" charset="-78"/>
       </a:defRPr>
     </a:lvl1pPr>
     <a:lvl2pPr marL="457200" algn="l" defTabSz="914400" rtl="0" eaLnBrk="1" latinLnBrk="0" hangingPunct="1">
@@ -402,8 +408,7 @@
           <a:schemeClr val="tx1"/>
         </a:solidFill>
         <a:latin typeface="+mn-lt"/>
-        <a:ea typeface="+mn-ea"/>
-        <a:cs typeface="+mn-cs"/>
+        <a:cs typeface="Amiri" pitchFamily="2" charset="-78"/>
       </a:defRPr>
     </a:lvl2pPr>
     <a:lvl3pPr marL="914400" algn="l" defTabSz="914400" rtl="0" eaLnBrk="1" latinLnBrk="0" hangingPunct="1">
@@ -412,8 +417,7 @@
           <a:schemeClr val="tx1"/>
         </a:solidFill>
         <a:latin typeface="+mn-lt"/>
-        <a:ea typeface="+mn-ea"/>
-        <a:cs typeface="+mn-cs"/>
+        <a:cs typeface="Amiri" pitchFamily="2" charset="-78"/>
       </a:defRPr>
     </a:lvl3pPr>
     <a:lvl4pPr marL="1371600" algn="l" defTabSz="914400" rtl="0" eaLnBrk="1" latinLnBrk="0" hangingPunct="1">
@@ -422,8 +426,7 @@
           <a:schemeClr val="tx1"/>
         </a:solidFill>
         <a:latin typeface="+mn-lt"/>
-        <a:ea typeface="+mn-ea"/>
-        <a:cs typeface="+mn-cs"/>
+        <a:cs typeface="Amiri" pitchFamily="2" charset="-78"/>
       </a:defRPr>
     </a:lvl4pPr>
     <a:lvl5pPr marL="1828800" algn="l" defTabSz="914400" rtl="0" eaLnBrk="1" latinLnBrk="0" hangingPunct="1">
@@ -432,8 +435,7 @@
           <a:schemeClr val="tx1"/>
         </a:solidFill>
         <a:latin typeface="+mn-lt"/>
-        <a:ea typeface="+mn-ea"/>
-        <a:cs typeface="+mn-cs"/>
+        <a:cs typeface="Amiri" pitchFamily="2" charset="-78"/>
       </a:defRPr>
     </a:lvl5pPr>
     <a:lvl6pPr marL="2286000" algn="l" defTabSz="914400" rtl="0" eaLnBrk="1" latinLnBrk="0" hangingPunct="1">
@@ -442,8 +444,7 @@
           <a:schemeClr val="tx1"/>
         </a:solidFill>
         <a:latin typeface="+mn-lt"/>
-        <a:ea typeface="+mn-ea"/>
-        <a:cs typeface="+mn-cs"/>
+        <a:cs typeface="Amiri" pitchFamily="2" charset="-78"/>
       </a:defRPr>
     </a:lvl6pPr>
     <a:lvl7pPr marL="2743200" algn="l" defTabSz="914400" rtl="0" eaLnBrk="1" latinLnBrk="0" hangingPunct="1">
@@ -452,8 +453,7 @@
           <a:schemeClr val="tx1"/>
         </a:solidFill>
         <a:latin typeface="+mn-lt"/>
-        <a:ea typeface="+mn-ea"/>
-        <a:cs typeface="+mn-cs"/>
+        <a:cs typeface="Amiri" pitchFamily="2" charset="-78"/>
       </a:defRPr>
     </a:lvl7pPr>
     <a:lvl8pPr marL="3200400" algn="l" defTabSz="914400" rtl="0" eaLnBrk="1" latinLnBrk="0" hangingPunct="1">
@@ -462,8 +462,7 @@
           <a:schemeClr val="tx1"/>
         </a:solidFill>
         <a:latin typeface="+mn-lt"/>
-        <a:ea typeface="+mn-ea"/>
-        <a:cs typeface="+mn-cs"/>
+        <a:cs typeface="Amiri" pitchFamily="2" charset="-78"/>
       </a:defRPr>
     </a:lvl8pPr>
     <a:lvl9pPr marL="3657600" algn="l" defTabSz="914400" rtl="0" eaLnBrk="1" latinLnBrk="0" hangingPunct="1">
@@ -472,8 +471,7 @@
           <a:schemeClr val="tx1"/>
         </a:solidFill>
         <a:latin typeface="+mn-lt"/>
-        <a:ea typeface="+mn-ea"/>
-        <a:cs typeface="+mn-cs"/>
+        <a:cs typeface="Amiri" pitchFamily="2" charset="-78"/>
       </a:defRPr>
     </a:lvl9pPr>
   </p:notesStyle>
@@ -2793,8 +2791,7 @@
             <a:schemeClr val="tx1"/>
           </a:solidFill>
           <a:latin typeface="+mj-lt"/>
-          <a:ea typeface="+mj-ea"/>
-          <a:cs typeface="+mj-cs"/>
+          <a:cs typeface="Amiri" pitchFamily="2" charset="-78"/>
         </a:defRPr>
       </a:lvl1pPr>
     </p:titleStyle>
@@ -2810,8 +2807,7 @@
             <a:schemeClr val="tx1"/>
           </a:solidFill>
           <a:latin typeface="+mn-lt"/>
-          <a:ea typeface="+mn-ea"/>
-          <a:cs typeface="+mn-cs"/>
+          <a:cs typeface="Amiri" pitchFamily="2" charset="-78"/>
         </a:defRPr>
       </a:lvl1pPr>
       <a:lvl2pPr marL="742950" indent="-285750" algn="l" defTabSz="914400" rtl="0" eaLnBrk="1" latinLnBrk="0" hangingPunct="1">
@@ -2825,8 +2821,7 @@
             <a:schemeClr val="tx1"/>
           </a:solidFill>
           <a:latin typeface="+mn-lt"/>
-          <a:ea typeface="+mn-ea"/>
-          <a:cs typeface="+mn-cs"/>
+          <a:cs typeface="Amiri" pitchFamily="2" charset="-78"/>
         </a:defRPr>
       </a:lvl2pPr>
       <a:lvl3pPr marL="1143000" indent="-228600" algn="l" defTabSz="914400" rtl="0" eaLnBrk="1" latinLnBrk="0" hangingPunct="1">
@@ -2840,8 +2835,7 @@
             <a:schemeClr val="tx1"/>
           </a:solidFill>
           <a:latin typeface="+mn-lt"/>
-          <a:ea typeface="+mn-ea"/>
-          <a:cs typeface="+mn-cs"/>
+          <a:cs typeface="Amiri" pitchFamily="2" charset="-78"/>
         </a:defRPr>
       </a:lvl3pPr>
       <a:lvl4pPr marL="1600200" indent="-228600" algn="l" defTabSz="914400" rtl="0" eaLnBrk="1" latinLnBrk="0" hangingPunct="1">
@@ -2855,8 +2849,7 @@
             <a:schemeClr val="tx1"/>
           </a:solidFill>
           <a:latin typeface="+mn-lt"/>
-          <a:ea typeface="+mn-ea"/>
-          <a:cs typeface="+mn-cs"/>
+          <a:cs typeface="Amiri" pitchFamily="2" charset="-78"/>
         </a:defRPr>
       </a:lvl4pPr>
       <a:lvl5pPr marL="2057400" indent="-228600" algn="l" defTabSz="914400" rtl="0" eaLnBrk="1" latinLnBrk="0" hangingPunct="1">
@@ -2870,8 +2863,7 @@
             <a:schemeClr val="tx1"/>
           </a:solidFill>
           <a:latin typeface="+mn-lt"/>
-          <a:ea typeface="+mn-ea"/>
-          <a:cs typeface="+mn-cs"/>
+          <a:cs typeface="Amiri" pitchFamily="2" charset="-78"/>
         </a:defRPr>
       </a:lvl5pPr>
       <a:lvl6pPr marL="2514600" indent="-228600" algn="l" defTabSz="914400" rtl="0" eaLnBrk="1" latinLnBrk="0" hangingPunct="1">
@@ -2885,8 +2877,7 @@
             <a:schemeClr val="tx1"/>
           </a:solidFill>
           <a:latin typeface="+mn-lt"/>
-          <a:ea typeface="+mn-ea"/>
-          <a:cs typeface="+mn-cs"/>
+          <a:cs typeface="Amiri" pitchFamily="2" charset="-78"/>
         </a:defRPr>
       </a:lvl6pPr>
       <a:lvl7pPr marL="2971800" indent="-228600" algn="l" defTabSz="914400" rtl="0" eaLnBrk="1" latinLnBrk="0" hangingPunct="1">
@@ -2900,8 +2891,7 @@
             <a:schemeClr val="tx1"/>
           </a:solidFill>
           <a:latin typeface="+mn-lt"/>
-          <a:ea typeface="+mn-ea"/>
-          <a:cs typeface="+mn-cs"/>
+          <a:cs typeface="Amiri" pitchFamily="2" charset="-78"/>
         </a:defRPr>
       </a:lvl7pPr>
       <a:lvl8pPr marL="3429000" indent="-228600" algn="l" defTabSz="914400" rtl="0" eaLnBrk="1" latinLnBrk="0" hangingPunct="1">
@@ -2915,8 +2905,7 @@
             <a:schemeClr val="tx1"/>
           </a:solidFill>
           <a:latin typeface="+mn-lt"/>
-          <a:ea typeface="+mn-ea"/>
-          <a:cs typeface="+mn-cs"/>
+          <a:cs typeface="Amiri" pitchFamily="2" charset="-78"/>
         </a:defRPr>
       </a:lvl8pPr>
       <a:lvl9pPr marL="3886200" indent="-228600" algn="l" defTabSz="914400" rtl="0" eaLnBrk="1" latinLnBrk="0" hangingPunct="1">
@@ -2930,8 +2919,7 @@
             <a:schemeClr val="tx1"/>
           </a:solidFill>
           <a:latin typeface="+mn-lt"/>
-          <a:ea typeface="+mn-ea"/>
-          <a:cs typeface="+mn-cs"/>
+          <a:cs typeface="Amiri" pitchFamily="2" charset="-78"/>
         </a:defRPr>
       </a:lvl9pPr>
     </p:bodyStyle>
@@ -2945,8 +2933,7 @@
             <a:schemeClr val="tx1"/>
           </a:solidFill>
           <a:latin typeface="+mn-lt"/>
-          <a:ea typeface="+mn-ea"/>
-          <a:cs typeface="+mn-cs"/>
+          <a:cs typeface="Amiri" pitchFamily="2" charset="-78"/>
         </a:defRPr>
       </a:lvl1pPr>
       <a:lvl2pPr marL="457200" algn="l" defTabSz="914400" rtl="0" eaLnBrk="1" latinLnBrk="0" hangingPunct="1">
@@ -2955,8 +2942,7 @@
             <a:schemeClr val="tx1"/>
           </a:solidFill>
           <a:latin typeface="+mn-lt"/>
-          <a:ea typeface="+mn-ea"/>
-          <a:cs typeface="+mn-cs"/>
+          <a:cs typeface="Amiri" pitchFamily="2" charset="-78"/>
         </a:defRPr>
       </a:lvl2pPr>
       <a:lvl3pPr marL="914400" algn="l" defTabSz="914400" rtl="0" eaLnBrk="1" latinLnBrk="0" hangingPunct="1">
@@ -2965,8 +2951,7 @@
             <a:schemeClr val="tx1"/>
           </a:solidFill>
           <a:latin typeface="+mn-lt"/>
-          <a:ea typeface="+mn-ea"/>
-          <a:cs typeface="+mn-cs"/>
+          <a:cs typeface="Amiri" pitchFamily="2" charset="-78"/>
         </a:defRPr>
       </a:lvl3pPr>
       <a:lvl4pPr marL="1371600" algn="l" defTabSz="914400" rtl="0" eaLnBrk="1" latinLnBrk="0" hangingPunct="1">
@@ -2975,8 +2960,7 @@
             <a:schemeClr val="tx1"/>
           </a:solidFill>
           <a:latin typeface="+mn-lt"/>
-          <a:ea typeface="+mn-ea"/>
-          <a:cs typeface="+mn-cs"/>
+          <a:cs typeface="Amiri" pitchFamily="2" charset="-78"/>
         </a:defRPr>
       </a:lvl4pPr>
       <a:lvl5pPr marL="1828800" algn="l" defTabSz="914400" rtl="0" eaLnBrk="1" latinLnBrk="0" hangingPunct="1">
@@ -2985,8 +2969,7 @@
             <a:schemeClr val="tx1"/>
           </a:solidFill>
           <a:latin typeface="+mn-lt"/>
-          <a:ea typeface="+mn-ea"/>
-          <a:cs typeface="+mn-cs"/>
+          <a:cs typeface="Amiri" pitchFamily="2" charset="-78"/>
         </a:defRPr>
       </a:lvl5pPr>
       <a:lvl6pPr marL="2286000" algn="l" defTabSz="914400" rtl="0" eaLnBrk="1" latinLnBrk="0" hangingPunct="1">
@@ -2995,8 +2978,7 @@
             <a:schemeClr val="tx1"/>
           </a:solidFill>
           <a:latin typeface="+mn-lt"/>
-          <a:ea typeface="+mn-ea"/>
-          <a:cs typeface="+mn-cs"/>
+          <a:cs typeface="Amiri" pitchFamily="2" charset="-78"/>
         </a:defRPr>
       </a:lvl6pPr>
       <a:lvl7pPr marL="2743200" algn="l" defTabSz="914400" rtl="0" eaLnBrk="1" latinLnBrk="0" hangingPunct="1">
@@ -3005,8 +2987,7 @@
             <a:schemeClr val="tx1"/>
           </a:solidFill>
           <a:latin typeface="+mn-lt"/>
-          <a:ea typeface="+mn-ea"/>
-          <a:cs typeface="+mn-cs"/>
+          <a:cs typeface="Amiri" pitchFamily="2" charset="-78"/>
         </a:defRPr>
       </a:lvl7pPr>
       <a:lvl8pPr marL="3200400" algn="l" defTabSz="914400" rtl="0" eaLnBrk="1" latinLnBrk="0" hangingPunct="1">
@@ -3015,8 +2996,7 @@
             <a:schemeClr val="tx1"/>
           </a:solidFill>
           <a:latin typeface="+mn-lt"/>
-          <a:ea typeface="+mn-ea"/>
-          <a:cs typeface="+mn-cs"/>
+          <a:cs typeface="Amiri" pitchFamily="2" charset="-78"/>
         </a:defRPr>
       </a:lvl8pPr>
       <a:lvl9pPr marL="3657600" algn="l" defTabSz="914400" rtl="0" eaLnBrk="1" latinLnBrk="0" hangingPunct="1">
@@ -3025,8 +3005,7 @@
             <a:schemeClr val="tx1"/>
           </a:solidFill>
           <a:latin typeface="+mn-lt"/>
-          <a:ea typeface="+mn-ea"/>
-          <a:cs typeface="+mn-cs"/>
+          <a:cs typeface="Amiri" pitchFamily="2" charset="-78"/>
         </a:defRPr>
       </a:lvl9pPr>
     </p:otherStyle>
@@ -3186,9 +3165,8 @@
                 <a:solidFill>
                   <a:srgbClr val="D4AF37"/>
                 </a:solidFill>
-                <a:latin typeface="Amiri" pitchFamily="34" charset="0"/>
-                <a:ea typeface="Amiri" pitchFamily="34" charset="-122"/>
-                <a:cs typeface="Amiri" pitchFamily="34" charset="-120"/>
+                <a:latin typeface="Amiri" pitchFamily="2" charset="-78"/>
+                <a:cs typeface="Amiri" pitchFamily="2" charset="-78"/>
               </a:rPr>
               <a:t>م</a:t>
             </a:r>
@@ -3226,8 +3204,7 @@
                   <a:srgbClr val="FFFFFF"/>
                 </a:solidFill>
                 <a:latin typeface="Cambria" pitchFamily="34" charset="0"/>
-                <a:ea typeface="Cambria" pitchFamily="34" charset="-122"/>
-                <a:cs typeface="Cambria" pitchFamily="34" charset="-120"/>
+                <a:cs typeface="Amiri" pitchFamily="2" charset="-78"/>
               </a:rPr>
               <a:t>Al Madina Online School</a:t>
             </a:r>
@@ -3243,8 +3220,7 @@
                   <a:srgbClr val="D4AF37"/>
                 </a:solidFill>
                 <a:latin typeface="Calibri" pitchFamily="34" charset="0"/>
-                <a:ea typeface="Calibri" pitchFamily="34" charset="-122"/>
-                <a:cs typeface="Calibri" pitchFamily="34" charset="-120"/>
+                <a:cs typeface="Amiri" pitchFamily="2" charset="-78"/>
               </a:rPr>
               <a:t>ARABIC DEPARTMENT · MIFTAH ARABIC</a:t>
             </a:r>
@@ -3282,8 +3258,7 @@
                   <a:srgbClr val="D4AF37"/>
                 </a:solidFill>
                 <a:latin typeface="Calibri" pitchFamily="34" charset="0"/>
-                <a:ea typeface="Calibri" pitchFamily="34" charset="-122"/>
-                <a:cs typeface="Calibri" pitchFamily="34" charset="-120"/>
+                <a:cs typeface="Amiri" pitchFamily="2" charset="-78"/>
               </a:rPr>
               <a:t>CAMBRIDGE IGCSE ARABIC 0544  ·  YEAR 9  ·  PROGRESSION P6  ·  P6-L09</a:t>
             </a:r>
@@ -3321,8 +3296,7 @@
                   <a:srgbClr val="9FB3D1"/>
                 </a:solidFill>
                 <a:latin typeface="Cambria" pitchFamily="34" charset="0"/>
-                <a:ea typeface="Cambria" pitchFamily="34" charset="-122"/>
-                <a:cs typeface="Cambria" pitchFamily="34" charset="-120"/>
+                <a:cs typeface="Amiri" pitchFamily="2" charset="-78"/>
               </a:rPr>
               <a:t>P6-L09</a:t>
             </a:r>
@@ -3360,8 +3334,7 @@
                   <a:srgbClr val="FFFFFF"/>
                 </a:solidFill>
                 <a:latin typeface="Cambria" pitchFamily="34" charset="0"/>
-                <a:ea typeface="Cambria" pitchFamily="34" charset="-122"/>
-                <a:cs typeface="Cambria" pitchFamily="34" charset="-120"/>
+                <a:cs typeface="Amiri" pitchFamily="2" charset="-78"/>
               </a:rPr>
               <a:t>Mock Examination — Papers 2 and 4 (Reading and Writing)</a:t>
             </a:r>
@@ -3398,9 +3371,8 @@
                 <a:solidFill>
                   <a:srgbClr val="D4AF37"/>
                 </a:solidFill>
-                <a:latin typeface="Amiri" pitchFamily="34" charset="0"/>
-                <a:ea typeface="Amiri" pitchFamily="34" charset="-122"/>
-                <a:cs typeface="Amiri" pitchFamily="34" charset="-120"/>
+                <a:latin typeface="Amiri" pitchFamily="2" charset="-78"/>
+                <a:cs typeface="Amiri" pitchFamily="2" charset="-78"/>
               </a:rPr>
               <a:t>امْتِحَانُ المُحَاكَاةِ — الوَرَقَتَانِ الثَّانِيَةُ وَالرَّابِعَةُ</a:t>
             </a:r>
@@ -3438,8 +3410,7 @@
                   <a:srgbClr val="C6D2E6"/>
                 </a:solidFill>
                 <a:latin typeface="Calibri" pitchFamily="34" charset="0"/>
-                <a:ea typeface="Calibri" pitchFamily="34" charset="-122"/>
-                <a:cs typeface="Calibri" pitchFamily="34" charset="-120"/>
+                <a:cs typeface="Amiri" pitchFamily="2" charset="-78"/>
               </a:rPr>
               <a:t>Sit the mock Paper 2 Reading and Paper 4 Writing under exam conditions: prove every reading answer from the text, write Q1 in the right register in under 20 minutes, and give Q2 its full architecture.</a:t>
             </a:r>
@@ -3504,8 +3475,7 @@
                   <a:srgbClr val="D4AF37"/>
                 </a:solidFill>
                 <a:latin typeface="Calibri" pitchFamily="34" charset="0"/>
-                <a:ea typeface="Calibri" pitchFamily="34" charset="-122"/>
-                <a:cs typeface="Calibri" pitchFamily="34" charset="-120"/>
+                <a:cs typeface="Amiri" pitchFamily="2" charset="-78"/>
               </a:rPr>
               <a:t>LESSON</a:t>
             </a:r>
@@ -3521,8 +3491,7 @@
                   <a:srgbClr val="FFFFFF"/>
                 </a:solidFill>
                 <a:latin typeface="Calibri" pitchFamily="34" charset="0"/>
-                <a:ea typeface="Calibri" pitchFamily="34" charset="-122"/>
-                <a:cs typeface="Calibri" pitchFamily="34" charset="-120"/>
+                <a:cs typeface="Amiri" pitchFamily="2" charset="-78"/>
               </a:rPr>
               <a:t>P6-L09 · Progression P6 · IGCSE Bridge</a:t>
             </a:r>
@@ -3587,8 +3556,7 @@
                   <a:srgbClr val="D4AF37"/>
                 </a:solidFill>
                 <a:latin typeface="Calibri" pitchFamily="34" charset="0"/>
-                <a:ea typeface="Calibri" pitchFamily="34" charset="-122"/>
-                <a:cs typeface="Calibri" pitchFamily="34" charset="-120"/>
+                <a:cs typeface="Amiri" pitchFamily="2" charset="-78"/>
               </a:rPr>
               <a:t>DURATION</a:t>
             </a:r>
@@ -3604,8 +3572,7 @@
                   <a:srgbClr val="FFFFFF"/>
                 </a:solidFill>
                 <a:latin typeface="Calibri" pitchFamily="34" charset="0"/>
-                <a:ea typeface="Calibri" pitchFamily="34" charset="-122"/>
-                <a:cs typeface="Calibri" pitchFamily="34" charset="-120"/>
+                <a:cs typeface="Amiri" pitchFamily="2" charset="-78"/>
               </a:rPr>
               <a:t>60 minutes · Teams</a:t>
             </a:r>
@@ -3670,8 +3637,7 @@
                   <a:srgbClr val="D4AF37"/>
                 </a:solidFill>
                 <a:latin typeface="Calibri" pitchFamily="34" charset="0"/>
-                <a:ea typeface="Calibri" pitchFamily="34" charset="-122"/>
-                <a:cs typeface="Calibri" pitchFamily="34" charset="-120"/>
+                <a:cs typeface="Amiri" pitchFamily="2" charset="-78"/>
               </a:rPr>
               <a:t>LEVEL</a:t>
             </a:r>
@@ -3687,8 +3653,7 @@
                   <a:srgbClr val="FFFFFF"/>
                 </a:solidFill>
                 <a:latin typeface="Calibri" pitchFamily="34" charset="0"/>
-                <a:ea typeface="Calibri" pitchFamily="34" charset="-122"/>
-                <a:cs typeface="Calibri" pitchFamily="34" charset="-120"/>
+                <a:cs typeface="Amiri" pitchFamily="2" charset="-78"/>
               </a:rPr>
               <a:t>Progression · B1 → B2</a:t>
             </a:r>
@@ -3753,8 +3718,7 @@
                   <a:srgbClr val="D4AF37"/>
                 </a:solidFill>
                 <a:latin typeface="Calibri" pitchFamily="34" charset="0"/>
-                <a:ea typeface="Calibri" pitchFamily="34" charset="-122"/>
-                <a:cs typeface="Calibri" pitchFamily="34" charset="-120"/>
+                <a:cs typeface="Amiri" pitchFamily="2" charset="-78"/>
               </a:rPr>
               <a:t>ON THE WEBSITE</a:t>
             </a:r>
@@ -3770,8 +3734,7 @@
                   <a:srgbClr val="FFFFFF"/>
                 </a:solidFill>
                 <a:latin typeface="Calibri" pitchFamily="34" charset="0"/>
-                <a:ea typeface="Calibri" pitchFamily="34" charset="-122"/>
-                <a:cs typeface="Calibri" pitchFamily="34" charset="-120"/>
+                <a:cs typeface="Amiri" pitchFamily="2" charset="-78"/>
               </a:rPr>
               <a:t>Pathways › Progression › P6 › P6-L09</a:t>
             </a:r>
@@ -3865,9 +3828,8 @@
                 <a:solidFill>
                   <a:srgbClr val="D4AF37"/>
                 </a:solidFill>
-                <a:latin typeface="Amiri" pitchFamily="34" charset="0"/>
-                <a:ea typeface="Amiri" pitchFamily="34" charset="-122"/>
-                <a:cs typeface="Amiri" pitchFamily="34" charset="-120"/>
+                <a:latin typeface="Amiri" pitchFamily="2" charset="-78"/>
+                <a:cs typeface="Amiri" pitchFamily="2" charset="-78"/>
               </a:rPr>
               <a:t>م</a:t>
             </a:r>
@@ -3905,8 +3867,7 @@
                   <a:srgbClr val="1B3B6F"/>
                 </a:solidFill>
                 <a:latin typeface="Cambria" pitchFamily="34" charset="0"/>
-                <a:ea typeface="Cambria" pitchFamily="34" charset="-122"/>
-                <a:cs typeface="Cambria" pitchFamily="34" charset="-120"/>
+                <a:cs typeface="Amiri" pitchFamily="2" charset="-78"/>
               </a:rPr>
               <a:t>Al Madina Online School</a:t>
             </a:r>
@@ -3944,8 +3905,7 @@
                   <a:srgbClr val="8A6D1E"/>
                 </a:solidFill>
                 <a:latin typeface="Calibri" pitchFamily="34" charset="0"/>
-                <a:ea typeface="Calibri" pitchFamily="34" charset="-122"/>
-                <a:cs typeface="Calibri" pitchFamily="34" charset="-120"/>
+                <a:cs typeface="Amiri" pitchFamily="2" charset="-78"/>
               </a:rPr>
               <a:t>ARABIC DEPARTMENT · MIFTAH ARABIC · IGCSE 0544</a:t>
             </a:r>
@@ -4010,8 +3970,7 @@
                   <a:srgbClr val="FFFFFF"/>
                 </a:solidFill>
                 <a:latin typeface="Calibri" pitchFamily="34" charset="0"/>
-                <a:ea typeface="Calibri" pitchFamily="34" charset="-122"/>
-                <a:cs typeface="Calibri" pitchFamily="34" charset="-120"/>
+                <a:cs typeface="Amiri" pitchFamily="2" charset="-78"/>
               </a:rPr>
               <a:t>P6-L09 · IGCSE Bridge</a:t>
             </a:r>
@@ -4076,8 +4035,7 @@
                   <a:srgbClr val="FFFFFF"/>
                 </a:solidFill>
                 <a:latin typeface="Calibri" pitchFamily="34" charset="0"/>
-                <a:ea typeface="Calibri" pitchFamily="34" charset="-122"/>
-                <a:cs typeface="Calibri" pitchFamily="34" charset="-120"/>
+                <a:cs typeface="Amiri" pitchFamily="2" charset="-78"/>
               </a:rPr>
               <a:t>YOU DO · 2 MIN</a:t>
             </a:r>
@@ -4115,8 +4073,7 @@
                   <a:srgbClr val="1E6B52"/>
                 </a:solidFill>
                 <a:latin typeface="Calibri" pitchFamily="34" charset="0"/>
-                <a:ea typeface="Calibri" pitchFamily="34" charset="-122"/>
-                <a:cs typeface="Calibri" pitchFamily="34" charset="-120"/>
+                <a:cs typeface="Amiri" pitchFamily="2" charset="-78"/>
               </a:rPr>
               <a:t>MOCK · Q GROUPS 3–4 · READ THE TEXT</a:t>
             </a:r>
@@ -4154,8 +4111,7 @@
                   <a:srgbClr val="1B3B6F"/>
                 </a:solidFill>
                 <a:latin typeface="Cambria" pitchFamily="34" charset="0"/>
-                <a:ea typeface="Cambria" pitchFamily="34" charset="-122"/>
-                <a:cs typeface="Cambria" pitchFamily="34" charset="-120"/>
+                <a:cs typeface="Amiri" pitchFamily="2" charset="-78"/>
               </a:rPr>
               <a:t>Paper 2 · Text 2 — R1–R4 + Q4 gap-fill</a:t>
             </a:r>
@@ -4192,9 +4148,8 @@
                 <a:solidFill>
                   <a:srgbClr val="8A6D1E"/>
                 </a:solidFill>
-                <a:latin typeface="Amiri" pitchFamily="34" charset="0"/>
-                <a:ea typeface="Amiri" pitchFamily="34" charset="-122"/>
-                <a:cs typeface="Amiri" pitchFamily="34" charset="-120"/>
+                <a:latin typeface="Amiri" pitchFamily="2" charset="-78"/>
+                <a:cs typeface="Amiri" pitchFamily="2" charset="-78"/>
               </a:rPr>
               <a:t>النَّصُّ</a:t>
             </a:r>
@@ -4232,8 +4187,7 @@
                   <a:srgbClr val="8A93A0"/>
                 </a:solidFill>
                 <a:latin typeface="Calibri" pitchFamily="34" charset="0"/>
-                <a:ea typeface="Calibri" pitchFamily="34" charset="-122"/>
-                <a:cs typeface="Calibri" pitchFamily="34" charset="-120"/>
+                <a:cs typeface="Amiri" pitchFamily="2" charset="-78"/>
               </a:rPr>
               <a:t>Miftah Arabic · Progression P6 · IGCSE Bridge · P6-L09</a:t>
             </a:r>
@@ -4307,9 +4261,8 @@
                 <a:solidFill>
                   <a:srgbClr val="1F2A37"/>
                 </a:solidFill>
-                <a:latin typeface="Amiri" pitchFamily="34" charset="0"/>
-                <a:ea typeface="Amiri" pitchFamily="34" charset="-122"/>
-                <a:cs typeface="Amiri" pitchFamily="34" charset="-120"/>
+                <a:latin typeface="Amiri" pitchFamily="2" charset="-78"/>
+                <a:cs typeface="Amiri" pitchFamily="2" charset="-78"/>
               </a:rPr>
               <a:t>يُشَارُ إِلَى أَنَّ القِرَاءَةَ عَادَةٌ تُثْرِي العَقْلَ. صَحِيحٌ أَنَّ الحَيَاةَ مَشْغُولَةٌ، غَيْرَ أَنَّ عَشْرَ دَقَائِقَ يَوْمِيًّا تَبْنِي عَادَةً رَاسِخَةً. وَيَتَطَلَّبُ الأَمْرُ أَنْ تُخَصِّصَ الأُسَرُ وَقْتًا لِلْقِرَاءَةِ. وَلَوْ قَرَأَ كُلُّ طِفْلٍ كِتَابًا شَهْرِيًّا، لَاتَّسَعَتْ مَدَارِكُهُ.</a:t>
             </a:r>
@@ -4347,8 +4300,7 @@
                   <a:srgbClr val="8A93A0"/>
                 </a:solidFill>
                 <a:latin typeface="Calibri" pitchFamily="34" charset="0"/>
-                <a:ea typeface="Calibri" pitchFamily="34" charset="-122"/>
-                <a:cs typeface="Calibri" pitchFamily="34" charset="-120"/>
+                <a:cs typeface="Amiri" pitchFamily="2" charset="-78"/>
               </a:rPr>
               <a:t>10 / 25</a:t>
             </a:r>
@@ -4442,9 +4394,8 @@
                 <a:solidFill>
                   <a:srgbClr val="D4AF37"/>
                 </a:solidFill>
-                <a:latin typeface="Amiri" pitchFamily="34" charset="0"/>
-                <a:ea typeface="Amiri" pitchFamily="34" charset="-122"/>
-                <a:cs typeface="Amiri" pitchFamily="34" charset="-120"/>
+                <a:latin typeface="Amiri" pitchFamily="2" charset="-78"/>
+                <a:cs typeface="Amiri" pitchFamily="2" charset="-78"/>
               </a:rPr>
               <a:t>م</a:t>
             </a:r>
@@ -4482,8 +4433,7 @@
                   <a:srgbClr val="1B3B6F"/>
                 </a:solidFill>
                 <a:latin typeface="Cambria" pitchFamily="34" charset="0"/>
-                <a:ea typeface="Cambria" pitchFamily="34" charset="-122"/>
-                <a:cs typeface="Cambria" pitchFamily="34" charset="-120"/>
+                <a:cs typeface="Amiri" pitchFamily="2" charset="-78"/>
               </a:rPr>
               <a:t>Al Madina Online School</a:t>
             </a:r>
@@ -4521,8 +4471,7 @@
                   <a:srgbClr val="8A6D1E"/>
                 </a:solidFill>
                 <a:latin typeface="Calibri" pitchFamily="34" charset="0"/>
-                <a:ea typeface="Calibri" pitchFamily="34" charset="-122"/>
-                <a:cs typeface="Calibri" pitchFamily="34" charset="-120"/>
+                <a:cs typeface="Amiri" pitchFamily="2" charset="-78"/>
               </a:rPr>
               <a:t>ARABIC DEPARTMENT · MIFTAH ARABIC · IGCSE 0544</a:t>
             </a:r>
@@ -4587,8 +4536,7 @@
                   <a:srgbClr val="FFFFFF"/>
                 </a:solidFill>
                 <a:latin typeface="Calibri" pitchFamily="34" charset="0"/>
-                <a:ea typeface="Calibri" pitchFamily="34" charset="-122"/>
-                <a:cs typeface="Calibri" pitchFamily="34" charset="-120"/>
+                <a:cs typeface="Amiri" pitchFamily="2" charset="-78"/>
               </a:rPr>
               <a:t>P6-L09 · IGCSE Bridge</a:t>
             </a:r>
@@ -4653,8 +4601,7 @@
                   <a:srgbClr val="FFFFFF"/>
                 </a:solidFill>
                 <a:latin typeface="Calibri" pitchFamily="34" charset="0"/>
-                <a:ea typeface="Calibri" pitchFamily="34" charset="-122"/>
-                <a:cs typeface="Calibri" pitchFamily="34" charset="-120"/>
+                <a:cs typeface="Amiri" pitchFamily="2" charset="-78"/>
               </a:rPr>
               <a:t>YOU DO · 7 MIN</a:t>
             </a:r>
@@ -4692,8 +4639,7 @@
                   <a:srgbClr val="1E6B52"/>
                 </a:solidFill>
                 <a:latin typeface="Calibri" pitchFamily="34" charset="0"/>
-                <a:ea typeface="Calibri" pitchFamily="34" charset="-122"/>
-                <a:cs typeface="Calibri" pitchFamily="34" charset="-120"/>
+                <a:cs typeface="Amiri" pitchFamily="2" charset="-78"/>
               </a:rPr>
               <a:t>MOCK · PAPER 2 · TEXT 2 — R1–R4 + Q4 GAP-FILL (6 MARKS)</a:t>
             </a:r>
@@ -4731,8 +4677,7 @@
                   <a:srgbClr val="1B3B6F"/>
                 </a:solidFill>
                 <a:latin typeface="Cambria" pitchFamily="34" charset="0"/>
-                <a:ea typeface="Cambria" pitchFamily="34" charset="-122"/>
-                <a:cs typeface="Cambria" pitchFamily="34" charset="-120"/>
+                <a:cs typeface="Amiri" pitchFamily="2" charset="-78"/>
               </a:rPr>
               <a:t>Comprehend, then choose the correct form</a:t>
             </a:r>
@@ -4769,9 +4714,8 @@
                 <a:solidFill>
                   <a:srgbClr val="8A6D1E"/>
                 </a:solidFill>
-                <a:latin typeface="Amiri" pitchFamily="34" charset="0"/>
-                <a:ea typeface="Amiri" pitchFamily="34" charset="-122"/>
-                <a:cs typeface="Amiri" pitchFamily="34" charset="-120"/>
+                <a:latin typeface="Amiri" pitchFamily="2" charset="-78"/>
+                <a:cs typeface="Amiri" pitchFamily="2" charset="-78"/>
               </a:rPr>
               <a:t>أَسْئِلَةُ القِرَاءَةِ</a:t>
             </a:r>
@@ -4809,8 +4753,7 @@
                   <a:srgbClr val="8A93A0"/>
                 </a:solidFill>
                 <a:latin typeface="Calibri" pitchFamily="34" charset="0"/>
-                <a:ea typeface="Calibri" pitchFamily="34" charset="-122"/>
-                <a:cs typeface="Calibri" pitchFamily="34" charset="-120"/>
+                <a:cs typeface="Amiri" pitchFamily="2" charset="-78"/>
               </a:rPr>
               <a:t>Miftah Arabic · Progression P6 · IGCSE Bridge · P6-L09</a:t>
             </a:r>
@@ -4907,8 +4850,7 @@
                   <a:srgbClr val="FFFFFF"/>
                 </a:solidFill>
                 <a:latin typeface="Calibri" pitchFamily="34" charset="0"/>
-                <a:ea typeface="Calibri" pitchFamily="34" charset="-122"/>
-                <a:cs typeface="Calibri" pitchFamily="34" charset="-120"/>
+                <a:cs typeface="Amiri" pitchFamily="2" charset="-78"/>
               </a:rPr>
               <a:t>1</a:t>
             </a:r>
@@ -4946,8 +4888,7 @@
                   <a:srgbClr val="1B3B6F"/>
                 </a:solidFill>
                 <a:latin typeface="Calibri" pitchFamily="34" charset="0"/>
-                <a:ea typeface="Calibri" pitchFamily="34" charset="-122"/>
-                <a:cs typeface="Calibri" pitchFamily="34" charset="-120"/>
+                <a:cs typeface="Amiri" pitchFamily="2" charset="-78"/>
               </a:rPr>
               <a:t>R1 — What is the main idea?</a:t>
             </a:r>
@@ -5010,8 +4951,7 @@
                   <a:srgbClr val="1B3B6F"/>
                 </a:solidFill>
                 <a:latin typeface="Calibri" pitchFamily="34" charset="0"/>
-                <a:ea typeface="Calibri" pitchFamily="34" charset="-122"/>
-                <a:cs typeface="Calibri" pitchFamily="34" charset="-120"/>
+                <a:cs typeface="Amiri" pitchFamily="2" charset="-78"/>
               </a:rPr>
               <a:t>A</a:t>
             </a:r>
@@ -5049,8 +4989,7 @@
                   <a:srgbClr val="1F2A37"/>
                 </a:solidFill>
                 <a:latin typeface="Calibri" pitchFamily="34" charset="0"/>
-                <a:ea typeface="Calibri" pitchFamily="34" charset="-122"/>
-                <a:cs typeface="Calibri" pitchFamily="34" charset="-120"/>
+                <a:cs typeface="Amiri" pitchFamily="2" charset="-78"/>
               </a:rPr>
               <a:t>Reading wastes time</a:t>
             </a:r>
@@ -5113,8 +5052,7 @@
                   <a:srgbClr val="1B3B6F"/>
                 </a:solidFill>
                 <a:latin typeface="Calibri" pitchFamily="34" charset="0"/>
-                <a:ea typeface="Calibri" pitchFamily="34" charset="-122"/>
-                <a:cs typeface="Calibri" pitchFamily="34" charset="-120"/>
+                <a:cs typeface="Amiri" pitchFamily="2" charset="-78"/>
               </a:rPr>
               <a:t>B</a:t>
             </a:r>
@@ -5152,8 +5090,7 @@
                   <a:srgbClr val="1F2A37"/>
                 </a:solidFill>
                 <a:latin typeface="Calibri" pitchFamily="34" charset="0"/>
-                <a:ea typeface="Calibri" pitchFamily="34" charset="-122"/>
-                <a:cs typeface="Calibri" pitchFamily="34" charset="-120"/>
+                <a:cs typeface="Amiri" pitchFamily="2" charset="-78"/>
               </a:rPr>
               <a:t>Reading enriches the mind</a:t>
             </a:r>
@@ -5216,8 +5153,7 @@
                   <a:srgbClr val="1B3B6F"/>
                 </a:solidFill>
                 <a:latin typeface="Calibri" pitchFamily="34" charset="0"/>
-                <a:ea typeface="Calibri" pitchFamily="34" charset="-122"/>
-                <a:cs typeface="Calibri" pitchFamily="34" charset="-120"/>
+                <a:cs typeface="Amiri" pitchFamily="2" charset="-78"/>
               </a:rPr>
               <a:t>C</a:t>
             </a:r>
@@ -5255,8 +5191,7 @@
                   <a:srgbClr val="1F2A37"/>
                 </a:solidFill>
                 <a:latin typeface="Calibri" pitchFamily="34" charset="0"/>
-                <a:ea typeface="Calibri" pitchFamily="34" charset="-122"/>
-                <a:cs typeface="Calibri" pitchFamily="34" charset="-120"/>
+                <a:cs typeface="Amiri" pitchFamily="2" charset="-78"/>
               </a:rPr>
               <a:t>Families are too busy to matter</a:t>
             </a:r>
@@ -5353,8 +5288,7 @@
                   <a:srgbClr val="FFFFFF"/>
                 </a:solidFill>
                 <a:latin typeface="Calibri" pitchFamily="34" charset="0"/>
-                <a:ea typeface="Calibri" pitchFamily="34" charset="-122"/>
-                <a:cs typeface="Calibri" pitchFamily="34" charset="-120"/>
+                <a:cs typeface="Amiri" pitchFamily="2" charset="-78"/>
               </a:rPr>
               <a:t>2</a:t>
             </a:r>
@@ -5392,8 +5326,7 @@
                   <a:srgbClr val="1B3B6F"/>
                 </a:solidFill>
                 <a:latin typeface="Calibri" pitchFamily="34" charset="0"/>
-                <a:ea typeface="Calibri" pitchFamily="34" charset="-122"/>
-                <a:cs typeface="Calibri" pitchFamily="34" charset="-120"/>
+                <a:cs typeface="Amiri" pitchFamily="2" charset="-78"/>
               </a:rPr>
               <a:t>R2 — How much daily reading builds a habit?</a:t>
             </a:r>
@@ -5456,8 +5389,7 @@
                   <a:srgbClr val="1B3B6F"/>
                 </a:solidFill>
                 <a:latin typeface="Calibri" pitchFamily="34" charset="0"/>
-                <a:ea typeface="Calibri" pitchFamily="34" charset="-122"/>
-                <a:cs typeface="Calibri" pitchFamily="34" charset="-120"/>
+                <a:cs typeface="Amiri" pitchFamily="2" charset="-78"/>
               </a:rPr>
               <a:t>A</a:t>
             </a:r>
@@ -5495,8 +5427,7 @@
                   <a:srgbClr val="1F2A37"/>
                 </a:solidFill>
                 <a:latin typeface="Calibri" pitchFamily="34" charset="0"/>
-                <a:ea typeface="Calibri" pitchFamily="34" charset="-122"/>
-                <a:cs typeface="Calibri" pitchFamily="34" charset="-120"/>
+                <a:cs typeface="Amiri" pitchFamily="2" charset="-78"/>
               </a:rPr>
               <a:t>Two hours</a:t>
             </a:r>
@@ -5559,8 +5490,7 @@
                   <a:srgbClr val="1B3B6F"/>
                 </a:solidFill>
                 <a:latin typeface="Calibri" pitchFamily="34" charset="0"/>
-                <a:ea typeface="Calibri" pitchFamily="34" charset="-122"/>
-                <a:cs typeface="Calibri" pitchFamily="34" charset="-120"/>
+                <a:cs typeface="Amiri" pitchFamily="2" charset="-78"/>
               </a:rPr>
               <a:t>B</a:t>
             </a:r>
@@ -5598,8 +5528,7 @@
                   <a:srgbClr val="1F2A37"/>
                 </a:solidFill>
                 <a:latin typeface="Calibri" pitchFamily="34" charset="0"/>
-                <a:ea typeface="Calibri" pitchFamily="34" charset="-122"/>
-                <a:cs typeface="Calibri" pitchFamily="34" charset="-120"/>
+                <a:cs typeface="Amiri" pitchFamily="2" charset="-78"/>
               </a:rPr>
               <a:t>No time</a:t>
             </a:r>
@@ -5662,8 +5591,7 @@
                   <a:srgbClr val="1B3B6F"/>
                 </a:solidFill>
                 <a:latin typeface="Calibri" pitchFamily="34" charset="0"/>
-                <a:ea typeface="Calibri" pitchFamily="34" charset="-122"/>
-                <a:cs typeface="Calibri" pitchFamily="34" charset="-120"/>
+                <a:cs typeface="Amiri" pitchFamily="2" charset="-78"/>
               </a:rPr>
               <a:t>C</a:t>
             </a:r>
@@ -5701,8 +5629,7 @@
                   <a:srgbClr val="1F2A37"/>
                 </a:solidFill>
                 <a:latin typeface="Calibri" pitchFamily="34" charset="0"/>
-                <a:ea typeface="Calibri" pitchFamily="34" charset="-122"/>
-                <a:cs typeface="Calibri" pitchFamily="34" charset="-120"/>
+                <a:cs typeface="Amiri" pitchFamily="2" charset="-78"/>
               </a:rPr>
               <a:t>Ten minutes</a:t>
             </a:r>
@@ -5799,8 +5726,7 @@
                   <a:srgbClr val="FFFFFF"/>
                 </a:solidFill>
                 <a:latin typeface="Calibri" pitchFamily="34" charset="0"/>
-                <a:ea typeface="Calibri" pitchFamily="34" charset="-122"/>
-                <a:cs typeface="Calibri" pitchFamily="34" charset="-120"/>
+                <a:cs typeface="Amiri" pitchFamily="2" charset="-78"/>
               </a:rPr>
               <a:t>3</a:t>
             </a:r>
@@ -5838,8 +5764,7 @@
                   <a:srgbClr val="1B3B6F"/>
                 </a:solidFill>
                 <a:latin typeface="Calibri" pitchFamily="34" charset="0"/>
-                <a:ea typeface="Calibri" pitchFamily="34" charset="-122"/>
-                <a:cs typeface="Calibri" pitchFamily="34" charset="-120"/>
+                <a:cs typeface="Amiri" pitchFamily="2" charset="-78"/>
               </a:rPr>
               <a:t>R3 — What does </a:t>
             </a:r>
@@ -5851,9 +5776,8 @@
                 <a:solidFill>
                   <a:srgbClr val="1B3B6F"/>
                 </a:solidFill>
-                <a:latin typeface="Amiri" pitchFamily="34" charset="0"/>
-                <a:ea typeface="Amiri" pitchFamily="34" charset="-122"/>
-                <a:cs typeface="Amiri" pitchFamily="34" charset="-120"/>
+                <a:latin typeface="Amiri" pitchFamily="2" charset="-78"/>
+                <a:cs typeface="Amiri" pitchFamily="2" charset="-78"/>
               </a:rPr>
               <a:t>صَحِيحٌ أَنَّ الحَيَاةَ مَشْغُولَةٌ</a:t>
             </a:r>
@@ -5866,8 +5790,7 @@
                   <a:srgbClr val="1B3B6F"/>
                 </a:solidFill>
                 <a:latin typeface="Calibri" pitchFamily="34" charset="0"/>
-                <a:ea typeface="Calibri" pitchFamily="34" charset="-122"/>
-                <a:cs typeface="Calibri" pitchFamily="34" charset="-120"/>
+                <a:cs typeface="Amiri" pitchFamily="2" charset="-78"/>
               </a:rPr>
               <a:t> do?</a:t>
             </a:r>
@@ -5930,8 +5853,7 @@
                   <a:srgbClr val="1B3B6F"/>
                 </a:solidFill>
                 <a:latin typeface="Calibri" pitchFamily="34" charset="0"/>
-                <a:ea typeface="Calibri" pitchFamily="34" charset="-122"/>
-                <a:cs typeface="Calibri" pitchFamily="34" charset="-120"/>
+                <a:cs typeface="Amiri" pitchFamily="2" charset="-78"/>
               </a:rPr>
               <a:t>A</a:t>
             </a:r>
@@ -5969,8 +5891,7 @@
                   <a:srgbClr val="1F2A37"/>
                 </a:solidFill>
                 <a:latin typeface="Calibri" pitchFamily="34" charset="0"/>
-                <a:ea typeface="Calibri" pitchFamily="34" charset="-122"/>
-                <a:cs typeface="Calibri" pitchFamily="34" charset="-120"/>
+                <a:cs typeface="Amiri" pitchFamily="2" charset="-78"/>
               </a:rPr>
               <a:t>Concedes an objection before answering it</a:t>
             </a:r>
@@ -6033,8 +5954,7 @@
                   <a:srgbClr val="1B3B6F"/>
                 </a:solidFill>
                 <a:latin typeface="Calibri" pitchFamily="34" charset="0"/>
-                <a:ea typeface="Calibri" pitchFamily="34" charset="-122"/>
-                <a:cs typeface="Calibri" pitchFamily="34" charset="-120"/>
+                <a:cs typeface="Amiri" pitchFamily="2" charset="-78"/>
               </a:rPr>
               <a:t>B</a:t>
             </a:r>
@@ -6072,8 +5992,7 @@
                   <a:srgbClr val="1F2A37"/>
                 </a:solidFill>
                 <a:latin typeface="Calibri" pitchFamily="34" charset="0"/>
-                <a:ea typeface="Calibri" pitchFamily="34" charset="-122"/>
-                <a:cs typeface="Calibri" pitchFamily="34" charset="-120"/>
+                <a:cs typeface="Amiri" pitchFamily="2" charset="-78"/>
               </a:rPr>
               <a:t>States the conclusion</a:t>
             </a:r>
@@ -6136,8 +6055,7 @@
                   <a:srgbClr val="1B3B6F"/>
                 </a:solidFill>
                 <a:latin typeface="Calibri" pitchFamily="34" charset="0"/>
-                <a:ea typeface="Calibri" pitchFamily="34" charset="-122"/>
-                <a:cs typeface="Calibri" pitchFamily="34" charset="-120"/>
+                <a:cs typeface="Amiri" pitchFamily="2" charset="-78"/>
               </a:rPr>
               <a:t>C</a:t>
             </a:r>
@@ -6175,8 +6093,7 @@
                   <a:srgbClr val="1F2A37"/>
                 </a:solidFill>
                 <a:latin typeface="Calibri" pitchFamily="34" charset="0"/>
-                <a:ea typeface="Calibri" pitchFamily="34" charset="-122"/>
-                <a:cs typeface="Calibri" pitchFamily="34" charset="-120"/>
+                <a:cs typeface="Amiri" pitchFamily="2" charset="-78"/>
               </a:rPr>
               <a:t>Reports a statistic</a:t>
             </a:r>
@@ -6273,8 +6190,7 @@
                   <a:srgbClr val="FFFFFF"/>
                 </a:solidFill>
                 <a:latin typeface="Calibri" pitchFamily="34" charset="0"/>
-                <a:ea typeface="Calibri" pitchFamily="34" charset="-122"/>
-                <a:cs typeface="Calibri" pitchFamily="34" charset="-120"/>
+                <a:cs typeface="Amiri" pitchFamily="2" charset="-78"/>
               </a:rPr>
               <a:t>4</a:t>
             </a:r>
@@ -6312,8 +6228,7 @@
                   <a:srgbClr val="1B3B6F"/>
                 </a:solidFill>
                 <a:latin typeface="Calibri" pitchFamily="34" charset="0"/>
-                <a:ea typeface="Calibri" pitchFamily="34" charset="-122"/>
-                <a:cs typeface="Calibri" pitchFamily="34" charset="-120"/>
+                <a:cs typeface="Amiri" pitchFamily="2" charset="-78"/>
               </a:rPr>
               <a:t>R4 gap-fill — </a:t>
             </a:r>
@@ -6325,9 +6240,8 @@
                 <a:solidFill>
                   <a:srgbClr val="1B3B6F"/>
                 </a:solidFill>
-                <a:latin typeface="Amiri" pitchFamily="34" charset="0"/>
-                <a:ea typeface="Amiri" pitchFamily="34" charset="-122"/>
-                <a:cs typeface="Amiri" pitchFamily="34" charset="-120"/>
+                <a:latin typeface="Amiri" pitchFamily="2" charset="-78"/>
+                <a:cs typeface="Amiri" pitchFamily="2" charset="-78"/>
               </a:rPr>
               <a:t>صَحِيحٌ أَنَّ الحَيَاةَ</a:t>
             </a:r>
@@ -6340,8 +6254,7 @@
                   <a:srgbClr val="1B3B6F"/>
                 </a:solidFill>
                 <a:latin typeface="Calibri" pitchFamily="34" charset="0"/>
-                <a:ea typeface="Calibri" pitchFamily="34" charset="-122"/>
-                <a:cs typeface="Calibri" pitchFamily="34" charset="-120"/>
+                <a:cs typeface="Amiri" pitchFamily="2" charset="-78"/>
               </a:rPr>
               <a:t> ___ .</a:t>
             </a:r>
@@ -6404,8 +6317,7 @@
                   <a:srgbClr val="1B3B6F"/>
                 </a:solidFill>
                 <a:latin typeface="Calibri" pitchFamily="34" charset="0"/>
-                <a:ea typeface="Calibri" pitchFamily="34" charset="-122"/>
-                <a:cs typeface="Calibri" pitchFamily="34" charset="-120"/>
+                <a:cs typeface="Amiri" pitchFamily="2" charset="-78"/>
               </a:rPr>
               <a:t>A</a:t>
             </a:r>
@@ -6442,9 +6354,8 @@
                 <a:solidFill>
                   <a:srgbClr val="1F2A37"/>
                 </a:solidFill>
-                <a:latin typeface="Amiri" pitchFamily="34" charset="0"/>
-                <a:ea typeface="Amiri" pitchFamily="34" charset="-122"/>
-                <a:cs typeface="Amiri" pitchFamily="34" charset="-120"/>
+                <a:latin typeface="Amiri" pitchFamily="2" charset="-78"/>
+                <a:cs typeface="Amiri" pitchFamily="2" charset="-78"/>
               </a:rPr>
               <a:t>تَكُونَ مَشْغُولَةً</a:t>
             </a:r>
@@ -6507,8 +6418,7 @@
                   <a:srgbClr val="1B3B6F"/>
                 </a:solidFill>
                 <a:latin typeface="Calibri" pitchFamily="34" charset="0"/>
-                <a:ea typeface="Calibri" pitchFamily="34" charset="-122"/>
-                <a:cs typeface="Calibri" pitchFamily="34" charset="-120"/>
+                <a:cs typeface="Amiri" pitchFamily="2" charset="-78"/>
               </a:rPr>
               <a:t>B</a:t>
             </a:r>
@@ -6545,9 +6455,8 @@
                 <a:solidFill>
                   <a:srgbClr val="1F2A37"/>
                 </a:solidFill>
-                <a:latin typeface="Amiri" pitchFamily="34" charset="0"/>
-                <a:ea typeface="Amiri" pitchFamily="34" charset="-122"/>
-                <a:cs typeface="Amiri" pitchFamily="34" charset="-120"/>
+                <a:latin typeface="Amiri" pitchFamily="2" charset="-78"/>
+                <a:cs typeface="Amiri" pitchFamily="2" charset="-78"/>
               </a:rPr>
               <a:t>مَشْغُولَةٌ</a:t>
             </a:r>
@@ -6610,8 +6519,7 @@
                   <a:srgbClr val="1B3B6F"/>
                 </a:solidFill>
                 <a:latin typeface="Calibri" pitchFamily="34" charset="0"/>
-                <a:ea typeface="Calibri" pitchFamily="34" charset="-122"/>
-                <a:cs typeface="Calibri" pitchFamily="34" charset="-120"/>
+                <a:cs typeface="Amiri" pitchFamily="2" charset="-78"/>
               </a:rPr>
               <a:t>C</a:t>
             </a:r>
@@ -6648,9 +6556,8 @@
                 <a:solidFill>
                   <a:srgbClr val="1F2A37"/>
                 </a:solidFill>
-                <a:latin typeface="Amiri" pitchFamily="34" charset="0"/>
-                <a:ea typeface="Amiri" pitchFamily="34" charset="-122"/>
-                <a:cs typeface="Amiri" pitchFamily="34" charset="-120"/>
+                <a:latin typeface="Amiri" pitchFamily="2" charset="-78"/>
+                <a:cs typeface="Amiri" pitchFamily="2" charset="-78"/>
               </a:rPr>
               <a:t>كَانَتْ مَشْغُولَةً</a:t>
             </a:r>
@@ -6747,8 +6654,7 @@
                   <a:srgbClr val="FFFFFF"/>
                 </a:solidFill>
                 <a:latin typeface="Calibri" pitchFamily="34" charset="0"/>
-                <a:ea typeface="Calibri" pitchFamily="34" charset="-122"/>
-                <a:cs typeface="Calibri" pitchFamily="34" charset="-120"/>
+                <a:cs typeface="Amiri" pitchFamily="2" charset="-78"/>
               </a:rPr>
               <a:t>5</a:t>
             </a:r>
@@ -6786,8 +6692,7 @@
                   <a:srgbClr val="1B3B6F"/>
                 </a:solidFill>
                 <a:latin typeface="Calibri" pitchFamily="34" charset="0"/>
-                <a:ea typeface="Calibri" pitchFamily="34" charset="-122"/>
-                <a:cs typeface="Calibri" pitchFamily="34" charset="-120"/>
+                <a:cs typeface="Amiri" pitchFamily="2" charset="-78"/>
               </a:rPr>
               <a:t>R4 gap-fill — </a:t>
             </a:r>
@@ -6799,9 +6704,8 @@
                 <a:solidFill>
                   <a:srgbClr val="1B3B6F"/>
                 </a:solidFill>
-                <a:latin typeface="Amiri" pitchFamily="34" charset="0"/>
-                <a:ea typeface="Amiri" pitchFamily="34" charset="-122"/>
-                <a:cs typeface="Amiri" pitchFamily="34" charset="-120"/>
+                <a:latin typeface="Amiri" pitchFamily="2" charset="-78"/>
+                <a:cs typeface="Amiri" pitchFamily="2" charset="-78"/>
               </a:rPr>
               <a:t>يَتَطَلَّبُ الأَمْرُ أَنْ</a:t>
             </a:r>
@@ -6814,8 +6718,7 @@
                   <a:srgbClr val="1B3B6F"/>
                 </a:solidFill>
                 <a:latin typeface="Calibri" pitchFamily="34" charset="0"/>
-                <a:ea typeface="Calibri" pitchFamily="34" charset="-122"/>
-                <a:cs typeface="Calibri" pitchFamily="34" charset="-120"/>
+                <a:cs typeface="Amiri" pitchFamily="2" charset="-78"/>
               </a:rPr>
               <a:t> ___ </a:t>
             </a:r>
@@ -6827,9 +6730,8 @@
                 <a:solidFill>
                   <a:srgbClr val="1B3B6F"/>
                 </a:solidFill>
-                <a:latin typeface="Amiri" pitchFamily="34" charset="0"/>
-                <a:ea typeface="Amiri" pitchFamily="34" charset="-122"/>
-                <a:cs typeface="Amiri" pitchFamily="34" charset="-120"/>
+                <a:latin typeface="Amiri" pitchFamily="2" charset="-78"/>
+                <a:cs typeface="Amiri" pitchFamily="2" charset="-78"/>
               </a:rPr>
               <a:t>الأُسَرُ وَقْتًا</a:t>
             </a:r>
@@ -6842,8 +6744,7 @@
                   <a:srgbClr val="1B3B6F"/>
                 </a:solidFill>
                 <a:latin typeface="Calibri" pitchFamily="34" charset="0"/>
-                <a:ea typeface="Calibri" pitchFamily="34" charset="-122"/>
-                <a:cs typeface="Calibri" pitchFamily="34" charset="-120"/>
+                <a:cs typeface="Amiri" pitchFamily="2" charset="-78"/>
               </a:rPr>
               <a:t>.</a:t>
             </a:r>
@@ -6906,8 +6807,7 @@
                   <a:srgbClr val="1B3B6F"/>
                 </a:solidFill>
                 <a:latin typeface="Calibri" pitchFamily="34" charset="0"/>
-                <a:ea typeface="Calibri" pitchFamily="34" charset="-122"/>
-                <a:cs typeface="Calibri" pitchFamily="34" charset="-120"/>
+                <a:cs typeface="Amiri" pitchFamily="2" charset="-78"/>
               </a:rPr>
               <a:t>A</a:t>
             </a:r>
@@ -6944,9 +6844,8 @@
                 <a:solidFill>
                   <a:srgbClr val="1F2A37"/>
                 </a:solidFill>
-                <a:latin typeface="Amiri" pitchFamily="34" charset="0"/>
-                <a:ea typeface="Amiri" pitchFamily="34" charset="-122"/>
-                <a:cs typeface="Amiri" pitchFamily="34" charset="-120"/>
+                <a:latin typeface="Amiri" pitchFamily="2" charset="-78"/>
+                <a:cs typeface="Amiri" pitchFamily="2" charset="-78"/>
               </a:rPr>
               <a:t>تُخَصِّصَ</a:t>
             </a:r>
@@ -7009,8 +6908,7 @@
                   <a:srgbClr val="1B3B6F"/>
                 </a:solidFill>
                 <a:latin typeface="Calibri" pitchFamily="34" charset="0"/>
-                <a:ea typeface="Calibri" pitchFamily="34" charset="-122"/>
-                <a:cs typeface="Calibri" pitchFamily="34" charset="-120"/>
+                <a:cs typeface="Amiri" pitchFamily="2" charset="-78"/>
               </a:rPr>
               <a:t>B</a:t>
             </a:r>
@@ -7047,9 +6945,8 @@
                 <a:solidFill>
                   <a:srgbClr val="1F2A37"/>
                 </a:solidFill>
-                <a:latin typeface="Amiri" pitchFamily="34" charset="0"/>
-                <a:ea typeface="Amiri" pitchFamily="34" charset="-122"/>
-                <a:cs typeface="Amiri" pitchFamily="34" charset="-120"/>
+                <a:latin typeface="Amiri" pitchFamily="2" charset="-78"/>
+                <a:cs typeface="Amiri" pitchFamily="2" charset="-78"/>
               </a:rPr>
               <a:t>تُخَصِّصُ</a:t>
             </a:r>
@@ -7112,8 +7009,7 @@
                   <a:srgbClr val="1B3B6F"/>
                 </a:solidFill>
                 <a:latin typeface="Calibri" pitchFamily="34" charset="0"/>
-                <a:ea typeface="Calibri" pitchFamily="34" charset="-122"/>
-                <a:cs typeface="Calibri" pitchFamily="34" charset="-120"/>
+                <a:cs typeface="Amiri" pitchFamily="2" charset="-78"/>
               </a:rPr>
               <a:t>C</a:t>
             </a:r>
@@ -7150,9 +7046,8 @@
                 <a:solidFill>
                   <a:srgbClr val="1F2A37"/>
                 </a:solidFill>
-                <a:latin typeface="Amiri" pitchFamily="34" charset="0"/>
-                <a:ea typeface="Amiri" pitchFamily="34" charset="-122"/>
-                <a:cs typeface="Amiri" pitchFamily="34" charset="-120"/>
+                <a:latin typeface="Amiri" pitchFamily="2" charset="-78"/>
+                <a:cs typeface="Amiri" pitchFamily="2" charset="-78"/>
               </a:rPr>
               <a:t>خَصَّصَتْ</a:t>
             </a:r>
@@ -7249,8 +7144,7 @@
                   <a:srgbClr val="FFFFFF"/>
                 </a:solidFill>
                 <a:latin typeface="Calibri" pitchFamily="34" charset="0"/>
-                <a:ea typeface="Calibri" pitchFamily="34" charset="-122"/>
-                <a:cs typeface="Calibri" pitchFamily="34" charset="-120"/>
+                <a:cs typeface="Amiri" pitchFamily="2" charset="-78"/>
               </a:rPr>
               <a:t>6</a:t>
             </a:r>
@@ -7288,8 +7182,7 @@
                   <a:srgbClr val="1B3B6F"/>
                 </a:solidFill>
                 <a:latin typeface="Calibri" pitchFamily="34" charset="0"/>
-                <a:ea typeface="Calibri" pitchFamily="34" charset="-122"/>
-                <a:cs typeface="Calibri" pitchFamily="34" charset="-120"/>
+                <a:cs typeface="Amiri" pitchFamily="2" charset="-78"/>
               </a:rPr>
               <a:t>R4 gap-fill — </a:t>
             </a:r>
@@ -7301,9 +7194,8 @@
                 <a:solidFill>
                   <a:srgbClr val="1B3B6F"/>
                 </a:solidFill>
-                <a:latin typeface="Amiri" pitchFamily="34" charset="0"/>
-                <a:ea typeface="Amiri" pitchFamily="34" charset="-122"/>
-                <a:cs typeface="Amiri" pitchFamily="34" charset="-120"/>
+                <a:latin typeface="Amiri" pitchFamily="2" charset="-78"/>
+                <a:cs typeface="Amiri" pitchFamily="2" charset="-78"/>
               </a:rPr>
               <a:t>لَوْ قَرَأَ كُلُّ طِفْلٍ كِتَابًا،</a:t>
             </a:r>
@@ -7316,8 +7208,7 @@
                   <a:srgbClr val="1B3B6F"/>
                 </a:solidFill>
                 <a:latin typeface="Calibri" pitchFamily="34" charset="0"/>
-                <a:ea typeface="Calibri" pitchFamily="34" charset="-122"/>
-                <a:cs typeface="Calibri" pitchFamily="34" charset="-120"/>
+                <a:cs typeface="Amiri" pitchFamily="2" charset="-78"/>
               </a:rPr>
               <a:t> ___ </a:t>
             </a:r>
@@ -7329,9 +7220,8 @@
                 <a:solidFill>
                   <a:srgbClr val="1B3B6F"/>
                 </a:solidFill>
-                <a:latin typeface="Amiri" pitchFamily="34" charset="0"/>
-                <a:ea typeface="Amiri" pitchFamily="34" charset="-122"/>
-                <a:cs typeface="Amiri" pitchFamily="34" charset="-120"/>
+                <a:latin typeface="Amiri" pitchFamily="2" charset="-78"/>
+                <a:cs typeface="Amiri" pitchFamily="2" charset="-78"/>
               </a:rPr>
               <a:t>مَدَارِكُهُ</a:t>
             </a:r>
@@ -7344,8 +7234,7 @@
                   <a:srgbClr val="1B3B6F"/>
                 </a:solidFill>
                 <a:latin typeface="Calibri" pitchFamily="34" charset="0"/>
-                <a:ea typeface="Calibri" pitchFamily="34" charset="-122"/>
-                <a:cs typeface="Calibri" pitchFamily="34" charset="-120"/>
+                <a:cs typeface="Amiri" pitchFamily="2" charset="-78"/>
               </a:rPr>
               <a:t>.</a:t>
             </a:r>
@@ -7408,8 +7297,7 @@
                   <a:srgbClr val="1B3B6F"/>
                 </a:solidFill>
                 <a:latin typeface="Calibri" pitchFamily="34" charset="0"/>
-                <a:ea typeface="Calibri" pitchFamily="34" charset="-122"/>
-                <a:cs typeface="Calibri" pitchFamily="34" charset="-120"/>
+                <a:cs typeface="Amiri" pitchFamily="2" charset="-78"/>
               </a:rPr>
               <a:t>A</a:t>
             </a:r>
@@ -7446,9 +7334,8 @@
                 <a:solidFill>
                   <a:srgbClr val="1F2A37"/>
                 </a:solidFill>
-                <a:latin typeface="Amiri" pitchFamily="34" charset="0"/>
-                <a:ea typeface="Amiri" pitchFamily="34" charset="-122"/>
-                <a:cs typeface="Amiri" pitchFamily="34" charset="-120"/>
+                <a:latin typeface="Amiri" pitchFamily="2" charset="-78"/>
+                <a:cs typeface="Amiri" pitchFamily="2" charset="-78"/>
               </a:rPr>
               <a:t>سَتَتَّسِعُ</a:t>
             </a:r>
@@ -7511,8 +7398,7 @@
                   <a:srgbClr val="1B3B6F"/>
                 </a:solidFill>
                 <a:latin typeface="Calibri" pitchFamily="34" charset="0"/>
-                <a:ea typeface="Calibri" pitchFamily="34" charset="-122"/>
-                <a:cs typeface="Calibri" pitchFamily="34" charset="-120"/>
+                <a:cs typeface="Amiri" pitchFamily="2" charset="-78"/>
               </a:rPr>
               <a:t>B</a:t>
             </a:r>
@@ -7549,9 +7435,8 @@
                 <a:solidFill>
                   <a:srgbClr val="1F2A37"/>
                 </a:solidFill>
-                <a:latin typeface="Amiri" pitchFamily="34" charset="0"/>
-                <a:ea typeface="Amiri" pitchFamily="34" charset="-122"/>
-                <a:cs typeface="Amiri" pitchFamily="34" charset="-120"/>
+                <a:latin typeface="Amiri" pitchFamily="2" charset="-78"/>
+                <a:cs typeface="Amiri" pitchFamily="2" charset="-78"/>
               </a:rPr>
               <a:t>تَتَّسِعُ</a:t>
             </a:r>
@@ -7614,8 +7499,7 @@
                   <a:srgbClr val="1B3B6F"/>
                 </a:solidFill>
                 <a:latin typeface="Calibri" pitchFamily="34" charset="0"/>
-                <a:ea typeface="Calibri" pitchFamily="34" charset="-122"/>
-                <a:cs typeface="Calibri" pitchFamily="34" charset="-120"/>
+                <a:cs typeface="Amiri" pitchFamily="2" charset="-78"/>
               </a:rPr>
               <a:t>C</a:t>
             </a:r>
@@ -7652,9 +7536,8 @@
                 <a:solidFill>
                   <a:srgbClr val="1F2A37"/>
                 </a:solidFill>
-                <a:latin typeface="Amiri" pitchFamily="34" charset="0"/>
-                <a:ea typeface="Amiri" pitchFamily="34" charset="-122"/>
-                <a:cs typeface="Amiri" pitchFamily="34" charset="-120"/>
+                <a:latin typeface="Amiri" pitchFamily="2" charset="-78"/>
+                <a:cs typeface="Amiri" pitchFamily="2" charset="-78"/>
               </a:rPr>
               <a:t>لَاتَّسَعَتْ</a:t>
             </a:r>
@@ -7692,8 +7575,7 @@
                   <a:srgbClr val="8A93A0"/>
                 </a:solidFill>
                 <a:latin typeface="Calibri" pitchFamily="34" charset="0"/>
-                <a:ea typeface="Calibri" pitchFamily="34" charset="-122"/>
-                <a:cs typeface="Calibri" pitchFamily="34" charset="-120"/>
+                <a:cs typeface="Amiri" pitchFamily="2" charset="-78"/>
               </a:rPr>
               <a:t>11 / 25</a:t>
             </a:r>
@@ -7787,9 +7669,8 @@
                 <a:solidFill>
                   <a:srgbClr val="D4AF37"/>
                 </a:solidFill>
-                <a:latin typeface="Amiri" pitchFamily="34" charset="0"/>
-                <a:ea typeface="Amiri" pitchFamily="34" charset="-122"/>
-                <a:cs typeface="Amiri" pitchFamily="34" charset="-120"/>
+                <a:latin typeface="Amiri" pitchFamily="2" charset="-78"/>
+                <a:cs typeface="Amiri" pitchFamily="2" charset="-78"/>
               </a:rPr>
               <a:t>م</a:t>
             </a:r>
@@ -7827,8 +7708,7 @@
                   <a:srgbClr val="1B3B6F"/>
                 </a:solidFill>
                 <a:latin typeface="Cambria" pitchFamily="34" charset="0"/>
-                <a:ea typeface="Cambria" pitchFamily="34" charset="-122"/>
-                <a:cs typeface="Cambria" pitchFamily="34" charset="-120"/>
+                <a:cs typeface="Amiri" pitchFamily="2" charset="-78"/>
               </a:rPr>
               <a:t>Al Madina Online School</a:t>
             </a:r>
@@ -7866,8 +7746,7 @@
                   <a:srgbClr val="8A6D1E"/>
                 </a:solidFill>
                 <a:latin typeface="Calibri" pitchFamily="34" charset="0"/>
-                <a:ea typeface="Calibri" pitchFamily="34" charset="-122"/>
-                <a:cs typeface="Calibri" pitchFamily="34" charset="-120"/>
+                <a:cs typeface="Amiri" pitchFamily="2" charset="-78"/>
               </a:rPr>
               <a:t>ARABIC DEPARTMENT · MIFTAH ARABIC · IGCSE 0544</a:t>
             </a:r>
@@ -7932,8 +7811,7 @@
                   <a:srgbClr val="FFFFFF"/>
                 </a:solidFill>
                 <a:latin typeface="Calibri" pitchFamily="34" charset="0"/>
-                <a:ea typeface="Calibri" pitchFamily="34" charset="-122"/>
-                <a:cs typeface="Calibri" pitchFamily="34" charset="-120"/>
+                <a:cs typeface="Amiri" pitchFamily="2" charset="-78"/>
               </a:rPr>
               <a:t>P6-L09 · IGCSE Bridge</a:t>
             </a:r>
@@ -7998,8 +7876,7 @@
                   <a:srgbClr val="FFFFFF"/>
                 </a:solidFill>
                 <a:latin typeface="Calibri" pitchFamily="34" charset="0"/>
-                <a:ea typeface="Calibri" pitchFamily="34" charset="-122"/>
-                <a:cs typeface="Calibri" pitchFamily="34" charset="-120"/>
+                <a:cs typeface="Amiri" pitchFamily="2" charset="-78"/>
               </a:rPr>
               <a:t>YOU DO · 2 MIN</a:t>
             </a:r>
@@ -8037,8 +7914,7 @@
                   <a:srgbClr val="1E6B52"/>
                 </a:solidFill>
                 <a:latin typeface="Calibri" pitchFamily="34" charset="0"/>
-                <a:ea typeface="Calibri" pitchFamily="34" charset="-122"/>
-                <a:cs typeface="Calibri" pitchFamily="34" charset="-120"/>
+                <a:cs typeface="Amiri" pitchFamily="2" charset="-78"/>
               </a:rPr>
               <a:t>MOCK · Q GROUPS 5–6 · READ THE TEXT</a:t>
             </a:r>
@@ -8076,8 +7952,7 @@
                   <a:srgbClr val="1B3B6F"/>
                 </a:solidFill>
                 <a:latin typeface="Cambria" pitchFamily="34" charset="0"/>
-                <a:ea typeface="Cambria" pitchFamily="34" charset="-122"/>
-                <a:cs typeface="Cambria" pitchFamily="34" charset="-120"/>
+                <a:cs typeface="Amiri" pitchFamily="2" charset="-78"/>
               </a:rPr>
               <a:t>Paper 2 · Text 3 — R3 + Q5 cross-text</a:t>
             </a:r>
@@ -8114,9 +7989,8 @@
                 <a:solidFill>
                   <a:srgbClr val="8A6D1E"/>
                 </a:solidFill>
-                <a:latin typeface="Amiri" pitchFamily="34" charset="0"/>
-                <a:ea typeface="Amiri" pitchFamily="34" charset="-122"/>
-                <a:cs typeface="Amiri" pitchFamily="34" charset="-120"/>
+                <a:latin typeface="Amiri" pitchFamily="2" charset="-78"/>
+                <a:cs typeface="Amiri" pitchFamily="2" charset="-78"/>
               </a:rPr>
               <a:t>النَّصُّ</a:t>
             </a:r>
@@ -8154,8 +8028,7 @@
                   <a:srgbClr val="8A93A0"/>
                 </a:solidFill>
                 <a:latin typeface="Calibri" pitchFamily="34" charset="0"/>
-                <a:ea typeface="Calibri" pitchFamily="34" charset="-122"/>
-                <a:cs typeface="Calibri" pitchFamily="34" charset="-120"/>
+                <a:cs typeface="Amiri" pitchFamily="2" charset="-78"/>
               </a:rPr>
               <a:t>Miftah Arabic · Progression P6 · IGCSE Bridge · P6-L09</a:t>
             </a:r>
@@ -8229,9 +8102,8 @@
                 <a:solidFill>
                   <a:srgbClr val="1F2A37"/>
                 </a:solidFill>
-                <a:latin typeface="Amiri" pitchFamily="34" charset="0"/>
-                <a:ea typeface="Amiri" pitchFamily="34" charset="-122"/>
-                <a:cs typeface="Amiri" pitchFamily="34" charset="-120"/>
+                <a:latin typeface="Amiri" pitchFamily="2" charset="-78"/>
+                <a:cs typeface="Amiri" pitchFamily="2" charset="-78"/>
               </a:rPr>
               <a:t>يَرَى الكَاتِبُ أَنَّ العَمَلَ التَّطَوُّعِيَّ يَبْنِي شَخْصِيَّةَ الشَّبَابِ. لَا يُمْكِنُ إِنْكَارُ أَنَّ الوَقْتَ ثَمِينٌ، غَيْرَ أَنَّ العَطَاءَ يَمْنَحُ مَعْنًى لَا يُشْتَرَى. وَبِنَاءً عَلَى مَا سَبَقَ، يَنْبَغِي أَنْ تُشَجِّعَ المَدَارِسُ التَّطَوُّعَ.</a:t>
             </a:r>
@@ -8269,8 +8141,7 @@
                   <a:srgbClr val="8A93A0"/>
                 </a:solidFill>
                 <a:latin typeface="Calibri" pitchFamily="34" charset="0"/>
-                <a:ea typeface="Calibri" pitchFamily="34" charset="-122"/>
-                <a:cs typeface="Calibri" pitchFamily="34" charset="-120"/>
+                <a:cs typeface="Amiri" pitchFamily="2" charset="-78"/>
               </a:rPr>
               <a:t>12 / 25</a:t>
             </a:r>
@@ -8364,9 +8235,8 @@
                 <a:solidFill>
                   <a:srgbClr val="D4AF37"/>
                 </a:solidFill>
-                <a:latin typeface="Amiri" pitchFamily="34" charset="0"/>
-                <a:ea typeface="Amiri" pitchFamily="34" charset="-122"/>
-                <a:cs typeface="Amiri" pitchFamily="34" charset="-120"/>
+                <a:latin typeface="Amiri" pitchFamily="2" charset="-78"/>
+                <a:cs typeface="Amiri" pitchFamily="2" charset="-78"/>
               </a:rPr>
               <a:t>م</a:t>
             </a:r>
@@ -8404,8 +8274,7 @@
                   <a:srgbClr val="1B3B6F"/>
                 </a:solidFill>
                 <a:latin typeface="Cambria" pitchFamily="34" charset="0"/>
-                <a:ea typeface="Cambria" pitchFamily="34" charset="-122"/>
-                <a:cs typeface="Cambria" pitchFamily="34" charset="-120"/>
+                <a:cs typeface="Amiri" pitchFamily="2" charset="-78"/>
               </a:rPr>
               <a:t>Al Madina Online School</a:t>
             </a:r>
@@ -8443,8 +8312,7 @@
                   <a:srgbClr val="8A6D1E"/>
                 </a:solidFill>
                 <a:latin typeface="Calibri" pitchFamily="34" charset="0"/>
-                <a:ea typeface="Calibri" pitchFamily="34" charset="-122"/>
-                <a:cs typeface="Calibri" pitchFamily="34" charset="-120"/>
+                <a:cs typeface="Amiri" pitchFamily="2" charset="-78"/>
               </a:rPr>
               <a:t>ARABIC DEPARTMENT · MIFTAH ARABIC · IGCSE 0544</a:t>
             </a:r>
@@ -8509,8 +8377,7 @@
                   <a:srgbClr val="FFFFFF"/>
                 </a:solidFill>
                 <a:latin typeface="Calibri" pitchFamily="34" charset="0"/>
-                <a:ea typeface="Calibri" pitchFamily="34" charset="-122"/>
-                <a:cs typeface="Calibri" pitchFamily="34" charset="-120"/>
+                <a:cs typeface="Amiri" pitchFamily="2" charset="-78"/>
               </a:rPr>
               <a:t>P6-L09 · IGCSE Bridge</a:t>
             </a:r>
@@ -8575,8 +8442,7 @@
                   <a:srgbClr val="FFFFFF"/>
                 </a:solidFill>
                 <a:latin typeface="Calibri" pitchFamily="34" charset="0"/>
-                <a:ea typeface="Calibri" pitchFamily="34" charset="-122"/>
-                <a:cs typeface="Calibri" pitchFamily="34" charset="-120"/>
+                <a:cs typeface="Amiri" pitchFamily="2" charset="-78"/>
               </a:rPr>
               <a:t>YOU DO · 7 MIN</a:t>
             </a:r>
@@ -8614,8 +8480,7 @@
                   <a:srgbClr val="1E6B52"/>
                 </a:solidFill>
                 <a:latin typeface="Calibri" pitchFamily="34" charset="0"/>
-                <a:ea typeface="Calibri" pitchFamily="34" charset="-122"/>
-                <a:cs typeface="Calibri" pitchFamily="34" charset="-120"/>
+                <a:cs typeface="Amiri" pitchFamily="2" charset="-78"/>
               </a:rPr>
               <a:t>MOCK · PAPER 2 · TEXT 3 — R3 + Q5 CROSS-TEXT (6 MARKS)</a:t>
             </a:r>
@@ -8653,8 +8518,7 @@
                   <a:srgbClr val="1B3B6F"/>
                 </a:solidFill>
                 <a:latin typeface="Cambria" pitchFamily="34" charset="0"/>
-                <a:ea typeface="Cambria" pitchFamily="34" charset="-122"/>
-                <a:cs typeface="Cambria" pitchFamily="34" charset="-120"/>
+                <a:cs typeface="Amiri" pitchFamily="2" charset="-78"/>
               </a:rPr>
               <a:t>Deep analysis and cross-text matching</a:t>
             </a:r>
@@ -8691,9 +8555,8 @@
                 <a:solidFill>
                   <a:srgbClr val="8A6D1E"/>
                 </a:solidFill>
-                <a:latin typeface="Amiri" pitchFamily="34" charset="0"/>
-                <a:ea typeface="Amiri" pitchFamily="34" charset="-122"/>
-                <a:cs typeface="Amiri" pitchFamily="34" charset="-120"/>
+                <a:latin typeface="Amiri" pitchFamily="2" charset="-78"/>
+                <a:cs typeface="Amiri" pitchFamily="2" charset="-78"/>
               </a:rPr>
               <a:t>أَسْئِلَةُ القِرَاءَةِ</a:t>
             </a:r>
@@ -8731,8 +8594,7 @@
                   <a:srgbClr val="8A93A0"/>
                 </a:solidFill>
                 <a:latin typeface="Calibri" pitchFamily="34" charset="0"/>
-                <a:ea typeface="Calibri" pitchFamily="34" charset="-122"/>
-                <a:cs typeface="Calibri" pitchFamily="34" charset="-120"/>
+                <a:cs typeface="Amiri" pitchFamily="2" charset="-78"/>
               </a:rPr>
               <a:t>Miftah Arabic · Progression P6 · IGCSE Bridge · P6-L09</a:t>
             </a:r>
@@ -8829,8 +8691,7 @@
                   <a:srgbClr val="FFFFFF"/>
                 </a:solidFill>
                 <a:latin typeface="Calibri" pitchFamily="34" charset="0"/>
-                <a:ea typeface="Calibri" pitchFamily="34" charset="-122"/>
-                <a:cs typeface="Calibri" pitchFamily="34" charset="-120"/>
+                <a:cs typeface="Amiri" pitchFamily="2" charset="-78"/>
               </a:rPr>
               <a:t>1</a:t>
             </a:r>
@@ -8868,8 +8729,7 @@
                   <a:srgbClr val="1B3B6F"/>
                 </a:solidFill>
                 <a:latin typeface="Calibri" pitchFamily="34" charset="0"/>
-                <a:ea typeface="Calibri" pitchFamily="34" charset="-122"/>
-                <a:cs typeface="Calibri" pitchFamily="34" charset="-120"/>
+                <a:cs typeface="Amiri" pitchFamily="2" charset="-78"/>
               </a:rPr>
               <a:t>R3 — What is the writer's attitude to volunteering?</a:t>
             </a:r>
@@ -8932,8 +8792,7 @@
                   <a:srgbClr val="1B3B6F"/>
                 </a:solidFill>
                 <a:latin typeface="Calibri" pitchFamily="34" charset="0"/>
-                <a:ea typeface="Calibri" pitchFamily="34" charset="-122"/>
-                <a:cs typeface="Calibri" pitchFamily="34" charset="-120"/>
+                <a:cs typeface="Amiri" pitchFamily="2" charset="-78"/>
               </a:rPr>
               <a:t>A</a:t>
             </a:r>
@@ -8971,8 +8830,7 @@
                   <a:srgbClr val="1F2A37"/>
                 </a:solidFill>
                 <a:latin typeface="Calibri" pitchFamily="34" charset="0"/>
-                <a:ea typeface="Calibri" pitchFamily="34" charset="-122"/>
-                <a:cs typeface="Calibri" pitchFamily="34" charset="-120"/>
+                <a:cs typeface="Amiri" pitchFamily="2" charset="-78"/>
               </a:rPr>
               <a:t>Positive: it gives meaning that cannot be bought</a:t>
             </a:r>
@@ -9035,8 +8893,7 @@
                   <a:srgbClr val="1B3B6F"/>
                 </a:solidFill>
                 <a:latin typeface="Calibri" pitchFamily="34" charset="0"/>
-                <a:ea typeface="Calibri" pitchFamily="34" charset="-122"/>
-                <a:cs typeface="Calibri" pitchFamily="34" charset="-120"/>
+                <a:cs typeface="Amiri" pitchFamily="2" charset="-78"/>
               </a:rPr>
               <a:t>B</a:t>
             </a:r>
@@ -9074,8 +8931,7 @@
                   <a:srgbClr val="1F2A37"/>
                 </a:solidFill>
                 <a:latin typeface="Calibri" pitchFamily="34" charset="0"/>
-                <a:ea typeface="Calibri" pitchFamily="34" charset="-122"/>
-                <a:cs typeface="Calibri" pitchFamily="34" charset="-120"/>
+                <a:cs typeface="Amiri" pitchFamily="2" charset="-78"/>
               </a:rPr>
               <a:t>Negative</a:t>
             </a:r>
@@ -9138,8 +8994,7 @@
                   <a:srgbClr val="1B3B6F"/>
                 </a:solidFill>
                 <a:latin typeface="Calibri" pitchFamily="34" charset="0"/>
-                <a:ea typeface="Calibri" pitchFamily="34" charset="-122"/>
-                <a:cs typeface="Calibri" pitchFamily="34" charset="-120"/>
+                <a:cs typeface="Amiri" pitchFamily="2" charset="-78"/>
               </a:rPr>
               <a:t>C</a:t>
             </a:r>
@@ -9177,8 +9032,7 @@
                   <a:srgbClr val="1F2A37"/>
                 </a:solidFill>
                 <a:latin typeface="Calibri" pitchFamily="34" charset="0"/>
-                <a:ea typeface="Calibri" pitchFamily="34" charset="-122"/>
-                <a:cs typeface="Calibri" pitchFamily="34" charset="-120"/>
+                <a:cs typeface="Amiri" pitchFamily="2" charset="-78"/>
               </a:rPr>
               <a:t>Neutral</a:t>
             </a:r>
@@ -9275,8 +9129,7 @@
                   <a:srgbClr val="FFFFFF"/>
                 </a:solidFill>
                 <a:latin typeface="Calibri" pitchFamily="34" charset="0"/>
-                <a:ea typeface="Calibri" pitchFamily="34" charset="-122"/>
-                <a:cs typeface="Calibri" pitchFamily="34" charset="-120"/>
+                <a:cs typeface="Amiri" pitchFamily="2" charset="-78"/>
               </a:rPr>
               <a:t>2</a:t>
             </a:r>
@@ -9314,8 +9167,7 @@
                   <a:srgbClr val="1B3B6F"/>
                 </a:solidFill>
                 <a:latin typeface="Calibri" pitchFamily="34" charset="0"/>
-                <a:ea typeface="Calibri" pitchFamily="34" charset="-122"/>
-                <a:cs typeface="Calibri" pitchFamily="34" charset="-120"/>
+                <a:cs typeface="Amiri" pitchFamily="2" charset="-78"/>
               </a:rPr>
               <a:t>R3 — What does </a:t>
             </a:r>
@@ -9327,9 +9179,8 @@
                 <a:solidFill>
                   <a:srgbClr val="1B3B6F"/>
                 </a:solidFill>
-                <a:latin typeface="Amiri" pitchFamily="34" charset="0"/>
-                <a:ea typeface="Amiri" pitchFamily="34" charset="-122"/>
-                <a:cs typeface="Amiri" pitchFamily="34" charset="-120"/>
+                <a:latin typeface="Amiri" pitchFamily="2" charset="-78"/>
+                <a:cs typeface="Amiri" pitchFamily="2" charset="-78"/>
               </a:rPr>
               <a:t>لَا يُمْكِنُ إِنْكَارُ أَنَّ</a:t>
             </a:r>
@@ -9342,8 +9193,7 @@
                   <a:srgbClr val="1B3B6F"/>
                 </a:solidFill>
                 <a:latin typeface="Calibri" pitchFamily="34" charset="0"/>
-                <a:ea typeface="Calibri" pitchFamily="34" charset="-122"/>
-                <a:cs typeface="Calibri" pitchFamily="34" charset="-120"/>
+                <a:cs typeface="Amiri" pitchFamily="2" charset="-78"/>
               </a:rPr>
               <a:t> signal?</a:t>
             </a:r>
@@ -9406,8 +9256,7 @@
                   <a:srgbClr val="1B3B6F"/>
                 </a:solidFill>
                 <a:latin typeface="Calibri" pitchFamily="34" charset="0"/>
-                <a:ea typeface="Calibri" pitchFamily="34" charset="-122"/>
-                <a:cs typeface="Calibri" pitchFamily="34" charset="-120"/>
+                <a:cs typeface="Amiri" pitchFamily="2" charset="-78"/>
               </a:rPr>
               <a:t>A</a:t>
             </a:r>
@@ -9445,8 +9294,7 @@
                   <a:srgbClr val="1F2A37"/>
                 </a:solidFill>
                 <a:latin typeface="Calibri" pitchFamily="34" charset="0"/>
-                <a:ea typeface="Calibri" pitchFamily="34" charset="-122"/>
-                <a:cs typeface="Calibri" pitchFamily="34" charset="-120"/>
+                <a:cs typeface="Amiri" pitchFamily="2" charset="-78"/>
               </a:rPr>
               <a:t>A final conclusion</a:t>
             </a:r>
@@ -9509,8 +9357,7 @@
                   <a:srgbClr val="1B3B6F"/>
                 </a:solidFill>
                 <a:latin typeface="Calibri" pitchFamily="34" charset="0"/>
-                <a:ea typeface="Calibri" pitchFamily="34" charset="-122"/>
-                <a:cs typeface="Calibri" pitchFamily="34" charset="-120"/>
+                <a:cs typeface="Amiri" pitchFamily="2" charset="-78"/>
               </a:rPr>
               <a:t>B</a:t>
             </a:r>
@@ -9548,8 +9395,7 @@
                   <a:srgbClr val="1F2A37"/>
                 </a:solidFill>
                 <a:latin typeface="Calibri" pitchFamily="34" charset="0"/>
-                <a:ea typeface="Calibri" pitchFamily="34" charset="-122"/>
-                <a:cs typeface="Calibri" pitchFamily="34" charset="-120"/>
+                <a:cs typeface="Amiri" pitchFamily="2" charset="-78"/>
               </a:rPr>
               <a:t>A concession before a counter-claim</a:t>
             </a:r>
@@ -9612,8 +9458,7 @@
                   <a:srgbClr val="1B3B6F"/>
                 </a:solidFill>
                 <a:latin typeface="Calibri" pitchFamily="34" charset="0"/>
-                <a:ea typeface="Calibri" pitchFamily="34" charset="-122"/>
-                <a:cs typeface="Calibri" pitchFamily="34" charset="-120"/>
+                <a:cs typeface="Amiri" pitchFamily="2" charset="-78"/>
               </a:rPr>
               <a:t>C</a:t>
             </a:r>
@@ -9651,8 +9496,7 @@
                   <a:srgbClr val="1F2A37"/>
                 </a:solidFill>
                 <a:latin typeface="Calibri" pitchFamily="34" charset="0"/>
-                <a:ea typeface="Calibri" pitchFamily="34" charset="-122"/>
-                <a:cs typeface="Calibri" pitchFamily="34" charset="-120"/>
+                <a:cs typeface="Amiri" pitchFamily="2" charset="-78"/>
               </a:rPr>
               <a:t>A statistic</a:t>
             </a:r>
@@ -9749,8 +9593,7 @@
                   <a:srgbClr val="FFFFFF"/>
                 </a:solidFill>
                 <a:latin typeface="Calibri" pitchFamily="34" charset="0"/>
-                <a:ea typeface="Calibri" pitchFamily="34" charset="-122"/>
-                <a:cs typeface="Calibri" pitchFamily="34" charset="-120"/>
+                <a:cs typeface="Amiri" pitchFamily="2" charset="-78"/>
               </a:rPr>
               <a:t>3</a:t>
             </a:r>
@@ -9788,8 +9631,7 @@
                   <a:srgbClr val="1B3B6F"/>
                 </a:solidFill>
                 <a:latin typeface="Calibri" pitchFamily="34" charset="0"/>
-                <a:ea typeface="Calibri" pitchFamily="34" charset="-122"/>
-                <a:cs typeface="Calibri" pitchFamily="34" charset="-120"/>
+                <a:cs typeface="Amiri" pitchFamily="2" charset="-78"/>
               </a:rPr>
               <a:t>R3 — What does </a:t>
             </a:r>
@@ -9801,9 +9643,8 @@
                 <a:solidFill>
                   <a:srgbClr val="1B3B6F"/>
                 </a:solidFill>
-                <a:latin typeface="Amiri" pitchFamily="34" charset="0"/>
-                <a:ea typeface="Amiri" pitchFamily="34" charset="-122"/>
-                <a:cs typeface="Amiri" pitchFamily="34" charset="-120"/>
+                <a:latin typeface="Amiri" pitchFamily="2" charset="-78"/>
+                <a:cs typeface="Amiri" pitchFamily="2" charset="-78"/>
               </a:rPr>
               <a:t>وَبِنَاءً عَلَى مَا سَبَقَ</a:t>
             </a:r>
@@ -9816,8 +9657,7 @@
                   <a:srgbClr val="1B3B6F"/>
                 </a:solidFill>
                 <a:latin typeface="Calibri" pitchFamily="34" charset="0"/>
-                <a:ea typeface="Calibri" pitchFamily="34" charset="-122"/>
-                <a:cs typeface="Calibri" pitchFamily="34" charset="-120"/>
+                <a:cs typeface="Amiri" pitchFamily="2" charset="-78"/>
               </a:rPr>
               <a:t> mark?</a:t>
             </a:r>
@@ -9880,8 +9720,7 @@
                   <a:srgbClr val="1B3B6F"/>
                 </a:solidFill>
                 <a:latin typeface="Calibri" pitchFamily="34" charset="0"/>
-                <a:ea typeface="Calibri" pitchFamily="34" charset="-122"/>
-                <a:cs typeface="Calibri" pitchFamily="34" charset="-120"/>
+                <a:cs typeface="Amiri" pitchFamily="2" charset="-78"/>
               </a:rPr>
               <a:t>A</a:t>
             </a:r>
@@ -9919,8 +9758,7 @@
                   <a:srgbClr val="1F2A37"/>
                 </a:solidFill>
                 <a:latin typeface="Calibri" pitchFamily="34" charset="0"/>
-                <a:ea typeface="Calibri" pitchFamily="34" charset="-122"/>
-                <a:cs typeface="Calibri" pitchFamily="34" charset="-120"/>
+                <a:cs typeface="Amiri" pitchFamily="2" charset="-78"/>
               </a:rPr>
               <a:t>The conclusion</a:t>
             </a:r>
@@ -9983,8 +9821,7 @@
                   <a:srgbClr val="1B3B6F"/>
                 </a:solidFill>
                 <a:latin typeface="Calibri" pitchFamily="34" charset="0"/>
-                <a:ea typeface="Calibri" pitchFamily="34" charset="-122"/>
-                <a:cs typeface="Calibri" pitchFamily="34" charset="-120"/>
+                <a:cs typeface="Amiri" pitchFamily="2" charset="-78"/>
               </a:rPr>
               <a:t>B</a:t>
             </a:r>
@@ -10022,8 +9859,7 @@
                   <a:srgbClr val="1F2A37"/>
                 </a:solidFill>
                 <a:latin typeface="Calibri" pitchFamily="34" charset="0"/>
-                <a:ea typeface="Calibri" pitchFamily="34" charset="-122"/>
-                <a:cs typeface="Calibri" pitchFamily="34" charset="-120"/>
+                <a:cs typeface="Amiri" pitchFamily="2" charset="-78"/>
               </a:rPr>
               <a:t>A new argument</a:t>
             </a:r>
@@ -10086,8 +9922,7 @@
                   <a:srgbClr val="1B3B6F"/>
                 </a:solidFill>
                 <a:latin typeface="Calibri" pitchFamily="34" charset="0"/>
-                <a:ea typeface="Calibri" pitchFamily="34" charset="-122"/>
-                <a:cs typeface="Calibri" pitchFamily="34" charset="-120"/>
+                <a:cs typeface="Amiri" pitchFamily="2" charset="-78"/>
               </a:rPr>
               <a:t>C</a:t>
             </a:r>
@@ -10125,8 +9960,7 @@
                   <a:srgbClr val="1F2A37"/>
                 </a:solidFill>
                 <a:latin typeface="Calibri" pitchFamily="34" charset="0"/>
-                <a:ea typeface="Calibri" pitchFamily="34" charset="-122"/>
-                <a:cs typeface="Calibri" pitchFamily="34" charset="-120"/>
+                <a:cs typeface="Amiri" pitchFamily="2" charset="-78"/>
               </a:rPr>
               <a:t>A quotation</a:t>
             </a:r>
@@ -10223,8 +10057,7 @@
                   <a:srgbClr val="FFFFFF"/>
                 </a:solidFill>
                 <a:latin typeface="Calibri" pitchFamily="34" charset="0"/>
-                <a:ea typeface="Calibri" pitchFamily="34" charset="-122"/>
-                <a:cs typeface="Calibri" pitchFamily="34" charset="-120"/>
+                <a:cs typeface="Amiri" pitchFamily="2" charset="-78"/>
               </a:rPr>
               <a:t>4</a:t>
             </a:r>
@@ -10262,8 +10095,7 @@
                   <a:srgbClr val="1B3B6F"/>
                 </a:solidFill>
                 <a:latin typeface="Calibri" pitchFamily="34" charset="0"/>
-                <a:ea typeface="Calibri" pitchFamily="34" charset="-122"/>
-                <a:cs typeface="Calibri" pitchFamily="34" charset="-120"/>
+                <a:cs typeface="Amiri" pitchFamily="2" charset="-78"/>
               </a:rPr>
               <a:t>Q5 — “Volunteering builds young people's character.” Which text?</a:t>
             </a:r>
@@ -10326,8 +10158,7 @@
                   <a:srgbClr val="1B3B6F"/>
                 </a:solidFill>
                 <a:latin typeface="Calibri" pitchFamily="34" charset="0"/>
-                <a:ea typeface="Calibri" pitchFamily="34" charset="-122"/>
-                <a:cs typeface="Calibri" pitchFamily="34" charset="-120"/>
+                <a:cs typeface="Amiri" pitchFamily="2" charset="-78"/>
               </a:rPr>
               <a:t>A</a:t>
             </a:r>
@@ -10365,8 +10196,7 @@
                   <a:srgbClr val="1F2A37"/>
                 </a:solidFill>
                 <a:latin typeface="Calibri" pitchFamily="34" charset="0"/>
-                <a:ea typeface="Calibri" pitchFamily="34" charset="-122"/>
-                <a:cs typeface="Calibri" pitchFamily="34" charset="-120"/>
+                <a:cs typeface="Amiri" pitchFamily="2" charset="-78"/>
               </a:rPr>
               <a:t>Text 1</a:t>
             </a:r>
@@ -10429,8 +10259,7 @@
                   <a:srgbClr val="1B3B6F"/>
                 </a:solidFill>
                 <a:latin typeface="Calibri" pitchFamily="34" charset="0"/>
-                <a:ea typeface="Calibri" pitchFamily="34" charset="-122"/>
-                <a:cs typeface="Calibri" pitchFamily="34" charset="-120"/>
+                <a:cs typeface="Amiri" pitchFamily="2" charset="-78"/>
               </a:rPr>
               <a:t>B</a:t>
             </a:r>
@@ -10468,8 +10297,7 @@
                   <a:srgbClr val="1F2A37"/>
                 </a:solidFill>
                 <a:latin typeface="Calibri" pitchFamily="34" charset="0"/>
-                <a:ea typeface="Calibri" pitchFamily="34" charset="-122"/>
-                <a:cs typeface="Calibri" pitchFamily="34" charset="-120"/>
+                <a:cs typeface="Amiri" pitchFamily="2" charset="-78"/>
               </a:rPr>
               <a:t>Text 2</a:t>
             </a:r>
@@ -10532,8 +10360,7 @@
                   <a:srgbClr val="1B3B6F"/>
                 </a:solidFill>
                 <a:latin typeface="Calibri" pitchFamily="34" charset="0"/>
-                <a:ea typeface="Calibri" pitchFamily="34" charset="-122"/>
-                <a:cs typeface="Calibri" pitchFamily="34" charset="-120"/>
+                <a:cs typeface="Amiri" pitchFamily="2" charset="-78"/>
               </a:rPr>
               <a:t>C</a:t>
             </a:r>
@@ -10571,8 +10398,7 @@
                   <a:srgbClr val="1F2A37"/>
                 </a:solidFill>
                 <a:latin typeface="Calibri" pitchFamily="34" charset="0"/>
-                <a:ea typeface="Calibri" pitchFamily="34" charset="-122"/>
-                <a:cs typeface="Calibri" pitchFamily="34" charset="-120"/>
+                <a:cs typeface="Amiri" pitchFamily="2" charset="-78"/>
               </a:rPr>
               <a:t>Text 3</a:t>
             </a:r>
@@ -10669,8 +10495,7 @@
                   <a:srgbClr val="FFFFFF"/>
                 </a:solidFill>
                 <a:latin typeface="Calibri" pitchFamily="34" charset="0"/>
-                <a:ea typeface="Calibri" pitchFamily="34" charset="-122"/>
-                <a:cs typeface="Calibri" pitchFamily="34" charset="-120"/>
+                <a:cs typeface="Amiri" pitchFamily="2" charset="-78"/>
               </a:rPr>
               <a:t>5</a:t>
             </a:r>
@@ -10708,8 +10533,7 @@
                   <a:srgbClr val="1B3B6F"/>
                 </a:solidFill>
                 <a:latin typeface="Calibri" pitchFamily="34" charset="0"/>
-                <a:ea typeface="Calibri" pitchFamily="34" charset="-122"/>
-                <a:cs typeface="Calibri" pitchFamily="34" charset="-120"/>
+                <a:cs typeface="Amiri" pitchFamily="2" charset="-78"/>
               </a:rPr>
               <a:t>Q5 — “Ten minutes of daily reading builds a habit.” Which text?</a:t>
             </a:r>
@@ -10772,8 +10596,7 @@
                   <a:srgbClr val="1B3B6F"/>
                 </a:solidFill>
                 <a:latin typeface="Calibri" pitchFamily="34" charset="0"/>
-                <a:ea typeface="Calibri" pitchFamily="34" charset="-122"/>
-                <a:cs typeface="Calibri" pitchFamily="34" charset="-120"/>
+                <a:cs typeface="Amiri" pitchFamily="2" charset="-78"/>
               </a:rPr>
               <a:t>A</a:t>
             </a:r>
@@ -10811,8 +10634,7 @@
                   <a:srgbClr val="1F2A37"/>
                 </a:solidFill>
                 <a:latin typeface="Calibri" pitchFamily="34" charset="0"/>
-                <a:ea typeface="Calibri" pitchFamily="34" charset="-122"/>
-                <a:cs typeface="Calibri" pitchFamily="34" charset="-120"/>
+                <a:cs typeface="Amiri" pitchFamily="2" charset="-78"/>
               </a:rPr>
               <a:t>Text 1</a:t>
             </a:r>
@@ -10875,8 +10697,7 @@
                   <a:srgbClr val="1B3B6F"/>
                 </a:solidFill>
                 <a:latin typeface="Calibri" pitchFamily="34" charset="0"/>
-                <a:ea typeface="Calibri" pitchFamily="34" charset="-122"/>
-                <a:cs typeface="Calibri" pitchFamily="34" charset="-120"/>
+                <a:cs typeface="Amiri" pitchFamily="2" charset="-78"/>
               </a:rPr>
               <a:t>B</a:t>
             </a:r>
@@ -10914,8 +10735,7 @@
                   <a:srgbClr val="1F2A37"/>
                 </a:solidFill>
                 <a:latin typeface="Calibri" pitchFamily="34" charset="0"/>
-                <a:ea typeface="Calibri" pitchFamily="34" charset="-122"/>
-                <a:cs typeface="Calibri" pitchFamily="34" charset="-120"/>
+                <a:cs typeface="Amiri" pitchFamily="2" charset="-78"/>
               </a:rPr>
               <a:t>Text 3</a:t>
             </a:r>
@@ -10978,8 +10798,7 @@
                   <a:srgbClr val="1B3B6F"/>
                 </a:solidFill>
                 <a:latin typeface="Calibri" pitchFamily="34" charset="0"/>
-                <a:ea typeface="Calibri" pitchFamily="34" charset="-122"/>
-                <a:cs typeface="Calibri" pitchFamily="34" charset="-120"/>
+                <a:cs typeface="Amiri" pitchFamily="2" charset="-78"/>
               </a:rPr>
               <a:t>C</a:t>
             </a:r>
@@ -11017,8 +10836,7 @@
                   <a:srgbClr val="1F2A37"/>
                 </a:solidFill>
                 <a:latin typeface="Calibri" pitchFamily="34" charset="0"/>
-                <a:ea typeface="Calibri" pitchFamily="34" charset="-122"/>
-                <a:cs typeface="Calibri" pitchFamily="34" charset="-120"/>
+                <a:cs typeface="Amiri" pitchFamily="2" charset="-78"/>
               </a:rPr>
               <a:t>Text 2</a:t>
             </a:r>
@@ -11115,8 +10933,7 @@
                   <a:srgbClr val="FFFFFF"/>
                 </a:solidFill>
                 <a:latin typeface="Calibri" pitchFamily="34" charset="0"/>
-                <a:ea typeface="Calibri" pitchFamily="34" charset="-122"/>
-                <a:cs typeface="Calibri" pitchFamily="34" charset="-120"/>
+                <a:cs typeface="Amiri" pitchFamily="2" charset="-78"/>
               </a:rPr>
               <a:t>6</a:t>
             </a:r>
@@ -11154,8 +10971,7 @@
                   <a:srgbClr val="1B3B6F"/>
                 </a:solidFill>
                 <a:latin typeface="Calibri" pitchFamily="34" charset="0"/>
-                <a:ea typeface="Calibri" pitchFamily="34" charset="-122"/>
-                <a:cs typeface="Calibri" pitchFamily="34" charset="-120"/>
+                <a:cs typeface="Amiri" pitchFamily="2" charset="-78"/>
               </a:rPr>
               <a:t>Q5 — “The sports centre opens at six in the morning.” Which text?</a:t>
             </a:r>
@@ -11218,8 +11034,7 @@
                   <a:srgbClr val="1B3B6F"/>
                 </a:solidFill>
                 <a:latin typeface="Calibri" pitchFamily="34" charset="0"/>
-                <a:ea typeface="Calibri" pitchFamily="34" charset="-122"/>
-                <a:cs typeface="Calibri" pitchFamily="34" charset="-120"/>
+                <a:cs typeface="Amiri" pitchFamily="2" charset="-78"/>
               </a:rPr>
               <a:t>A</a:t>
             </a:r>
@@ -11257,8 +11072,7 @@
                   <a:srgbClr val="1F2A37"/>
                 </a:solidFill>
                 <a:latin typeface="Calibri" pitchFamily="34" charset="0"/>
-                <a:ea typeface="Calibri" pitchFamily="34" charset="-122"/>
-                <a:cs typeface="Calibri" pitchFamily="34" charset="-120"/>
+                <a:cs typeface="Amiri" pitchFamily="2" charset="-78"/>
               </a:rPr>
               <a:t>Text 1</a:t>
             </a:r>
@@ -11321,8 +11135,7 @@
                   <a:srgbClr val="1B3B6F"/>
                 </a:solidFill>
                 <a:latin typeface="Calibri" pitchFamily="34" charset="0"/>
-                <a:ea typeface="Calibri" pitchFamily="34" charset="-122"/>
-                <a:cs typeface="Calibri" pitchFamily="34" charset="-120"/>
+                <a:cs typeface="Amiri" pitchFamily="2" charset="-78"/>
               </a:rPr>
               <a:t>B</a:t>
             </a:r>
@@ -11360,8 +11173,7 @@
                   <a:srgbClr val="1F2A37"/>
                 </a:solidFill>
                 <a:latin typeface="Calibri" pitchFamily="34" charset="0"/>
-                <a:ea typeface="Calibri" pitchFamily="34" charset="-122"/>
-                <a:cs typeface="Calibri" pitchFamily="34" charset="-120"/>
+                <a:cs typeface="Amiri" pitchFamily="2" charset="-78"/>
               </a:rPr>
               <a:t>Text 2</a:t>
             </a:r>
@@ -11424,8 +11236,7 @@
                   <a:srgbClr val="1B3B6F"/>
                 </a:solidFill>
                 <a:latin typeface="Calibri" pitchFamily="34" charset="0"/>
-                <a:ea typeface="Calibri" pitchFamily="34" charset="-122"/>
-                <a:cs typeface="Calibri" pitchFamily="34" charset="-120"/>
+                <a:cs typeface="Amiri" pitchFamily="2" charset="-78"/>
               </a:rPr>
               <a:t>C</a:t>
             </a:r>
@@ -11463,8 +11274,7 @@
                   <a:srgbClr val="1F2A37"/>
                 </a:solidFill>
                 <a:latin typeface="Calibri" pitchFamily="34" charset="0"/>
-                <a:ea typeface="Calibri" pitchFamily="34" charset="-122"/>
-                <a:cs typeface="Calibri" pitchFamily="34" charset="-120"/>
+                <a:cs typeface="Amiri" pitchFamily="2" charset="-78"/>
               </a:rPr>
               <a:t>Text 3</a:t>
             </a:r>
@@ -11502,8 +11312,7 @@
                   <a:srgbClr val="8A93A0"/>
                 </a:solidFill>
                 <a:latin typeface="Calibri" pitchFamily="34" charset="0"/>
-                <a:ea typeface="Calibri" pitchFamily="34" charset="-122"/>
-                <a:cs typeface="Calibri" pitchFamily="34" charset="-120"/>
+                <a:cs typeface="Amiri" pitchFamily="2" charset="-78"/>
               </a:rPr>
               <a:t>13 / 25</a:t>
             </a:r>
@@ -11597,9 +11406,8 @@
                 <a:solidFill>
                   <a:srgbClr val="D4AF37"/>
                 </a:solidFill>
-                <a:latin typeface="Amiri" pitchFamily="34" charset="0"/>
-                <a:ea typeface="Amiri" pitchFamily="34" charset="-122"/>
-                <a:cs typeface="Amiri" pitchFamily="34" charset="-120"/>
+                <a:latin typeface="Amiri" pitchFamily="2" charset="-78"/>
+                <a:cs typeface="Amiri" pitchFamily="2" charset="-78"/>
               </a:rPr>
               <a:t>م</a:t>
             </a:r>
@@ -11637,8 +11445,7 @@
                   <a:srgbClr val="1B3B6F"/>
                 </a:solidFill>
                 <a:latin typeface="Cambria" pitchFamily="34" charset="0"/>
-                <a:ea typeface="Cambria" pitchFamily="34" charset="-122"/>
-                <a:cs typeface="Cambria" pitchFamily="34" charset="-120"/>
+                <a:cs typeface="Amiri" pitchFamily="2" charset="-78"/>
               </a:rPr>
               <a:t>Al Madina Online School</a:t>
             </a:r>
@@ -11676,8 +11483,7 @@
                   <a:srgbClr val="8A6D1E"/>
                 </a:solidFill>
                 <a:latin typeface="Calibri" pitchFamily="34" charset="0"/>
-                <a:ea typeface="Calibri" pitchFamily="34" charset="-122"/>
-                <a:cs typeface="Calibri" pitchFamily="34" charset="-120"/>
+                <a:cs typeface="Amiri" pitchFamily="2" charset="-78"/>
               </a:rPr>
               <a:t>ARABIC DEPARTMENT · MIFTAH ARABIC · IGCSE 0544</a:t>
             </a:r>
@@ -11742,8 +11548,7 @@
                   <a:srgbClr val="FFFFFF"/>
                 </a:solidFill>
                 <a:latin typeface="Calibri" pitchFamily="34" charset="0"/>
-                <a:ea typeface="Calibri" pitchFamily="34" charset="-122"/>
-                <a:cs typeface="Calibri" pitchFamily="34" charset="-120"/>
+                <a:cs typeface="Amiri" pitchFamily="2" charset="-78"/>
               </a:rPr>
               <a:t>P6-L09 · IGCSE Bridge</a:t>
             </a:r>
@@ -11808,8 +11613,7 @@
                   <a:srgbClr val="FFFFFF"/>
                 </a:solidFill>
                 <a:latin typeface="Calibri" pitchFamily="34" charset="0"/>
-                <a:ea typeface="Calibri" pitchFamily="34" charset="-122"/>
-                <a:cs typeface="Calibri" pitchFamily="34" charset="-120"/>
+                <a:cs typeface="Amiri" pitchFamily="2" charset="-78"/>
               </a:rPr>
               <a:t>YOU DO · 20 MIN</a:t>
             </a:r>
@@ -11847,8 +11651,7 @@
                   <a:srgbClr val="1E6B52"/>
                 </a:solidFill>
                 <a:latin typeface="Calibri" pitchFamily="34" charset="0"/>
-                <a:ea typeface="Calibri" pitchFamily="34" charset="-122"/>
-                <a:cs typeface="Calibri" pitchFamily="34" charset="-120"/>
+                <a:cs typeface="Amiri" pitchFamily="2" charset="-78"/>
               </a:rPr>
               <a:t>MOCK · PAPER 4 · Q1 — DIRECTED WRITING (15 MARKS) · 20 MINUTES</a:t>
             </a:r>
@@ -11886,8 +11689,7 @@
                   <a:srgbClr val="1B3B6F"/>
                 </a:solidFill>
                 <a:latin typeface="Cambria" pitchFamily="34" charset="0"/>
-                <a:ea typeface="Cambria" pitchFamily="34" charset="-122"/>
-                <a:cs typeface="Cambria" pitchFamily="34" charset="-120"/>
+                <a:cs typeface="Amiri" pitchFamily="2" charset="-78"/>
               </a:rPr>
               <a:t>Q1: a formal email to the principal</a:t>
             </a:r>
@@ -11924,9 +11726,8 @@
                 <a:solidFill>
                   <a:srgbClr val="8A6D1E"/>
                 </a:solidFill>
-                <a:latin typeface="Amiri" pitchFamily="34" charset="0"/>
-                <a:ea typeface="Amiri" pitchFamily="34" charset="-122"/>
-                <a:cs typeface="Amiri" pitchFamily="34" charset="-120"/>
+                <a:latin typeface="Amiri" pitchFamily="2" charset="-78"/>
+                <a:cs typeface="Amiri" pitchFamily="2" charset="-78"/>
               </a:rPr>
               <a:t>الكِتَابَةُ المُوَجَّهَةُ</a:t>
             </a:r>
@@ -11964,8 +11765,7 @@
                   <a:srgbClr val="8A93A0"/>
                 </a:solidFill>
                 <a:latin typeface="Calibri" pitchFamily="34" charset="0"/>
-                <a:ea typeface="Calibri" pitchFamily="34" charset="-122"/>
-                <a:cs typeface="Calibri" pitchFamily="34" charset="-120"/>
+                <a:cs typeface="Amiri" pitchFamily="2" charset="-78"/>
               </a:rPr>
               <a:t>Miftah Arabic · Progression P6 · IGCSE Bridge · P6-L09</a:t>
             </a:r>
@@ -12064,8 +11864,7 @@
                   <a:srgbClr val="FFFFFF"/>
                 </a:solidFill>
                 <a:latin typeface="Calibri" pitchFamily="34" charset="0"/>
-                <a:ea typeface="Calibri" pitchFamily="34" charset="-122"/>
-                <a:cs typeface="Calibri" pitchFamily="34" charset="-120"/>
+                <a:cs typeface="Amiri" pitchFamily="2" charset="-78"/>
               </a:rPr>
               <a:t>MOCK · PAPER 4 · Q1</a:t>
             </a:r>
@@ -12103,8 +11902,7 @@
                   <a:srgbClr val="1F2A37"/>
                 </a:solidFill>
                 <a:latin typeface="Calibri" pitchFamily="34" charset="0"/>
-                <a:ea typeface="Calibri" pitchFamily="34" charset="-122"/>
-                <a:cs typeface="Calibri" pitchFamily="34" charset="-120"/>
+                <a:cs typeface="Amiri" pitchFamily="2" charset="-78"/>
               </a:rPr>
               <a:t>Write a formal email (130–140 words) to your school principal proposing a new after-school club. Include: the idea, why it is needed, what it requires, and a request for approval. Register: formal.</a:t>
             </a:r>
@@ -12142,8 +11940,7 @@
                   <a:srgbClr val="1F2A37"/>
                 </a:solidFill>
                 <a:latin typeface="Calibri" pitchFamily="34" charset="0"/>
-                <a:ea typeface="Calibri" pitchFamily="34" charset="-122"/>
-                <a:cs typeface="Calibri" pitchFamily="34" charset="-120"/>
+                <a:cs typeface="Amiri" pitchFamily="2" charset="-78"/>
               </a:rPr>
               <a:t>☐  A formal opening and closing.</a:t>
             </a:r>
@@ -12181,8 +11978,7 @@
                   <a:srgbClr val="1F2A37"/>
                 </a:solidFill>
                 <a:latin typeface="Calibri" pitchFamily="34" charset="0"/>
-                <a:ea typeface="Calibri" pitchFamily="34" charset="-122"/>
-                <a:cs typeface="Calibri" pitchFamily="34" charset="-120"/>
+                <a:cs typeface="Amiri" pitchFamily="2" charset="-78"/>
               </a:rPr>
               <a:t>☐  The idea, the need, what it requires, and a request.</a:t>
             </a:r>
@@ -12220,8 +12016,7 @@
                   <a:srgbClr val="1F2A37"/>
                 </a:solidFill>
                 <a:latin typeface="Calibri" pitchFamily="34" charset="0"/>
-                <a:ea typeface="Calibri" pitchFamily="34" charset="-122"/>
-                <a:cs typeface="Calibri" pitchFamily="34" charset="-120"/>
+                <a:cs typeface="Amiri" pitchFamily="2" charset="-78"/>
               </a:rPr>
               <a:t>☐  At least one subjunctive trigger and one conditional.</a:t>
             </a:r>
@@ -12259,8 +12054,7 @@
                   <a:srgbClr val="1F2A37"/>
                 </a:solidFill>
                 <a:latin typeface="Calibri" pitchFamily="34" charset="0"/>
-                <a:ea typeface="Calibri" pitchFamily="34" charset="-122"/>
-                <a:cs typeface="Calibri" pitchFamily="34" charset="-120"/>
+                <a:cs typeface="Amiri" pitchFamily="2" charset="-78"/>
               </a:rPr>
               <a:t>☐  Correct register from the opening sentence.</a:t>
             </a:r>
@@ -12332,8 +12126,7 @@
                   <a:srgbClr val="8A6D1E"/>
                 </a:solidFill>
                 <a:latin typeface="Calibri" pitchFamily="34" charset="0"/>
-                <a:ea typeface="Calibri" pitchFamily="34" charset="-122"/>
-                <a:cs typeface="Calibri" pitchFamily="34" charset="-120"/>
+                <a:cs typeface="Amiri" pitchFamily="2" charset="-78"/>
               </a:rPr>
               <a:t>EXAM FORMULAS (ALLOWED — LEARNT IN P6-L04)</a:t>
             </a:r>
@@ -12370,9 +12163,8 @@
                 <a:solidFill>
                   <a:srgbClr val="1B3B6F"/>
                 </a:solidFill>
-                <a:latin typeface="Amiri" pitchFamily="34" charset="0"/>
-                <a:ea typeface="Amiri" pitchFamily="34" charset="-122"/>
-                <a:cs typeface="Amiri" pitchFamily="34" charset="-120"/>
+                <a:latin typeface="Amiri" pitchFamily="2" charset="-78"/>
+                <a:cs typeface="Amiri" pitchFamily="2" charset="-78"/>
               </a:rPr>
               <a:t>حَضْرَةَ مُدِيرِ المَدْرَسَةِ المُحْتَرَمِ،</a:t>
             </a:r>
@@ -12410,8 +12202,7 @@
                   <a:srgbClr val="5A6472"/>
                 </a:solidFill>
                 <a:latin typeface="Calibri" pitchFamily="34" charset="0"/>
-                <a:ea typeface="Calibri" pitchFamily="34" charset="-122"/>
-                <a:cs typeface="Calibri" pitchFamily="34" charset="-120"/>
+                <a:cs typeface="Amiri" pitchFamily="2" charset="-78"/>
               </a:rPr>
               <a:t>Dear Principal, (formal opening)</a:t>
             </a:r>
@@ -12448,9 +12239,8 @@
                 <a:solidFill>
                   <a:srgbClr val="1B3B6F"/>
                 </a:solidFill>
-                <a:latin typeface="Amiri" pitchFamily="34" charset="0"/>
-                <a:ea typeface="Amiri" pitchFamily="34" charset="-122"/>
-                <a:cs typeface="Amiri" pitchFamily="34" charset="-120"/>
+                <a:latin typeface="Amiri" pitchFamily="2" charset="-78"/>
+                <a:cs typeface="Amiri" pitchFamily="2" charset="-78"/>
               </a:rPr>
               <a:t>أَتَشَرَّفُ بِأَنْ أَقْتَرِحَ …</a:t>
             </a:r>
@@ -12488,8 +12278,7 @@
                   <a:srgbClr val="5A6472"/>
                 </a:solidFill>
                 <a:latin typeface="Calibri" pitchFamily="34" charset="0"/>
-                <a:ea typeface="Calibri" pitchFamily="34" charset="-122"/>
-                <a:cs typeface="Calibri" pitchFamily="34" charset="-120"/>
+                <a:cs typeface="Amiri" pitchFamily="2" charset="-78"/>
               </a:rPr>
               <a:t>I am honoured to propose …</a:t>
             </a:r>
@@ -12526,9 +12315,8 @@
                 <a:solidFill>
                   <a:srgbClr val="1B3B6F"/>
                 </a:solidFill>
-                <a:latin typeface="Amiri" pitchFamily="34" charset="0"/>
-                <a:ea typeface="Amiri" pitchFamily="34" charset="-122"/>
-                <a:cs typeface="Amiri" pitchFamily="34" charset="-120"/>
+                <a:latin typeface="Amiri" pitchFamily="2" charset="-78"/>
+                <a:cs typeface="Amiri" pitchFamily="2" charset="-78"/>
               </a:rPr>
               <a:t>وَتَفَضَّلُوا بِقَبُولِ الاحْتِرَامِ.</a:t>
             </a:r>
@@ -12566,8 +12354,7 @@
                   <a:srgbClr val="5A6472"/>
                 </a:solidFill>
                 <a:latin typeface="Calibri" pitchFamily="34" charset="0"/>
-                <a:ea typeface="Calibri" pitchFamily="34" charset="-122"/>
-                <a:cs typeface="Calibri" pitchFamily="34" charset="-120"/>
+                <a:cs typeface="Amiri" pitchFamily="2" charset="-78"/>
               </a:rPr>
               <a:t>Yours respectfully (formal closing)</a:t>
             </a:r>
@@ -12605,8 +12392,7 @@
                   <a:srgbClr val="8A93A0"/>
                 </a:solidFill>
                 <a:latin typeface="Calibri" pitchFamily="34" charset="0"/>
-                <a:ea typeface="Calibri" pitchFamily="34" charset="-122"/>
-                <a:cs typeface="Calibri" pitchFamily="34" charset="-120"/>
+                <a:cs typeface="Amiri" pitchFamily="2" charset="-78"/>
               </a:rPr>
               <a:t>14 / 25</a:t>
             </a:r>
@@ -12700,9 +12486,8 @@
                 <a:solidFill>
                   <a:srgbClr val="D4AF37"/>
                 </a:solidFill>
-                <a:latin typeface="Amiri" pitchFamily="34" charset="0"/>
-                <a:ea typeface="Amiri" pitchFamily="34" charset="-122"/>
-                <a:cs typeface="Amiri" pitchFamily="34" charset="-120"/>
+                <a:latin typeface="Amiri" pitchFamily="2" charset="-78"/>
+                <a:cs typeface="Amiri" pitchFamily="2" charset="-78"/>
               </a:rPr>
               <a:t>م</a:t>
             </a:r>
@@ -12740,8 +12525,7 @@
                   <a:srgbClr val="1B3B6F"/>
                 </a:solidFill>
                 <a:latin typeface="Cambria" pitchFamily="34" charset="0"/>
-                <a:ea typeface="Cambria" pitchFamily="34" charset="-122"/>
-                <a:cs typeface="Cambria" pitchFamily="34" charset="-120"/>
+                <a:cs typeface="Amiri" pitchFamily="2" charset="-78"/>
               </a:rPr>
               <a:t>Al Madina Online School</a:t>
             </a:r>
@@ -12779,8 +12563,7 @@
                   <a:srgbClr val="8A6D1E"/>
                 </a:solidFill>
                 <a:latin typeface="Calibri" pitchFamily="34" charset="0"/>
-                <a:ea typeface="Calibri" pitchFamily="34" charset="-122"/>
-                <a:cs typeface="Calibri" pitchFamily="34" charset="-120"/>
+                <a:cs typeface="Amiri" pitchFamily="2" charset="-78"/>
               </a:rPr>
               <a:t>ARABIC DEPARTMENT · MIFTAH ARABIC · IGCSE 0544</a:t>
             </a:r>
@@ -12845,8 +12628,7 @@
                   <a:srgbClr val="FFFFFF"/>
                 </a:solidFill>
                 <a:latin typeface="Calibri" pitchFamily="34" charset="0"/>
-                <a:ea typeface="Calibri" pitchFamily="34" charset="-122"/>
-                <a:cs typeface="Calibri" pitchFamily="34" charset="-120"/>
+                <a:cs typeface="Amiri" pitchFamily="2" charset="-78"/>
               </a:rPr>
               <a:t>P6-L09 · IGCSE Bridge</a:t>
             </a:r>
@@ -12911,8 +12693,7 @@
                   <a:srgbClr val="FFFFFF"/>
                 </a:solidFill>
                 <a:latin typeface="Calibri" pitchFamily="34" charset="0"/>
-                <a:ea typeface="Calibri" pitchFamily="34" charset="-122"/>
-                <a:cs typeface="Calibri" pitchFamily="34" charset="-120"/>
+                <a:cs typeface="Amiri" pitchFamily="2" charset="-78"/>
               </a:rPr>
               <a:t>FEEDBACK</a:t>
             </a:r>
@@ -12950,8 +12731,7 @@
                   <a:srgbClr val="8A6D1E"/>
                 </a:solidFill>
                 <a:latin typeface="Calibri" pitchFamily="34" charset="0"/>
-                <a:ea typeface="Calibri" pitchFamily="34" charset="-122"/>
-                <a:cs typeface="Calibri" pitchFamily="34" charset="-120"/>
+                <a:cs typeface="Amiri" pitchFamily="2" charset="-78"/>
               </a:rPr>
               <a:t>MOCK · ANSWERS · SHOW AFTER THE WHOLE PAPER</a:t>
             </a:r>
@@ -12989,8 +12769,7 @@
                   <a:srgbClr val="1B3B6F"/>
                 </a:solidFill>
                 <a:latin typeface="Cambria" pitchFamily="34" charset="0"/>
-                <a:ea typeface="Cambria" pitchFamily="34" charset="-122"/>
-                <a:cs typeface="Cambria" pitchFamily="34" charset="-120"/>
+                <a:cs typeface="Amiri" pitchFamily="2" charset="-78"/>
               </a:rPr>
               <a:t>Q Groups 1–2: answers</a:t>
             </a:r>
@@ -13027,9 +12806,8 @@
                 <a:solidFill>
                   <a:srgbClr val="8A6D1E"/>
                 </a:solidFill>
-                <a:latin typeface="Amiri" pitchFamily="34" charset="0"/>
-                <a:ea typeface="Amiri" pitchFamily="34" charset="-122"/>
-                <a:cs typeface="Amiri" pitchFamily="34" charset="-120"/>
+                <a:latin typeface="Amiri" pitchFamily="2" charset="-78"/>
+                <a:cs typeface="Amiri" pitchFamily="2" charset="-78"/>
               </a:rPr>
               <a:t>الإِجَابَاتُ</a:t>
             </a:r>
@@ -13067,8 +12845,7 @@
                   <a:srgbClr val="8A93A0"/>
                 </a:solidFill>
                 <a:latin typeface="Calibri" pitchFamily="34" charset="0"/>
-                <a:ea typeface="Calibri" pitchFamily="34" charset="-122"/>
-                <a:cs typeface="Calibri" pitchFamily="34" charset="-120"/>
+                <a:cs typeface="Amiri" pitchFamily="2" charset="-78"/>
               </a:rPr>
               <a:t>Miftah Arabic · Progression P6 · IGCSE Bridge · P6-L09</a:t>
             </a:r>
@@ -13165,8 +12942,7 @@
                   <a:srgbClr val="FFFFFF"/>
                 </a:solidFill>
                 <a:latin typeface="Calibri" pitchFamily="34" charset="0"/>
-                <a:ea typeface="Calibri" pitchFamily="34" charset="-122"/>
-                <a:cs typeface="Calibri" pitchFamily="34" charset="-120"/>
+                <a:cs typeface="Amiri" pitchFamily="2" charset="-78"/>
               </a:rPr>
               <a:t>1</a:t>
             </a:r>
@@ -13204,8 +12980,7 @@
                   <a:srgbClr val="1B3B6F"/>
                 </a:solidFill>
                 <a:latin typeface="Calibri" pitchFamily="34" charset="0"/>
-                <a:ea typeface="Calibri" pitchFamily="34" charset="-122"/>
-                <a:cs typeface="Calibri" pitchFamily="34" charset="-120"/>
+                <a:cs typeface="Amiri" pitchFamily="2" charset="-78"/>
               </a:rPr>
               <a:t>When does the sports centre open?</a:t>
             </a:r>
@@ -13268,8 +13043,7 @@
                   <a:srgbClr val="1B3B6F"/>
                 </a:solidFill>
                 <a:latin typeface="Calibri" pitchFamily="34" charset="0"/>
-                <a:ea typeface="Calibri" pitchFamily="34" charset="-122"/>
-                <a:cs typeface="Calibri" pitchFamily="34" charset="-120"/>
+                <a:cs typeface="Amiri" pitchFamily="2" charset="-78"/>
               </a:rPr>
               <a:t>A</a:t>
             </a:r>
@@ -13307,8 +13081,7 @@
                   <a:srgbClr val="9AA1AB"/>
                 </a:solidFill>
                 <a:latin typeface="Calibri" pitchFamily="34" charset="0"/>
-                <a:ea typeface="Calibri" pitchFamily="34" charset="-122"/>
-                <a:cs typeface="Calibri" pitchFamily="34" charset="-120"/>
+                <a:cs typeface="Amiri" pitchFamily="2" charset="-78"/>
               </a:rPr>
               <a:t>At 6 p.m.</a:t>
             </a:r>
@@ -13371,8 +13144,7 @@
                   <a:srgbClr val="1B3B6F"/>
                 </a:solidFill>
                 <a:latin typeface="Calibri" pitchFamily="34" charset="0"/>
-                <a:ea typeface="Calibri" pitchFamily="34" charset="-122"/>
-                <a:cs typeface="Calibri" pitchFamily="34" charset="-120"/>
+                <a:cs typeface="Amiri" pitchFamily="2" charset="-78"/>
               </a:rPr>
               <a:t>B</a:t>
             </a:r>
@@ -13410,8 +13182,7 @@
                   <a:srgbClr val="9AA1AB"/>
                 </a:solidFill>
                 <a:latin typeface="Calibri" pitchFamily="34" charset="0"/>
-                <a:ea typeface="Calibri" pitchFamily="34" charset="-122"/>
-                <a:cs typeface="Calibri" pitchFamily="34" charset="-120"/>
+                <a:cs typeface="Amiri" pitchFamily="2" charset="-78"/>
               </a:rPr>
               <a:t>It does not open</a:t>
             </a:r>
@@ -13501,8 +13272,7 @@
                   <a:srgbClr val="FFFFFF"/>
                 </a:solidFill>
                 <a:latin typeface="Calibri" pitchFamily="34" charset="0"/>
-                <a:ea typeface="Calibri" pitchFamily="34" charset="-122"/>
-                <a:cs typeface="Calibri" pitchFamily="34" charset="-120"/>
+                <a:cs typeface="Amiri" pitchFamily="2" charset="-78"/>
               </a:rPr>
               <a:t>C</a:t>
             </a:r>
@@ -13540,8 +13310,7 @@
                   <a:srgbClr val="1F2A37"/>
                 </a:solidFill>
                 <a:latin typeface="Calibri" pitchFamily="34" charset="0"/>
-                <a:ea typeface="Calibri" pitchFamily="34" charset="-122"/>
-                <a:cs typeface="Calibri" pitchFamily="34" charset="-120"/>
+                <a:cs typeface="Amiri" pitchFamily="2" charset="-78"/>
               </a:rPr>
               <a:t>At 6 a.m.</a:t>
             </a:r>
@@ -13578,9 +13347,8 @@
                 <a:solidFill>
                   <a:srgbClr val="8A6D1E"/>
                 </a:solidFill>
-                <a:latin typeface="Amiri" pitchFamily="34" charset="0"/>
-                <a:ea typeface="Amiri" pitchFamily="34" charset="-122"/>
-                <a:cs typeface="Amiri" pitchFamily="34" charset="-120"/>
+                <a:latin typeface="Amiri" pitchFamily="2" charset="-78"/>
+                <a:cs typeface="Amiri" pitchFamily="2" charset="-78"/>
               </a:rPr>
               <a:t>يُفْتَتَحُ المَرْكَزُ الرِّيَاضِيُّ فِي السَّاعَةِ السَّادِسَةِ صَبَاحًا.</a:t>
             </a:r>
@@ -13677,8 +13445,7 @@
                   <a:srgbClr val="FFFFFF"/>
                 </a:solidFill>
                 <a:latin typeface="Calibri" pitchFamily="34" charset="0"/>
-                <a:ea typeface="Calibri" pitchFamily="34" charset="-122"/>
-                <a:cs typeface="Calibri" pitchFamily="34" charset="-120"/>
+                <a:cs typeface="Amiri" pitchFamily="2" charset="-78"/>
               </a:rPr>
               <a:t>2</a:t>
             </a:r>
@@ -13716,8 +13483,7 @@
                   <a:srgbClr val="1B3B6F"/>
                 </a:solidFill>
                 <a:latin typeface="Calibri" pitchFamily="34" charset="0"/>
-                <a:ea typeface="Calibri" pitchFamily="34" charset="-122"/>
-                <a:cs typeface="Calibri" pitchFamily="34" charset="-120"/>
+                <a:cs typeface="Amiri" pitchFamily="2" charset="-78"/>
               </a:rPr>
               <a:t>What is required to use the pitch?</a:t>
             </a:r>
@@ -13780,8 +13546,7 @@
                   <a:srgbClr val="1B3B6F"/>
                 </a:solidFill>
                 <a:latin typeface="Calibri" pitchFamily="34" charset="0"/>
-                <a:ea typeface="Calibri" pitchFamily="34" charset="-122"/>
-                <a:cs typeface="Calibri" pitchFamily="34" charset="-120"/>
+                <a:cs typeface="Amiri" pitchFamily="2" charset="-78"/>
               </a:rPr>
               <a:t>A</a:t>
             </a:r>
@@ -13819,8 +13584,7 @@
                   <a:srgbClr val="9AA1AB"/>
                 </a:solidFill>
                 <a:latin typeface="Calibri" pitchFamily="34" charset="0"/>
-                <a:ea typeface="Calibri" pitchFamily="34" charset="-122"/>
-                <a:cs typeface="Calibri" pitchFamily="34" charset="-120"/>
+                <a:cs typeface="Amiri" pitchFamily="2" charset="-78"/>
               </a:rPr>
               <a:t>Paying at the door</a:t>
             </a:r>
@@ -13910,8 +13674,7 @@
                   <a:srgbClr val="FFFFFF"/>
                 </a:solidFill>
                 <a:latin typeface="Calibri" pitchFamily="34" charset="0"/>
-                <a:ea typeface="Calibri" pitchFamily="34" charset="-122"/>
-                <a:cs typeface="Calibri" pitchFamily="34" charset="-120"/>
+                <a:cs typeface="Amiri" pitchFamily="2" charset="-78"/>
               </a:rPr>
               <a:t>B</a:t>
             </a:r>
@@ -13949,8 +13712,7 @@
                   <a:srgbClr val="1F2A37"/>
                 </a:solidFill>
                 <a:latin typeface="Calibri" pitchFamily="34" charset="0"/>
-                <a:ea typeface="Calibri" pitchFamily="34" charset="-122"/>
-                <a:cs typeface="Calibri" pitchFamily="34" charset="-120"/>
+                <a:cs typeface="Amiri" pitchFamily="2" charset="-78"/>
               </a:rPr>
               <a:t>Booking in advance</a:t>
             </a:r>
@@ -14013,8 +13775,7 @@
                   <a:srgbClr val="1B3B6F"/>
                 </a:solidFill>
                 <a:latin typeface="Calibri" pitchFamily="34" charset="0"/>
-                <a:ea typeface="Calibri" pitchFamily="34" charset="-122"/>
-                <a:cs typeface="Calibri" pitchFamily="34" charset="-120"/>
+                <a:cs typeface="Amiri" pitchFamily="2" charset="-78"/>
               </a:rPr>
               <a:t>C</a:t>
             </a:r>
@@ -14052,8 +13813,7 @@
                   <a:srgbClr val="9AA1AB"/>
                 </a:solidFill>
                 <a:latin typeface="Calibri" pitchFamily="34" charset="0"/>
-                <a:ea typeface="Calibri" pitchFamily="34" charset="-122"/>
-                <a:cs typeface="Calibri" pitchFamily="34" charset="-120"/>
+                <a:cs typeface="Amiri" pitchFamily="2" charset="-78"/>
               </a:rPr>
               <a:t>Nothing</a:t>
             </a:r>
@@ -14090,9 +13850,8 @@
                 <a:solidFill>
                   <a:srgbClr val="8A6D1E"/>
                 </a:solidFill>
-                <a:latin typeface="Amiri" pitchFamily="34" charset="0"/>
-                <a:ea typeface="Amiri" pitchFamily="34" charset="-122"/>
-                <a:cs typeface="Amiri" pitchFamily="34" charset="-120"/>
+                <a:latin typeface="Amiri" pitchFamily="2" charset="-78"/>
+                <a:cs typeface="Amiri" pitchFamily="2" charset="-78"/>
               </a:rPr>
               <a:t>يُشْتَرَطُ حَجْزُ المَلْعَبِ مُسْبَقًا.</a:t>
             </a:r>
@@ -14189,8 +13948,7 @@
                   <a:srgbClr val="FFFFFF"/>
                 </a:solidFill>
                 <a:latin typeface="Calibri" pitchFamily="34" charset="0"/>
-                <a:ea typeface="Calibri" pitchFamily="34" charset="-122"/>
-                <a:cs typeface="Calibri" pitchFamily="34" charset="-120"/>
+                <a:cs typeface="Amiri" pitchFamily="2" charset="-78"/>
               </a:rPr>
               <a:t>3</a:t>
             </a:r>
@@ -14228,8 +13986,7 @@
                   <a:srgbClr val="1B3B6F"/>
                 </a:solidFill>
                 <a:latin typeface="Calibri" pitchFamily="34" charset="0"/>
-                <a:ea typeface="Calibri" pitchFamily="34" charset="-122"/>
-                <a:cs typeface="Calibri" pitchFamily="34" charset="-120"/>
+                <a:cs typeface="Amiri" pitchFamily="2" charset="-78"/>
               </a:rPr>
               <a:t>When are beginners' swimming lessons?</a:t>
             </a:r>
@@ -14292,8 +14049,7 @@
                   <a:srgbClr val="1B3B6F"/>
                 </a:solidFill>
                 <a:latin typeface="Calibri" pitchFamily="34" charset="0"/>
-                <a:ea typeface="Calibri" pitchFamily="34" charset="-122"/>
-                <a:cs typeface="Calibri" pitchFamily="34" charset="-120"/>
+                <a:cs typeface="Amiri" pitchFamily="2" charset="-78"/>
               </a:rPr>
               <a:t>A</a:t>
             </a:r>
@@ -14331,8 +14087,7 @@
                   <a:srgbClr val="9AA1AB"/>
                 </a:solidFill>
                 <a:latin typeface="Calibri" pitchFamily="34" charset="0"/>
-                <a:ea typeface="Calibri" pitchFamily="34" charset="-122"/>
-                <a:cs typeface="Calibri" pitchFamily="34" charset="-120"/>
+                <a:cs typeface="Amiri" pitchFamily="2" charset="-78"/>
               </a:rPr>
               <a:t>On Sunday</a:t>
             </a:r>
@@ -14422,8 +14177,7 @@
                   <a:srgbClr val="FFFFFF"/>
                 </a:solidFill>
                 <a:latin typeface="Calibri" pitchFamily="34" charset="0"/>
-                <a:ea typeface="Calibri" pitchFamily="34" charset="-122"/>
-                <a:cs typeface="Calibri" pitchFamily="34" charset="-120"/>
+                <a:cs typeface="Amiri" pitchFamily="2" charset="-78"/>
               </a:rPr>
               <a:t>B</a:t>
             </a:r>
@@ -14461,8 +14215,7 @@
                   <a:srgbClr val="1F2A37"/>
                 </a:solidFill>
                 <a:latin typeface="Calibri" pitchFamily="34" charset="0"/>
-                <a:ea typeface="Calibri" pitchFamily="34" charset="-122"/>
-                <a:cs typeface="Calibri" pitchFamily="34" charset="-120"/>
+                <a:cs typeface="Amiri" pitchFamily="2" charset="-78"/>
               </a:rPr>
               <a:t>On Saturday</a:t>
             </a:r>
@@ -14525,8 +14278,7 @@
                   <a:srgbClr val="1B3B6F"/>
                 </a:solidFill>
                 <a:latin typeface="Calibri" pitchFamily="34" charset="0"/>
-                <a:ea typeface="Calibri" pitchFamily="34" charset="-122"/>
-                <a:cs typeface="Calibri" pitchFamily="34" charset="-120"/>
+                <a:cs typeface="Amiri" pitchFamily="2" charset="-78"/>
               </a:rPr>
               <a:t>C</a:t>
             </a:r>
@@ -14564,8 +14316,7 @@
                   <a:srgbClr val="9AA1AB"/>
                 </a:solidFill>
                 <a:latin typeface="Calibri" pitchFamily="34" charset="0"/>
-                <a:ea typeface="Calibri" pitchFamily="34" charset="-122"/>
-                <a:cs typeface="Calibri" pitchFamily="34" charset="-120"/>
+                <a:cs typeface="Amiri" pitchFamily="2" charset="-78"/>
               </a:rPr>
               <a:t>Every day</a:t>
             </a:r>
@@ -14602,9 +14353,8 @@
                 <a:solidFill>
                   <a:srgbClr val="8A6D1E"/>
                 </a:solidFill>
-                <a:latin typeface="Amiri" pitchFamily="34" charset="0"/>
-                <a:ea typeface="Amiri" pitchFamily="34" charset="-122"/>
-                <a:cs typeface="Amiri" pitchFamily="34" charset="-120"/>
+                <a:latin typeface="Amiri" pitchFamily="2" charset="-78"/>
+                <a:cs typeface="Amiri" pitchFamily="2" charset="-78"/>
               </a:rPr>
               <a:t>تُقَامُ دُرُوسُ السِّبَاحَةِ لِلْمُبْتَدِئِينَ يَوْمَ السَّبْتِ.</a:t>
             </a:r>
@@ -14701,8 +14451,7 @@
                   <a:srgbClr val="FFFFFF"/>
                 </a:solidFill>
                 <a:latin typeface="Calibri" pitchFamily="34" charset="0"/>
-                <a:ea typeface="Calibri" pitchFamily="34" charset="-122"/>
-                <a:cs typeface="Calibri" pitchFamily="34" charset="-120"/>
+                <a:cs typeface="Amiri" pitchFamily="2" charset="-78"/>
               </a:rPr>
               <a:t>4</a:t>
             </a:r>
@@ -14740,8 +14489,7 @@
                   <a:srgbClr val="1B3B6F"/>
                 </a:solidFill>
                 <a:latin typeface="Calibri" pitchFamily="34" charset="0"/>
-                <a:ea typeface="Calibri" pitchFamily="34" charset="-122"/>
-                <a:cs typeface="Calibri" pitchFamily="34" charset="-120"/>
+                <a:cs typeface="Amiri" pitchFamily="2" charset="-78"/>
               </a:rPr>
               <a:t>What is forbidden in the training hall?</a:t>
             </a:r>
@@ -14804,8 +14552,7 @@
                   <a:srgbClr val="1B3B6F"/>
                 </a:solidFill>
                 <a:latin typeface="Calibri" pitchFamily="34" charset="0"/>
-                <a:ea typeface="Calibri" pitchFamily="34" charset="-122"/>
-                <a:cs typeface="Calibri" pitchFamily="34" charset="-120"/>
+                <a:cs typeface="Amiri" pitchFamily="2" charset="-78"/>
               </a:rPr>
               <a:t>A</a:t>
             </a:r>
@@ -14843,8 +14590,7 @@
                   <a:srgbClr val="9AA1AB"/>
                 </a:solidFill>
                 <a:latin typeface="Calibri" pitchFamily="34" charset="0"/>
-                <a:ea typeface="Calibri" pitchFamily="34" charset="-122"/>
-                <a:cs typeface="Calibri" pitchFamily="34" charset="-120"/>
+                <a:cs typeface="Amiri" pitchFamily="2" charset="-78"/>
               </a:rPr>
               <a:t>Drinking water</a:t>
             </a:r>
@@ -14907,8 +14653,7 @@
                   <a:srgbClr val="1B3B6F"/>
                 </a:solidFill>
                 <a:latin typeface="Calibri" pitchFamily="34" charset="0"/>
-                <a:ea typeface="Calibri" pitchFamily="34" charset="-122"/>
-                <a:cs typeface="Calibri" pitchFamily="34" charset="-120"/>
+                <a:cs typeface="Amiri" pitchFamily="2" charset="-78"/>
               </a:rPr>
               <a:t>B</a:t>
             </a:r>
@@ -14946,8 +14691,7 @@
                   <a:srgbClr val="9AA1AB"/>
                 </a:solidFill>
                 <a:latin typeface="Calibri" pitchFamily="34" charset="0"/>
-                <a:ea typeface="Calibri" pitchFamily="34" charset="-122"/>
-                <a:cs typeface="Calibri" pitchFamily="34" charset="-120"/>
+                <a:cs typeface="Amiri" pitchFamily="2" charset="-78"/>
               </a:rPr>
               <a:t>Wearing shoes</a:t>
             </a:r>
@@ -15037,8 +14781,7 @@
                   <a:srgbClr val="FFFFFF"/>
                 </a:solidFill>
                 <a:latin typeface="Calibri" pitchFamily="34" charset="0"/>
-                <a:ea typeface="Calibri" pitchFamily="34" charset="-122"/>
-                <a:cs typeface="Calibri" pitchFamily="34" charset="-120"/>
+                <a:cs typeface="Amiri" pitchFamily="2" charset="-78"/>
               </a:rPr>
               <a:t>C</a:t>
             </a:r>
@@ -15076,8 +14819,7 @@
                   <a:srgbClr val="1F2A37"/>
                 </a:solidFill>
                 <a:latin typeface="Calibri" pitchFamily="34" charset="0"/>
-                <a:ea typeface="Calibri" pitchFamily="34" charset="-122"/>
-                <a:cs typeface="Calibri" pitchFamily="34" charset="-120"/>
+                <a:cs typeface="Amiri" pitchFamily="2" charset="-78"/>
               </a:rPr>
               <a:t>Using the phone</a:t>
             </a:r>
@@ -15114,9 +14856,8 @@
                 <a:solidFill>
                   <a:srgbClr val="8A6D1E"/>
                 </a:solidFill>
-                <a:latin typeface="Amiri" pitchFamily="34" charset="0"/>
-                <a:ea typeface="Amiri" pitchFamily="34" charset="-122"/>
-                <a:cs typeface="Amiri" pitchFamily="34" charset="-120"/>
+                <a:latin typeface="Amiri" pitchFamily="2" charset="-78"/>
+                <a:cs typeface="Amiri" pitchFamily="2" charset="-78"/>
               </a:rPr>
               <a:t>يُمْنَعُ اسْتِخْدَامُ الهَاتِفِ فِي قَاعَةِ التَّدْرِيبِ.</a:t>
             </a:r>
@@ -15154,8 +14895,7 @@
                   <a:srgbClr val="8A93A0"/>
                 </a:solidFill>
                 <a:latin typeface="Calibri" pitchFamily="34" charset="0"/>
-                <a:ea typeface="Calibri" pitchFamily="34" charset="-122"/>
-                <a:cs typeface="Calibri" pitchFamily="34" charset="-120"/>
+                <a:cs typeface="Amiri" pitchFamily="2" charset="-78"/>
               </a:rPr>
               <a:t>15 / 25</a:t>
             </a:r>
@@ -15249,9 +14989,8 @@
                 <a:solidFill>
                   <a:srgbClr val="D4AF37"/>
                 </a:solidFill>
-                <a:latin typeface="Amiri" pitchFamily="34" charset="0"/>
-                <a:ea typeface="Amiri" pitchFamily="34" charset="-122"/>
-                <a:cs typeface="Amiri" pitchFamily="34" charset="-120"/>
+                <a:latin typeface="Amiri" pitchFamily="2" charset="-78"/>
+                <a:cs typeface="Amiri" pitchFamily="2" charset="-78"/>
               </a:rPr>
               <a:t>م</a:t>
             </a:r>
@@ -15289,8 +15028,7 @@
                   <a:srgbClr val="1B3B6F"/>
                 </a:solidFill>
                 <a:latin typeface="Cambria" pitchFamily="34" charset="0"/>
-                <a:ea typeface="Cambria" pitchFamily="34" charset="-122"/>
-                <a:cs typeface="Cambria" pitchFamily="34" charset="-120"/>
+                <a:cs typeface="Amiri" pitchFamily="2" charset="-78"/>
               </a:rPr>
               <a:t>Al Madina Online School</a:t>
             </a:r>
@@ -15328,8 +15066,7 @@
                   <a:srgbClr val="8A6D1E"/>
                 </a:solidFill>
                 <a:latin typeface="Calibri" pitchFamily="34" charset="0"/>
-                <a:ea typeface="Calibri" pitchFamily="34" charset="-122"/>
-                <a:cs typeface="Calibri" pitchFamily="34" charset="-120"/>
+                <a:cs typeface="Amiri" pitchFamily="2" charset="-78"/>
               </a:rPr>
               <a:t>ARABIC DEPARTMENT · MIFTAH ARABIC · IGCSE 0544</a:t>
             </a:r>
@@ -15394,8 +15131,7 @@
                   <a:srgbClr val="FFFFFF"/>
                 </a:solidFill>
                 <a:latin typeface="Calibri" pitchFamily="34" charset="0"/>
-                <a:ea typeface="Calibri" pitchFamily="34" charset="-122"/>
-                <a:cs typeface="Calibri" pitchFamily="34" charset="-120"/>
+                <a:cs typeface="Amiri" pitchFamily="2" charset="-78"/>
               </a:rPr>
               <a:t>P6-L09 · IGCSE Bridge</a:t>
             </a:r>
@@ -15460,8 +15196,7 @@
                   <a:srgbClr val="FFFFFF"/>
                 </a:solidFill>
                 <a:latin typeface="Calibri" pitchFamily="34" charset="0"/>
-                <a:ea typeface="Calibri" pitchFamily="34" charset="-122"/>
-                <a:cs typeface="Calibri" pitchFamily="34" charset="-120"/>
+                <a:cs typeface="Amiri" pitchFamily="2" charset="-78"/>
               </a:rPr>
               <a:t>FEEDBACK</a:t>
             </a:r>
@@ -15499,8 +15234,7 @@
                   <a:srgbClr val="8A6D1E"/>
                 </a:solidFill>
                 <a:latin typeface="Calibri" pitchFamily="34" charset="0"/>
-                <a:ea typeface="Calibri" pitchFamily="34" charset="-122"/>
-                <a:cs typeface="Calibri" pitchFamily="34" charset="-120"/>
+                <a:cs typeface="Amiri" pitchFamily="2" charset="-78"/>
               </a:rPr>
               <a:t>MOCK · ANSWERS · SHOW AFTER THE WHOLE PAPER</a:t>
             </a:r>
@@ -15538,8 +15272,7 @@
                   <a:srgbClr val="1B3B6F"/>
                 </a:solidFill>
                 <a:latin typeface="Cambria" pitchFamily="34" charset="0"/>
-                <a:ea typeface="Cambria" pitchFamily="34" charset="-122"/>
-                <a:cs typeface="Cambria" pitchFamily="34" charset="-120"/>
+                <a:cs typeface="Amiri" pitchFamily="2" charset="-78"/>
               </a:rPr>
               <a:t>Q Groups 3–4: answers</a:t>
             </a:r>
@@ -15576,9 +15309,8 @@
                 <a:solidFill>
                   <a:srgbClr val="8A6D1E"/>
                 </a:solidFill>
-                <a:latin typeface="Amiri" pitchFamily="34" charset="0"/>
-                <a:ea typeface="Amiri" pitchFamily="34" charset="-122"/>
-                <a:cs typeface="Amiri" pitchFamily="34" charset="-120"/>
+                <a:latin typeface="Amiri" pitchFamily="2" charset="-78"/>
+                <a:cs typeface="Amiri" pitchFamily="2" charset="-78"/>
               </a:rPr>
               <a:t>الإِجَابَاتُ</a:t>
             </a:r>
@@ -15616,8 +15348,7 @@
                   <a:srgbClr val="8A93A0"/>
                 </a:solidFill>
                 <a:latin typeface="Calibri" pitchFamily="34" charset="0"/>
-                <a:ea typeface="Calibri" pitchFamily="34" charset="-122"/>
-                <a:cs typeface="Calibri" pitchFamily="34" charset="-120"/>
+                <a:cs typeface="Amiri" pitchFamily="2" charset="-78"/>
               </a:rPr>
               <a:t>Miftah Arabic · Progression P6 · IGCSE Bridge · P6-L09</a:t>
             </a:r>
@@ -15714,8 +15445,7 @@
                   <a:srgbClr val="FFFFFF"/>
                 </a:solidFill>
                 <a:latin typeface="Calibri" pitchFamily="34" charset="0"/>
-                <a:ea typeface="Calibri" pitchFamily="34" charset="-122"/>
-                <a:cs typeface="Calibri" pitchFamily="34" charset="-120"/>
+                <a:cs typeface="Amiri" pitchFamily="2" charset="-78"/>
               </a:rPr>
               <a:t>1</a:t>
             </a:r>
@@ -15753,8 +15483,7 @@
                   <a:srgbClr val="1B3B6F"/>
                 </a:solidFill>
                 <a:latin typeface="Calibri" pitchFamily="34" charset="0"/>
-                <a:ea typeface="Calibri" pitchFamily="34" charset="-122"/>
-                <a:cs typeface="Calibri" pitchFamily="34" charset="-120"/>
+                <a:cs typeface="Amiri" pitchFamily="2" charset="-78"/>
               </a:rPr>
               <a:t>R1 — What is the main idea?</a:t>
             </a:r>
@@ -15817,8 +15546,7 @@
                   <a:srgbClr val="1B3B6F"/>
                 </a:solidFill>
                 <a:latin typeface="Calibri" pitchFamily="34" charset="0"/>
-                <a:ea typeface="Calibri" pitchFamily="34" charset="-122"/>
-                <a:cs typeface="Calibri" pitchFamily="34" charset="-120"/>
+                <a:cs typeface="Amiri" pitchFamily="2" charset="-78"/>
               </a:rPr>
               <a:t>A</a:t>
             </a:r>
@@ -15856,8 +15584,7 @@
                   <a:srgbClr val="9AA1AB"/>
                 </a:solidFill>
                 <a:latin typeface="Calibri" pitchFamily="34" charset="0"/>
-                <a:ea typeface="Calibri" pitchFamily="34" charset="-122"/>
-                <a:cs typeface="Calibri" pitchFamily="34" charset="-120"/>
+                <a:cs typeface="Amiri" pitchFamily="2" charset="-78"/>
               </a:rPr>
               <a:t>Reading wastes time</a:t>
             </a:r>
@@ -15947,8 +15674,7 @@
                   <a:srgbClr val="FFFFFF"/>
                 </a:solidFill>
                 <a:latin typeface="Calibri" pitchFamily="34" charset="0"/>
-                <a:ea typeface="Calibri" pitchFamily="34" charset="-122"/>
-                <a:cs typeface="Calibri" pitchFamily="34" charset="-120"/>
+                <a:cs typeface="Amiri" pitchFamily="2" charset="-78"/>
               </a:rPr>
               <a:t>B</a:t>
             </a:r>
@@ -15986,8 +15712,7 @@
                   <a:srgbClr val="1F2A37"/>
                 </a:solidFill>
                 <a:latin typeface="Calibri" pitchFamily="34" charset="0"/>
-                <a:ea typeface="Calibri" pitchFamily="34" charset="-122"/>
-                <a:cs typeface="Calibri" pitchFamily="34" charset="-120"/>
+                <a:cs typeface="Amiri" pitchFamily="2" charset="-78"/>
               </a:rPr>
               <a:t>Reading enriches the mind</a:t>
             </a:r>
@@ -16050,8 +15775,7 @@
                   <a:srgbClr val="1B3B6F"/>
                 </a:solidFill>
                 <a:latin typeface="Calibri" pitchFamily="34" charset="0"/>
-                <a:ea typeface="Calibri" pitchFamily="34" charset="-122"/>
-                <a:cs typeface="Calibri" pitchFamily="34" charset="-120"/>
+                <a:cs typeface="Amiri" pitchFamily="2" charset="-78"/>
               </a:rPr>
               <a:t>C</a:t>
             </a:r>
@@ -16089,8 +15813,7 @@
                   <a:srgbClr val="9AA1AB"/>
                 </a:solidFill>
                 <a:latin typeface="Calibri" pitchFamily="34" charset="0"/>
-                <a:ea typeface="Calibri" pitchFamily="34" charset="-122"/>
-                <a:cs typeface="Calibri" pitchFamily="34" charset="-120"/>
+                <a:cs typeface="Amiri" pitchFamily="2" charset="-78"/>
               </a:rPr>
               <a:t>Families are too busy to matter</a:t>
             </a:r>
@@ -16127,9 +15850,8 @@
                 <a:solidFill>
                   <a:srgbClr val="8A6D1E"/>
                 </a:solidFill>
-                <a:latin typeface="Amiri" pitchFamily="34" charset="0"/>
-                <a:ea typeface="Amiri" pitchFamily="34" charset="-122"/>
-                <a:cs typeface="Amiri" pitchFamily="34" charset="-120"/>
+                <a:latin typeface="Amiri" pitchFamily="2" charset="-78"/>
+                <a:cs typeface="Amiri" pitchFamily="2" charset="-78"/>
               </a:rPr>
               <a:t>يُشَارُ إِلَى أَنَّ القِرَاءَةَ عَادَةٌ تُثْرِي العَقْلَ.</a:t>
             </a:r>
@@ -16226,8 +15948,7 @@
                   <a:srgbClr val="FFFFFF"/>
                 </a:solidFill>
                 <a:latin typeface="Calibri" pitchFamily="34" charset="0"/>
-                <a:ea typeface="Calibri" pitchFamily="34" charset="-122"/>
-                <a:cs typeface="Calibri" pitchFamily="34" charset="-120"/>
+                <a:cs typeface="Amiri" pitchFamily="2" charset="-78"/>
               </a:rPr>
               <a:t>2</a:t>
             </a:r>
@@ -16265,8 +15986,7 @@
                   <a:srgbClr val="1B3B6F"/>
                 </a:solidFill>
                 <a:latin typeface="Calibri" pitchFamily="34" charset="0"/>
-                <a:ea typeface="Calibri" pitchFamily="34" charset="-122"/>
-                <a:cs typeface="Calibri" pitchFamily="34" charset="-120"/>
+                <a:cs typeface="Amiri" pitchFamily="2" charset="-78"/>
               </a:rPr>
               <a:t>R2 — How much daily reading builds a habit?</a:t>
             </a:r>
@@ -16329,8 +16049,7 @@
                   <a:srgbClr val="1B3B6F"/>
                 </a:solidFill>
                 <a:latin typeface="Calibri" pitchFamily="34" charset="0"/>
-                <a:ea typeface="Calibri" pitchFamily="34" charset="-122"/>
-                <a:cs typeface="Calibri" pitchFamily="34" charset="-120"/>
+                <a:cs typeface="Amiri" pitchFamily="2" charset="-78"/>
               </a:rPr>
               <a:t>A</a:t>
             </a:r>
@@ -16368,8 +16087,7 @@
                   <a:srgbClr val="9AA1AB"/>
                 </a:solidFill>
                 <a:latin typeface="Calibri" pitchFamily="34" charset="0"/>
-                <a:ea typeface="Calibri" pitchFamily="34" charset="-122"/>
-                <a:cs typeface="Calibri" pitchFamily="34" charset="-120"/>
+                <a:cs typeface="Amiri" pitchFamily="2" charset="-78"/>
               </a:rPr>
               <a:t>Two hours</a:t>
             </a:r>
@@ -16432,8 +16150,7 @@
                   <a:srgbClr val="1B3B6F"/>
                 </a:solidFill>
                 <a:latin typeface="Calibri" pitchFamily="34" charset="0"/>
-                <a:ea typeface="Calibri" pitchFamily="34" charset="-122"/>
-                <a:cs typeface="Calibri" pitchFamily="34" charset="-120"/>
+                <a:cs typeface="Amiri" pitchFamily="2" charset="-78"/>
               </a:rPr>
               <a:t>B</a:t>
             </a:r>
@@ -16471,8 +16188,7 @@
                   <a:srgbClr val="9AA1AB"/>
                 </a:solidFill>
                 <a:latin typeface="Calibri" pitchFamily="34" charset="0"/>
-                <a:ea typeface="Calibri" pitchFamily="34" charset="-122"/>
-                <a:cs typeface="Calibri" pitchFamily="34" charset="-120"/>
+                <a:cs typeface="Amiri" pitchFamily="2" charset="-78"/>
               </a:rPr>
               <a:t>No time</a:t>
             </a:r>
@@ -16562,8 +16278,7 @@
                   <a:srgbClr val="FFFFFF"/>
                 </a:solidFill>
                 <a:latin typeface="Calibri" pitchFamily="34" charset="0"/>
-                <a:ea typeface="Calibri" pitchFamily="34" charset="-122"/>
-                <a:cs typeface="Calibri" pitchFamily="34" charset="-120"/>
+                <a:cs typeface="Amiri" pitchFamily="2" charset="-78"/>
               </a:rPr>
               <a:t>C</a:t>
             </a:r>
@@ -16601,8 +16316,7 @@
                   <a:srgbClr val="1F2A37"/>
                 </a:solidFill>
                 <a:latin typeface="Calibri" pitchFamily="34" charset="0"/>
-                <a:ea typeface="Calibri" pitchFamily="34" charset="-122"/>
-                <a:cs typeface="Calibri" pitchFamily="34" charset="-120"/>
+                <a:cs typeface="Amiri" pitchFamily="2" charset="-78"/>
               </a:rPr>
               <a:t>Ten minutes</a:t>
             </a:r>
@@ -16639,9 +16353,8 @@
                 <a:solidFill>
                   <a:srgbClr val="8A6D1E"/>
                 </a:solidFill>
-                <a:latin typeface="Amiri" pitchFamily="34" charset="0"/>
-                <a:ea typeface="Amiri" pitchFamily="34" charset="-122"/>
-                <a:cs typeface="Amiri" pitchFamily="34" charset="-120"/>
+                <a:latin typeface="Amiri" pitchFamily="2" charset="-78"/>
+                <a:cs typeface="Amiri" pitchFamily="2" charset="-78"/>
               </a:rPr>
               <a:t>عَشْرَ دَقَائِقَ يَوْمِيًّا تَبْنِي عَادَةً رَاسِخَةً.</a:t>
             </a:r>
@@ -16738,8 +16451,7 @@
                   <a:srgbClr val="FFFFFF"/>
                 </a:solidFill>
                 <a:latin typeface="Calibri" pitchFamily="34" charset="0"/>
-                <a:ea typeface="Calibri" pitchFamily="34" charset="-122"/>
-                <a:cs typeface="Calibri" pitchFamily="34" charset="-120"/>
+                <a:cs typeface="Amiri" pitchFamily="2" charset="-78"/>
               </a:rPr>
               <a:t>3</a:t>
             </a:r>
@@ -16777,8 +16489,7 @@
                   <a:srgbClr val="1B3B6F"/>
                 </a:solidFill>
                 <a:latin typeface="Calibri" pitchFamily="34" charset="0"/>
-                <a:ea typeface="Calibri" pitchFamily="34" charset="-122"/>
-                <a:cs typeface="Calibri" pitchFamily="34" charset="-120"/>
+                <a:cs typeface="Amiri" pitchFamily="2" charset="-78"/>
               </a:rPr>
               <a:t>R3 — What does </a:t>
             </a:r>
@@ -16790,9 +16501,8 @@
                 <a:solidFill>
                   <a:srgbClr val="1B3B6F"/>
                 </a:solidFill>
-                <a:latin typeface="Amiri" pitchFamily="34" charset="0"/>
-                <a:ea typeface="Amiri" pitchFamily="34" charset="-122"/>
-                <a:cs typeface="Amiri" pitchFamily="34" charset="-120"/>
+                <a:latin typeface="Amiri" pitchFamily="2" charset="-78"/>
+                <a:cs typeface="Amiri" pitchFamily="2" charset="-78"/>
               </a:rPr>
               <a:t>صَحِيحٌ أَنَّ الحَيَاةَ مَشْغُولَةٌ</a:t>
             </a:r>
@@ -16805,8 +16515,7 @@
                   <a:srgbClr val="1B3B6F"/>
                 </a:solidFill>
                 <a:latin typeface="Calibri" pitchFamily="34" charset="0"/>
-                <a:ea typeface="Calibri" pitchFamily="34" charset="-122"/>
-                <a:cs typeface="Calibri" pitchFamily="34" charset="-120"/>
+                <a:cs typeface="Amiri" pitchFamily="2" charset="-78"/>
               </a:rPr>
               <a:t> do?</a:t>
             </a:r>
@@ -16896,8 +16605,7 @@
                   <a:srgbClr val="FFFFFF"/>
                 </a:solidFill>
                 <a:latin typeface="Calibri" pitchFamily="34" charset="0"/>
-                <a:ea typeface="Calibri" pitchFamily="34" charset="-122"/>
-                <a:cs typeface="Calibri" pitchFamily="34" charset="-120"/>
+                <a:cs typeface="Amiri" pitchFamily="2" charset="-78"/>
               </a:rPr>
               <a:t>A</a:t>
             </a:r>
@@ -16935,8 +16643,7 @@
                   <a:srgbClr val="1F2A37"/>
                 </a:solidFill>
                 <a:latin typeface="Calibri" pitchFamily="34" charset="0"/>
-                <a:ea typeface="Calibri" pitchFamily="34" charset="-122"/>
-                <a:cs typeface="Calibri" pitchFamily="34" charset="-120"/>
+                <a:cs typeface="Amiri" pitchFamily="2" charset="-78"/>
               </a:rPr>
               <a:t>Concedes an objection before answering it</a:t>
             </a:r>
@@ -16999,8 +16706,7 @@
                   <a:srgbClr val="1B3B6F"/>
                 </a:solidFill>
                 <a:latin typeface="Calibri" pitchFamily="34" charset="0"/>
-                <a:ea typeface="Calibri" pitchFamily="34" charset="-122"/>
-                <a:cs typeface="Calibri" pitchFamily="34" charset="-120"/>
+                <a:cs typeface="Amiri" pitchFamily="2" charset="-78"/>
               </a:rPr>
               <a:t>B</a:t>
             </a:r>
@@ -17038,8 +16744,7 @@
                   <a:srgbClr val="9AA1AB"/>
                 </a:solidFill>
                 <a:latin typeface="Calibri" pitchFamily="34" charset="0"/>
-                <a:ea typeface="Calibri" pitchFamily="34" charset="-122"/>
-                <a:cs typeface="Calibri" pitchFamily="34" charset="-120"/>
+                <a:cs typeface="Amiri" pitchFamily="2" charset="-78"/>
               </a:rPr>
               <a:t>States the conclusion</a:t>
             </a:r>
@@ -17102,8 +16807,7 @@
                   <a:srgbClr val="1B3B6F"/>
                 </a:solidFill>
                 <a:latin typeface="Calibri" pitchFamily="34" charset="0"/>
-                <a:ea typeface="Calibri" pitchFamily="34" charset="-122"/>
-                <a:cs typeface="Calibri" pitchFamily="34" charset="-120"/>
+                <a:cs typeface="Amiri" pitchFamily="2" charset="-78"/>
               </a:rPr>
               <a:t>C</a:t>
             </a:r>
@@ -17141,8 +16845,7 @@
                   <a:srgbClr val="9AA1AB"/>
                 </a:solidFill>
                 <a:latin typeface="Calibri" pitchFamily="34" charset="0"/>
-                <a:ea typeface="Calibri" pitchFamily="34" charset="-122"/>
-                <a:cs typeface="Calibri" pitchFamily="34" charset="-120"/>
+                <a:cs typeface="Amiri" pitchFamily="2" charset="-78"/>
               </a:rPr>
               <a:t>Reports a statistic</a:t>
             </a:r>
@@ -17180,8 +16883,7 @@
                   <a:srgbClr val="8A6D1E"/>
                 </a:solidFill>
                 <a:latin typeface="Calibri" pitchFamily="34" charset="0"/>
-                <a:ea typeface="Calibri" pitchFamily="34" charset="-122"/>
-                <a:cs typeface="Calibri" pitchFamily="34" charset="-120"/>
+                <a:cs typeface="Amiri" pitchFamily="2" charset="-78"/>
               </a:rPr>
               <a:t>It concedes a real objection before the refutation.</a:t>
             </a:r>
@@ -17278,8 +16980,7 @@
                   <a:srgbClr val="FFFFFF"/>
                 </a:solidFill>
                 <a:latin typeface="Calibri" pitchFamily="34" charset="0"/>
-                <a:ea typeface="Calibri" pitchFamily="34" charset="-122"/>
-                <a:cs typeface="Calibri" pitchFamily="34" charset="-120"/>
+                <a:cs typeface="Amiri" pitchFamily="2" charset="-78"/>
               </a:rPr>
               <a:t>4</a:t>
             </a:r>
@@ -17317,8 +17018,7 @@
                   <a:srgbClr val="1B3B6F"/>
                 </a:solidFill>
                 <a:latin typeface="Calibri" pitchFamily="34" charset="0"/>
-                <a:ea typeface="Calibri" pitchFamily="34" charset="-122"/>
-                <a:cs typeface="Calibri" pitchFamily="34" charset="-120"/>
+                <a:cs typeface="Amiri" pitchFamily="2" charset="-78"/>
               </a:rPr>
               <a:t>R4 gap-fill — </a:t>
             </a:r>
@@ -17330,9 +17030,8 @@
                 <a:solidFill>
                   <a:srgbClr val="1B3B6F"/>
                 </a:solidFill>
-                <a:latin typeface="Amiri" pitchFamily="34" charset="0"/>
-                <a:ea typeface="Amiri" pitchFamily="34" charset="-122"/>
-                <a:cs typeface="Amiri" pitchFamily="34" charset="-120"/>
+                <a:latin typeface="Amiri" pitchFamily="2" charset="-78"/>
+                <a:cs typeface="Amiri" pitchFamily="2" charset="-78"/>
               </a:rPr>
               <a:t>صَحِيحٌ أَنَّ الحَيَاةَ</a:t>
             </a:r>
@@ -17345,8 +17044,7 @@
                   <a:srgbClr val="1B3B6F"/>
                 </a:solidFill>
                 <a:latin typeface="Calibri" pitchFamily="34" charset="0"/>
-                <a:ea typeface="Calibri" pitchFamily="34" charset="-122"/>
-                <a:cs typeface="Calibri" pitchFamily="34" charset="-120"/>
+                <a:cs typeface="Amiri" pitchFamily="2" charset="-78"/>
               </a:rPr>
               <a:t> ___ .</a:t>
             </a:r>
@@ -17409,8 +17107,7 @@
                   <a:srgbClr val="1B3B6F"/>
                 </a:solidFill>
                 <a:latin typeface="Calibri" pitchFamily="34" charset="0"/>
-                <a:ea typeface="Calibri" pitchFamily="34" charset="-122"/>
-                <a:cs typeface="Calibri" pitchFamily="34" charset="-120"/>
+                <a:cs typeface="Amiri" pitchFamily="2" charset="-78"/>
               </a:rPr>
               <a:t>A</a:t>
             </a:r>
@@ -17447,9 +17144,8 @@
                 <a:solidFill>
                   <a:srgbClr val="9AA1AB"/>
                 </a:solidFill>
-                <a:latin typeface="Amiri" pitchFamily="34" charset="0"/>
-                <a:ea typeface="Amiri" pitchFamily="34" charset="-122"/>
-                <a:cs typeface="Amiri" pitchFamily="34" charset="-120"/>
+                <a:latin typeface="Amiri" pitchFamily="2" charset="-78"/>
+                <a:cs typeface="Amiri" pitchFamily="2" charset="-78"/>
               </a:rPr>
               <a:t>تَكُونَ مَشْغُولَةً</a:t>
             </a:r>
@@ -17539,8 +17235,7 @@
                   <a:srgbClr val="FFFFFF"/>
                 </a:solidFill>
                 <a:latin typeface="Calibri" pitchFamily="34" charset="0"/>
-                <a:ea typeface="Calibri" pitchFamily="34" charset="-122"/>
-                <a:cs typeface="Calibri" pitchFamily="34" charset="-120"/>
+                <a:cs typeface="Amiri" pitchFamily="2" charset="-78"/>
               </a:rPr>
               <a:t>B</a:t>
             </a:r>
@@ -17577,9 +17272,8 @@
                 <a:solidFill>
                   <a:srgbClr val="1F2A37"/>
                 </a:solidFill>
-                <a:latin typeface="Amiri" pitchFamily="34" charset="0"/>
-                <a:ea typeface="Amiri" pitchFamily="34" charset="-122"/>
-                <a:cs typeface="Amiri" pitchFamily="34" charset="-120"/>
+                <a:latin typeface="Amiri" pitchFamily="2" charset="-78"/>
+                <a:cs typeface="Amiri" pitchFamily="2" charset="-78"/>
               </a:rPr>
               <a:t>مَشْغُولَةٌ</a:t>
             </a:r>
@@ -17642,8 +17336,7 @@
                   <a:srgbClr val="1B3B6F"/>
                 </a:solidFill>
                 <a:latin typeface="Calibri" pitchFamily="34" charset="0"/>
-                <a:ea typeface="Calibri" pitchFamily="34" charset="-122"/>
-                <a:cs typeface="Calibri" pitchFamily="34" charset="-120"/>
+                <a:cs typeface="Amiri" pitchFamily="2" charset="-78"/>
               </a:rPr>
               <a:t>C</a:t>
             </a:r>
@@ -17680,9 +17373,8 @@
                 <a:solidFill>
                   <a:srgbClr val="9AA1AB"/>
                 </a:solidFill>
-                <a:latin typeface="Amiri" pitchFamily="34" charset="0"/>
-                <a:ea typeface="Amiri" pitchFamily="34" charset="-122"/>
-                <a:cs typeface="Amiri" pitchFamily="34" charset="-120"/>
+                <a:latin typeface="Amiri" pitchFamily="2" charset="-78"/>
+                <a:cs typeface="Amiri" pitchFamily="2" charset="-78"/>
               </a:rPr>
               <a:t>كَانَتْ مَشْغُولَةً</a:t>
             </a:r>
@@ -17720,8 +17412,7 @@
                   <a:srgbClr val="8A6D1E"/>
                 </a:solidFill>
                 <a:latin typeface="Calibri" pitchFamily="34" charset="0"/>
-                <a:ea typeface="Calibri" pitchFamily="34" charset="-122"/>
-                <a:cs typeface="Calibri" pitchFamily="34" charset="-120"/>
+                <a:cs typeface="Amiri" pitchFamily="2" charset="-78"/>
               </a:rPr>
               <a:t>After </a:t>
             </a:r>
@@ -17733,9 +17424,8 @@
                 <a:solidFill>
                   <a:srgbClr val="8A6D1E"/>
                 </a:solidFill>
-                <a:latin typeface="Amiri" pitchFamily="34" charset="0"/>
-                <a:ea typeface="Amiri" pitchFamily="34" charset="-122"/>
-                <a:cs typeface="Amiri" pitchFamily="34" charset="-120"/>
+                <a:latin typeface="Amiri" pitchFamily="2" charset="-78"/>
+                <a:cs typeface="Amiri" pitchFamily="2" charset="-78"/>
               </a:rPr>
               <a:t>صَحِيحٌ أَنَّ</a:t>
             </a:r>
@@ -17748,8 +17438,7 @@
                   <a:srgbClr val="8A6D1E"/>
                 </a:solidFill>
                 <a:latin typeface="Calibri" pitchFamily="34" charset="0"/>
-                <a:ea typeface="Calibri" pitchFamily="34" charset="-122"/>
-                <a:cs typeface="Calibri" pitchFamily="34" charset="-120"/>
+                <a:cs typeface="Amiri" pitchFamily="2" charset="-78"/>
               </a:rPr>
               <a:t> the clause is indicative — a real situation.</a:t>
             </a:r>
@@ -17846,8 +17535,7 @@
                   <a:srgbClr val="FFFFFF"/>
                 </a:solidFill>
                 <a:latin typeface="Calibri" pitchFamily="34" charset="0"/>
-                <a:ea typeface="Calibri" pitchFamily="34" charset="-122"/>
-                <a:cs typeface="Calibri" pitchFamily="34" charset="-120"/>
+                <a:cs typeface="Amiri" pitchFamily="2" charset="-78"/>
               </a:rPr>
               <a:t>5</a:t>
             </a:r>
@@ -17885,8 +17573,7 @@
                   <a:srgbClr val="1B3B6F"/>
                 </a:solidFill>
                 <a:latin typeface="Calibri" pitchFamily="34" charset="0"/>
-                <a:ea typeface="Calibri" pitchFamily="34" charset="-122"/>
-                <a:cs typeface="Calibri" pitchFamily="34" charset="-120"/>
+                <a:cs typeface="Amiri" pitchFamily="2" charset="-78"/>
               </a:rPr>
               <a:t>R4 gap-fill — </a:t>
             </a:r>
@@ -17898,9 +17585,8 @@
                 <a:solidFill>
                   <a:srgbClr val="1B3B6F"/>
                 </a:solidFill>
-                <a:latin typeface="Amiri" pitchFamily="34" charset="0"/>
-                <a:ea typeface="Amiri" pitchFamily="34" charset="-122"/>
-                <a:cs typeface="Amiri" pitchFamily="34" charset="-120"/>
+                <a:latin typeface="Amiri" pitchFamily="2" charset="-78"/>
+                <a:cs typeface="Amiri" pitchFamily="2" charset="-78"/>
               </a:rPr>
               <a:t>يَتَطَلَّبُ الأَمْرُ أَنْ</a:t>
             </a:r>
@@ -17913,8 +17599,7 @@
                   <a:srgbClr val="1B3B6F"/>
                 </a:solidFill>
                 <a:latin typeface="Calibri" pitchFamily="34" charset="0"/>
-                <a:ea typeface="Calibri" pitchFamily="34" charset="-122"/>
-                <a:cs typeface="Calibri" pitchFamily="34" charset="-120"/>
+                <a:cs typeface="Amiri" pitchFamily="2" charset="-78"/>
               </a:rPr>
               <a:t> ___ </a:t>
             </a:r>
@@ -17926,9 +17611,8 @@
                 <a:solidFill>
                   <a:srgbClr val="1B3B6F"/>
                 </a:solidFill>
-                <a:latin typeface="Amiri" pitchFamily="34" charset="0"/>
-                <a:ea typeface="Amiri" pitchFamily="34" charset="-122"/>
-                <a:cs typeface="Amiri" pitchFamily="34" charset="-120"/>
+                <a:latin typeface="Amiri" pitchFamily="2" charset="-78"/>
+                <a:cs typeface="Amiri" pitchFamily="2" charset="-78"/>
               </a:rPr>
               <a:t>الأُسَرُ وَقْتًا</a:t>
             </a:r>
@@ -17941,8 +17625,7 @@
                   <a:srgbClr val="1B3B6F"/>
                 </a:solidFill>
                 <a:latin typeface="Calibri" pitchFamily="34" charset="0"/>
-                <a:ea typeface="Calibri" pitchFamily="34" charset="-122"/>
-                <a:cs typeface="Calibri" pitchFamily="34" charset="-120"/>
+                <a:cs typeface="Amiri" pitchFamily="2" charset="-78"/>
               </a:rPr>
               <a:t>.</a:t>
             </a:r>
@@ -18032,8 +17715,7 @@
                   <a:srgbClr val="FFFFFF"/>
                 </a:solidFill>
                 <a:latin typeface="Calibri" pitchFamily="34" charset="0"/>
-                <a:ea typeface="Calibri" pitchFamily="34" charset="-122"/>
-                <a:cs typeface="Calibri" pitchFamily="34" charset="-120"/>
+                <a:cs typeface="Amiri" pitchFamily="2" charset="-78"/>
               </a:rPr>
               <a:t>A</a:t>
             </a:r>
@@ -18070,9 +17752,8 @@
                 <a:solidFill>
                   <a:srgbClr val="1F2A37"/>
                 </a:solidFill>
-                <a:latin typeface="Amiri" pitchFamily="34" charset="0"/>
-                <a:ea typeface="Amiri" pitchFamily="34" charset="-122"/>
-                <a:cs typeface="Amiri" pitchFamily="34" charset="-120"/>
+                <a:latin typeface="Amiri" pitchFamily="2" charset="-78"/>
+                <a:cs typeface="Amiri" pitchFamily="2" charset="-78"/>
               </a:rPr>
               <a:t>تُخَصِّصَ</a:t>
             </a:r>
@@ -18135,8 +17816,7 @@
                   <a:srgbClr val="1B3B6F"/>
                 </a:solidFill>
                 <a:latin typeface="Calibri" pitchFamily="34" charset="0"/>
-                <a:ea typeface="Calibri" pitchFamily="34" charset="-122"/>
-                <a:cs typeface="Calibri" pitchFamily="34" charset="-120"/>
+                <a:cs typeface="Amiri" pitchFamily="2" charset="-78"/>
               </a:rPr>
               <a:t>B</a:t>
             </a:r>
@@ -18173,9 +17853,8 @@
                 <a:solidFill>
                   <a:srgbClr val="9AA1AB"/>
                 </a:solidFill>
-                <a:latin typeface="Amiri" pitchFamily="34" charset="0"/>
-                <a:ea typeface="Amiri" pitchFamily="34" charset="-122"/>
-                <a:cs typeface="Amiri" pitchFamily="34" charset="-120"/>
+                <a:latin typeface="Amiri" pitchFamily="2" charset="-78"/>
+                <a:cs typeface="Amiri" pitchFamily="2" charset="-78"/>
               </a:rPr>
               <a:t>تُخَصِّصُ</a:t>
             </a:r>
@@ -18238,8 +17917,7 @@
                   <a:srgbClr val="1B3B6F"/>
                 </a:solidFill>
                 <a:latin typeface="Calibri" pitchFamily="34" charset="0"/>
-                <a:ea typeface="Calibri" pitchFamily="34" charset="-122"/>
-                <a:cs typeface="Calibri" pitchFamily="34" charset="-120"/>
+                <a:cs typeface="Amiri" pitchFamily="2" charset="-78"/>
               </a:rPr>
               <a:t>C</a:t>
             </a:r>
@@ -18276,9 +17954,8 @@
                 <a:solidFill>
                   <a:srgbClr val="9AA1AB"/>
                 </a:solidFill>
-                <a:latin typeface="Amiri" pitchFamily="34" charset="0"/>
-                <a:ea typeface="Amiri" pitchFamily="34" charset="-122"/>
-                <a:cs typeface="Amiri" pitchFamily="34" charset="-120"/>
+                <a:latin typeface="Amiri" pitchFamily="2" charset="-78"/>
+                <a:cs typeface="Amiri" pitchFamily="2" charset="-78"/>
               </a:rPr>
               <a:t>خَصَّصَتْ</a:t>
             </a:r>
@@ -18316,8 +17993,7 @@
                   <a:srgbClr val="8A6D1E"/>
                 </a:solidFill>
                 <a:latin typeface="Calibri" pitchFamily="34" charset="0"/>
-                <a:ea typeface="Calibri" pitchFamily="34" charset="-122"/>
-                <a:cs typeface="Calibri" pitchFamily="34" charset="-120"/>
+                <a:cs typeface="Amiri" pitchFamily="2" charset="-78"/>
               </a:rPr>
               <a:t>After </a:t>
             </a:r>
@@ -18329,9 +18005,8 @@
                 <a:solidFill>
                   <a:srgbClr val="8A6D1E"/>
                 </a:solidFill>
-                <a:latin typeface="Amiri" pitchFamily="34" charset="0"/>
-                <a:ea typeface="Amiri" pitchFamily="34" charset="-122"/>
-                <a:cs typeface="Amiri" pitchFamily="34" charset="-120"/>
+                <a:latin typeface="Amiri" pitchFamily="2" charset="-78"/>
+                <a:cs typeface="Amiri" pitchFamily="2" charset="-78"/>
               </a:rPr>
               <a:t>أَنْ</a:t>
             </a:r>
@@ -18344,8 +18019,7 @@
                   <a:srgbClr val="8A6D1E"/>
                 </a:solidFill>
                 <a:latin typeface="Calibri" pitchFamily="34" charset="0"/>
-                <a:ea typeface="Calibri" pitchFamily="34" charset="-122"/>
-                <a:cs typeface="Calibri" pitchFamily="34" charset="-120"/>
+                <a:cs typeface="Amiri" pitchFamily="2" charset="-78"/>
               </a:rPr>
               <a:t> (with </a:t>
             </a:r>
@@ -18357,9 +18031,8 @@
                 <a:solidFill>
                   <a:srgbClr val="8A6D1E"/>
                 </a:solidFill>
-                <a:latin typeface="Amiri" pitchFamily="34" charset="0"/>
-                <a:ea typeface="Amiri" pitchFamily="34" charset="-122"/>
-                <a:cs typeface="Amiri" pitchFamily="34" charset="-120"/>
+                <a:latin typeface="Amiri" pitchFamily="2" charset="-78"/>
+                <a:cs typeface="Amiri" pitchFamily="2" charset="-78"/>
               </a:rPr>
               <a:t>يَتَطَلَّبُ</a:t>
             </a:r>
@@ -18372,8 +18045,7 @@
                   <a:srgbClr val="8A6D1E"/>
                 </a:solidFill>
                 <a:latin typeface="Calibri" pitchFamily="34" charset="0"/>
-                <a:ea typeface="Calibri" pitchFamily="34" charset="-122"/>
-                <a:cs typeface="Calibri" pitchFamily="34" charset="-120"/>
+                <a:cs typeface="Amiri" pitchFamily="2" charset="-78"/>
               </a:rPr>
               <a:t>) the verb is subjunctive: </a:t>
             </a:r>
@@ -18385,9 +18057,8 @@
                 <a:solidFill>
                   <a:srgbClr val="8A6D1E"/>
                 </a:solidFill>
-                <a:latin typeface="Amiri" pitchFamily="34" charset="0"/>
-                <a:ea typeface="Amiri" pitchFamily="34" charset="-122"/>
-                <a:cs typeface="Amiri" pitchFamily="34" charset="-120"/>
+                <a:latin typeface="Amiri" pitchFamily="2" charset="-78"/>
+                <a:cs typeface="Amiri" pitchFamily="2" charset="-78"/>
               </a:rPr>
               <a:t>تُخَصِّصَ</a:t>
             </a:r>
@@ -18400,8 +18071,7 @@
                   <a:srgbClr val="8A6D1E"/>
                 </a:solidFill>
                 <a:latin typeface="Calibri" pitchFamily="34" charset="0"/>
-                <a:ea typeface="Calibri" pitchFamily="34" charset="-122"/>
-                <a:cs typeface="Calibri" pitchFamily="34" charset="-120"/>
+                <a:cs typeface="Amiri" pitchFamily="2" charset="-78"/>
               </a:rPr>
               <a:t>.</a:t>
             </a:r>
@@ -18498,8 +18168,7 @@
                   <a:srgbClr val="FFFFFF"/>
                 </a:solidFill>
                 <a:latin typeface="Calibri" pitchFamily="34" charset="0"/>
-                <a:ea typeface="Calibri" pitchFamily="34" charset="-122"/>
-                <a:cs typeface="Calibri" pitchFamily="34" charset="-120"/>
+                <a:cs typeface="Amiri" pitchFamily="2" charset="-78"/>
               </a:rPr>
               <a:t>6</a:t>
             </a:r>
@@ -18537,8 +18206,7 @@
                   <a:srgbClr val="1B3B6F"/>
                 </a:solidFill>
                 <a:latin typeface="Calibri" pitchFamily="34" charset="0"/>
-                <a:ea typeface="Calibri" pitchFamily="34" charset="-122"/>
-                <a:cs typeface="Calibri" pitchFamily="34" charset="-120"/>
+                <a:cs typeface="Amiri" pitchFamily="2" charset="-78"/>
               </a:rPr>
               <a:t>R4 gap-fill — </a:t>
             </a:r>
@@ -18550,9 +18218,8 @@
                 <a:solidFill>
                   <a:srgbClr val="1B3B6F"/>
                 </a:solidFill>
-                <a:latin typeface="Amiri" pitchFamily="34" charset="0"/>
-                <a:ea typeface="Amiri" pitchFamily="34" charset="-122"/>
-                <a:cs typeface="Amiri" pitchFamily="34" charset="-120"/>
+                <a:latin typeface="Amiri" pitchFamily="2" charset="-78"/>
+                <a:cs typeface="Amiri" pitchFamily="2" charset="-78"/>
               </a:rPr>
               <a:t>لَوْ قَرَأَ كُلُّ طِفْلٍ كِتَابًا،</a:t>
             </a:r>
@@ -18565,8 +18232,7 @@
                   <a:srgbClr val="1B3B6F"/>
                 </a:solidFill>
                 <a:latin typeface="Calibri" pitchFamily="34" charset="0"/>
-                <a:ea typeface="Calibri" pitchFamily="34" charset="-122"/>
-                <a:cs typeface="Calibri" pitchFamily="34" charset="-120"/>
+                <a:cs typeface="Amiri" pitchFamily="2" charset="-78"/>
               </a:rPr>
               <a:t> ___ </a:t>
             </a:r>
@@ -18578,9 +18244,8 @@
                 <a:solidFill>
                   <a:srgbClr val="1B3B6F"/>
                 </a:solidFill>
-                <a:latin typeface="Amiri" pitchFamily="34" charset="0"/>
-                <a:ea typeface="Amiri" pitchFamily="34" charset="-122"/>
-                <a:cs typeface="Amiri" pitchFamily="34" charset="-120"/>
+                <a:latin typeface="Amiri" pitchFamily="2" charset="-78"/>
+                <a:cs typeface="Amiri" pitchFamily="2" charset="-78"/>
               </a:rPr>
               <a:t>مَدَارِكُهُ</a:t>
             </a:r>
@@ -18593,8 +18258,7 @@
                   <a:srgbClr val="1B3B6F"/>
                 </a:solidFill>
                 <a:latin typeface="Calibri" pitchFamily="34" charset="0"/>
-                <a:ea typeface="Calibri" pitchFamily="34" charset="-122"/>
-                <a:cs typeface="Calibri" pitchFamily="34" charset="-120"/>
+                <a:cs typeface="Amiri" pitchFamily="2" charset="-78"/>
               </a:rPr>
               <a:t>.</a:t>
             </a:r>
@@ -18657,8 +18321,7 @@
                   <a:srgbClr val="1B3B6F"/>
                 </a:solidFill>
                 <a:latin typeface="Calibri" pitchFamily="34" charset="0"/>
-                <a:ea typeface="Calibri" pitchFamily="34" charset="-122"/>
-                <a:cs typeface="Calibri" pitchFamily="34" charset="-120"/>
+                <a:cs typeface="Amiri" pitchFamily="2" charset="-78"/>
               </a:rPr>
               <a:t>A</a:t>
             </a:r>
@@ -18695,9 +18358,8 @@
                 <a:solidFill>
                   <a:srgbClr val="9AA1AB"/>
                 </a:solidFill>
-                <a:latin typeface="Amiri" pitchFamily="34" charset="0"/>
-                <a:ea typeface="Amiri" pitchFamily="34" charset="-122"/>
-                <a:cs typeface="Amiri" pitchFamily="34" charset="-120"/>
+                <a:latin typeface="Amiri" pitchFamily="2" charset="-78"/>
+                <a:cs typeface="Amiri" pitchFamily="2" charset="-78"/>
               </a:rPr>
               <a:t>سَتَتَّسِعُ</a:t>
             </a:r>
@@ -18760,8 +18422,7 @@
                   <a:srgbClr val="1B3B6F"/>
                 </a:solidFill>
                 <a:latin typeface="Calibri" pitchFamily="34" charset="0"/>
-                <a:ea typeface="Calibri" pitchFamily="34" charset="-122"/>
-                <a:cs typeface="Calibri" pitchFamily="34" charset="-120"/>
+                <a:cs typeface="Amiri" pitchFamily="2" charset="-78"/>
               </a:rPr>
               <a:t>B</a:t>
             </a:r>
@@ -18798,9 +18459,8 @@
                 <a:solidFill>
                   <a:srgbClr val="9AA1AB"/>
                 </a:solidFill>
-                <a:latin typeface="Amiri" pitchFamily="34" charset="0"/>
-                <a:ea typeface="Amiri" pitchFamily="34" charset="-122"/>
-                <a:cs typeface="Amiri" pitchFamily="34" charset="-120"/>
+                <a:latin typeface="Amiri" pitchFamily="2" charset="-78"/>
+                <a:cs typeface="Amiri" pitchFamily="2" charset="-78"/>
               </a:rPr>
               <a:t>تَتَّسِعُ</a:t>
             </a:r>
@@ -18890,8 +18550,7 @@
                   <a:srgbClr val="FFFFFF"/>
                 </a:solidFill>
                 <a:latin typeface="Calibri" pitchFamily="34" charset="0"/>
-                <a:ea typeface="Calibri" pitchFamily="34" charset="-122"/>
-                <a:cs typeface="Calibri" pitchFamily="34" charset="-120"/>
+                <a:cs typeface="Amiri" pitchFamily="2" charset="-78"/>
               </a:rPr>
               <a:t>C</a:t>
             </a:r>
@@ -18928,9 +18587,8 @@
                 <a:solidFill>
                   <a:srgbClr val="1F2A37"/>
                 </a:solidFill>
-                <a:latin typeface="Amiri" pitchFamily="34" charset="0"/>
-                <a:ea typeface="Amiri" pitchFamily="34" charset="-122"/>
-                <a:cs typeface="Amiri" pitchFamily="34" charset="-120"/>
+                <a:latin typeface="Amiri" pitchFamily="2" charset="-78"/>
+                <a:cs typeface="Amiri" pitchFamily="2" charset="-78"/>
               </a:rPr>
               <a:t>لَاتَّسَعَتْ</a:t>
             </a:r>
@@ -18968,8 +18626,7 @@
                   <a:srgbClr val="8A6D1E"/>
                 </a:solidFill>
                 <a:latin typeface="Calibri" pitchFamily="34" charset="0"/>
-                <a:ea typeface="Calibri" pitchFamily="34" charset="-122"/>
-                <a:cs typeface="Calibri" pitchFamily="34" charset="-120"/>
+                <a:cs typeface="Amiri" pitchFamily="2" charset="-78"/>
               </a:rPr>
               <a:t>A </a:t>
             </a:r>
@@ -18981,9 +18638,8 @@
                 <a:solidFill>
                   <a:srgbClr val="8A6D1E"/>
                 </a:solidFill>
-                <a:latin typeface="Amiri" pitchFamily="34" charset="0"/>
-                <a:ea typeface="Amiri" pitchFamily="34" charset="-122"/>
-                <a:cs typeface="Amiri" pitchFamily="34" charset="-120"/>
+                <a:latin typeface="Amiri" pitchFamily="2" charset="-78"/>
+                <a:cs typeface="Amiri" pitchFamily="2" charset="-78"/>
               </a:rPr>
               <a:t>لَوْ</a:t>
             </a:r>
@@ -18996,8 +18652,7 @@
                   <a:srgbClr val="8A6D1E"/>
                 </a:solidFill>
                 <a:latin typeface="Calibri" pitchFamily="34" charset="0"/>
-                <a:ea typeface="Calibri" pitchFamily="34" charset="-122"/>
-                <a:cs typeface="Calibri" pitchFamily="34" charset="-120"/>
+                <a:cs typeface="Amiri" pitchFamily="2" charset="-78"/>
               </a:rPr>
               <a:t> conditional takes a </a:t>
             </a:r>
@@ -19009,9 +18664,8 @@
                 <a:solidFill>
                   <a:srgbClr val="8A6D1E"/>
                 </a:solidFill>
-                <a:latin typeface="Amiri" pitchFamily="34" charset="0"/>
-                <a:ea typeface="Amiri" pitchFamily="34" charset="-122"/>
-                <a:cs typeface="Amiri" pitchFamily="34" charset="-120"/>
+                <a:latin typeface="Amiri" pitchFamily="2" charset="-78"/>
+                <a:cs typeface="Amiri" pitchFamily="2" charset="-78"/>
               </a:rPr>
               <a:t>لَـ</a:t>
             </a:r>
@@ -19024,8 +18678,7 @@
                   <a:srgbClr val="8A6D1E"/>
                 </a:solidFill>
                 <a:latin typeface="Calibri" pitchFamily="34" charset="0"/>
-                <a:ea typeface="Calibri" pitchFamily="34" charset="-122"/>
-                <a:cs typeface="Calibri" pitchFamily="34" charset="-120"/>
+                <a:cs typeface="Amiri" pitchFamily="2" charset="-78"/>
               </a:rPr>
               <a:t> result: </a:t>
             </a:r>
@@ -19037,9 +18690,8 @@
                 <a:solidFill>
                   <a:srgbClr val="8A6D1E"/>
                 </a:solidFill>
-                <a:latin typeface="Amiri" pitchFamily="34" charset="0"/>
-                <a:ea typeface="Amiri" pitchFamily="34" charset="-122"/>
-                <a:cs typeface="Amiri" pitchFamily="34" charset="-120"/>
+                <a:latin typeface="Amiri" pitchFamily="2" charset="-78"/>
+                <a:cs typeface="Amiri" pitchFamily="2" charset="-78"/>
               </a:rPr>
               <a:t>لَاتَّسَعَتْ</a:t>
             </a:r>
@@ -19052,8 +18704,7 @@
                   <a:srgbClr val="8A6D1E"/>
                 </a:solidFill>
                 <a:latin typeface="Calibri" pitchFamily="34" charset="0"/>
-                <a:ea typeface="Calibri" pitchFamily="34" charset="-122"/>
-                <a:cs typeface="Calibri" pitchFamily="34" charset="-120"/>
+                <a:cs typeface="Amiri" pitchFamily="2" charset="-78"/>
               </a:rPr>
               <a:t>.</a:t>
             </a:r>
@@ -19091,8 +18742,7 @@
                   <a:srgbClr val="8A93A0"/>
                 </a:solidFill>
                 <a:latin typeface="Calibri" pitchFamily="34" charset="0"/>
-                <a:ea typeface="Calibri" pitchFamily="34" charset="-122"/>
-                <a:cs typeface="Calibri" pitchFamily="34" charset="-120"/>
+                <a:cs typeface="Amiri" pitchFamily="2" charset="-78"/>
               </a:rPr>
               <a:t>16 / 25</a:t>
             </a:r>
@@ -19186,9 +18836,8 @@
                 <a:solidFill>
                   <a:srgbClr val="D4AF37"/>
                 </a:solidFill>
-                <a:latin typeface="Amiri" pitchFamily="34" charset="0"/>
-                <a:ea typeface="Amiri" pitchFamily="34" charset="-122"/>
-                <a:cs typeface="Amiri" pitchFamily="34" charset="-120"/>
+                <a:latin typeface="Amiri" pitchFamily="2" charset="-78"/>
+                <a:cs typeface="Amiri" pitchFamily="2" charset="-78"/>
               </a:rPr>
               <a:t>م</a:t>
             </a:r>
@@ -19226,8 +18875,7 @@
                   <a:srgbClr val="1B3B6F"/>
                 </a:solidFill>
                 <a:latin typeface="Cambria" pitchFamily="34" charset="0"/>
-                <a:ea typeface="Cambria" pitchFamily="34" charset="-122"/>
-                <a:cs typeface="Cambria" pitchFamily="34" charset="-120"/>
+                <a:cs typeface="Amiri" pitchFamily="2" charset="-78"/>
               </a:rPr>
               <a:t>Al Madina Online School</a:t>
             </a:r>
@@ -19265,8 +18913,7 @@
                   <a:srgbClr val="8A6D1E"/>
                 </a:solidFill>
                 <a:latin typeface="Calibri" pitchFamily="34" charset="0"/>
-                <a:ea typeface="Calibri" pitchFamily="34" charset="-122"/>
-                <a:cs typeface="Calibri" pitchFamily="34" charset="-120"/>
+                <a:cs typeface="Amiri" pitchFamily="2" charset="-78"/>
               </a:rPr>
               <a:t>ARABIC DEPARTMENT · MIFTAH ARABIC · IGCSE 0544</a:t>
             </a:r>
@@ -19331,8 +18978,7 @@
                   <a:srgbClr val="FFFFFF"/>
                 </a:solidFill>
                 <a:latin typeface="Calibri" pitchFamily="34" charset="0"/>
-                <a:ea typeface="Calibri" pitchFamily="34" charset="-122"/>
-                <a:cs typeface="Calibri" pitchFamily="34" charset="-120"/>
+                <a:cs typeface="Amiri" pitchFamily="2" charset="-78"/>
               </a:rPr>
               <a:t>P6-L09 · IGCSE Bridge</a:t>
             </a:r>
@@ -19397,8 +19043,7 @@
                   <a:srgbClr val="FFFFFF"/>
                 </a:solidFill>
                 <a:latin typeface="Calibri" pitchFamily="34" charset="0"/>
-                <a:ea typeface="Calibri" pitchFamily="34" charset="-122"/>
-                <a:cs typeface="Calibri" pitchFamily="34" charset="-120"/>
+                <a:cs typeface="Amiri" pitchFamily="2" charset="-78"/>
               </a:rPr>
               <a:t>FEEDBACK</a:t>
             </a:r>
@@ -19436,8 +19081,7 @@
                   <a:srgbClr val="8A6D1E"/>
                 </a:solidFill>
                 <a:latin typeface="Calibri" pitchFamily="34" charset="0"/>
-                <a:ea typeface="Calibri" pitchFamily="34" charset="-122"/>
-                <a:cs typeface="Calibri" pitchFamily="34" charset="-120"/>
+                <a:cs typeface="Amiri" pitchFamily="2" charset="-78"/>
               </a:rPr>
               <a:t>MOCK · ANSWERS · SHOW AFTER THE WHOLE PAPER</a:t>
             </a:r>
@@ -19475,8 +19119,7 @@
                   <a:srgbClr val="1B3B6F"/>
                 </a:solidFill>
                 <a:latin typeface="Cambria" pitchFamily="34" charset="0"/>
-                <a:ea typeface="Cambria" pitchFamily="34" charset="-122"/>
-                <a:cs typeface="Cambria" pitchFamily="34" charset="-120"/>
+                <a:cs typeface="Amiri" pitchFamily="2" charset="-78"/>
               </a:rPr>
               <a:t>Q Groups 5–6: answers</a:t>
             </a:r>
@@ -19513,9 +19156,8 @@
                 <a:solidFill>
                   <a:srgbClr val="8A6D1E"/>
                 </a:solidFill>
-                <a:latin typeface="Amiri" pitchFamily="34" charset="0"/>
-                <a:ea typeface="Amiri" pitchFamily="34" charset="-122"/>
-                <a:cs typeface="Amiri" pitchFamily="34" charset="-120"/>
+                <a:latin typeface="Amiri" pitchFamily="2" charset="-78"/>
+                <a:cs typeface="Amiri" pitchFamily="2" charset="-78"/>
               </a:rPr>
               <a:t>الإِجَابَاتُ</a:t>
             </a:r>
@@ -19553,8 +19195,7 @@
                   <a:srgbClr val="8A93A0"/>
                 </a:solidFill>
                 <a:latin typeface="Calibri" pitchFamily="34" charset="0"/>
-                <a:ea typeface="Calibri" pitchFamily="34" charset="-122"/>
-                <a:cs typeface="Calibri" pitchFamily="34" charset="-120"/>
+                <a:cs typeface="Amiri" pitchFamily="2" charset="-78"/>
               </a:rPr>
               <a:t>Miftah Arabic · Progression P6 · IGCSE Bridge · P6-L09</a:t>
             </a:r>
@@ -19651,8 +19292,7 @@
                   <a:srgbClr val="FFFFFF"/>
                 </a:solidFill>
                 <a:latin typeface="Calibri" pitchFamily="34" charset="0"/>
-                <a:ea typeface="Calibri" pitchFamily="34" charset="-122"/>
-                <a:cs typeface="Calibri" pitchFamily="34" charset="-120"/>
+                <a:cs typeface="Amiri" pitchFamily="2" charset="-78"/>
               </a:rPr>
               <a:t>1</a:t>
             </a:r>
@@ -19690,8 +19330,7 @@
                   <a:srgbClr val="1B3B6F"/>
                 </a:solidFill>
                 <a:latin typeface="Calibri" pitchFamily="34" charset="0"/>
-                <a:ea typeface="Calibri" pitchFamily="34" charset="-122"/>
-                <a:cs typeface="Calibri" pitchFamily="34" charset="-120"/>
+                <a:cs typeface="Amiri" pitchFamily="2" charset="-78"/>
               </a:rPr>
               <a:t>R3 — What is the writer's attitude to volunteering?</a:t>
             </a:r>
@@ -19781,8 +19420,7 @@
                   <a:srgbClr val="FFFFFF"/>
                 </a:solidFill>
                 <a:latin typeface="Calibri" pitchFamily="34" charset="0"/>
-                <a:ea typeface="Calibri" pitchFamily="34" charset="-122"/>
-                <a:cs typeface="Calibri" pitchFamily="34" charset="-120"/>
+                <a:cs typeface="Amiri" pitchFamily="2" charset="-78"/>
               </a:rPr>
               <a:t>A</a:t>
             </a:r>
@@ -19820,8 +19458,7 @@
                   <a:srgbClr val="1F2A37"/>
                 </a:solidFill>
                 <a:latin typeface="Calibri" pitchFamily="34" charset="0"/>
-                <a:ea typeface="Calibri" pitchFamily="34" charset="-122"/>
-                <a:cs typeface="Calibri" pitchFamily="34" charset="-120"/>
+                <a:cs typeface="Amiri" pitchFamily="2" charset="-78"/>
               </a:rPr>
               <a:t>Positive: it gives meaning that cannot be bought</a:t>
             </a:r>
@@ -19884,8 +19521,7 @@
                   <a:srgbClr val="1B3B6F"/>
                 </a:solidFill>
                 <a:latin typeface="Calibri" pitchFamily="34" charset="0"/>
-                <a:ea typeface="Calibri" pitchFamily="34" charset="-122"/>
-                <a:cs typeface="Calibri" pitchFamily="34" charset="-120"/>
+                <a:cs typeface="Amiri" pitchFamily="2" charset="-78"/>
               </a:rPr>
               <a:t>B</a:t>
             </a:r>
@@ -19923,8 +19559,7 @@
                   <a:srgbClr val="9AA1AB"/>
                 </a:solidFill>
                 <a:latin typeface="Calibri" pitchFamily="34" charset="0"/>
-                <a:ea typeface="Calibri" pitchFamily="34" charset="-122"/>
-                <a:cs typeface="Calibri" pitchFamily="34" charset="-120"/>
+                <a:cs typeface="Amiri" pitchFamily="2" charset="-78"/>
               </a:rPr>
               <a:t>Negative</a:t>
             </a:r>
@@ -19987,8 +19622,7 @@
                   <a:srgbClr val="1B3B6F"/>
                 </a:solidFill>
                 <a:latin typeface="Calibri" pitchFamily="34" charset="0"/>
-                <a:ea typeface="Calibri" pitchFamily="34" charset="-122"/>
-                <a:cs typeface="Calibri" pitchFamily="34" charset="-120"/>
+                <a:cs typeface="Amiri" pitchFamily="2" charset="-78"/>
               </a:rPr>
               <a:t>C</a:t>
             </a:r>
@@ -20026,8 +19660,7 @@
                   <a:srgbClr val="9AA1AB"/>
                 </a:solidFill>
                 <a:latin typeface="Calibri" pitchFamily="34" charset="0"/>
-                <a:ea typeface="Calibri" pitchFamily="34" charset="-122"/>
-                <a:cs typeface="Calibri" pitchFamily="34" charset="-120"/>
+                <a:cs typeface="Amiri" pitchFamily="2" charset="-78"/>
               </a:rPr>
               <a:t>Neutral</a:t>
             </a:r>
@@ -20064,9 +19697,8 @@
                 <a:solidFill>
                   <a:srgbClr val="8A6D1E"/>
                 </a:solidFill>
-                <a:latin typeface="Amiri" pitchFamily="34" charset="0"/>
-                <a:ea typeface="Amiri" pitchFamily="34" charset="-122"/>
-                <a:cs typeface="Amiri" pitchFamily="34" charset="-120"/>
+                <a:latin typeface="Amiri" pitchFamily="2" charset="-78"/>
+                <a:cs typeface="Amiri" pitchFamily="2" charset="-78"/>
               </a:rPr>
               <a:t>غَيْرَ أَنَّ العَطَاءَ يَمْنَحُ مَعْنًى لَا يُشْتَرَى.</a:t>
             </a:r>
@@ -20163,8 +19795,7 @@
                   <a:srgbClr val="FFFFFF"/>
                 </a:solidFill>
                 <a:latin typeface="Calibri" pitchFamily="34" charset="0"/>
-                <a:ea typeface="Calibri" pitchFamily="34" charset="-122"/>
-                <a:cs typeface="Calibri" pitchFamily="34" charset="-120"/>
+                <a:cs typeface="Amiri" pitchFamily="2" charset="-78"/>
               </a:rPr>
               <a:t>2</a:t>
             </a:r>
@@ -20202,8 +19833,7 @@
                   <a:srgbClr val="1B3B6F"/>
                 </a:solidFill>
                 <a:latin typeface="Calibri" pitchFamily="34" charset="0"/>
-                <a:ea typeface="Calibri" pitchFamily="34" charset="-122"/>
-                <a:cs typeface="Calibri" pitchFamily="34" charset="-120"/>
+                <a:cs typeface="Amiri" pitchFamily="2" charset="-78"/>
               </a:rPr>
               <a:t>R3 — What does </a:t>
             </a:r>
@@ -20215,9 +19845,8 @@
                 <a:solidFill>
                   <a:srgbClr val="1B3B6F"/>
                 </a:solidFill>
-                <a:latin typeface="Amiri" pitchFamily="34" charset="0"/>
-                <a:ea typeface="Amiri" pitchFamily="34" charset="-122"/>
-                <a:cs typeface="Amiri" pitchFamily="34" charset="-120"/>
+                <a:latin typeface="Amiri" pitchFamily="2" charset="-78"/>
+                <a:cs typeface="Amiri" pitchFamily="2" charset="-78"/>
               </a:rPr>
               <a:t>لَا يُمْكِنُ إِنْكَارُ أَنَّ</a:t>
             </a:r>
@@ -20230,8 +19859,7 @@
                   <a:srgbClr val="1B3B6F"/>
                 </a:solidFill>
                 <a:latin typeface="Calibri" pitchFamily="34" charset="0"/>
-                <a:ea typeface="Calibri" pitchFamily="34" charset="-122"/>
-                <a:cs typeface="Calibri" pitchFamily="34" charset="-120"/>
+                <a:cs typeface="Amiri" pitchFamily="2" charset="-78"/>
               </a:rPr>
               <a:t> signal?</a:t>
             </a:r>
@@ -20294,8 +19922,7 @@
                   <a:srgbClr val="1B3B6F"/>
                 </a:solidFill>
                 <a:latin typeface="Calibri" pitchFamily="34" charset="0"/>
-                <a:ea typeface="Calibri" pitchFamily="34" charset="-122"/>
-                <a:cs typeface="Calibri" pitchFamily="34" charset="-120"/>
+                <a:cs typeface="Amiri" pitchFamily="2" charset="-78"/>
               </a:rPr>
               <a:t>A</a:t>
             </a:r>
@@ -20333,8 +19960,7 @@
                   <a:srgbClr val="9AA1AB"/>
                 </a:solidFill>
                 <a:latin typeface="Calibri" pitchFamily="34" charset="0"/>
-                <a:ea typeface="Calibri" pitchFamily="34" charset="-122"/>
-                <a:cs typeface="Calibri" pitchFamily="34" charset="-120"/>
+                <a:cs typeface="Amiri" pitchFamily="2" charset="-78"/>
               </a:rPr>
               <a:t>A final conclusion</a:t>
             </a:r>
@@ -20424,8 +20050,7 @@
                   <a:srgbClr val="FFFFFF"/>
                 </a:solidFill>
                 <a:latin typeface="Calibri" pitchFamily="34" charset="0"/>
-                <a:ea typeface="Calibri" pitchFamily="34" charset="-122"/>
-                <a:cs typeface="Calibri" pitchFamily="34" charset="-120"/>
+                <a:cs typeface="Amiri" pitchFamily="2" charset="-78"/>
               </a:rPr>
               <a:t>B</a:t>
             </a:r>
@@ -20463,8 +20088,7 @@
                   <a:srgbClr val="1F2A37"/>
                 </a:solidFill>
                 <a:latin typeface="Calibri" pitchFamily="34" charset="0"/>
-                <a:ea typeface="Calibri" pitchFamily="34" charset="-122"/>
-                <a:cs typeface="Calibri" pitchFamily="34" charset="-120"/>
+                <a:cs typeface="Amiri" pitchFamily="2" charset="-78"/>
               </a:rPr>
               <a:t>A concession before a counter-claim</a:t>
             </a:r>
@@ -20527,8 +20151,7 @@
                   <a:srgbClr val="1B3B6F"/>
                 </a:solidFill>
                 <a:latin typeface="Calibri" pitchFamily="34" charset="0"/>
-                <a:ea typeface="Calibri" pitchFamily="34" charset="-122"/>
-                <a:cs typeface="Calibri" pitchFamily="34" charset="-120"/>
+                <a:cs typeface="Amiri" pitchFamily="2" charset="-78"/>
               </a:rPr>
               <a:t>C</a:t>
             </a:r>
@@ -20566,8 +20189,7 @@
                   <a:srgbClr val="9AA1AB"/>
                 </a:solidFill>
                 <a:latin typeface="Calibri" pitchFamily="34" charset="0"/>
-                <a:ea typeface="Calibri" pitchFamily="34" charset="-122"/>
-                <a:cs typeface="Calibri" pitchFamily="34" charset="-120"/>
+                <a:cs typeface="Amiri" pitchFamily="2" charset="-78"/>
               </a:rPr>
               <a:t>A statistic</a:t>
             </a:r>
@@ -20605,8 +20227,7 @@
                   <a:srgbClr val="8A6D1E"/>
                 </a:solidFill>
                 <a:latin typeface="Calibri" pitchFamily="34" charset="0"/>
-                <a:ea typeface="Calibri" pitchFamily="34" charset="-122"/>
-                <a:cs typeface="Calibri" pitchFamily="34" charset="-120"/>
+                <a:cs typeface="Amiri" pitchFamily="2" charset="-78"/>
               </a:rPr>
               <a:t>It concedes a point before the stronger claim.</a:t>
             </a:r>
@@ -20703,8 +20324,7 @@
                   <a:srgbClr val="FFFFFF"/>
                 </a:solidFill>
                 <a:latin typeface="Calibri" pitchFamily="34" charset="0"/>
-                <a:ea typeface="Calibri" pitchFamily="34" charset="-122"/>
-                <a:cs typeface="Calibri" pitchFamily="34" charset="-120"/>
+                <a:cs typeface="Amiri" pitchFamily="2" charset="-78"/>
               </a:rPr>
               <a:t>3</a:t>
             </a:r>
@@ -20742,8 +20362,7 @@
                   <a:srgbClr val="1B3B6F"/>
                 </a:solidFill>
                 <a:latin typeface="Calibri" pitchFamily="34" charset="0"/>
-                <a:ea typeface="Calibri" pitchFamily="34" charset="-122"/>
-                <a:cs typeface="Calibri" pitchFamily="34" charset="-120"/>
+                <a:cs typeface="Amiri" pitchFamily="2" charset="-78"/>
               </a:rPr>
               <a:t>R3 — What does </a:t>
             </a:r>
@@ -20755,9 +20374,8 @@
                 <a:solidFill>
                   <a:srgbClr val="1B3B6F"/>
                 </a:solidFill>
-                <a:latin typeface="Amiri" pitchFamily="34" charset="0"/>
-                <a:ea typeface="Amiri" pitchFamily="34" charset="-122"/>
-                <a:cs typeface="Amiri" pitchFamily="34" charset="-120"/>
+                <a:latin typeface="Amiri" pitchFamily="2" charset="-78"/>
+                <a:cs typeface="Amiri" pitchFamily="2" charset="-78"/>
               </a:rPr>
               <a:t>وَبِنَاءً عَلَى مَا سَبَقَ</a:t>
             </a:r>
@@ -20770,8 +20388,7 @@
                   <a:srgbClr val="1B3B6F"/>
                 </a:solidFill>
                 <a:latin typeface="Calibri" pitchFamily="34" charset="0"/>
-                <a:ea typeface="Calibri" pitchFamily="34" charset="-122"/>
-                <a:cs typeface="Calibri" pitchFamily="34" charset="-120"/>
+                <a:cs typeface="Amiri" pitchFamily="2" charset="-78"/>
               </a:rPr>
               <a:t> mark?</a:t>
             </a:r>
@@ -20861,8 +20478,7 @@
                   <a:srgbClr val="FFFFFF"/>
                 </a:solidFill>
                 <a:latin typeface="Calibri" pitchFamily="34" charset="0"/>
-                <a:ea typeface="Calibri" pitchFamily="34" charset="-122"/>
-                <a:cs typeface="Calibri" pitchFamily="34" charset="-120"/>
+                <a:cs typeface="Amiri" pitchFamily="2" charset="-78"/>
               </a:rPr>
               <a:t>A</a:t>
             </a:r>
@@ -20900,8 +20516,7 @@
                   <a:srgbClr val="1F2A37"/>
                 </a:solidFill>
                 <a:latin typeface="Calibri" pitchFamily="34" charset="0"/>
-                <a:ea typeface="Calibri" pitchFamily="34" charset="-122"/>
-                <a:cs typeface="Calibri" pitchFamily="34" charset="-120"/>
+                <a:cs typeface="Amiri" pitchFamily="2" charset="-78"/>
               </a:rPr>
               <a:t>The conclusion</a:t>
             </a:r>
@@ -20964,8 +20579,7 @@
                   <a:srgbClr val="1B3B6F"/>
                 </a:solidFill>
                 <a:latin typeface="Calibri" pitchFamily="34" charset="0"/>
-                <a:ea typeface="Calibri" pitchFamily="34" charset="-122"/>
-                <a:cs typeface="Calibri" pitchFamily="34" charset="-120"/>
+                <a:cs typeface="Amiri" pitchFamily="2" charset="-78"/>
               </a:rPr>
               <a:t>B</a:t>
             </a:r>
@@ -21003,8 +20617,7 @@
                   <a:srgbClr val="9AA1AB"/>
                 </a:solidFill>
                 <a:latin typeface="Calibri" pitchFamily="34" charset="0"/>
-                <a:ea typeface="Calibri" pitchFamily="34" charset="-122"/>
-                <a:cs typeface="Calibri" pitchFamily="34" charset="-120"/>
+                <a:cs typeface="Amiri" pitchFamily="2" charset="-78"/>
               </a:rPr>
               <a:t>A new argument</a:t>
             </a:r>
@@ -21067,8 +20680,7 @@
                   <a:srgbClr val="1B3B6F"/>
                 </a:solidFill>
                 <a:latin typeface="Calibri" pitchFamily="34" charset="0"/>
-                <a:ea typeface="Calibri" pitchFamily="34" charset="-122"/>
-                <a:cs typeface="Calibri" pitchFamily="34" charset="-120"/>
+                <a:cs typeface="Amiri" pitchFamily="2" charset="-78"/>
               </a:rPr>
               <a:t>C</a:t>
             </a:r>
@@ -21106,8 +20718,7 @@
                   <a:srgbClr val="9AA1AB"/>
                 </a:solidFill>
                 <a:latin typeface="Calibri" pitchFamily="34" charset="0"/>
-                <a:ea typeface="Calibri" pitchFamily="34" charset="-122"/>
-                <a:cs typeface="Calibri" pitchFamily="34" charset="-120"/>
+                <a:cs typeface="Amiri" pitchFamily="2" charset="-78"/>
               </a:rPr>
               <a:t>A quotation</a:t>
             </a:r>
@@ -21144,9 +20755,8 @@
                 <a:solidFill>
                   <a:srgbClr val="8A6D1E"/>
                 </a:solidFill>
-                <a:latin typeface="Amiri" pitchFamily="34" charset="0"/>
-                <a:ea typeface="Amiri" pitchFamily="34" charset="-122"/>
-                <a:cs typeface="Amiri" pitchFamily="34" charset="-120"/>
+                <a:latin typeface="Amiri" pitchFamily="2" charset="-78"/>
+                <a:cs typeface="Amiri" pitchFamily="2" charset="-78"/>
               </a:rPr>
               <a:t>وَبِنَاءً عَلَى مَا سَبَقَ</a:t>
             </a:r>
@@ -21159,8 +20769,7 @@
                   <a:srgbClr val="8A6D1E"/>
                 </a:solidFill>
                 <a:latin typeface="Calibri" pitchFamily="34" charset="0"/>
-                <a:ea typeface="Calibri" pitchFamily="34" charset="-122"/>
-                <a:cs typeface="Calibri" pitchFamily="34" charset="-120"/>
+                <a:cs typeface="Amiri" pitchFamily="2" charset="-78"/>
               </a:rPr>
               <a:t> opens the conclusion.</a:t>
             </a:r>
@@ -21257,8 +20866,7 @@
                   <a:srgbClr val="FFFFFF"/>
                 </a:solidFill>
                 <a:latin typeface="Calibri" pitchFamily="34" charset="0"/>
-                <a:ea typeface="Calibri" pitchFamily="34" charset="-122"/>
-                <a:cs typeface="Calibri" pitchFamily="34" charset="-120"/>
+                <a:cs typeface="Amiri" pitchFamily="2" charset="-78"/>
               </a:rPr>
               <a:t>4</a:t>
             </a:r>
@@ -21296,8 +20904,7 @@
                   <a:srgbClr val="1B3B6F"/>
                 </a:solidFill>
                 <a:latin typeface="Calibri" pitchFamily="34" charset="0"/>
-                <a:ea typeface="Calibri" pitchFamily="34" charset="-122"/>
-                <a:cs typeface="Calibri" pitchFamily="34" charset="-120"/>
+                <a:cs typeface="Amiri" pitchFamily="2" charset="-78"/>
               </a:rPr>
               <a:t>Q5 — “Volunteering builds young people's character.” Which text?</a:t>
             </a:r>
@@ -21360,8 +20967,7 @@
                   <a:srgbClr val="1B3B6F"/>
                 </a:solidFill>
                 <a:latin typeface="Calibri" pitchFamily="34" charset="0"/>
-                <a:ea typeface="Calibri" pitchFamily="34" charset="-122"/>
-                <a:cs typeface="Calibri" pitchFamily="34" charset="-120"/>
+                <a:cs typeface="Amiri" pitchFamily="2" charset="-78"/>
               </a:rPr>
               <a:t>A</a:t>
             </a:r>
@@ -21399,8 +21005,7 @@
                   <a:srgbClr val="9AA1AB"/>
                 </a:solidFill>
                 <a:latin typeface="Calibri" pitchFamily="34" charset="0"/>
-                <a:ea typeface="Calibri" pitchFamily="34" charset="-122"/>
-                <a:cs typeface="Calibri" pitchFamily="34" charset="-120"/>
+                <a:cs typeface="Amiri" pitchFamily="2" charset="-78"/>
               </a:rPr>
               <a:t>Text 1</a:t>
             </a:r>
@@ -21463,8 +21068,7 @@
                   <a:srgbClr val="1B3B6F"/>
                 </a:solidFill>
                 <a:latin typeface="Calibri" pitchFamily="34" charset="0"/>
-                <a:ea typeface="Calibri" pitchFamily="34" charset="-122"/>
-                <a:cs typeface="Calibri" pitchFamily="34" charset="-120"/>
+                <a:cs typeface="Amiri" pitchFamily="2" charset="-78"/>
               </a:rPr>
               <a:t>B</a:t>
             </a:r>
@@ -21502,8 +21106,7 @@
                   <a:srgbClr val="9AA1AB"/>
                 </a:solidFill>
                 <a:latin typeface="Calibri" pitchFamily="34" charset="0"/>
-                <a:ea typeface="Calibri" pitchFamily="34" charset="-122"/>
-                <a:cs typeface="Calibri" pitchFamily="34" charset="-120"/>
+                <a:cs typeface="Amiri" pitchFamily="2" charset="-78"/>
               </a:rPr>
               <a:t>Text 2</a:t>
             </a:r>
@@ -21593,8 +21196,7 @@
                   <a:srgbClr val="FFFFFF"/>
                 </a:solidFill>
                 <a:latin typeface="Calibri" pitchFamily="34" charset="0"/>
-                <a:ea typeface="Calibri" pitchFamily="34" charset="-122"/>
-                <a:cs typeface="Calibri" pitchFamily="34" charset="-120"/>
+                <a:cs typeface="Amiri" pitchFamily="2" charset="-78"/>
               </a:rPr>
               <a:t>C</a:t>
             </a:r>
@@ -21632,8 +21234,7 @@
                   <a:srgbClr val="1F2A37"/>
                 </a:solidFill>
                 <a:latin typeface="Calibri" pitchFamily="34" charset="0"/>
-                <a:ea typeface="Calibri" pitchFamily="34" charset="-122"/>
-                <a:cs typeface="Calibri" pitchFamily="34" charset="-120"/>
+                <a:cs typeface="Amiri" pitchFamily="2" charset="-78"/>
               </a:rPr>
               <a:t>Text 3</a:t>
             </a:r>
@@ -21671,8 +21272,7 @@
                   <a:srgbClr val="8A6D1E"/>
                 </a:solidFill>
                 <a:latin typeface="Calibri" pitchFamily="34" charset="0"/>
-                <a:ea typeface="Calibri" pitchFamily="34" charset="-122"/>
-                <a:cs typeface="Calibri" pitchFamily="34" charset="-120"/>
+                <a:cs typeface="Amiri" pitchFamily="2" charset="-78"/>
               </a:rPr>
               <a:t>Text 3: </a:t>
             </a:r>
@@ -21684,9 +21284,8 @@
                 <a:solidFill>
                   <a:srgbClr val="8A6D1E"/>
                 </a:solidFill>
-                <a:latin typeface="Amiri" pitchFamily="34" charset="0"/>
-                <a:ea typeface="Amiri" pitchFamily="34" charset="-122"/>
-                <a:cs typeface="Amiri" pitchFamily="34" charset="-120"/>
+                <a:latin typeface="Amiri" pitchFamily="2" charset="-78"/>
+                <a:cs typeface="Amiri" pitchFamily="2" charset="-78"/>
               </a:rPr>
               <a:t>العَمَلُ التَّطَوُّعِيُّ يَبْنِي شَخْصِيَّةَ الشَّبَابِ</a:t>
             </a:r>
@@ -21699,8 +21298,7 @@
                   <a:srgbClr val="8A6D1E"/>
                 </a:solidFill>
                 <a:latin typeface="Calibri" pitchFamily="34" charset="0"/>
-                <a:ea typeface="Calibri" pitchFamily="34" charset="-122"/>
-                <a:cs typeface="Calibri" pitchFamily="34" charset="-120"/>
+                <a:cs typeface="Amiri" pitchFamily="2" charset="-78"/>
               </a:rPr>
               <a:t>.</a:t>
             </a:r>
@@ -21797,8 +21395,7 @@
                   <a:srgbClr val="FFFFFF"/>
                 </a:solidFill>
                 <a:latin typeface="Calibri" pitchFamily="34" charset="0"/>
-                <a:ea typeface="Calibri" pitchFamily="34" charset="-122"/>
-                <a:cs typeface="Calibri" pitchFamily="34" charset="-120"/>
+                <a:cs typeface="Amiri" pitchFamily="2" charset="-78"/>
               </a:rPr>
               <a:t>5</a:t>
             </a:r>
@@ -21836,8 +21433,7 @@
                   <a:srgbClr val="1B3B6F"/>
                 </a:solidFill>
                 <a:latin typeface="Calibri" pitchFamily="34" charset="0"/>
-                <a:ea typeface="Calibri" pitchFamily="34" charset="-122"/>
-                <a:cs typeface="Calibri" pitchFamily="34" charset="-120"/>
+                <a:cs typeface="Amiri" pitchFamily="2" charset="-78"/>
               </a:rPr>
               <a:t>Q5 — “Ten minutes of daily reading builds a habit.” Which text?</a:t>
             </a:r>
@@ -21900,8 +21496,7 @@
                   <a:srgbClr val="1B3B6F"/>
                 </a:solidFill>
                 <a:latin typeface="Calibri" pitchFamily="34" charset="0"/>
-                <a:ea typeface="Calibri" pitchFamily="34" charset="-122"/>
-                <a:cs typeface="Calibri" pitchFamily="34" charset="-120"/>
+                <a:cs typeface="Amiri" pitchFamily="2" charset="-78"/>
               </a:rPr>
               <a:t>A</a:t>
             </a:r>
@@ -21939,8 +21534,7 @@
                   <a:srgbClr val="9AA1AB"/>
                 </a:solidFill>
                 <a:latin typeface="Calibri" pitchFamily="34" charset="0"/>
-                <a:ea typeface="Calibri" pitchFamily="34" charset="-122"/>
-                <a:cs typeface="Calibri" pitchFamily="34" charset="-120"/>
+                <a:cs typeface="Amiri" pitchFamily="2" charset="-78"/>
               </a:rPr>
               <a:t>Text 1</a:t>
             </a:r>
@@ -22003,8 +21597,7 @@
                   <a:srgbClr val="1B3B6F"/>
                 </a:solidFill>
                 <a:latin typeface="Calibri" pitchFamily="34" charset="0"/>
-                <a:ea typeface="Calibri" pitchFamily="34" charset="-122"/>
-                <a:cs typeface="Calibri" pitchFamily="34" charset="-120"/>
+                <a:cs typeface="Amiri" pitchFamily="2" charset="-78"/>
               </a:rPr>
               <a:t>B</a:t>
             </a:r>
@@ -22042,8 +21635,7 @@
                   <a:srgbClr val="9AA1AB"/>
                 </a:solidFill>
                 <a:latin typeface="Calibri" pitchFamily="34" charset="0"/>
-                <a:ea typeface="Calibri" pitchFamily="34" charset="-122"/>
-                <a:cs typeface="Calibri" pitchFamily="34" charset="-120"/>
+                <a:cs typeface="Amiri" pitchFamily="2" charset="-78"/>
               </a:rPr>
               <a:t>Text 3</a:t>
             </a:r>
@@ -22133,8 +21725,7 @@
                   <a:srgbClr val="FFFFFF"/>
                 </a:solidFill>
                 <a:latin typeface="Calibri" pitchFamily="34" charset="0"/>
-                <a:ea typeface="Calibri" pitchFamily="34" charset="-122"/>
-                <a:cs typeface="Calibri" pitchFamily="34" charset="-120"/>
+                <a:cs typeface="Amiri" pitchFamily="2" charset="-78"/>
               </a:rPr>
               <a:t>C</a:t>
             </a:r>
@@ -22172,8 +21763,7 @@
                   <a:srgbClr val="1F2A37"/>
                 </a:solidFill>
                 <a:latin typeface="Calibri" pitchFamily="34" charset="0"/>
-                <a:ea typeface="Calibri" pitchFamily="34" charset="-122"/>
-                <a:cs typeface="Calibri" pitchFamily="34" charset="-120"/>
+                <a:cs typeface="Amiri" pitchFamily="2" charset="-78"/>
               </a:rPr>
               <a:t>Text 2</a:t>
             </a:r>
@@ -22211,8 +21801,7 @@
                   <a:srgbClr val="8A6D1E"/>
                 </a:solidFill>
                 <a:latin typeface="Calibri" pitchFamily="34" charset="0"/>
-                <a:ea typeface="Calibri" pitchFamily="34" charset="-122"/>
-                <a:cs typeface="Calibri" pitchFamily="34" charset="-120"/>
+                <a:cs typeface="Amiri" pitchFamily="2" charset="-78"/>
               </a:rPr>
               <a:t>Text 2: </a:t>
             </a:r>
@@ -22224,9 +21813,8 @@
                 <a:solidFill>
                   <a:srgbClr val="8A6D1E"/>
                 </a:solidFill>
-                <a:latin typeface="Amiri" pitchFamily="34" charset="0"/>
-                <a:ea typeface="Amiri" pitchFamily="34" charset="-122"/>
-                <a:cs typeface="Amiri" pitchFamily="34" charset="-120"/>
+                <a:latin typeface="Amiri" pitchFamily="2" charset="-78"/>
+                <a:cs typeface="Amiri" pitchFamily="2" charset="-78"/>
               </a:rPr>
               <a:t>عَشْرَ دَقَائِقَ يَوْمِيًّا تَبْنِي عَادَةً</a:t>
             </a:r>
@@ -22239,8 +21827,7 @@
                   <a:srgbClr val="8A6D1E"/>
                 </a:solidFill>
                 <a:latin typeface="Calibri" pitchFamily="34" charset="0"/>
-                <a:ea typeface="Calibri" pitchFamily="34" charset="-122"/>
-                <a:cs typeface="Calibri" pitchFamily="34" charset="-120"/>
+                <a:cs typeface="Amiri" pitchFamily="2" charset="-78"/>
               </a:rPr>
               <a:t>.</a:t>
             </a:r>
@@ -22337,8 +21924,7 @@
                   <a:srgbClr val="FFFFFF"/>
                 </a:solidFill>
                 <a:latin typeface="Calibri" pitchFamily="34" charset="0"/>
-                <a:ea typeface="Calibri" pitchFamily="34" charset="-122"/>
-                <a:cs typeface="Calibri" pitchFamily="34" charset="-120"/>
+                <a:cs typeface="Amiri" pitchFamily="2" charset="-78"/>
               </a:rPr>
               <a:t>6</a:t>
             </a:r>
@@ -22376,8 +21962,7 @@
                   <a:srgbClr val="1B3B6F"/>
                 </a:solidFill>
                 <a:latin typeface="Calibri" pitchFamily="34" charset="0"/>
-                <a:ea typeface="Calibri" pitchFamily="34" charset="-122"/>
-                <a:cs typeface="Calibri" pitchFamily="34" charset="-120"/>
+                <a:cs typeface="Amiri" pitchFamily="2" charset="-78"/>
               </a:rPr>
               <a:t>Q5 — “The sports centre opens at six in the morning.” Which text?</a:t>
             </a:r>
@@ -22467,8 +22052,7 @@
                   <a:srgbClr val="FFFFFF"/>
                 </a:solidFill>
                 <a:latin typeface="Calibri" pitchFamily="34" charset="0"/>
-                <a:ea typeface="Calibri" pitchFamily="34" charset="-122"/>
-                <a:cs typeface="Calibri" pitchFamily="34" charset="-120"/>
+                <a:cs typeface="Amiri" pitchFamily="2" charset="-78"/>
               </a:rPr>
               <a:t>A</a:t>
             </a:r>
@@ -22506,8 +22090,7 @@
                   <a:srgbClr val="1F2A37"/>
                 </a:solidFill>
                 <a:latin typeface="Calibri" pitchFamily="34" charset="0"/>
-                <a:ea typeface="Calibri" pitchFamily="34" charset="-122"/>
-                <a:cs typeface="Calibri" pitchFamily="34" charset="-120"/>
+                <a:cs typeface="Amiri" pitchFamily="2" charset="-78"/>
               </a:rPr>
               <a:t>Text 1</a:t>
             </a:r>
@@ -22570,8 +22153,7 @@
                   <a:srgbClr val="1B3B6F"/>
                 </a:solidFill>
                 <a:latin typeface="Calibri" pitchFamily="34" charset="0"/>
-                <a:ea typeface="Calibri" pitchFamily="34" charset="-122"/>
-                <a:cs typeface="Calibri" pitchFamily="34" charset="-120"/>
+                <a:cs typeface="Amiri" pitchFamily="2" charset="-78"/>
               </a:rPr>
               <a:t>B</a:t>
             </a:r>
@@ -22609,8 +22191,7 @@
                   <a:srgbClr val="9AA1AB"/>
                 </a:solidFill>
                 <a:latin typeface="Calibri" pitchFamily="34" charset="0"/>
-                <a:ea typeface="Calibri" pitchFamily="34" charset="-122"/>
-                <a:cs typeface="Calibri" pitchFamily="34" charset="-120"/>
+                <a:cs typeface="Amiri" pitchFamily="2" charset="-78"/>
               </a:rPr>
               <a:t>Text 2</a:t>
             </a:r>
@@ -22673,8 +22254,7 @@
                   <a:srgbClr val="1B3B6F"/>
                 </a:solidFill>
                 <a:latin typeface="Calibri" pitchFamily="34" charset="0"/>
-                <a:ea typeface="Calibri" pitchFamily="34" charset="-122"/>
-                <a:cs typeface="Calibri" pitchFamily="34" charset="-120"/>
+                <a:cs typeface="Amiri" pitchFamily="2" charset="-78"/>
               </a:rPr>
               <a:t>C</a:t>
             </a:r>
@@ -22712,8 +22292,7 @@
                   <a:srgbClr val="9AA1AB"/>
                 </a:solidFill>
                 <a:latin typeface="Calibri" pitchFamily="34" charset="0"/>
-                <a:ea typeface="Calibri" pitchFamily="34" charset="-122"/>
-                <a:cs typeface="Calibri" pitchFamily="34" charset="-120"/>
+                <a:cs typeface="Amiri" pitchFamily="2" charset="-78"/>
               </a:rPr>
               <a:t>Text 3</a:t>
             </a:r>
@@ -22751,8 +22330,7 @@
                   <a:srgbClr val="8A6D1E"/>
                 </a:solidFill>
                 <a:latin typeface="Calibri" pitchFamily="34" charset="0"/>
-                <a:ea typeface="Calibri" pitchFamily="34" charset="-122"/>
-                <a:cs typeface="Calibri" pitchFamily="34" charset="-120"/>
+                <a:cs typeface="Amiri" pitchFamily="2" charset="-78"/>
               </a:rPr>
               <a:t>Text 1: </a:t>
             </a:r>
@@ -22764,9 +22342,8 @@
                 <a:solidFill>
                   <a:srgbClr val="8A6D1E"/>
                 </a:solidFill>
-                <a:latin typeface="Amiri" pitchFamily="34" charset="0"/>
-                <a:ea typeface="Amiri" pitchFamily="34" charset="-122"/>
-                <a:cs typeface="Amiri" pitchFamily="34" charset="-120"/>
+                <a:latin typeface="Amiri" pitchFamily="2" charset="-78"/>
+                <a:cs typeface="Amiri" pitchFamily="2" charset="-78"/>
               </a:rPr>
               <a:t>يُفْتَتَحُ المَرْكَزُ الرِّيَاضِيُّ فِي السَّادِسَةِ صَبَاحًا</a:t>
             </a:r>
@@ -22779,8 +22356,7 @@
                   <a:srgbClr val="8A6D1E"/>
                 </a:solidFill>
                 <a:latin typeface="Calibri" pitchFamily="34" charset="0"/>
-                <a:ea typeface="Calibri" pitchFamily="34" charset="-122"/>
-                <a:cs typeface="Calibri" pitchFamily="34" charset="-120"/>
+                <a:cs typeface="Amiri" pitchFamily="2" charset="-78"/>
               </a:rPr>
               <a:t>.</a:t>
             </a:r>
@@ -22818,8 +22394,7 @@
                   <a:srgbClr val="8A93A0"/>
                 </a:solidFill>
                 <a:latin typeface="Calibri" pitchFamily="34" charset="0"/>
-                <a:ea typeface="Calibri" pitchFamily="34" charset="-122"/>
-                <a:cs typeface="Calibri" pitchFamily="34" charset="-120"/>
+                <a:cs typeface="Amiri" pitchFamily="2" charset="-78"/>
               </a:rPr>
               <a:t>17 / 25</a:t>
             </a:r>
@@ -22913,9 +22488,8 @@
                 <a:solidFill>
                   <a:srgbClr val="D4AF37"/>
                 </a:solidFill>
-                <a:latin typeface="Amiri" pitchFamily="34" charset="0"/>
-                <a:ea typeface="Amiri" pitchFamily="34" charset="-122"/>
-                <a:cs typeface="Amiri" pitchFamily="34" charset="-120"/>
+                <a:latin typeface="Amiri" pitchFamily="2" charset="-78"/>
+                <a:cs typeface="Amiri" pitchFamily="2" charset="-78"/>
               </a:rPr>
               <a:t>م</a:t>
             </a:r>
@@ -22953,8 +22527,7 @@
                   <a:srgbClr val="1B3B6F"/>
                 </a:solidFill>
                 <a:latin typeface="Cambria" pitchFamily="34" charset="0"/>
-                <a:ea typeface="Cambria" pitchFamily="34" charset="-122"/>
-                <a:cs typeface="Cambria" pitchFamily="34" charset="-120"/>
+                <a:cs typeface="Amiri" pitchFamily="2" charset="-78"/>
               </a:rPr>
               <a:t>Al Madina Online School</a:t>
             </a:r>
@@ -22992,8 +22565,7 @@
                   <a:srgbClr val="8A6D1E"/>
                 </a:solidFill>
                 <a:latin typeface="Calibri" pitchFamily="34" charset="0"/>
-                <a:ea typeface="Calibri" pitchFamily="34" charset="-122"/>
-                <a:cs typeface="Calibri" pitchFamily="34" charset="-120"/>
+                <a:cs typeface="Amiri" pitchFamily="2" charset="-78"/>
               </a:rPr>
               <a:t>ARABIC DEPARTMENT · MIFTAH ARABIC · IGCSE 0544</a:t>
             </a:r>
@@ -23058,8 +22630,7 @@
                   <a:srgbClr val="FFFFFF"/>
                 </a:solidFill>
                 <a:latin typeface="Calibri" pitchFamily="34" charset="0"/>
-                <a:ea typeface="Calibri" pitchFamily="34" charset="-122"/>
-                <a:cs typeface="Calibri" pitchFamily="34" charset="-120"/>
+                <a:cs typeface="Amiri" pitchFamily="2" charset="-78"/>
               </a:rPr>
               <a:t>P6-L09 · IGCSE Bridge</a:t>
             </a:r>
@@ -23124,8 +22695,7 @@
                   <a:srgbClr val="FFFFFF"/>
                 </a:solidFill>
                 <a:latin typeface="Calibri" pitchFamily="34" charset="0"/>
-                <a:ea typeface="Calibri" pitchFamily="34" charset="-122"/>
-                <a:cs typeface="Calibri" pitchFamily="34" charset="-120"/>
+                <a:cs typeface="Amiri" pitchFamily="2" charset="-78"/>
               </a:rPr>
               <a:t>FEEDBACK · 1 MIN</a:t>
             </a:r>
@@ -23163,8 +22733,7 @@
                   <a:srgbClr val="8A6D1E"/>
                 </a:solidFill>
                 <a:latin typeface="Calibri" pitchFamily="34" charset="0"/>
-                <a:ea typeface="Calibri" pitchFamily="34" charset="-122"/>
-                <a:cs typeface="Calibri" pitchFamily="34" charset="-120"/>
+                <a:cs typeface="Amiri" pitchFamily="2" charset="-78"/>
               </a:rPr>
               <a:t>FEEDBACK · PAPER 4 Q1 · THE WEBSITE MODEL</a:t>
             </a:r>
@@ -23202,8 +22771,7 @@
                   <a:srgbClr val="1B3B6F"/>
                 </a:solidFill>
                 <a:latin typeface="Cambria" pitchFamily="34" charset="0"/>
-                <a:ea typeface="Cambria" pitchFamily="34" charset="-122"/>
-                <a:cs typeface="Cambria" pitchFamily="34" charset="-120"/>
+                <a:cs typeface="Amiri" pitchFamily="2" charset="-78"/>
               </a:rPr>
               <a:t>Q1: what the examiner wants to see</a:t>
             </a:r>
@@ -23240,9 +22808,8 @@
                 <a:solidFill>
                   <a:srgbClr val="8A6D1E"/>
                 </a:solidFill>
-                <a:latin typeface="Amiri" pitchFamily="34" charset="0"/>
-                <a:ea typeface="Amiri" pitchFamily="34" charset="-122"/>
-                <a:cs typeface="Amiri" pitchFamily="34" charset="-120"/>
+                <a:latin typeface="Amiri" pitchFamily="2" charset="-78"/>
+                <a:cs typeface="Amiri" pitchFamily="2" charset="-78"/>
               </a:rPr>
               <a:t>نَمُوذَجُ الإِجَابَةِ</a:t>
             </a:r>
@@ -23280,8 +22847,7 @@
                   <a:srgbClr val="8A93A0"/>
                 </a:solidFill>
                 <a:latin typeface="Calibri" pitchFamily="34" charset="0"/>
-                <a:ea typeface="Calibri" pitchFamily="34" charset="-122"/>
-                <a:cs typeface="Calibri" pitchFamily="34" charset="-120"/>
+                <a:cs typeface="Amiri" pitchFamily="2" charset="-78"/>
               </a:rPr>
               <a:t>Miftah Arabic · Progression P6 · IGCSE Bridge · P6-L09</a:t>
             </a:r>
@@ -23355,9 +22921,8 @@
                 <a:solidFill>
                   <a:srgbClr val="1F2A37"/>
                 </a:solidFill>
-                <a:latin typeface="Amiri" pitchFamily="34" charset="0"/>
-                <a:ea typeface="Amiri" pitchFamily="34" charset="-122"/>
-                <a:cs typeface="Amiri" pitchFamily="34" charset="-120"/>
+                <a:latin typeface="Amiri" pitchFamily="2" charset="-78"/>
+                <a:cs typeface="Amiri" pitchFamily="2" charset="-78"/>
               </a:rPr>
               <a:t>حَضْرَةَ مُدِيرِ المَدْرَسَةِ المُحْتَرَمِ، أَتَشَرَّفُ بِأَنْ أَقْتَرِحَ إِنْشَاءَ نَادٍ لِلْبِرْمَجَةِ بَعْدَ الدَّوَامِ. يُشَارُ إِلَى أَنَّ المَهَارَاتِ الرَّقْمِيَّةَ بَاتَتْ ضَرُورِيَّةً. صَحِيحٌ أَنَّ الوَقْتَ مَحْدُودٌ، غَيْرَ أَنَّ سَاعَةً أُسْبُوعِيَّةً تَكْفِي. وَيَتَطَلَّبُ الأَمْرُ أَنْ تُوَفِّرَ المَدْرَسَةُ قَاعَةً وَمُشْرِفًا. وَإِذَا وَافَقْتُمْ، سَيَسْتَفِيدُ عَدَدٌ كَبِيرٌ مِنَ الطُّلَّابِ. أَرْجُو أَنْ تَتَكَرَّمُوا بِالمُوَافَقَةِ، وَتَفَضَّلُوا بِقَبُولِ الاحْتِرَامِ.</a:t>
             </a:r>
@@ -23422,8 +22987,7 @@
                   <a:srgbClr val="5A6472"/>
                 </a:solidFill>
                 <a:latin typeface="Calibri" pitchFamily="34" charset="0"/>
-                <a:ea typeface="Calibri" pitchFamily="34" charset="-122"/>
-                <a:cs typeface="Calibri" pitchFamily="34" charset="-120"/>
+                <a:cs typeface="Amiri" pitchFamily="2" charset="-78"/>
               </a:rPr>
               <a:t>“Dear Principal, I am honoured to propose setting up a coding club after school. It is noted that digital skills have become essential. It is true that time is limited; however, one hour a week is enough. It is necessary that the school provides a room and a supervisor. If you agree, many students will benefit. I hope you will kindly approve; please accept my respect.”</a:t>
             </a:r>
@@ -23461,8 +23025,7 @@
                   <a:srgbClr val="8A6D1E"/>
                 </a:solidFill>
                 <a:latin typeface="Calibri" pitchFamily="34" charset="0"/>
-                <a:ea typeface="Calibri" pitchFamily="34" charset="-122"/>
-                <a:cs typeface="Calibri" pitchFamily="34" charset="-120"/>
+                <a:cs typeface="Amiri" pitchFamily="2" charset="-78"/>
               </a:rPr>
               <a:t>FIND IN THE MODEL:</a:t>
             </a:r>
@@ -23527,8 +23090,7 @@
                   <a:srgbClr val="FFFFFF"/>
                 </a:solidFill>
                 <a:latin typeface="Calibri" pitchFamily="34" charset="0"/>
-                <a:ea typeface="Calibri" pitchFamily="34" charset="-122"/>
-                <a:cs typeface="Calibri" pitchFamily="34" charset="-120"/>
+                <a:cs typeface="Amiri" pitchFamily="2" charset="-78"/>
               </a:rPr>
               <a:t>أَتَشَرَّفُ بِأَنْ</a:t>
             </a:r>
@@ -23593,8 +23155,7 @@
                   <a:srgbClr val="FFFFFF"/>
                 </a:solidFill>
                 <a:latin typeface="Calibri" pitchFamily="34" charset="0"/>
-                <a:ea typeface="Calibri" pitchFamily="34" charset="-122"/>
-                <a:cs typeface="Calibri" pitchFamily="34" charset="-120"/>
+                <a:cs typeface="Amiri" pitchFamily="2" charset="-78"/>
               </a:rPr>
               <a:t>صَحِيحٌ أَنَّ … غَيْرَ أَنَّ</a:t>
             </a:r>
@@ -23659,8 +23220,7 @@
                   <a:srgbClr val="FFFFFF"/>
                 </a:solidFill>
                 <a:latin typeface="Calibri" pitchFamily="34" charset="0"/>
-                <a:ea typeface="Calibri" pitchFamily="34" charset="-122"/>
-                <a:cs typeface="Calibri" pitchFamily="34" charset="-120"/>
+                <a:cs typeface="Amiri" pitchFamily="2" charset="-78"/>
               </a:rPr>
               <a:t>يَتَطَلَّبُ الأَمْرُ أَنْ</a:t>
             </a:r>
@@ -23725,8 +23285,7 @@
                   <a:srgbClr val="FFFFFF"/>
                 </a:solidFill>
                 <a:latin typeface="Calibri" pitchFamily="34" charset="0"/>
-                <a:ea typeface="Calibri" pitchFamily="34" charset="-122"/>
-                <a:cs typeface="Calibri" pitchFamily="34" charset="-120"/>
+                <a:cs typeface="Amiri" pitchFamily="2" charset="-78"/>
               </a:rPr>
               <a:t>إِذَا وَافَقْتُمْ</a:t>
             </a:r>
@@ -23764,8 +23323,7 @@
                   <a:srgbClr val="8A93A0"/>
                 </a:solidFill>
                 <a:latin typeface="Calibri" pitchFamily="34" charset="0"/>
-                <a:ea typeface="Calibri" pitchFamily="34" charset="-122"/>
-                <a:cs typeface="Calibri" pitchFamily="34" charset="-120"/>
+                <a:cs typeface="Amiri" pitchFamily="2" charset="-78"/>
               </a:rPr>
               <a:t>18 / 25</a:t>
             </a:r>
@@ -23859,9 +23417,8 @@
                 <a:solidFill>
                   <a:srgbClr val="D4AF37"/>
                 </a:solidFill>
-                <a:latin typeface="Amiri" pitchFamily="34" charset="0"/>
-                <a:ea typeface="Amiri" pitchFamily="34" charset="-122"/>
-                <a:cs typeface="Amiri" pitchFamily="34" charset="-120"/>
+                <a:latin typeface="Amiri" pitchFamily="2" charset="-78"/>
+                <a:cs typeface="Amiri" pitchFamily="2" charset="-78"/>
               </a:rPr>
               <a:t>م</a:t>
             </a:r>
@@ -23899,8 +23456,7 @@
                   <a:srgbClr val="1B3B6F"/>
                 </a:solidFill>
                 <a:latin typeface="Cambria" pitchFamily="34" charset="0"/>
-                <a:ea typeface="Cambria" pitchFamily="34" charset="-122"/>
-                <a:cs typeface="Cambria" pitchFamily="34" charset="-120"/>
+                <a:cs typeface="Amiri" pitchFamily="2" charset="-78"/>
               </a:rPr>
               <a:t>Al Madina Online School</a:t>
             </a:r>
@@ -23938,8 +23494,7 @@
                   <a:srgbClr val="8A6D1E"/>
                 </a:solidFill>
                 <a:latin typeface="Calibri" pitchFamily="34" charset="0"/>
-                <a:ea typeface="Calibri" pitchFamily="34" charset="-122"/>
-                <a:cs typeface="Calibri" pitchFamily="34" charset="-120"/>
+                <a:cs typeface="Amiri" pitchFamily="2" charset="-78"/>
               </a:rPr>
               <a:t>ARABIC DEPARTMENT · MIFTAH ARABIC · IGCSE 0544</a:t>
             </a:r>
@@ -24004,8 +23559,7 @@
                   <a:srgbClr val="FFFFFF"/>
                 </a:solidFill>
                 <a:latin typeface="Calibri" pitchFamily="34" charset="0"/>
-                <a:ea typeface="Calibri" pitchFamily="34" charset="-122"/>
-                <a:cs typeface="Calibri" pitchFamily="34" charset="-120"/>
+                <a:cs typeface="Amiri" pitchFamily="2" charset="-78"/>
               </a:rPr>
               <a:t>P6-L09 · IGCSE Bridge</a:t>
             </a:r>
@@ -24070,8 +23624,7 @@
                   <a:srgbClr val="FFFFFF"/>
                 </a:solidFill>
                 <a:latin typeface="Calibri" pitchFamily="34" charset="0"/>
-                <a:ea typeface="Calibri" pitchFamily="34" charset="-122"/>
-                <a:cs typeface="Calibri" pitchFamily="34" charset="-120"/>
+                <a:cs typeface="Amiri" pitchFamily="2" charset="-78"/>
               </a:rPr>
               <a:t>YOU DO · 35 MIN</a:t>
             </a:r>
@@ -24109,8 +23662,7 @@
                   <a:srgbClr val="1E6B52"/>
                 </a:solidFill>
                 <a:latin typeface="Calibri" pitchFamily="34" charset="0"/>
-                <a:ea typeface="Calibri" pitchFamily="34" charset="-122"/>
-                <a:cs typeface="Calibri" pitchFamily="34" charset="-120"/>
+                <a:cs typeface="Amiri" pitchFamily="2" charset="-78"/>
               </a:rPr>
               <a:t>MOCK · PAPER 4 · Q2 — EXTENDED WRITING (15 MARKS) · 35 MINUTES</a:t>
             </a:r>
@@ -24148,8 +23700,7 @@
                   <a:srgbClr val="1B3B6F"/>
                 </a:solidFill>
                 <a:latin typeface="Cambria" pitchFamily="34" charset="0"/>
-                <a:ea typeface="Cambria" pitchFamily="34" charset="-122"/>
-                <a:cs typeface="Cambria" pitchFamily="34" charset="-120"/>
+                <a:cs typeface="Amiri" pitchFamily="2" charset="-78"/>
               </a:rPr>
               <a:t>Q2: an argumentative essay — choose ONE title</a:t>
             </a:r>
@@ -24186,9 +23737,8 @@
                 <a:solidFill>
                   <a:srgbClr val="8A6D1E"/>
                 </a:solidFill>
-                <a:latin typeface="Amiri" pitchFamily="34" charset="0"/>
-                <a:ea typeface="Amiri" pitchFamily="34" charset="-122"/>
-                <a:cs typeface="Amiri" pitchFamily="34" charset="-120"/>
+                <a:latin typeface="Amiri" pitchFamily="2" charset="-78"/>
+                <a:cs typeface="Amiri" pitchFamily="2" charset="-78"/>
               </a:rPr>
               <a:t>الكِتَابَةُ المُمْتَدَّةُ</a:t>
             </a:r>
@@ -24226,8 +23776,7 @@
                   <a:srgbClr val="8A93A0"/>
                 </a:solidFill>
                 <a:latin typeface="Calibri" pitchFamily="34" charset="0"/>
-                <a:ea typeface="Calibri" pitchFamily="34" charset="-122"/>
-                <a:cs typeface="Calibri" pitchFamily="34" charset="-120"/>
+                <a:cs typeface="Amiri" pitchFamily="2" charset="-78"/>
               </a:rPr>
               <a:t>Miftah Arabic · Progression P6 · IGCSE Bridge · P6-L09</a:t>
             </a:r>
@@ -24326,8 +23875,7 @@
                   <a:srgbClr val="FFFFFF"/>
                 </a:solidFill>
                 <a:latin typeface="Calibri" pitchFamily="34" charset="0"/>
-                <a:ea typeface="Calibri" pitchFamily="34" charset="-122"/>
-                <a:cs typeface="Calibri" pitchFamily="34" charset="-120"/>
+                <a:cs typeface="Amiri" pitchFamily="2" charset="-78"/>
               </a:rPr>
               <a:t>MOCK · PAPER 4 · Q2</a:t>
             </a:r>
@@ -24365,8 +23913,7 @@
                   <a:srgbClr val="1F2A37"/>
                 </a:solidFill>
                 <a:latin typeface="Calibri" pitchFamily="34" charset="0"/>
-                <a:ea typeface="Calibri" pitchFamily="34" charset="-122"/>
-                <a:cs typeface="Calibri" pitchFamily="34" charset="-120"/>
+                <a:cs typeface="Amiri" pitchFamily="2" charset="-78"/>
               </a:rPr>
               <a:t>Choose ONE title and write an argumentative essay of 130–150 words. Plan for 4 minutes, write for 26, check for 5.</a:t>
             </a:r>
@@ -24404,8 +23951,7 @@
                   <a:srgbClr val="1F2A37"/>
                 </a:solidFill>
                 <a:latin typeface="Calibri" pitchFamily="34" charset="0"/>
-                <a:ea typeface="Calibri" pitchFamily="34" charset="-122"/>
-                <a:cs typeface="Calibri" pitchFamily="34" charset="-120"/>
+                <a:cs typeface="Amiri" pitchFamily="2" charset="-78"/>
               </a:rPr>
               <a:t>☐  A clear thesis and cited evidence.</a:t>
             </a:r>
@@ -24443,8 +23989,7 @@
                   <a:srgbClr val="1F2A37"/>
                 </a:solidFill>
                 <a:latin typeface="Calibri" pitchFamily="34" charset="0"/>
-                <a:ea typeface="Calibri" pitchFamily="34" charset="-122"/>
-                <a:cs typeface="Calibri" pitchFamily="34" charset="-120"/>
+                <a:cs typeface="Amiri" pitchFamily="2" charset="-78"/>
               </a:rPr>
               <a:t>☐  A concession (</a:t>
             </a:r>
@@ -24456,9 +24001,8 @@
                 <a:solidFill>
                   <a:srgbClr val="1F2A37"/>
                 </a:solidFill>
-                <a:latin typeface="Amiri" pitchFamily="34" charset="0"/>
-                <a:ea typeface="Amiri" pitchFamily="34" charset="-122"/>
-                <a:cs typeface="Amiri" pitchFamily="34" charset="-120"/>
+                <a:latin typeface="Amiri" pitchFamily="2" charset="-78"/>
+                <a:cs typeface="Amiri" pitchFamily="2" charset="-78"/>
               </a:rPr>
               <a:t>صَحِيحٌ أَنَّ</a:t>
             </a:r>
@@ -24471,8 +24015,7 @@
                   <a:srgbClr val="1F2A37"/>
                 </a:solidFill>
                 <a:latin typeface="Calibri" pitchFamily="34" charset="0"/>
-                <a:ea typeface="Calibri" pitchFamily="34" charset="-122"/>
-                <a:cs typeface="Calibri" pitchFamily="34" charset="-120"/>
+                <a:cs typeface="Amiri" pitchFamily="2" charset="-78"/>
               </a:rPr>
               <a:t>) and a refutation (</a:t>
             </a:r>
@@ -24484,9 +24027,8 @@
                 <a:solidFill>
                   <a:srgbClr val="1F2A37"/>
                 </a:solidFill>
-                <a:latin typeface="Amiri" pitchFamily="34" charset="0"/>
-                <a:ea typeface="Amiri" pitchFamily="34" charset="-122"/>
-                <a:cs typeface="Amiri" pitchFamily="34" charset="-120"/>
+                <a:latin typeface="Amiri" pitchFamily="2" charset="-78"/>
+                <a:cs typeface="Amiri" pitchFamily="2" charset="-78"/>
               </a:rPr>
               <a:t>غَيْرَ أَنَّ</a:t>
             </a:r>
@@ -24499,8 +24041,7 @@
                   <a:srgbClr val="1F2A37"/>
                 </a:solidFill>
                 <a:latin typeface="Calibri" pitchFamily="34" charset="0"/>
-                <a:ea typeface="Calibri" pitchFamily="34" charset="-122"/>
-                <a:cs typeface="Calibri" pitchFamily="34" charset="-120"/>
+                <a:cs typeface="Amiri" pitchFamily="2" charset="-78"/>
               </a:rPr>
               <a:t>).</a:t>
             </a:r>
@@ -24538,8 +24079,7 @@
                   <a:srgbClr val="1F2A37"/>
                 </a:solidFill>
                 <a:latin typeface="Calibri" pitchFamily="34" charset="0"/>
-                <a:ea typeface="Calibri" pitchFamily="34" charset="-122"/>
-                <a:cs typeface="Calibri" pitchFamily="34" charset="-120"/>
+                <a:cs typeface="Amiri" pitchFamily="2" charset="-78"/>
               </a:rPr>
               <a:t>☐  A conditional and a subjunctive trigger.</a:t>
             </a:r>
@@ -24577,8 +24117,7 @@
                   <a:srgbClr val="1F2A37"/>
                 </a:solidFill>
                 <a:latin typeface="Calibri" pitchFamily="34" charset="0"/>
-                <a:ea typeface="Calibri" pitchFamily="34" charset="-122"/>
-                <a:cs typeface="Calibri" pitchFamily="34" charset="-120"/>
+                <a:cs typeface="Amiri" pitchFamily="2" charset="-78"/>
               </a:rPr>
               <a:t>☐  A conclusion connector with a subjunctive; 130–150 words.</a:t>
             </a:r>
@@ -24650,8 +24189,7 @@
                   <a:srgbClr val="8A6D1E"/>
                 </a:solidFill>
                 <a:latin typeface="Calibri" pitchFamily="34" charset="0"/>
-                <a:ea typeface="Calibri" pitchFamily="34" charset="-122"/>
-                <a:cs typeface="Calibri" pitchFamily="34" charset="-120"/>
+                <a:cs typeface="Amiri" pitchFamily="2" charset="-78"/>
               </a:rPr>
               <a:t>THE THREE TITLES (WEBSITE)</a:t>
             </a:r>
@@ -24688,9 +24226,8 @@
                 <a:solidFill>
                   <a:srgbClr val="1B3B6F"/>
                 </a:solidFill>
-                <a:latin typeface="Amiri" pitchFamily="34" charset="0"/>
-                <a:ea typeface="Amiri" pitchFamily="34" charset="-122"/>
-                <a:cs typeface="Amiri" pitchFamily="34" charset="-120"/>
+                <a:latin typeface="Amiri" pitchFamily="2" charset="-78"/>
+                <a:cs typeface="Amiri" pitchFamily="2" charset="-78"/>
               </a:rPr>
               <a:t>السَّفَرُ أَفْضَلُ مُعَلِّمٍ — هَلْ تُوَافِقُ؟</a:t>
             </a:r>
@@ -24728,8 +24265,7 @@
                   <a:srgbClr val="5A6472"/>
                 </a:solidFill>
                 <a:latin typeface="Calibri" pitchFamily="34" charset="0"/>
-                <a:ea typeface="Calibri" pitchFamily="34" charset="-122"/>
-                <a:cs typeface="Calibri" pitchFamily="34" charset="-120"/>
+                <a:cs typeface="Amiri" pitchFamily="2" charset="-78"/>
               </a:rPr>
               <a:t>(A) Travel is the best teacher — do you agree?</a:t>
             </a:r>
@@ -24766,9 +24302,8 @@
                 <a:solidFill>
                   <a:srgbClr val="1B3B6F"/>
                 </a:solidFill>
-                <a:latin typeface="Amiri" pitchFamily="34" charset="0"/>
-                <a:ea typeface="Amiri" pitchFamily="34" charset="-122"/>
-                <a:cs typeface="Amiri" pitchFamily="34" charset="-120"/>
+                <a:latin typeface="Amiri" pitchFamily="2" charset="-78"/>
+                <a:cs typeface="Amiri" pitchFamily="2" charset="-78"/>
               </a:rPr>
               <a:t>المُدُنُ الكُبْرَى أَفْضَلُ لِلْعَيْشِ مِنَ القُرَى — هَلْ تُوَافِقُ؟</a:t>
             </a:r>
@@ -24806,8 +24341,7 @@
                   <a:srgbClr val="5A6472"/>
                 </a:solidFill>
                 <a:latin typeface="Calibri" pitchFamily="34" charset="0"/>
-                <a:ea typeface="Calibri" pitchFamily="34" charset="-122"/>
-                <a:cs typeface="Calibri" pitchFamily="34" charset="-120"/>
+                <a:cs typeface="Amiri" pitchFamily="2" charset="-78"/>
               </a:rPr>
               <a:t>(B) Big cities are better to live in than villages — do you agree?</a:t>
             </a:r>
@@ -24844,9 +24378,8 @@
                 <a:solidFill>
                   <a:srgbClr val="1B3B6F"/>
                 </a:solidFill>
-                <a:latin typeface="Amiri" pitchFamily="34" charset="0"/>
-                <a:ea typeface="Amiri" pitchFamily="34" charset="-122"/>
-                <a:cs typeface="Amiri" pitchFamily="34" charset="-120"/>
+                <a:latin typeface="Amiri" pitchFamily="2" charset="-78"/>
+                <a:cs typeface="Amiri" pitchFamily="2" charset="-78"/>
               </a:rPr>
               <a:t>عَلَى الشَّبَابِ أَنْ يَخْدُمُوا مُجْتَمَعَهُمْ قَبْلَ أَنْفُسِهِمْ — هَلْ تُوَافِقُ؟</a:t>
             </a:r>
@@ -24884,8 +24417,7 @@
                   <a:srgbClr val="5A6472"/>
                 </a:solidFill>
                 <a:latin typeface="Calibri" pitchFamily="34" charset="0"/>
-                <a:ea typeface="Calibri" pitchFamily="34" charset="-122"/>
-                <a:cs typeface="Calibri" pitchFamily="34" charset="-120"/>
+                <a:cs typeface="Amiri" pitchFamily="2" charset="-78"/>
               </a:rPr>
               <a:t>(C) Young people should serve their community before themselves — do you agree?</a:t>
             </a:r>
@@ -24923,8 +24455,7 @@
                   <a:srgbClr val="8A93A0"/>
                 </a:solidFill>
                 <a:latin typeface="Calibri" pitchFamily="34" charset="0"/>
-                <a:ea typeface="Calibri" pitchFamily="34" charset="-122"/>
-                <a:cs typeface="Calibri" pitchFamily="34" charset="-120"/>
+                <a:cs typeface="Amiri" pitchFamily="2" charset="-78"/>
               </a:rPr>
               <a:t>19 / 25</a:t>
             </a:r>
@@ -25018,9 +24549,8 @@
                 <a:solidFill>
                   <a:srgbClr val="D4AF37"/>
                 </a:solidFill>
-                <a:latin typeface="Amiri" pitchFamily="34" charset="0"/>
-                <a:ea typeface="Amiri" pitchFamily="34" charset="-122"/>
-                <a:cs typeface="Amiri" pitchFamily="34" charset="-120"/>
+                <a:latin typeface="Amiri" pitchFamily="2" charset="-78"/>
+                <a:cs typeface="Amiri" pitchFamily="2" charset="-78"/>
               </a:rPr>
               <a:t>م</a:t>
             </a:r>
@@ -25058,8 +24588,7 @@
                   <a:srgbClr val="1B3B6F"/>
                 </a:solidFill>
                 <a:latin typeface="Cambria" pitchFamily="34" charset="0"/>
-                <a:ea typeface="Cambria" pitchFamily="34" charset="-122"/>
-                <a:cs typeface="Cambria" pitchFamily="34" charset="-120"/>
+                <a:cs typeface="Amiri" pitchFamily="2" charset="-78"/>
               </a:rPr>
               <a:t>Al Madina Online School</a:t>
             </a:r>
@@ -25097,8 +24626,7 @@
                   <a:srgbClr val="8A6D1E"/>
                 </a:solidFill>
                 <a:latin typeface="Calibri" pitchFamily="34" charset="0"/>
-                <a:ea typeface="Calibri" pitchFamily="34" charset="-122"/>
-                <a:cs typeface="Calibri" pitchFamily="34" charset="-120"/>
+                <a:cs typeface="Amiri" pitchFamily="2" charset="-78"/>
               </a:rPr>
               <a:t>ARABIC DEPARTMENT · MIFTAH ARABIC · IGCSE 0544</a:t>
             </a:r>
@@ -25163,8 +24691,7 @@
                   <a:srgbClr val="FFFFFF"/>
                 </a:solidFill>
                 <a:latin typeface="Calibri" pitchFamily="34" charset="0"/>
-                <a:ea typeface="Calibri" pitchFamily="34" charset="-122"/>
-                <a:cs typeface="Calibri" pitchFamily="34" charset="-120"/>
+                <a:cs typeface="Amiri" pitchFamily="2" charset="-78"/>
               </a:rPr>
               <a:t>P6-L09 · IGCSE Bridge</a:t>
             </a:r>
@@ -25229,8 +24756,7 @@
                   <a:srgbClr val="FFFFFF"/>
                 </a:solidFill>
                 <a:latin typeface="Calibri" pitchFamily="34" charset="0"/>
-                <a:ea typeface="Calibri" pitchFamily="34" charset="-122"/>
-                <a:cs typeface="Calibri" pitchFamily="34" charset="-120"/>
+                <a:cs typeface="Amiri" pitchFamily="2" charset="-78"/>
               </a:rPr>
               <a:t>WELCOME · 1 MIN</a:t>
             </a:r>
@@ -25268,8 +24794,7 @@
                   <a:srgbClr val="5A6472"/>
                 </a:solidFill>
                 <a:latin typeface="Calibri" pitchFamily="34" charset="0"/>
-                <a:ea typeface="Calibri" pitchFamily="34" charset="-122"/>
-                <a:cs typeface="Calibri" pitchFamily="34" charset="-120"/>
+                <a:cs typeface="Amiri" pitchFamily="2" charset="-78"/>
               </a:rPr>
               <a:t>BEFORE WE BEGIN</a:t>
             </a:r>
@@ -25307,8 +24832,7 @@
                   <a:srgbClr val="1B3B6F"/>
                 </a:solidFill>
                 <a:latin typeface="Cambria" pitchFamily="34" charset="0"/>
-                <a:ea typeface="Cambria" pitchFamily="34" charset="-122"/>
-                <a:cs typeface="Cambria" pitchFamily="34" charset="-120"/>
+                <a:cs typeface="Amiri" pitchFamily="2" charset="-78"/>
               </a:rPr>
               <a:t>Our online classroom</a:t>
             </a:r>
@@ -25345,9 +24869,8 @@
                 <a:solidFill>
                   <a:srgbClr val="8A6D1E"/>
                 </a:solidFill>
-                <a:latin typeface="Amiri" pitchFamily="34" charset="0"/>
-                <a:ea typeface="Amiri" pitchFamily="34" charset="-122"/>
-                <a:cs typeface="Amiri" pitchFamily="34" charset="-120"/>
+                <a:latin typeface="Amiri" pitchFamily="2" charset="-78"/>
+                <a:cs typeface="Amiri" pitchFamily="2" charset="-78"/>
               </a:rPr>
               <a:t>آدَابُ الصَّفِّ</a:t>
             </a:r>
@@ -25385,8 +24908,7 @@
                   <a:srgbClr val="8A93A0"/>
                 </a:solidFill>
                 <a:latin typeface="Calibri" pitchFamily="34" charset="0"/>
-                <a:ea typeface="Calibri" pitchFamily="34" charset="-122"/>
-                <a:cs typeface="Calibri" pitchFamily="34" charset="-120"/>
+                <a:cs typeface="Amiri" pitchFamily="2" charset="-78"/>
               </a:rPr>
               <a:t>Miftah Arabic · Progression P6 · IGCSE Bridge · P6-L09</a:t>
             </a:r>
@@ -25507,8 +25029,7 @@
                   <a:srgbClr val="1B3B6F"/>
                 </a:solidFill>
                 <a:latin typeface="Calibri" pitchFamily="34" charset="0"/>
-                <a:ea typeface="Calibri" pitchFamily="34" charset="-122"/>
-                <a:cs typeface="Calibri" pitchFamily="34" charset="-120"/>
+                <a:cs typeface="Amiri" pitchFamily="2" charset="-78"/>
               </a:rPr>
               <a:t>Camera on</a:t>
             </a:r>
@@ -25524,8 +25045,7 @@
                   <a:srgbClr val="5A6472"/>
                 </a:solidFill>
                 <a:latin typeface="Calibri" pitchFamily="34" charset="0"/>
-                <a:ea typeface="Calibri" pitchFamily="34" charset="-122"/>
-                <a:cs typeface="Calibri" pitchFamily="34" charset="-120"/>
+                <a:cs typeface="Amiri" pitchFamily="2" charset="-78"/>
               </a:rPr>
               <a:t>So I can see you learning and help you quickly.</a:t>
             </a:r>
@@ -25646,8 +25166,7 @@
                   <a:srgbClr val="1B3B6F"/>
                 </a:solidFill>
                 <a:latin typeface="Calibri" pitchFamily="34" charset="0"/>
-                <a:ea typeface="Calibri" pitchFamily="34" charset="-122"/>
-                <a:cs typeface="Calibri" pitchFamily="34" charset="-120"/>
+                <a:cs typeface="Amiri" pitchFamily="2" charset="-78"/>
               </a:rPr>
               <a:t>Mic muted</a:t>
             </a:r>
@@ -25663,8 +25182,7 @@
                   <a:srgbClr val="5A6472"/>
                 </a:solidFill>
                 <a:latin typeface="Calibri" pitchFamily="34" charset="0"/>
-                <a:ea typeface="Calibri" pitchFamily="34" charset="-122"/>
-                <a:cs typeface="Calibri" pitchFamily="34" charset="-120"/>
+                <a:cs typeface="Amiri" pitchFamily="2" charset="-78"/>
               </a:rPr>
               <a:t>Unmute only when invited to speak.</a:t>
             </a:r>
@@ -25785,8 +25303,7 @@
                   <a:srgbClr val="1B3B6F"/>
                 </a:solidFill>
                 <a:latin typeface="Calibri" pitchFamily="34" charset="0"/>
-                <a:ea typeface="Calibri" pitchFamily="34" charset="-122"/>
-                <a:cs typeface="Calibri" pitchFamily="34" charset="-120"/>
+                <a:cs typeface="Amiri" pitchFamily="2" charset="-78"/>
               </a:rPr>
               <a:t>Chat for learning</a:t>
             </a:r>
@@ -25802,8 +25319,7 @@
                   <a:srgbClr val="5A6472"/>
                 </a:solidFill>
                 <a:latin typeface="Calibri" pitchFamily="34" charset="0"/>
-                <a:ea typeface="Calibri" pitchFamily="34" charset="-122"/>
-                <a:cs typeface="Calibri" pitchFamily="34" charset="-120"/>
+                <a:cs typeface="Amiri" pitchFamily="2" charset="-78"/>
               </a:rPr>
               <a:t>Answers, questions and Arabic only.</a:t>
             </a:r>
@@ -25924,8 +25440,7 @@
                   <a:srgbClr val="1B3B6F"/>
                 </a:solidFill>
                 <a:latin typeface="Calibri" pitchFamily="34" charset="0"/>
-                <a:ea typeface="Calibri" pitchFamily="34" charset="-122"/>
-                <a:cs typeface="Calibri" pitchFamily="34" charset="-120"/>
+                <a:cs typeface="Amiri" pitchFamily="2" charset="-78"/>
               </a:rPr>
               <a:t>Raise your hand</a:t>
             </a:r>
@@ -25941,8 +25456,7 @@
                   <a:srgbClr val="5A6472"/>
                 </a:solidFill>
                 <a:latin typeface="Calibri" pitchFamily="34" charset="0"/>
-                <a:ea typeface="Calibri" pitchFamily="34" charset="-122"/>
-                <a:cs typeface="Calibri" pitchFamily="34" charset="-120"/>
+                <a:cs typeface="Amiri" pitchFamily="2" charset="-78"/>
               </a:rPr>
               <a:t>Use the hand button to ask for help.</a:t>
             </a:r>
@@ -26014,8 +25528,7 @@
                   <a:srgbClr val="1B3B6F"/>
                 </a:solidFill>
                 <a:latin typeface="Calibri" pitchFamily="34" charset="0"/>
-                <a:ea typeface="Calibri" pitchFamily="34" charset="-122"/>
-                <a:cs typeface="Calibri" pitchFamily="34" charset="-120"/>
+                <a:cs typeface="Amiri" pitchFamily="2" charset="-78"/>
               </a:rPr>
               <a:t>HOW WE TALK — THE ORACY CODE</a:t>
             </a:r>
@@ -26078,8 +25591,7 @@
                   <a:srgbClr val="D4AF37"/>
                 </a:solidFill>
                 <a:latin typeface="Arial" pitchFamily="34" charset="0"/>
-                <a:ea typeface="Arial" pitchFamily="34" charset="-122"/>
-                <a:cs typeface="Arial" pitchFamily="34" charset="-120"/>
+                <a:cs typeface="Amiri" pitchFamily="2" charset="-78"/>
               </a:rPr>
               <a:t>●</a:t>
             </a:r>
@@ -26117,8 +25629,7 @@
                   <a:srgbClr val="1B3B6F"/>
                 </a:solidFill>
                 <a:latin typeface="Calibri" pitchFamily="34" charset="0"/>
-                <a:ea typeface="Calibri" pitchFamily="34" charset="-122"/>
-                <a:cs typeface="Calibri" pitchFamily="34" charset="-120"/>
+                <a:cs typeface="Amiri" pitchFamily="2" charset="-78"/>
               </a:rPr>
               <a:t>Think</a:t>
             </a:r>
@@ -26134,8 +25645,7 @@
                   <a:srgbClr val="5A6472"/>
                 </a:solidFill>
                 <a:latin typeface="Calibri" pitchFamily="34" charset="0"/>
-                <a:ea typeface="Calibri" pitchFamily="34" charset="-122"/>
-                <a:cs typeface="Calibri" pitchFamily="34" charset="-120"/>
+                <a:cs typeface="Amiri" pitchFamily="2" charset="-78"/>
               </a:rPr>
               <a:t>silent preparation</a:t>
             </a:r>
@@ -26198,8 +25708,7 @@
                   <a:srgbClr val="D4AF37"/>
                 </a:solidFill>
                 <a:latin typeface="Arial" pitchFamily="34" charset="0"/>
-                <a:ea typeface="Arial" pitchFamily="34" charset="-122"/>
-                <a:cs typeface="Arial" pitchFamily="34" charset="-120"/>
+                <a:cs typeface="Amiri" pitchFamily="2" charset="-78"/>
               </a:rPr>
               <a:t>↔</a:t>
             </a:r>
@@ -26237,8 +25746,7 @@
                   <a:srgbClr val="1B3B6F"/>
                 </a:solidFill>
                 <a:latin typeface="Calibri" pitchFamily="34" charset="0"/>
-                <a:ea typeface="Calibri" pitchFamily="34" charset="-122"/>
-                <a:cs typeface="Calibri" pitchFamily="34" charset="-120"/>
+                <a:cs typeface="Amiri" pitchFamily="2" charset="-78"/>
               </a:rPr>
               <a:t>Rehearse</a:t>
             </a:r>
@@ -26254,8 +25762,7 @@
                   <a:srgbClr val="5A6472"/>
                 </a:solidFill>
                 <a:latin typeface="Calibri" pitchFamily="34" charset="0"/>
-                <a:ea typeface="Calibri" pitchFamily="34" charset="-122"/>
-                <a:cs typeface="Calibri" pitchFamily="34" charset="-120"/>
+                <a:cs typeface="Amiri" pitchFamily="2" charset="-78"/>
               </a:rPr>
               <a:t>both partners speak</a:t>
             </a:r>
@@ -26318,8 +25825,7 @@
                   <a:srgbClr val="D4AF37"/>
                 </a:solidFill>
                 <a:latin typeface="Arial" pitchFamily="34" charset="0"/>
-                <a:ea typeface="Arial" pitchFamily="34" charset="-122"/>
-                <a:cs typeface="Arial" pitchFamily="34" charset="-120"/>
+                <a:cs typeface="Amiri" pitchFamily="2" charset="-78"/>
               </a:rPr>
               <a:t>+</a:t>
             </a:r>
@@ -26357,8 +25863,7 @@
                   <a:srgbClr val="1B3B6F"/>
                 </a:solidFill>
                 <a:latin typeface="Calibri" pitchFamily="34" charset="0"/>
-                <a:ea typeface="Calibri" pitchFamily="34" charset="-122"/>
-                <a:cs typeface="Calibri" pitchFamily="34" charset="-120"/>
+                <a:cs typeface="Amiri" pitchFamily="2" charset="-78"/>
               </a:rPr>
               <a:t>Build</a:t>
             </a:r>
@@ -26374,8 +25879,7 @@
                   <a:srgbClr val="5A6472"/>
                 </a:solidFill>
                 <a:latin typeface="Calibri" pitchFamily="34" charset="0"/>
-                <a:ea typeface="Calibri" pitchFamily="34" charset="-122"/>
-                <a:cs typeface="Calibri" pitchFamily="34" charset="-120"/>
+                <a:cs typeface="Amiri" pitchFamily="2" charset="-78"/>
               </a:rPr>
               <a:t>add a reason or detail</a:t>
             </a:r>
@@ -26438,8 +25942,7 @@
                   <a:srgbClr val="D4AF37"/>
                 </a:solidFill>
                 <a:latin typeface="Arial" pitchFamily="34" charset="0"/>
-                <a:ea typeface="Arial" pitchFamily="34" charset="-122"/>
-                <a:cs typeface="Arial" pitchFamily="34" charset="-120"/>
+                <a:cs typeface="Amiri" pitchFamily="2" charset="-78"/>
               </a:rPr>
               <a:t>?</a:t>
             </a:r>
@@ -26477,8 +25980,7 @@
                   <a:srgbClr val="1B3B6F"/>
                 </a:solidFill>
                 <a:latin typeface="Calibri" pitchFamily="34" charset="0"/>
-                <a:ea typeface="Calibri" pitchFamily="34" charset="-122"/>
-                <a:cs typeface="Calibri" pitchFamily="34" charset="-120"/>
+                <a:cs typeface="Amiri" pitchFamily="2" charset="-78"/>
               </a:rPr>
               <a:t>Challenge</a:t>
             </a:r>
@@ -26494,8 +25996,7 @@
                   <a:srgbClr val="5A6472"/>
                 </a:solidFill>
                 <a:latin typeface="Calibri" pitchFamily="34" charset="0"/>
-                <a:ea typeface="Calibri" pitchFamily="34" charset="-122"/>
-                <a:cs typeface="Calibri" pitchFamily="34" charset="-120"/>
+                <a:cs typeface="Amiri" pitchFamily="2" charset="-78"/>
               </a:rPr>
               <a:t>question respectfully</a:t>
             </a:r>
@@ -26558,8 +26059,7 @@
                   <a:srgbClr val="D4AF37"/>
                 </a:solidFill>
                 <a:latin typeface="Arial" pitchFamily="34" charset="0"/>
-                <a:ea typeface="Arial" pitchFamily="34" charset="-122"/>
-                <a:cs typeface="Arial" pitchFamily="34" charset="-120"/>
+                <a:cs typeface="Amiri" pitchFamily="2" charset="-78"/>
               </a:rPr>
               <a:t>◎</a:t>
             </a:r>
@@ -26597,8 +26097,7 @@
                   <a:srgbClr val="1B3B6F"/>
                 </a:solidFill>
                 <a:latin typeface="Calibri" pitchFamily="34" charset="0"/>
-                <a:ea typeface="Calibri" pitchFamily="34" charset="-122"/>
-                <a:cs typeface="Calibri" pitchFamily="34" charset="-120"/>
+                <a:cs typeface="Amiri" pitchFamily="2" charset="-78"/>
               </a:rPr>
               <a:t>Share</a:t>
             </a:r>
@@ -26614,8 +26113,7 @@
                   <a:srgbClr val="5A6472"/>
                 </a:solidFill>
                 <a:latin typeface="Calibri" pitchFamily="34" charset="0"/>
-                <a:ea typeface="Calibri" pitchFamily="34" charset="-122"/>
-                <a:cs typeface="Calibri" pitchFamily="34" charset="-120"/>
+                <a:cs typeface="Amiri" pitchFamily="2" charset="-78"/>
               </a:rPr>
               <a:t>anyone may be invited</a:t>
             </a:r>
@@ -26678,8 +26176,7 @@
                   <a:srgbClr val="D4AF37"/>
                 </a:solidFill>
                 <a:latin typeface="Arial" pitchFamily="34" charset="0"/>
-                <a:ea typeface="Arial" pitchFamily="34" charset="-122"/>
-                <a:cs typeface="Arial" pitchFamily="34" charset="-120"/>
+                <a:cs typeface="Amiri" pitchFamily="2" charset="-78"/>
               </a:rPr>
               <a:t>↺</a:t>
             </a:r>
@@ -26717,8 +26214,7 @@
                   <a:srgbClr val="1B3B6F"/>
                 </a:solidFill>
                 <a:latin typeface="Calibri" pitchFamily="34" charset="0"/>
-                <a:ea typeface="Calibri" pitchFamily="34" charset="-122"/>
-                <a:cs typeface="Calibri" pitchFamily="34" charset="-120"/>
+                <a:cs typeface="Amiri" pitchFamily="2" charset="-78"/>
               </a:rPr>
               <a:t>Summarise</a:t>
             </a:r>
@@ -26734,8 +26230,7 @@
                   <a:srgbClr val="5A6472"/>
                 </a:solidFill>
                 <a:latin typeface="Calibri" pitchFamily="34" charset="0"/>
-                <a:ea typeface="Calibri" pitchFamily="34" charset="-122"/>
-                <a:cs typeface="Calibri" pitchFamily="34" charset="-120"/>
+                <a:cs typeface="Amiri" pitchFamily="2" charset="-78"/>
               </a:rPr>
               <a:t>say it more precisely</a:t>
             </a:r>
@@ -26773,8 +26268,7 @@
                   <a:srgbClr val="8A6D1E"/>
                 </a:solidFill>
                 <a:latin typeface="Calibri" pitchFamily="34" charset="0"/>
-                <a:ea typeface="Calibri" pitchFamily="34" charset="-122"/>
-                <a:cs typeface="Calibri" pitchFamily="34" charset="-120"/>
+                <a:cs typeface="Amiri" pitchFamily="2" charset="-78"/>
               </a:rPr>
               <a:t>I will always give you thinking and practice time before I ask anyone. Reading aloud is by invitation — you can always say “pass, please come back to me”.</a:t>
             </a:r>
@@ -26812,8 +26306,7 @@
                   <a:srgbClr val="8A93A0"/>
                 </a:solidFill>
                 <a:latin typeface="Calibri" pitchFamily="34" charset="0"/>
-                <a:ea typeface="Calibri" pitchFamily="34" charset="-122"/>
-                <a:cs typeface="Calibri" pitchFamily="34" charset="-120"/>
+                <a:cs typeface="Amiri" pitchFamily="2" charset="-78"/>
               </a:rPr>
               <a:t>2 / 25</a:t>
             </a:r>
@@ -26907,9 +26400,8 @@
                 <a:solidFill>
                   <a:srgbClr val="D4AF37"/>
                 </a:solidFill>
-                <a:latin typeface="Amiri" pitchFamily="34" charset="0"/>
-                <a:ea typeface="Amiri" pitchFamily="34" charset="-122"/>
-                <a:cs typeface="Amiri" pitchFamily="34" charset="-120"/>
+                <a:latin typeface="Amiri" pitchFamily="2" charset="-78"/>
+                <a:cs typeface="Amiri" pitchFamily="2" charset="-78"/>
               </a:rPr>
               <a:t>م</a:t>
             </a:r>
@@ -26947,8 +26439,7 @@
                   <a:srgbClr val="1B3B6F"/>
                 </a:solidFill>
                 <a:latin typeface="Cambria" pitchFamily="34" charset="0"/>
-                <a:ea typeface="Cambria" pitchFamily="34" charset="-122"/>
-                <a:cs typeface="Cambria" pitchFamily="34" charset="-120"/>
+                <a:cs typeface="Amiri" pitchFamily="2" charset="-78"/>
               </a:rPr>
               <a:t>Al Madina Online School</a:t>
             </a:r>
@@ -26986,8 +26477,7 @@
                   <a:srgbClr val="8A6D1E"/>
                 </a:solidFill>
                 <a:latin typeface="Calibri" pitchFamily="34" charset="0"/>
-                <a:ea typeface="Calibri" pitchFamily="34" charset="-122"/>
-                <a:cs typeface="Calibri" pitchFamily="34" charset="-120"/>
+                <a:cs typeface="Amiri" pitchFamily="2" charset="-78"/>
               </a:rPr>
               <a:t>ARABIC DEPARTMENT · MIFTAH ARABIC · IGCSE 0544</a:t>
             </a:r>
@@ -27052,8 +26542,7 @@
                   <a:srgbClr val="FFFFFF"/>
                 </a:solidFill>
                 <a:latin typeface="Calibri" pitchFamily="34" charset="0"/>
-                <a:ea typeface="Calibri" pitchFamily="34" charset="-122"/>
-                <a:cs typeface="Calibri" pitchFamily="34" charset="-120"/>
+                <a:cs typeface="Amiri" pitchFamily="2" charset="-78"/>
               </a:rPr>
               <a:t>P6-L09 · IGCSE Bridge</a:t>
             </a:r>
@@ -27118,8 +26607,7 @@
                   <a:srgbClr val="FFFFFF"/>
                 </a:solidFill>
                 <a:latin typeface="Calibri" pitchFamily="34" charset="0"/>
-                <a:ea typeface="Calibri" pitchFamily="34" charset="-122"/>
-                <a:cs typeface="Calibri" pitchFamily="34" charset="-120"/>
+                <a:cs typeface="Amiri" pitchFamily="2" charset="-78"/>
               </a:rPr>
               <a:t>FEEDBACK · 1 MIN</a:t>
             </a:r>
@@ -27157,8 +26645,7 @@
                   <a:srgbClr val="8A6D1E"/>
                 </a:solidFill>
                 <a:latin typeface="Calibri" pitchFamily="34" charset="0"/>
-                <a:ea typeface="Calibri" pitchFamily="34" charset="-122"/>
-                <a:cs typeface="Calibri" pitchFamily="34" charset="-120"/>
+                <a:cs typeface="Amiri" pitchFamily="2" charset="-78"/>
               </a:rPr>
               <a:t>FEEDBACK · PAPER 4 Q2 · THE WEBSITE MODEL (TITLE A)</a:t>
             </a:r>
@@ -27196,8 +26683,7 @@
                   <a:srgbClr val="1B3B6F"/>
                 </a:solidFill>
                 <a:latin typeface="Cambria" pitchFamily="34" charset="0"/>
-                <a:ea typeface="Cambria" pitchFamily="34" charset="-122"/>
-                <a:cs typeface="Cambria" pitchFamily="34" charset="-120"/>
+                <a:cs typeface="Amiri" pitchFamily="2" charset="-78"/>
               </a:rPr>
               <a:t>Q2: the full essay architecture</a:t>
             </a:r>
@@ -27234,9 +26720,8 @@
                 <a:solidFill>
                   <a:srgbClr val="8A6D1E"/>
                 </a:solidFill>
-                <a:latin typeface="Amiri" pitchFamily="34" charset="0"/>
-                <a:ea typeface="Amiri" pitchFamily="34" charset="-122"/>
-                <a:cs typeface="Amiri" pitchFamily="34" charset="-120"/>
+                <a:latin typeface="Amiri" pitchFamily="2" charset="-78"/>
+                <a:cs typeface="Amiri" pitchFamily="2" charset="-78"/>
               </a:rPr>
               <a:t>نَمُوذَجُ الإِجَابَةِ</a:t>
             </a:r>
@@ -27274,8 +26759,7 @@
                   <a:srgbClr val="8A93A0"/>
                 </a:solidFill>
                 <a:latin typeface="Calibri" pitchFamily="34" charset="0"/>
-                <a:ea typeface="Calibri" pitchFamily="34" charset="-122"/>
-                <a:cs typeface="Calibri" pitchFamily="34" charset="-120"/>
+                <a:cs typeface="Amiri" pitchFamily="2" charset="-78"/>
               </a:rPr>
               <a:t>Miftah Arabic · Progression P6 · IGCSE Bridge · P6-L09</a:t>
             </a:r>
@@ -27349,9 +26833,8 @@
                 <a:solidFill>
                   <a:srgbClr val="1F2A37"/>
                 </a:solidFill>
-                <a:latin typeface="Amiri" pitchFamily="34" charset="0"/>
-                <a:ea typeface="Amiri" pitchFamily="34" charset="-122"/>
-                <a:cs typeface="Amiri" pitchFamily="34" charset="-120"/>
+                <a:latin typeface="Amiri" pitchFamily="2" charset="-78"/>
+                <a:cs typeface="Amiri" pitchFamily="2" charset="-78"/>
               </a:rPr>
               <a:t>يُشَارُ إِلَى أَنَّ السَّفَرَ مِنْ أَعْظَمِ مَصَادِرِ التَّعَلُّمِ. أَكَّدَ التَّرْبَوِيُّونَ أَنَّ الاحْتِكَاكَ بِالثَّقَافَاتِ يُنَمِّي الوَعْيَ. صَحِيحٌ أَنَّ الكُتُبَ تُعَلِّمُ الكَثِيرَ، غَيْرَ أَنَّ التَّجْرِبَةَ المُبَاشِرَةَ تَتْرُكُ أَثَرًا أَعْمَقَ. وَلَوْ سَافَرَ كُلُّ طَالِبٍ مَرَّةً، لَتَغَيَّرَتْ نَظْرَتُهُ إِلَى العَالَمِ. وَإِذَا أُتِيحَتِ الفُرَصُ، سَيَتَعَلَّمُ الشَّبَابُ التَّسَامُحَ. وَبِنَاءً عَلَى مَا سَبَقَ، يَنْبَغِي أَنْ نُشَجِّعَ السَّفَرَ التَّعْلِيمِيَّ لِكَيْ نَبْنِيَ جِيلًا مُنْفَتِحًا.</a:t>
             </a:r>
@@ -27416,8 +26899,7 @@
                   <a:srgbClr val="5A6472"/>
                 </a:solidFill>
                 <a:latin typeface="Calibri" pitchFamily="34" charset="0"/>
-                <a:ea typeface="Calibri" pitchFamily="34" charset="-122"/>
-                <a:cs typeface="Calibri" pitchFamily="34" charset="-120"/>
+                <a:cs typeface="Amiri" pitchFamily="2" charset="-78"/>
               </a:rPr>
               <a:t>“It is noted that travel is one of the greatest sources of learning. Educators have stressed that contact with cultures develops awareness. It is true that books teach a great deal; however, direct experience leaves a deeper mark. If every student travelled once, their view of the world would change. If opportunities are provided, young people will learn tolerance. Based on the above, we should encourage educational travel so that we build an open-minded generation.”</a:t>
             </a:r>
@@ -27455,8 +26937,7 @@
                   <a:srgbClr val="8A6D1E"/>
                 </a:solidFill>
                 <a:latin typeface="Calibri" pitchFamily="34" charset="0"/>
-                <a:ea typeface="Calibri" pitchFamily="34" charset="-122"/>
-                <a:cs typeface="Calibri" pitchFamily="34" charset="-120"/>
+                <a:cs typeface="Amiri" pitchFamily="2" charset="-78"/>
               </a:rPr>
               <a:t>FIND IN THE MODEL:</a:t>
             </a:r>
@@ -27521,8 +27002,7 @@
                   <a:srgbClr val="FFFFFF"/>
                 </a:solidFill>
                 <a:latin typeface="Calibri" pitchFamily="34" charset="0"/>
-                <a:ea typeface="Calibri" pitchFamily="34" charset="-122"/>
-                <a:cs typeface="Calibri" pitchFamily="34" charset="-120"/>
+                <a:cs typeface="Amiri" pitchFamily="2" charset="-78"/>
               </a:rPr>
               <a:t>أَكَّدَ التَّرْبَوِيُّونَ أَنَّ</a:t>
             </a:r>
@@ -27587,8 +27067,7 @@
                   <a:srgbClr val="FFFFFF"/>
                 </a:solidFill>
                 <a:latin typeface="Calibri" pitchFamily="34" charset="0"/>
-                <a:ea typeface="Calibri" pitchFamily="34" charset="-122"/>
-                <a:cs typeface="Calibri" pitchFamily="34" charset="-120"/>
+                <a:cs typeface="Amiri" pitchFamily="2" charset="-78"/>
               </a:rPr>
               <a:t>لَوْ سَافَرَ … لَتَغَيَّرَتْ</a:t>
             </a:r>
@@ -27653,8 +27132,7 @@
                   <a:srgbClr val="FFFFFF"/>
                 </a:solidFill>
                 <a:latin typeface="Calibri" pitchFamily="34" charset="0"/>
-                <a:ea typeface="Calibri" pitchFamily="34" charset="-122"/>
-                <a:cs typeface="Calibri" pitchFamily="34" charset="-120"/>
+                <a:cs typeface="Amiri" pitchFamily="2" charset="-78"/>
               </a:rPr>
               <a:t>إِذَا أُتِيحَتِ الفُرَصُ</a:t>
             </a:r>
@@ -27719,8 +27197,7 @@
                   <a:srgbClr val="FFFFFF"/>
                 </a:solidFill>
                 <a:latin typeface="Calibri" pitchFamily="34" charset="0"/>
-                <a:ea typeface="Calibri" pitchFamily="34" charset="-122"/>
-                <a:cs typeface="Calibri" pitchFamily="34" charset="-120"/>
+                <a:cs typeface="Amiri" pitchFamily="2" charset="-78"/>
               </a:rPr>
               <a:t>وَبِنَاءً عَلَى مَا سَبَقَ</a:t>
             </a:r>
@@ -27758,8 +27235,7 @@
                   <a:srgbClr val="8A93A0"/>
                 </a:solidFill>
                 <a:latin typeface="Calibri" pitchFamily="34" charset="0"/>
-                <a:ea typeface="Calibri" pitchFamily="34" charset="-122"/>
-                <a:cs typeface="Calibri" pitchFamily="34" charset="-120"/>
+                <a:cs typeface="Amiri" pitchFamily="2" charset="-78"/>
               </a:rPr>
               <a:t>20 / 25</a:t>
             </a:r>
@@ -27853,9 +27329,8 @@
                 <a:solidFill>
                   <a:srgbClr val="D4AF37"/>
                 </a:solidFill>
-                <a:latin typeface="Amiri" pitchFamily="34" charset="0"/>
-                <a:ea typeface="Amiri" pitchFamily="34" charset="-122"/>
-                <a:cs typeface="Amiri" pitchFamily="34" charset="-120"/>
+                <a:latin typeface="Amiri" pitchFamily="2" charset="-78"/>
+                <a:cs typeface="Amiri" pitchFamily="2" charset="-78"/>
               </a:rPr>
               <a:t>م</a:t>
             </a:r>
@@ -27893,8 +27368,7 @@
                   <a:srgbClr val="1B3B6F"/>
                 </a:solidFill>
                 <a:latin typeface="Cambria" pitchFamily="34" charset="0"/>
-                <a:ea typeface="Cambria" pitchFamily="34" charset="-122"/>
-                <a:cs typeface="Cambria" pitchFamily="34" charset="-120"/>
+                <a:cs typeface="Amiri" pitchFamily="2" charset="-78"/>
               </a:rPr>
               <a:t>Al Madina Online School</a:t>
             </a:r>
@@ -27932,8 +27406,7 @@
                   <a:srgbClr val="8A6D1E"/>
                 </a:solidFill>
                 <a:latin typeface="Calibri" pitchFamily="34" charset="0"/>
-                <a:ea typeface="Calibri" pitchFamily="34" charset="-122"/>
-                <a:cs typeface="Calibri" pitchFamily="34" charset="-120"/>
+                <a:cs typeface="Amiri" pitchFamily="2" charset="-78"/>
               </a:rPr>
               <a:t>ARABIC DEPARTMENT · MIFTAH ARABIC · IGCSE 0544</a:t>
             </a:r>
@@ -27998,8 +27471,7 @@
                   <a:srgbClr val="FFFFFF"/>
                 </a:solidFill>
                 <a:latin typeface="Calibri" pitchFamily="34" charset="0"/>
-                <a:ea typeface="Calibri" pitchFamily="34" charset="-122"/>
-                <a:cs typeface="Calibri" pitchFamily="34" charset="-120"/>
+                <a:cs typeface="Amiri" pitchFamily="2" charset="-78"/>
               </a:rPr>
               <a:t>P6-L09 · IGCSE Bridge</a:t>
             </a:r>
@@ -28064,8 +27536,7 @@
                   <a:srgbClr val="FFFFFF"/>
                 </a:solidFill>
                 <a:latin typeface="Calibri" pitchFamily="34" charset="0"/>
-                <a:ea typeface="Calibri" pitchFamily="34" charset="-122"/>
-                <a:cs typeface="Calibri" pitchFamily="34" charset="-120"/>
+                <a:cs typeface="Amiri" pitchFamily="2" charset="-78"/>
               </a:rPr>
               <a:t>FEEDBACK · 2 MIN</a:t>
             </a:r>
@@ -28103,8 +27574,7 @@
                   <a:srgbClr val="8A6D1E"/>
                 </a:solidFill>
                 <a:latin typeface="Calibri" pitchFamily="34" charset="0"/>
-                <a:ea typeface="Calibri" pitchFamily="34" charset="-122"/>
-                <a:cs typeface="Calibri" pitchFamily="34" charset="-120"/>
+                <a:cs typeface="Amiri" pitchFamily="2" charset="-78"/>
               </a:rPr>
               <a:t>FEEDBACK · SCORE · TARGET (WEBSITE)</a:t>
             </a:r>
@@ -28142,8 +27612,7 @@
                   <a:srgbClr val="1B3B6F"/>
                 </a:solidFill>
                 <a:latin typeface="Cambria" pitchFamily="34" charset="0"/>
-                <a:ea typeface="Cambria" pitchFamily="34" charset="-122"/>
-                <a:cs typeface="Cambria" pitchFamily="34" charset="-120"/>
+                <a:cs typeface="Amiri" pitchFamily="2" charset="-78"/>
               </a:rPr>
               <a:t>Record your Papers 2 and 4 mock scores</a:t>
             </a:r>
@@ -28180,9 +27649,8 @@
                 <a:solidFill>
                   <a:srgbClr val="8A6D1E"/>
                 </a:solidFill>
-                <a:latin typeface="Amiri" pitchFamily="34" charset="0"/>
-                <a:ea typeface="Amiri" pitchFamily="34" charset="-122"/>
-                <a:cs typeface="Amiri" pitchFamily="34" charset="-120"/>
+                <a:latin typeface="Amiri" pitchFamily="2" charset="-78"/>
+                <a:cs typeface="Amiri" pitchFamily="2" charset="-78"/>
               </a:rPr>
               <a:t>سَجِّلْ نَتِيجَتَكَ</a:t>
             </a:r>
@@ -28220,8 +27688,7 @@
                   <a:srgbClr val="8A93A0"/>
                 </a:solidFill>
                 <a:latin typeface="Calibri" pitchFamily="34" charset="0"/>
-                <a:ea typeface="Calibri" pitchFamily="34" charset="-122"/>
-                <a:cs typeface="Calibri" pitchFamily="34" charset="-120"/>
+                <a:cs typeface="Amiri" pitchFamily="2" charset="-78"/>
               </a:rPr>
               <a:t>Miftah Arabic · Progression P6 · IGCSE Bridge · P6-L09</a:t>
             </a:r>
@@ -28284,8 +27751,7 @@
                   <a:srgbClr val="FFFFFF"/>
                 </a:solidFill>
                 <a:latin typeface="Calibri" pitchFamily="34" charset="0"/>
-                <a:ea typeface="Calibri" pitchFamily="34" charset="-122"/>
-                <a:cs typeface="Calibri" pitchFamily="34" charset="-120"/>
+                <a:cs typeface="Amiri" pitchFamily="2" charset="-78"/>
               </a:rPr>
               <a:t>Yours</a:t>
             </a:r>
@@ -28323,8 +27789,7 @@
                   <a:srgbClr val="FFFFFF"/>
                 </a:solidFill>
                 <a:latin typeface="Calibri" pitchFamily="34" charset="0"/>
-                <a:ea typeface="Calibri" pitchFamily="34" charset="-122"/>
-                <a:cs typeface="Calibri" pitchFamily="34" charset="-120"/>
+                <a:cs typeface="Amiri" pitchFamily="2" charset="-78"/>
               </a:rPr>
               <a:t>Example</a:t>
             </a:r>
@@ -28362,8 +27827,7 @@
                   <a:srgbClr val="FFFFFF"/>
                 </a:solidFill>
                 <a:latin typeface="Calibri" pitchFamily="34" charset="0"/>
-                <a:ea typeface="Calibri" pitchFamily="34" charset="-122"/>
-                <a:cs typeface="Calibri" pitchFamily="34" charset="-120"/>
+                <a:cs typeface="Amiri" pitchFamily="2" charset="-78"/>
               </a:rPr>
               <a:t>Record</a:t>
             </a:r>
@@ -28428,8 +27892,7 @@
                   <a:srgbClr val="5A6472"/>
                 </a:solidFill>
                 <a:latin typeface="Calibri" pitchFamily="34" charset="0"/>
-                <a:ea typeface="Calibri" pitchFamily="34" charset="-122"/>
-                <a:cs typeface="Calibri" pitchFamily="34" charset="-120"/>
+                <a:cs typeface="Amiri" pitchFamily="2" charset="-78"/>
               </a:rPr>
               <a:t>______________</a:t>
             </a:r>
@@ -28467,8 +27930,7 @@
                   <a:srgbClr val="5A6472"/>
                 </a:solidFill>
                 <a:latin typeface="Calibri" pitchFamily="34" charset="0"/>
-                <a:ea typeface="Calibri" pitchFamily="34" charset="-122"/>
-                <a:cs typeface="Calibri" pitchFamily="34" charset="-120"/>
+                <a:cs typeface="Amiri" pitchFamily="2" charset="-78"/>
               </a:rPr>
               <a:t>12/16 → 33.75/45</a:t>
             </a:r>
@@ -28506,8 +27968,7 @@
                   <a:srgbClr val="5A6472"/>
                 </a:solidFill>
                 <a:latin typeface="Calibri" pitchFamily="34" charset="0"/>
-                <a:ea typeface="Calibri" pitchFamily="34" charset="-122"/>
-                <a:cs typeface="Calibri" pitchFamily="34" charset="-120"/>
+                <a:cs typeface="Amiri" pitchFamily="2" charset="-78"/>
               </a:rPr>
               <a:t>Paper 2 Reading raw (out of 16) → converted (out of 45)</a:t>
             </a:r>
@@ -28572,8 +28033,7 @@
                   <a:srgbClr val="FFFFFF"/>
                 </a:solidFill>
                 <a:latin typeface="Calibri" pitchFamily="34" charset="0"/>
-                <a:ea typeface="Calibri" pitchFamily="34" charset="-122"/>
-                <a:cs typeface="Calibri" pitchFamily="34" charset="-120"/>
+                <a:cs typeface="Amiri" pitchFamily="2" charset="-78"/>
               </a:rPr>
               <a:t>CORE</a:t>
             </a:r>
@@ -28638,8 +28098,7 @@
                   <a:srgbClr val="5A6472"/>
                 </a:solidFill>
                 <a:latin typeface="Calibri" pitchFamily="34" charset="0"/>
-                <a:ea typeface="Calibri" pitchFamily="34" charset="-122"/>
-                <a:cs typeface="Calibri" pitchFamily="34" charset="-120"/>
+                <a:cs typeface="Amiri" pitchFamily="2" charset="-78"/>
               </a:rPr>
               <a:t>______________</a:t>
             </a:r>
@@ -28677,8 +28136,7 @@
                   <a:srgbClr val="5A6472"/>
                 </a:solidFill>
                 <a:latin typeface="Calibri" pitchFamily="34" charset="0"/>
-                <a:ea typeface="Calibri" pitchFamily="34" charset="-122"/>
-                <a:cs typeface="Calibri" pitchFamily="34" charset="-120"/>
+                <a:cs typeface="Amiri" pitchFamily="2" charset="-78"/>
               </a:rPr>
               <a:t>10/15</a:t>
             </a:r>
@@ -28716,8 +28174,7 @@
                   <a:srgbClr val="5A6472"/>
                 </a:solidFill>
                 <a:latin typeface="Calibri" pitchFamily="34" charset="0"/>
-                <a:ea typeface="Calibri" pitchFamily="34" charset="-122"/>
-                <a:cs typeface="Calibri" pitchFamily="34" charset="-120"/>
+                <a:cs typeface="Amiri" pitchFamily="2" charset="-78"/>
               </a:rPr>
               <a:t>Paper 4 Q1 (out of 15)</a:t>
             </a:r>
@@ -28782,8 +28239,7 @@
                   <a:srgbClr val="FFFFFF"/>
                 </a:solidFill>
                 <a:latin typeface="Calibri" pitchFamily="34" charset="0"/>
-                <a:ea typeface="Calibri" pitchFamily="34" charset="-122"/>
-                <a:cs typeface="Calibri" pitchFamily="34" charset="-120"/>
+                <a:cs typeface="Amiri" pitchFamily="2" charset="-78"/>
               </a:rPr>
               <a:t>CORE</a:t>
             </a:r>
@@ -28848,8 +28304,7 @@
                   <a:srgbClr val="5A6472"/>
                 </a:solidFill>
                 <a:latin typeface="Calibri" pitchFamily="34" charset="0"/>
-                <a:ea typeface="Calibri" pitchFamily="34" charset="-122"/>
-                <a:cs typeface="Calibri" pitchFamily="34" charset="-120"/>
+                <a:cs typeface="Amiri" pitchFamily="2" charset="-78"/>
               </a:rPr>
               <a:t>______________</a:t>
             </a:r>
@@ -28887,8 +28342,7 @@
                   <a:srgbClr val="5A6472"/>
                 </a:solidFill>
                 <a:latin typeface="Calibri" pitchFamily="34" charset="0"/>
-                <a:ea typeface="Calibri" pitchFamily="34" charset="-122"/>
-                <a:cs typeface="Calibri" pitchFamily="34" charset="-120"/>
+                <a:cs typeface="Amiri" pitchFamily="2" charset="-78"/>
               </a:rPr>
               <a:t>(after marking)</a:t>
             </a:r>
@@ -28926,8 +28380,7 @@
                   <a:srgbClr val="5A6472"/>
                 </a:solidFill>
                 <a:latin typeface="Calibri" pitchFamily="34" charset="0"/>
-                <a:ea typeface="Calibri" pitchFamily="34" charset="-122"/>
-                <a:cs typeface="Calibri" pitchFamily="34" charset="-120"/>
+                <a:cs typeface="Amiri" pitchFamily="2" charset="-78"/>
               </a:rPr>
               <a:t>Paper 4 Q2 (out of 15)</a:t>
             </a:r>
@@ -28992,8 +28445,7 @@
                   <a:srgbClr val="5A6472"/>
                 </a:solidFill>
                 <a:latin typeface="Calibri" pitchFamily="34" charset="0"/>
-                <a:ea typeface="Calibri" pitchFamily="34" charset="-122"/>
-                <a:cs typeface="Calibri" pitchFamily="34" charset="-120"/>
+                <a:cs typeface="Amiri" pitchFamily="2" charset="-78"/>
               </a:rPr>
               <a:t>______________</a:t>
             </a:r>
@@ -29031,8 +28483,7 @@
                   <a:srgbClr val="5A6472"/>
                 </a:solidFill>
                 <a:latin typeface="Calibri" pitchFamily="34" charset="0"/>
-                <a:ea typeface="Calibri" pitchFamily="34" charset="-122"/>
-                <a:cs typeface="Calibri" pitchFamily="34" charset="-120"/>
+                <a:cs typeface="Amiri" pitchFamily="2" charset="-78"/>
               </a:rPr>
               <a:t>Q1 ran over → plan in 2 minutes</a:t>
             </a:r>
@@ -29070,8 +28521,7 @@
                   <a:srgbClr val="5A6472"/>
                 </a:solidFill>
                 <a:latin typeface="Calibri" pitchFamily="34" charset="0"/>
-                <a:ea typeface="Calibri" pitchFamily="34" charset="-122"/>
-                <a:cs typeface="Calibri" pitchFamily="34" charset="-120"/>
+                <a:cs typeface="Amiri" pitchFamily="2" charset="-78"/>
               </a:rPr>
               <a:t>My biggest challenge today and my fix</a:t>
             </a:r>
@@ -29109,8 +28559,7 @@
                   <a:srgbClr val="1B3B6F"/>
                 </a:solidFill>
                 <a:latin typeface="Calibri" pitchFamily="34" charset="0"/>
-                <a:ea typeface="Calibri" pitchFamily="34" charset="-122"/>
-                <a:cs typeface="Calibri" pitchFamily="34" charset="-120"/>
+                <a:cs typeface="Amiri" pitchFamily="2" charset="-78"/>
               </a:rPr>
               <a:t>Convert Paper 2: raw × 2.8125 (e.g. 12/16 → 33.75 ≈ 34/45). Paper 4 scores come back after teacher marking. Bring this record to P6-L11.</a:t>
             </a:r>
@@ -29148,8 +28597,7 @@
                   <a:srgbClr val="8A93A0"/>
                 </a:solidFill>
                 <a:latin typeface="Calibri" pitchFamily="34" charset="0"/>
-                <a:ea typeface="Calibri" pitchFamily="34" charset="-122"/>
-                <a:cs typeface="Calibri" pitchFamily="34" charset="-120"/>
+                <a:cs typeface="Amiri" pitchFamily="2" charset="-78"/>
               </a:rPr>
               <a:t>21 / 25</a:t>
             </a:r>
@@ -29243,9 +28691,8 @@
                 <a:solidFill>
                   <a:srgbClr val="D4AF37"/>
                 </a:solidFill>
-                <a:latin typeface="Amiri" pitchFamily="34" charset="0"/>
-                <a:ea typeface="Amiri" pitchFamily="34" charset="-122"/>
-                <a:cs typeface="Amiri" pitchFamily="34" charset="-120"/>
+                <a:latin typeface="Amiri" pitchFamily="2" charset="-78"/>
+                <a:cs typeface="Amiri" pitchFamily="2" charset="-78"/>
               </a:rPr>
               <a:t>م</a:t>
             </a:r>
@@ -29283,8 +28730,7 @@
                   <a:srgbClr val="1B3B6F"/>
                 </a:solidFill>
                 <a:latin typeface="Cambria" pitchFamily="34" charset="0"/>
-                <a:ea typeface="Cambria" pitchFamily="34" charset="-122"/>
-                <a:cs typeface="Cambria" pitchFamily="34" charset="-120"/>
+                <a:cs typeface="Amiri" pitchFamily="2" charset="-78"/>
               </a:rPr>
               <a:t>Al Madina Online School</a:t>
             </a:r>
@@ -29322,8 +28768,7 @@
                   <a:srgbClr val="8A6D1E"/>
                 </a:solidFill>
                 <a:latin typeface="Calibri" pitchFamily="34" charset="0"/>
-                <a:ea typeface="Calibri" pitchFamily="34" charset="-122"/>
-                <a:cs typeface="Calibri" pitchFamily="34" charset="-120"/>
+                <a:cs typeface="Amiri" pitchFamily="2" charset="-78"/>
               </a:rPr>
               <a:t>ARABIC DEPARTMENT · MIFTAH ARABIC · IGCSE 0544</a:t>
             </a:r>
@@ -29388,8 +28833,7 @@
                   <a:srgbClr val="FFFFFF"/>
                 </a:solidFill>
                 <a:latin typeface="Calibri" pitchFamily="34" charset="0"/>
-                <a:ea typeface="Calibri" pitchFamily="34" charset="-122"/>
-                <a:cs typeface="Calibri" pitchFamily="34" charset="-120"/>
+                <a:cs typeface="Amiri" pitchFamily="2" charset="-78"/>
               </a:rPr>
               <a:t>P6-L09 · IGCSE Bridge</a:t>
             </a:r>
@@ -29454,8 +28898,7 @@
                   <a:srgbClr val="FFFFFF"/>
                 </a:solidFill>
                 <a:latin typeface="Calibri" pitchFamily="34" charset="0"/>
-                <a:ea typeface="Calibri" pitchFamily="34" charset="-122"/>
-                <a:cs typeface="Calibri" pitchFamily="34" charset="-120"/>
+                <a:cs typeface="Amiri" pitchFamily="2" charset="-78"/>
               </a:rPr>
               <a:t>FEEDBACK · 2 MIN</a:t>
             </a:r>
@@ -29493,8 +28936,7 @@
                   <a:srgbClr val="8A6D1E"/>
                 </a:solidFill>
                 <a:latin typeface="Calibri" pitchFamily="34" charset="0"/>
-                <a:ea typeface="Calibri" pitchFamily="34" charset="-122"/>
-                <a:cs typeface="Calibri" pitchFamily="34" charset="-120"/>
+                <a:cs typeface="Amiri" pitchFamily="2" charset="-78"/>
               </a:rPr>
               <a:t>FEEDBACK · PAPERS 2 AND 4 DONE (WEBSITE)</a:t>
             </a:r>
@@ -29532,8 +28974,7 @@
                   <a:srgbClr val="1B3B6F"/>
                 </a:solidFill>
                 <a:latin typeface="Cambria" pitchFamily="34" charset="0"/>
-                <a:ea typeface="Cambria" pitchFamily="34" charset="-122"/>
-                <a:cs typeface="Cambria" pitchFamily="34" charset="-120"/>
+                <a:cs typeface="Amiri" pitchFamily="2" charset="-78"/>
               </a:rPr>
               <a:t>Post-mock reflection</a:t>
             </a:r>
@@ -29570,9 +29011,8 @@
                 <a:solidFill>
                   <a:srgbClr val="8A6D1E"/>
                 </a:solidFill>
-                <a:latin typeface="Amiri" pitchFamily="34" charset="0"/>
-                <a:ea typeface="Amiri" pitchFamily="34" charset="-122"/>
-                <a:cs typeface="Amiri" pitchFamily="34" charset="-120"/>
+                <a:latin typeface="Amiri" pitchFamily="2" charset="-78"/>
+                <a:cs typeface="Amiri" pitchFamily="2" charset="-78"/>
               </a:rPr>
               <a:t>التَّأَمُّلُ</a:t>
             </a:r>
@@ -29610,8 +29050,7 @@
                   <a:srgbClr val="8A93A0"/>
                 </a:solidFill>
                 <a:latin typeface="Calibri" pitchFamily="34" charset="0"/>
-                <a:ea typeface="Calibri" pitchFamily="34" charset="-122"/>
-                <a:cs typeface="Calibri" pitchFamily="34" charset="-120"/>
+                <a:cs typeface="Amiri" pitchFamily="2" charset="-78"/>
               </a:rPr>
               <a:t>Miftah Arabic · Progression P6 · IGCSE Bridge · P6-L09</a:t>
             </a:r>
@@ -29674,8 +29113,7 @@
                   <a:srgbClr val="FFFFFF"/>
                 </a:solidFill>
                 <a:latin typeface="Calibri" pitchFamily="34" charset="0"/>
-                <a:ea typeface="Calibri" pitchFamily="34" charset="-122"/>
-                <a:cs typeface="Calibri" pitchFamily="34" charset="-120"/>
+                <a:cs typeface="Amiri" pitchFamily="2" charset="-78"/>
               </a:rPr>
               <a:t>Model ending</a:t>
             </a:r>
@@ -29713,8 +29151,7 @@
                   <a:srgbClr val="FFFFFF"/>
                 </a:solidFill>
                 <a:latin typeface="Calibri" pitchFamily="34" charset="0"/>
-                <a:ea typeface="Calibri" pitchFamily="34" charset="-122"/>
-                <a:cs typeface="Calibri" pitchFamily="34" charset="-120"/>
+                <a:cs typeface="Amiri" pitchFamily="2" charset="-78"/>
               </a:rPr>
               <a:t>Meaning</a:t>
             </a:r>
@@ -29752,8 +29189,7 @@
                   <a:srgbClr val="FFFFFF"/>
                 </a:solidFill>
                 <a:latin typeface="Calibri" pitchFamily="34" charset="0"/>
-                <a:ea typeface="Calibri" pitchFamily="34" charset="-122"/>
-                <a:cs typeface="Calibri" pitchFamily="34" charset="-120"/>
+                <a:cs typeface="Amiri" pitchFamily="2" charset="-78"/>
               </a:rPr>
               <a:t>Reflection frame (website)</a:t>
             </a:r>
@@ -29818,8 +29254,7 @@
                   <a:srgbClr val="5A6472"/>
                 </a:solidFill>
                 <a:latin typeface="Calibri" pitchFamily="34" charset="0"/>
-                <a:ea typeface="Calibri" pitchFamily="34" charset="-122"/>
-                <a:cs typeface="Calibri" pitchFamily="34" charset="-120"/>
+                <a:cs typeface="Amiri" pitchFamily="2" charset="-78"/>
               </a:rPr>
               <a:t>the formal opening and closing of Q1</a:t>
             </a:r>
@@ -29857,8 +29292,7 @@
                   <a:srgbClr val="5A6472"/>
                 </a:solidFill>
                 <a:latin typeface="Calibri" pitchFamily="34" charset="0"/>
-                <a:ea typeface="Calibri" pitchFamily="34" charset="-122"/>
-                <a:cs typeface="Calibri" pitchFamily="34" charset="-120"/>
+                <a:cs typeface="Amiri" pitchFamily="2" charset="-78"/>
               </a:rPr>
               <a:t>where my register / architecture was strongest</a:t>
             </a:r>
@@ -29896,8 +29330,7 @@
                   <a:srgbClr val="5A6472"/>
                 </a:solidFill>
                 <a:latin typeface="Calibri" pitchFamily="34" charset="0"/>
-                <a:ea typeface="Calibri" pitchFamily="34" charset="-122"/>
-                <a:cs typeface="Calibri" pitchFamily="34" charset="-120"/>
+                <a:cs typeface="Amiri" pitchFamily="2" charset="-78"/>
               </a:rPr>
               <a:t>My Paper 4 register/architecture was strongest in…</a:t>
             </a:r>
@@ -29962,8 +29395,7 @@
                   <a:srgbClr val="5A6472"/>
                 </a:solidFill>
                 <a:latin typeface="Calibri" pitchFamily="34" charset="0"/>
-                <a:ea typeface="Calibri" pitchFamily="34" charset="-122"/>
-                <a:cs typeface="Calibri" pitchFamily="34" charset="-120"/>
+                <a:cs typeface="Amiri" pitchFamily="2" charset="-78"/>
               </a:rPr>
               <a:t>timing — Q1 under 20 minutes</a:t>
             </a:r>
@@ -30001,8 +29433,7 @@
                   <a:srgbClr val="5A6472"/>
                 </a:solidFill>
                 <a:latin typeface="Calibri" pitchFamily="34" charset="0"/>
-                <a:ea typeface="Calibri" pitchFamily="34" charset="-122"/>
-                <a:cs typeface="Calibri" pitchFamily="34" charset="-120"/>
+                <a:cs typeface="Amiri" pitchFamily="2" charset="-78"/>
               </a:rPr>
               <a:t>what I will improve for the real exam</a:t>
             </a:r>
@@ -30040,8 +29471,7 @@
                   <a:srgbClr val="5A6472"/>
                 </a:solidFill>
                 <a:latin typeface="Calibri" pitchFamily="34" charset="0"/>
-                <a:ea typeface="Calibri" pitchFamily="34" charset="-122"/>
-                <a:cs typeface="Calibri" pitchFamily="34" charset="-120"/>
+                <a:cs typeface="Amiri" pitchFamily="2" charset="-78"/>
               </a:rPr>
               <a:t>For the real exam I will improve…</a:t>
             </a:r>
@@ -30079,8 +29509,7 @@
                   <a:srgbClr val="1B3B6F"/>
                 </a:solidFill>
                 <a:latin typeface="Calibri" pitchFamily="34" charset="0"/>
-                <a:ea typeface="Calibri" pitchFamily="34" charset="-122"/>
-                <a:cs typeface="Calibri" pitchFamily="34" charset="-120"/>
+                <a:cs typeface="Amiri" pitchFamily="2" charset="-78"/>
               </a:rPr>
               <a:t>Papers 2 and 4 done — well done for sitting them under real conditions.</a:t>
             </a:r>
@@ -30118,8 +29547,7 @@
                   <a:srgbClr val="8A93A0"/>
                 </a:solidFill>
                 <a:latin typeface="Calibri" pitchFamily="34" charset="0"/>
-                <a:ea typeface="Calibri" pitchFamily="34" charset="-122"/>
-                <a:cs typeface="Calibri" pitchFamily="34" charset="-120"/>
+                <a:cs typeface="Amiri" pitchFamily="2" charset="-78"/>
               </a:rPr>
               <a:t>22 / 25</a:t>
             </a:r>
@@ -30213,9 +29641,8 @@
                 <a:solidFill>
                   <a:srgbClr val="D4AF37"/>
                 </a:solidFill>
-                <a:latin typeface="Amiri" pitchFamily="34" charset="0"/>
-                <a:ea typeface="Amiri" pitchFamily="34" charset="-122"/>
-                <a:cs typeface="Amiri" pitchFamily="34" charset="-120"/>
+                <a:latin typeface="Amiri" pitchFamily="2" charset="-78"/>
+                <a:cs typeface="Amiri" pitchFamily="2" charset="-78"/>
               </a:rPr>
               <a:t>م</a:t>
             </a:r>
@@ -30253,8 +29680,7 @@
                   <a:srgbClr val="1B3B6F"/>
                 </a:solidFill>
                 <a:latin typeface="Cambria" pitchFamily="34" charset="0"/>
-                <a:ea typeface="Cambria" pitchFamily="34" charset="-122"/>
-                <a:cs typeface="Cambria" pitchFamily="34" charset="-120"/>
+                <a:cs typeface="Amiri" pitchFamily="2" charset="-78"/>
               </a:rPr>
               <a:t>Al Madina Online School</a:t>
             </a:r>
@@ -30292,8 +29718,7 @@
                   <a:srgbClr val="8A6D1E"/>
                 </a:solidFill>
                 <a:latin typeface="Calibri" pitchFamily="34" charset="0"/>
-                <a:ea typeface="Calibri" pitchFamily="34" charset="-122"/>
-                <a:cs typeface="Calibri" pitchFamily="34" charset="-120"/>
+                <a:cs typeface="Amiri" pitchFamily="2" charset="-78"/>
               </a:rPr>
               <a:t>ARABIC DEPARTMENT · MIFTAH ARABIC · IGCSE 0544</a:t>
             </a:r>
@@ -30358,8 +29783,7 @@
                   <a:srgbClr val="FFFFFF"/>
                 </a:solidFill>
                 <a:latin typeface="Calibri" pitchFamily="34" charset="0"/>
-                <a:ea typeface="Calibri" pitchFamily="34" charset="-122"/>
-                <a:cs typeface="Calibri" pitchFamily="34" charset="-120"/>
+                <a:cs typeface="Amiri" pitchFamily="2" charset="-78"/>
               </a:rPr>
               <a:t>P6-L09 · IGCSE Bridge</a:t>
             </a:r>
@@ -30424,8 +29848,7 @@
                   <a:srgbClr val="FFFFFF"/>
                 </a:solidFill>
                 <a:latin typeface="Calibri" pitchFamily="34" charset="0"/>
-                <a:ea typeface="Calibri" pitchFamily="34" charset="-122"/>
-                <a:cs typeface="Calibri" pitchFamily="34" charset="-120"/>
+                <a:cs typeface="Amiri" pitchFamily="2" charset="-78"/>
               </a:rPr>
               <a:t>FEEDBACK · 1 MIN</a:t>
             </a:r>
@@ -30463,8 +29886,7 @@
                   <a:srgbClr val="8A6D1E"/>
                 </a:solidFill>
                 <a:latin typeface="Calibri" pitchFamily="34" charset="0"/>
-                <a:ea typeface="Calibri" pitchFamily="34" charset="-122"/>
-                <a:cs typeface="Calibri" pitchFamily="34" charset="-120"/>
+                <a:cs typeface="Amiri" pitchFamily="2" charset="-78"/>
               </a:rPr>
               <a:t>FEEDBACK · SUCCESS CRITERIA</a:t>
             </a:r>
@@ -30502,8 +29924,7 @@
                   <a:srgbClr val="1B3B6F"/>
                 </a:solidFill>
                 <a:latin typeface="Cambria" pitchFamily="34" charset="0"/>
-                <a:ea typeface="Cambria" pitchFamily="34" charset="-122"/>
-                <a:cs typeface="Cambria" pitchFamily="34" charset="-120"/>
+                <a:cs typeface="Amiri" pitchFamily="2" charset="-78"/>
               </a:rPr>
               <a:t>Check your work</a:t>
             </a:r>
@@ -30540,9 +29961,8 @@
                 <a:solidFill>
                   <a:srgbClr val="8A6D1E"/>
                 </a:solidFill>
-                <a:latin typeface="Amiri" pitchFamily="34" charset="0"/>
-                <a:ea typeface="Amiri" pitchFamily="34" charset="-122"/>
-                <a:cs typeface="Amiri" pitchFamily="34" charset="-120"/>
+                <a:latin typeface="Amiri" pitchFamily="2" charset="-78"/>
+                <a:cs typeface="Amiri" pitchFamily="2" charset="-78"/>
               </a:rPr>
               <a:t>قَيِّمْ عَمَلَكَ</a:t>
             </a:r>
@@ -30580,8 +30000,7 @@
                   <a:srgbClr val="8A93A0"/>
                 </a:solidFill>
                 <a:latin typeface="Calibri" pitchFamily="34" charset="0"/>
-                <a:ea typeface="Calibri" pitchFamily="34" charset="-122"/>
-                <a:cs typeface="Calibri" pitchFamily="34" charset="-120"/>
+                <a:cs typeface="Amiri" pitchFamily="2" charset="-78"/>
               </a:rPr>
               <a:t>Miftah Arabic · Progression P6 · IGCSE Bridge · P6-L09</a:t>
             </a:r>
@@ -30678,8 +30097,7 @@
                   <a:srgbClr val="1F2A37"/>
                 </a:solidFill>
                 <a:latin typeface="Calibri" pitchFamily="34" charset="0"/>
-                <a:ea typeface="Calibri" pitchFamily="34" charset="-122"/>
-                <a:cs typeface="Calibri" pitchFamily="34" charset="-120"/>
+                <a:cs typeface="Amiri" pitchFamily="2" charset="-78"/>
               </a:rPr>
               <a:t>I proved every reading answer from the Arabic text.</a:t>
             </a:r>
@@ -30744,8 +30162,7 @@
                   <a:srgbClr val="FFFFFF"/>
                 </a:solidFill>
                 <a:latin typeface="Calibri" pitchFamily="34" charset="0"/>
-                <a:ea typeface="Calibri" pitchFamily="34" charset="-122"/>
-                <a:cs typeface="Calibri" pitchFamily="34" charset="-120"/>
+                <a:cs typeface="Amiri" pitchFamily="2" charset="-78"/>
               </a:rPr>
               <a:t>CORE</a:t>
             </a:r>
@@ -30842,8 +30259,7 @@
                   <a:srgbClr val="1F2A37"/>
                 </a:solidFill>
                 <a:latin typeface="Calibri" pitchFamily="34" charset="0"/>
-                <a:ea typeface="Calibri" pitchFamily="34" charset="-122"/>
-                <a:cs typeface="Calibri" pitchFamily="34" charset="-120"/>
+                <a:cs typeface="Amiri" pitchFamily="2" charset="-78"/>
               </a:rPr>
               <a:t>I chose the correct form in every Q4 gap.</a:t>
             </a:r>
@@ -30908,8 +30324,7 @@
                   <a:srgbClr val="FFFFFF"/>
                 </a:solidFill>
                 <a:latin typeface="Calibri" pitchFamily="34" charset="0"/>
-                <a:ea typeface="Calibri" pitchFamily="34" charset="-122"/>
-                <a:cs typeface="Calibri" pitchFamily="34" charset="-120"/>
+                <a:cs typeface="Amiri" pitchFamily="2" charset="-78"/>
               </a:rPr>
               <a:t>DEVELOP</a:t>
             </a:r>
@@ -31006,8 +30421,7 @@
                   <a:srgbClr val="1F2A37"/>
                 </a:solidFill>
                 <a:latin typeface="Calibri" pitchFamily="34" charset="0"/>
-                <a:ea typeface="Calibri" pitchFamily="34" charset="-122"/>
-                <a:cs typeface="Calibri" pitchFamily="34" charset="-120"/>
+                <a:cs typeface="Amiri" pitchFamily="2" charset="-78"/>
               </a:rPr>
               <a:t>I wrote Q1 in the correct register and Q2 with full architecture.</a:t>
             </a:r>
@@ -31072,8 +30486,7 @@
                   <a:srgbClr val="FFFFFF"/>
                 </a:solidFill>
                 <a:latin typeface="Calibri" pitchFamily="34" charset="0"/>
-                <a:ea typeface="Calibri" pitchFamily="34" charset="-122"/>
-                <a:cs typeface="Calibri" pitchFamily="34" charset="-120"/>
+                <a:cs typeface="Amiri" pitchFamily="2" charset="-78"/>
               </a:rPr>
               <a:t>STRETCH</a:t>
             </a:r>
@@ -31170,8 +30583,7 @@
                   <a:srgbClr val="1F2A37"/>
                 </a:solidFill>
                 <a:latin typeface="Calibri" pitchFamily="34" charset="0"/>
-                <a:ea typeface="Calibri" pitchFamily="34" charset="-122"/>
-                <a:cs typeface="Calibri" pitchFamily="34" charset="-120"/>
+                <a:cs typeface="Amiri" pitchFamily="2" charset="-78"/>
               </a:rPr>
               <a:t>I kept Q1 under 20 minutes so Q2 had enough time.</a:t>
             </a:r>
@@ -31236,8 +30648,7 @@
                   <a:srgbClr val="FFFFFF"/>
                 </a:solidFill>
                 <a:latin typeface="Calibri" pitchFamily="34" charset="0"/>
-                <a:ea typeface="Calibri" pitchFamily="34" charset="-122"/>
-                <a:cs typeface="Calibri" pitchFamily="34" charset="-120"/>
+                <a:cs typeface="Amiri" pitchFamily="2" charset="-78"/>
               </a:rPr>
               <a:t>DEVELOP</a:t>
             </a:r>
@@ -31309,8 +30720,7 @@
                   <a:srgbClr val="2E8B57"/>
                 </a:solidFill>
                 <a:latin typeface="Calibri" pitchFamily="34" charset="0"/>
-                <a:ea typeface="Calibri" pitchFamily="34" charset="-122"/>
-                <a:cs typeface="Calibri" pitchFamily="34" charset="-120"/>
+                <a:cs typeface="Amiri" pitchFamily="2" charset="-78"/>
               </a:rPr>
               <a:t>WWW</a:t>
             </a:r>
@@ -31326,8 +30736,7 @@
                   <a:srgbClr val="1F2A37"/>
                 </a:solidFill>
                 <a:latin typeface="Calibri" pitchFamily="34" charset="0"/>
-                <a:ea typeface="Calibri" pitchFamily="34" charset="-122"/>
-                <a:cs typeface="Calibri" pitchFamily="34" charset="-120"/>
+                <a:cs typeface="Amiri" pitchFamily="2" charset="-78"/>
               </a:rPr>
               <a:t>What went well? One thing you did accurately.</a:t>
             </a:r>
@@ -31399,8 +30808,7 @@
                   <a:srgbClr val="C9780A"/>
                 </a:solidFill>
                 <a:latin typeface="Calibri" pitchFamily="34" charset="0"/>
-                <a:ea typeface="Calibri" pitchFamily="34" charset="-122"/>
-                <a:cs typeface="Calibri" pitchFamily="34" charset="-120"/>
+                <a:cs typeface="Amiri" pitchFamily="2" charset="-78"/>
               </a:rPr>
               <a:t>EBI</a:t>
             </a:r>
@@ -31416,8 +30824,7 @@
                   <a:srgbClr val="1F2A37"/>
                 </a:solidFill>
                 <a:latin typeface="Calibri" pitchFamily="34" charset="0"/>
-                <a:ea typeface="Calibri" pitchFamily="34" charset="-122"/>
-                <a:cs typeface="Calibri" pitchFamily="34" charset="-120"/>
+                <a:cs typeface="Amiri" pitchFamily="2" charset="-78"/>
               </a:rPr>
               <a:t>Even better if… One thing you will fix or add.</a:t>
             </a:r>
@@ -31455,8 +30862,7 @@
                   <a:srgbClr val="8A93A0"/>
                 </a:solidFill>
                 <a:latin typeface="Calibri" pitchFamily="34" charset="0"/>
-                <a:ea typeface="Calibri" pitchFamily="34" charset="-122"/>
-                <a:cs typeface="Calibri" pitchFamily="34" charset="-120"/>
+                <a:cs typeface="Amiri" pitchFamily="2" charset="-78"/>
               </a:rPr>
               <a:t>23 / 25</a:t>
             </a:r>
@@ -31550,9 +30956,8 @@
                 <a:solidFill>
                   <a:srgbClr val="D4AF37"/>
                 </a:solidFill>
-                <a:latin typeface="Amiri" pitchFamily="34" charset="0"/>
-                <a:ea typeface="Amiri" pitchFamily="34" charset="-122"/>
-                <a:cs typeface="Amiri" pitchFamily="34" charset="-120"/>
+                <a:latin typeface="Amiri" pitchFamily="2" charset="-78"/>
+                <a:cs typeface="Amiri" pitchFamily="2" charset="-78"/>
               </a:rPr>
               <a:t>م</a:t>
             </a:r>
@@ -31590,8 +30995,7 @@
                   <a:srgbClr val="1B3B6F"/>
                 </a:solidFill>
                 <a:latin typeface="Cambria" pitchFamily="34" charset="0"/>
-                <a:ea typeface="Cambria" pitchFamily="34" charset="-122"/>
-                <a:cs typeface="Cambria" pitchFamily="34" charset="-120"/>
+                <a:cs typeface="Amiri" pitchFamily="2" charset="-78"/>
               </a:rPr>
               <a:t>Al Madina Online School</a:t>
             </a:r>
@@ -31629,8 +31033,7 @@
                   <a:srgbClr val="8A6D1E"/>
                 </a:solidFill>
                 <a:latin typeface="Calibri" pitchFamily="34" charset="0"/>
-                <a:ea typeface="Calibri" pitchFamily="34" charset="-122"/>
-                <a:cs typeface="Calibri" pitchFamily="34" charset="-120"/>
+                <a:cs typeface="Amiri" pitchFamily="2" charset="-78"/>
               </a:rPr>
               <a:t>ARABIC DEPARTMENT · MIFTAH ARABIC · IGCSE 0544</a:t>
             </a:r>
@@ -31695,8 +31098,7 @@
                   <a:srgbClr val="FFFFFF"/>
                 </a:solidFill>
                 <a:latin typeface="Calibri" pitchFamily="34" charset="0"/>
-                <a:ea typeface="Calibri" pitchFamily="34" charset="-122"/>
-                <a:cs typeface="Calibri" pitchFamily="34" charset="-120"/>
+                <a:cs typeface="Amiri" pitchFamily="2" charset="-78"/>
               </a:rPr>
               <a:t>P6-L09 · IGCSE Bridge</a:t>
             </a:r>
@@ -31761,8 +31163,7 @@
                   <a:srgbClr val="FFFFFF"/>
                 </a:solidFill>
                 <a:latin typeface="Calibri" pitchFamily="34" charset="0"/>
-                <a:ea typeface="Calibri" pitchFamily="34" charset="-122"/>
-                <a:cs typeface="Calibri" pitchFamily="34" charset="-120"/>
+                <a:cs typeface="Amiri" pitchFamily="2" charset="-78"/>
               </a:rPr>
               <a:t>PREPARATION · 2 MIN</a:t>
             </a:r>
@@ -31800,8 +31201,7 @@
                   <a:srgbClr val="C45A3C"/>
                 </a:solidFill>
                 <a:latin typeface="Calibri" pitchFamily="34" charset="0"/>
-                <a:ea typeface="Calibri" pitchFamily="34" charset="-122"/>
-                <a:cs typeface="Calibri" pitchFamily="34" charset="-120"/>
+                <a:cs typeface="Amiri" pitchFamily="2" charset="-78"/>
               </a:rPr>
               <a:t>PREPARATION FOR NEXT LESSON · ABOUT 10 MINUTES</a:t>
             </a:r>
@@ -31839,8 +31239,7 @@
                   <a:srgbClr val="1B3B6F"/>
                 </a:solidFill>
                 <a:latin typeface="Cambria" pitchFamily="34" charset="0"/>
-                <a:ea typeface="Cambria" pitchFamily="34" charset="-122"/>
-                <a:cs typeface="Cambria" pitchFamily="34" charset="-120"/>
+                <a:cs typeface="Amiri" pitchFamily="2" charset="-78"/>
               </a:rPr>
               <a:t>Before P6-L10: get ready at home</a:t>
             </a:r>
@@ -31877,9 +31276,8 @@
                 <a:solidFill>
                   <a:srgbClr val="8A6D1E"/>
                 </a:solidFill>
-                <a:latin typeface="Amiri" pitchFamily="34" charset="0"/>
-                <a:ea typeface="Amiri" pitchFamily="34" charset="-122"/>
-                <a:cs typeface="Amiri" pitchFamily="34" charset="-120"/>
+                <a:latin typeface="Amiri" pitchFamily="2" charset="-78"/>
+                <a:cs typeface="Amiri" pitchFamily="2" charset="-78"/>
               </a:rPr>
               <a:t>التَّحْضِيرُ لِلدَّرْسِ القَادِمِ</a:t>
             </a:r>
@@ -31917,8 +31315,7 @@
                   <a:srgbClr val="8A93A0"/>
                 </a:solidFill>
                 <a:latin typeface="Calibri" pitchFamily="34" charset="0"/>
-                <a:ea typeface="Calibri" pitchFamily="34" charset="-122"/>
-                <a:cs typeface="Calibri" pitchFamily="34" charset="-120"/>
+                <a:cs typeface="Amiri" pitchFamily="2" charset="-78"/>
               </a:rPr>
               <a:t>Miftah Arabic · Progression P6 · IGCSE Bridge · P6-L09</a:t>
             </a:r>
@@ -32039,8 +31436,7 @@
                   <a:srgbClr val="C45A3C"/>
                 </a:solidFill>
                 <a:latin typeface="Calibri" pitchFamily="34" charset="0"/>
-                <a:ea typeface="Calibri" pitchFamily="34" charset="-122"/>
-                <a:cs typeface="Calibri" pitchFamily="34" charset="-120"/>
+                <a:cs typeface="Amiri" pitchFamily="2" charset="-78"/>
               </a:rPr>
               <a:t>LEARN THESE 5 WORDS</a:t>
             </a:r>
@@ -32056,8 +31452,7 @@
                   <a:srgbClr val="5A6472"/>
                 </a:solidFill>
                 <a:latin typeface="Calibri" pitchFamily="34" charset="0"/>
-                <a:ea typeface="Calibri" pitchFamily="34" charset="-122"/>
-                <a:cs typeface="Calibri" pitchFamily="34" charset="-120"/>
+                <a:cs typeface="Amiri" pitchFamily="2" charset="-78"/>
               </a:rPr>
               <a:t>for P6-L10 · Mock Examination — Paper 3 Speaking (Full IGCSE Format)</a:t>
             </a:r>
@@ -32094,9 +31489,8 @@
                 <a:solidFill>
                   <a:srgbClr val="1B3B6F"/>
                 </a:solidFill>
-                <a:latin typeface="Amiri" pitchFamily="34" charset="0"/>
-                <a:ea typeface="Amiri" pitchFamily="34" charset="-122"/>
-                <a:cs typeface="Amiri" pitchFamily="34" charset="-120"/>
+                <a:latin typeface="Amiri" pitchFamily="2" charset="-78"/>
+                <a:cs typeface="Amiri" pitchFamily="2" charset="-78"/>
               </a:rPr>
               <a:t>تَمْثِيلُ الدَّوْرِ</a:t>
             </a:r>
@@ -32134,8 +31528,7 @@
                   <a:srgbClr val="1F2A37"/>
                 </a:solidFill>
                 <a:latin typeface="Calibri" pitchFamily="34" charset="0"/>
-                <a:ea typeface="Calibri" pitchFamily="34" charset="-122"/>
-                <a:cs typeface="Calibri" pitchFamily="34" charset="-120"/>
+                <a:cs typeface="Amiri" pitchFamily="2" charset="-78"/>
               </a:rPr>
               <a:t>role play</a:t>
             </a:r>
@@ -32148,8 +31541,7 @@
                   <a:srgbClr val="5A6472"/>
                 </a:solidFill>
                 <a:latin typeface="Calibri" pitchFamily="34" charset="0"/>
-                <a:ea typeface="Calibri" pitchFamily="34" charset="-122"/>
-                <a:cs typeface="Calibri" pitchFamily="34" charset="-120"/>
+                <a:cs typeface="Amiri" pitchFamily="2" charset="-78"/>
               </a:rPr>
               <a:t>  —</a:t>
             </a:r>
@@ -32186,9 +31578,8 @@
                 <a:solidFill>
                   <a:srgbClr val="1B3B6F"/>
                 </a:solidFill>
-                <a:latin typeface="Amiri" pitchFamily="34" charset="0"/>
-                <a:ea typeface="Amiri" pitchFamily="34" charset="-122"/>
-                <a:cs typeface="Amiri" pitchFamily="34" charset="-120"/>
+                <a:latin typeface="Amiri" pitchFamily="2" charset="-78"/>
+                <a:cs typeface="Amiri" pitchFamily="2" charset="-78"/>
               </a:rPr>
               <a:t>المُحَادَثَةُ المَوْضُوعِيَّةُ</a:t>
             </a:r>
@@ -32226,8 +31617,7 @@
                   <a:srgbClr val="1F2A37"/>
                 </a:solidFill>
                 <a:latin typeface="Calibri" pitchFamily="34" charset="0"/>
-                <a:ea typeface="Calibri" pitchFamily="34" charset="-122"/>
-                <a:cs typeface="Calibri" pitchFamily="34" charset="-120"/>
+                <a:cs typeface="Amiri" pitchFamily="2" charset="-78"/>
               </a:rPr>
               <a:t>topic conversation</a:t>
             </a:r>
@@ -32240,8 +31630,7 @@
                   <a:srgbClr val="5A6472"/>
                 </a:solidFill>
                 <a:latin typeface="Calibri" pitchFamily="34" charset="0"/>
-                <a:ea typeface="Calibri" pitchFamily="34" charset="-122"/>
-                <a:cs typeface="Calibri" pitchFamily="34" charset="-120"/>
+                <a:cs typeface="Amiri" pitchFamily="2" charset="-78"/>
               </a:rPr>
               <a:t>  —</a:t>
             </a:r>
@@ -32278,9 +31667,8 @@
                 <a:solidFill>
                   <a:srgbClr val="1B3B6F"/>
                 </a:solidFill>
-                <a:latin typeface="Amiri" pitchFamily="34" charset="0"/>
-                <a:ea typeface="Amiri" pitchFamily="34" charset="-122"/>
-                <a:cs typeface="Amiri" pitchFamily="34" charset="-120"/>
+                <a:latin typeface="Amiri" pitchFamily="2" charset="-78"/>
+                <a:cs typeface="Amiri" pitchFamily="2" charset="-78"/>
               </a:rPr>
               <a:t>التَّوْسِيعُ فِي الإِجَابَةِ</a:t>
             </a:r>
@@ -32318,8 +31706,7 @@
                   <a:srgbClr val="1F2A37"/>
                 </a:solidFill>
                 <a:latin typeface="Calibri" pitchFamily="34" charset="0"/>
-                <a:ea typeface="Calibri" pitchFamily="34" charset="-122"/>
-                <a:cs typeface="Calibri" pitchFamily="34" charset="-120"/>
+                <a:cs typeface="Amiri" pitchFamily="2" charset="-78"/>
               </a:rPr>
               <a:t>extending the answer</a:t>
             </a:r>
@@ -32332,8 +31719,7 @@
                   <a:srgbClr val="5A6472"/>
                 </a:solidFill>
                 <a:latin typeface="Calibri" pitchFamily="34" charset="0"/>
-                <a:ea typeface="Calibri" pitchFamily="34" charset="-122"/>
-                <a:cs typeface="Calibri" pitchFamily="34" charset="-120"/>
+                <a:cs typeface="Amiri" pitchFamily="2" charset="-78"/>
               </a:rPr>
               <a:t>  —</a:t>
             </a:r>
@@ -32370,9 +31756,8 @@
                 <a:solidFill>
                   <a:srgbClr val="1B3B6F"/>
                 </a:solidFill>
-                <a:latin typeface="Amiri" pitchFamily="34" charset="0"/>
-                <a:ea typeface="Amiri" pitchFamily="34" charset="-122"/>
-                <a:cs typeface="Amiri" pitchFamily="34" charset="-120"/>
+                <a:latin typeface="Amiri" pitchFamily="2" charset="-78"/>
+                <a:cs typeface="Amiri" pitchFamily="2" charset="-78"/>
               </a:rPr>
               <a:t>لُغَةُ التَّوَقُّفِ وَالتَّفْكِيرِ</a:t>
             </a:r>
@@ -32410,8 +31795,7 @@
                   <a:srgbClr val="1F2A37"/>
                 </a:solidFill>
                 <a:latin typeface="Calibri" pitchFamily="34" charset="0"/>
-                <a:ea typeface="Calibri" pitchFamily="34" charset="-122"/>
-                <a:cs typeface="Calibri" pitchFamily="34" charset="-120"/>
+                <a:cs typeface="Amiri" pitchFamily="2" charset="-78"/>
               </a:rPr>
               <a:t>pause-and-think language</a:t>
             </a:r>
@@ -32424,8 +31808,7 @@
                   <a:srgbClr val="5A6472"/>
                 </a:solidFill>
                 <a:latin typeface="Calibri" pitchFamily="34" charset="0"/>
-                <a:ea typeface="Calibri" pitchFamily="34" charset="-122"/>
-                <a:cs typeface="Calibri" pitchFamily="34" charset="-120"/>
+                <a:cs typeface="Amiri" pitchFamily="2" charset="-78"/>
               </a:rPr>
               <a:t>  —</a:t>
             </a:r>
@@ -32462,9 +31845,8 @@
                 <a:solidFill>
                   <a:srgbClr val="1B3B6F"/>
                 </a:solidFill>
-                <a:latin typeface="Amiri" pitchFamily="34" charset="0"/>
-                <a:ea typeface="Amiri" pitchFamily="34" charset="-122"/>
-                <a:cs typeface="Amiri" pitchFamily="34" charset="-120"/>
+                <a:latin typeface="Amiri" pitchFamily="2" charset="-78"/>
+                <a:cs typeface="Amiri" pitchFamily="2" charset="-78"/>
               </a:rPr>
               <a:t>التَّحَدُّثُ بِثِقَةٍ</a:t>
             </a:r>
@@ -32502,8 +31884,7 @@
                   <a:srgbClr val="1F2A37"/>
                 </a:solidFill>
                 <a:latin typeface="Calibri" pitchFamily="34" charset="0"/>
-                <a:ea typeface="Calibri" pitchFamily="34" charset="-122"/>
-                <a:cs typeface="Calibri" pitchFamily="34" charset="-120"/>
+                <a:cs typeface="Amiri" pitchFamily="2" charset="-78"/>
               </a:rPr>
               <a:t>speaking with confidence</a:t>
             </a:r>
@@ -32516,8 +31897,7 @@
                   <a:srgbClr val="5A6472"/>
                 </a:solidFill>
                 <a:latin typeface="Calibri" pitchFamily="34" charset="0"/>
-                <a:ea typeface="Calibri" pitchFamily="34" charset="-122"/>
-                <a:cs typeface="Calibri" pitchFamily="34" charset="-120"/>
+                <a:cs typeface="Amiri" pitchFamily="2" charset="-78"/>
               </a:rPr>
               <a:t>  —</a:t>
             </a:r>
@@ -32555,8 +31935,7 @@
                   <a:srgbClr val="C45A3C"/>
                 </a:solidFill>
                 <a:latin typeface="Calibri" pitchFamily="34" charset="0"/>
-                <a:ea typeface="Calibri" pitchFamily="34" charset="-122"/>
-                <a:cs typeface="Calibri" pitchFamily="34" charset="-120"/>
+                <a:cs typeface="Amiri" pitchFamily="2" charset="-78"/>
               </a:rPr>
               <a:t>AND ANSWER ONE QUESTION</a:t>
             </a:r>
@@ -32594,8 +31973,7 @@
                   <a:srgbClr val="1F2A37"/>
                 </a:solidFill>
                 <a:latin typeface="Calibri" pitchFamily="34" charset="0"/>
-                <a:ea typeface="Calibri" pitchFamily="34" charset="-122"/>
-                <a:cs typeface="Calibri" pitchFamily="34" charset="-120"/>
+                <a:cs typeface="Amiri" pitchFamily="2" charset="-78"/>
               </a:rPr>
               <a:t>Write three emergency sentences you will use in the speaking mock.</a:t>
             </a:r>
@@ -32635,9 +32013,8 @@
                 <a:solidFill>
                   <a:srgbClr val="1B3B6F"/>
                 </a:solidFill>
-                <a:latin typeface="Amiri" pitchFamily="34" charset="0"/>
-                <a:ea typeface="Amiri" pitchFamily="34" charset="-122"/>
-                <a:cs typeface="Amiri" pitchFamily="34" charset="-120"/>
+                <a:latin typeface="Amiri" pitchFamily="2" charset="-78"/>
+                <a:cs typeface="Amiri" pitchFamily="2" charset="-78"/>
               </a:rPr>
               <a:t>يُشَارُ إِلَى أَنَّ ______ ، وَإِذَا ______ ، سَوْفَ ______ .</a:t>
             </a:r>
@@ -32675,8 +32052,7 @@
                   <a:srgbClr val="1B3B6F"/>
                 </a:solidFill>
                 <a:latin typeface="Calibri" pitchFamily="34" charset="0"/>
-                <a:ea typeface="Calibri" pitchFamily="34" charset="-122"/>
-                <a:cs typeface="Calibri" pitchFamily="34" charset="-120"/>
+                <a:cs typeface="Amiri" pitchFamily="2" charset="-78"/>
               </a:rPr>
               <a:t>HOMEWORK — CHOOSE YOUR ROUTE</a:t>
             </a:r>
@@ -32775,8 +32151,7 @@
                   <a:srgbClr val="FFFFFF"/>
                 </a:solidFill>
                 <a:latin typeface="Calibri" pitchFamily="34" charset="0"/>
-                <a:ea typeface="Calibri" pitchFamily="34" charset="-122"/>
-                <a:cs typeface="Calibri" pitchFamily="34" charset="-120"/>
+                <a:cs typeface="Amiri" pitchFamily="2" charset="-78"/>
               </a:rPr>
               <a:t>CORE</a:t>
             </a:r>
@@ -32814,8 +32189,7 @@
                   <a:srgbClr val="1F2A37"/>
                 </a:solidFill>
                 <a:latin typeface="Calibri" pitchFamily="34" charset="0"/>
-                <a:ea typeface="Calibri" pitchFamily="34" charset="-122"/>
-                <a:cs typeface="Calibri" pitchFamily="34" charset="-120"/>
+                <a:cs typeface="Amiri" pitchFamily="2" charset="-78"/>
               </a:rPr>
               <a:t>Sit Q2 in 35 minutes (title A or C); revise the five speaking words.</a:t>
             </a:r>
@@ -32914,8 +32288,7 @@
                   <a:srgbClr val="FFFFFF"/>
                 </a:solidFill>
                 <a:latin typeface="Calibri" pitchFamily="34" charset="0"/>
-                <a:ea typeface="Calibri" pitchFamily="34" charset="-122"/>
-                <a:cs typeface="Calibri" pitchFamily="34" charset="-120"/>
+                <a:cs typeface="Amiri" pitchFamily="2" charset="-78"/>
               </a:rPr>
               <a:t>DEVELOP</a:t>
             </a:r>
@@ -32953,8 +32326,7 @@
                   <a:srgbClr val="1F2A37"/>
                 </a:solidFill>
                 <a:latin typeface="Calibri" pitchFamily="34" charset="0"/>
-                <a:ea typeface="Calibri" pitchFamily="34" charset="-122"/>
-                <a:cs typeface="Calibri" pitchFamily="34" charset="-120"/>
+                <a:cs typeface="Amiri" pitchFamily="2" charset="-78"/>
               </a:rPr>
               <a:t>Sit Q2 in 35 minutes with the full checklist; revise the five speaking words.</a:t>
             </a:r>
@@ -33053,8 +32425,7 @@
                   <a:srgbClr val="FFFFFF"/>
                 </a:solidFill>
                 <a:latin typeface="Calibri" pitchFamily="34" charset="0"/>
-                <a:ea typeface="Calibri" pitchFamily="34" charset="-122"/>
-                <a:cs typeface="Calibri" pitchFamily="34" charset="-120"/>
+                <a:cs typeface="Amiri" pitchFamily="2" charset="-78"/>
               </a:rPr>
               <a:t>STRETCH</a:t>
             </a:r>
@@ -33092,8 +32463,7 @@
                   <a:srgbClr val="1F2A37"/>
                 </a:solidFill>
                 <a:latin typeface="Calibri" pitchFamily="34" charset="0"/>
-                <a:ea typeface="Calibri" pitchFamily="34" charset="-122"/>
-                <a:cs typeface="Calibri" pitchFamily="34" charset="-120"/>
+                <a:cs typeface="Amiri" pitchFamily="2" charset="-78"/>
               </a:rPr>
               <a:t>Sit Q2 in 35 minutes, then check it against the four model chips; revise the five speaking words.</a:t>
             </a:r>
@@ -33131,8 +32501,7 @@
                   <a:srgbClr val="8A93A0"/>
                 </a:solidFill>
                 <a:latin typeface="Calibri" pitchFamily="34" charset="0"/>
-                <a:ea typeface="Calibri" pitchFamily="34" charset="-122"/>
-                <a:cs typeface="Calibri" pitchFamily="34" charset="-120"/>
+                <a:cs typeface="Amiri" pitchFamily="2" charset="-78"/>
               </a:rPr>
               <a:t>24 / 25</a:t>
             </a:r>
@@ -33276,8 +32645,7 @@
                   <a:srgbClr val="D4AF37"/>
                 </a:solidFill>
                 <a:latin typeface="Calibri" pitchFamily="34" charset="0"/>
-                <a:ea typeface="Calibri" pitchFamily="34" charset="-122"/>
-                <a:cs typeface="Calibri" pitchFamily="34" charset="-120"/>
+                <a:cs typeface="Amiri" pitchFamily="2" charset="-78"/>
               </a:rPr>
               <a:t>P6-L09 COMPLETE</a:t>
             </a:r>
@@ -33314,9 +32682,8 @@
                 <a:solidFill>
                   <a:srgbClr val="FFFFFF"/>
                 </a:solidFill>
-                <a:latin typeface="Amiri" pitchFamily="34" charset="0"/>
-                <a:ea typeface="Amiri" pitchFamily="34" charset="-122"/>
-                <a:cs typeface="Amiri" pitchFamily="34" charset="-120"/>
+                <a:latin typeface="Amiri" pitchFamily="2" charset="-78"/>
+                <a:cs typeface="Amiri" pitchFamily="2" charset="-78"/>
               </a:rPr>
               <a:t>أَحْسَنْتُمْ! إِلَى اللِّقَاءِ</a:t>
             </a:r>
@@ -33354,8 +32721,7 @@
                   <a:srgbClr val="C6D2E6"/>
                 </a:solidFill>
                 <a:latin typeface="Calibri" pitchFamily="34" charset="0"/>
-                <a:ea typeface="Calibri" pitchFamily="34" charset="-122"/>
-                <a:cs typeface="Calibri" pitchFamily="34" charset="-120"/>
+                <a:cs typeface="Amiri" pitchFamily="2" charset="-78"/>
               </a:rPr>
               <a:t>Well done — see you next lesson.</a:t>
             </a:r>
@@ -33393,8 +32759,7 @@
                   <a:srgbClr val="D4AF37"/>
                 </a:solidFill>
                 <a:latin typeface="Calibri" pitchFamily="34" charset="0"/>
-                <a:ea typeface="Calibri" pitchFamily="34" charset="-122"/>
-                <a:cs typeface="Calibri" pitchFamily="34" charset="-120"/>
+                <a:cs typeface="Amiri" pitchFamily="2" charset="-78"/>
               </a:rPr>
               <a:t>NEXT LESSON</a:t>
             </a:r>
@@ -33432,8 +32797,7 @@
                   <a:srgbClr val="FFFFFF"/>
                 </a:solidFill>
                 <a:latin typeface="Cambria" pitchFamily="34" charset="0"/>
-                <a:ea typeface="Cambria" pitchFamily="34" charset="-122"/>
-                <a:cs typeface="Cambria" pitchFamily="34" charset="-120"/>
+                <a:cs typeface="Amiri" pitchFamily="2" charset="-78"/>
               </a:rPr>
               <a:t>P6-L10 · Mock Examination — Paper 3 Speaking (Full IGCSE Format)</a:t>
             </a:r>
@@ -33470,9 +32834,8 @@
                 <a:solidFill>
                   <a:srgbClr val="D4AF37"/>
                 </a:solidFill>
-                <a:latin typeface="Amiri" pitchFamily="34" charset="0"/>
-                <a:ea typeface="Amiri" pitchFamily="34" charset="-122"/>
-                <a:cs typeface="Amiri" pitchFamily="34" charset="-120"/>
+                <a:latin typeface="Amiri" pitchFamily="2" charset="-78"/>
+                <a:cs typeface="Amiri" pitchFamily="2" charset="-78"/>
               </a:rPr>
               <a:t>امْتِحَانُ المُحَاكَاةِ — الوَرَقَةُ الثَّالِثَةُ: التَّحَدُّثُ</a:t>
             </a:r>
@@ -33510,8 +32873,7 @@
                   <a:srgbClr val="FFFFFF"/>
                 </a:solidFill>
                 <a:latin typeface="Calibri" pitchFamily="34" charset="0"/>
-                <a:ea typeface="Calibri" pitchFamily="34" charset="-122"/>
-                <a:cs typeface="Calibri" pitchFamily="34" charset="-120"/>
+                <a:cs typeface="Amiri" pitchFamily="2" charset="-78"/>
               </a:rPr>
               <a:t>Remember: prove every reading answer from the text; write in the right register from the first line; Q1 under 20 minutes so that Q2 gets its full architecture.</a:t>
             </a:r>
@@ -33605,9 +32967,8 @@
                 <a:solidFill>
                   <a:srgbClr val="D4AF37"/>
                 </a:solidFill>
-                <a:latin typeface="Amiri" pitchFamily="34" charset="0"/>
-                <a:ea typeface="Amiri" pitchFamily="34" charset="-122"/>
-                <a:cs typeface="Amiri" pitchFamily="34" charset="-120"/>
+                <a:latin typeface="Amiri" pitchFamily="2" charset="-78"/>
+                <a:cs typeface="Amiri" pitchFamily="2" charset="-78"/>
               </a:rPr>
               <a:t>م</a:t>
             </a:r>
@@ -33645,8 +33006,7 @@
                   <a:srgbClr val="1B3B6F"/>
                 </a:solidFill>
                 <a:latin typeface="Cambria" pitchFamily="34" charset="0"/>
-                <a:ea typeface="Cambria" pitchFamily="34" charset="-122"/>
-                <a:cs typeface="Cambria" pitchFamily="34" charset="-120"/>
+                <a:cs typeface="Amiri" pitchFamily="2" charset="-78"/>
               </a:rPr>
               <a:t>Al Madina Online School</a:t>
             </a:r>
@@ -33684,8 +33044,7 @@
                   <a:srgbClr val="8A6D1E"/>
                 </a:solidFill>
                 <a:latin typeface="Calibri" pitchFamily="34" charset="0"/>
-                <a:ea typeface="Calibri" pitchFamily="34" charset="-122"/>
-                <a:cs typeface="Calibri" pitchFamily="34" charset="-120"/>
+                <a:cs typeface="Amiri" pitchFamily="2" charset="-78"/>
               </a:rPr>
               <a:t>ARABIC DEPARTMENT · MIFTAH ARABIC · IGCSE 0544</a:t>
             </a:r>
@@ -33750,8 +33109,7 @@
                   <a:srgbClr val="FFFFFF"/>
                 </a:solidFill>
                 <a:latin typeface="Calibri" pitchFamily="34" charset="0"/>
-                <a:ea typeface="Calibri" pitchFamily="34" charset="-122"/>
-                <a:cs typeface="Calibri" pitchFamily="34" charset="-120"/>
+                <a:cs typeface="Amiri" pitchFamily="2" charset="-78"/>
               </a:rPr>
               <a:t>P6-L09 · IGCSE Bridge</a:t>
             </a:r>
@@ -33816,8 +33174,7 @@
                   <a:srgbClr val="FFFFFF"/>
                 </a:solidFill>
                 <a:latin typeface="Calibri" pitchFamily="34" charset="0"/>
-                <a:ea typeface="Calibri" pitchFamily="34" charset="-122"/>
-                <a:cs typeface="Calibri" pitchFamily="34" charset="-120"/>
+                <a:cs typeface="Amiri" pitchFamily="2" charset="-78"/>
               </a:rPr>
               <a:t>WELCOME</a:t>
             </a:r>
@@ -33855,8 +33212,7 @@
                   <a:srgbClr val="5A6472"/>
                 </a:solidFill>
                 <a:latin typeface="Calibri" pitchFamily="34" charset="0"/>
-                <a:ea typeface="Calibri" pitchFamily="34" charset="-122"/>
-                <a:cs typeface="Calibri" pitchFamily="34" charset="-120"/>
+                <a:cs typeface="Amiri" pitchFamily="2" charset="-78"/>
               </a:rPr>
               <a:t>TODAY’S LESSON MAP</a:t>
             </a:r>
@@ -33894,8 +33250,7 @@
                   <a:srgbClr val="1B3B6F"/>
                 </a:solidFill>
                 <a:latin typeface="Cambria" pitchFamily="34" charset="0"/>
-                <a:ea typeface="Cambria" pitchFamily="34" charset="-122"/>
-                <a:cs typeface="Cambria" pitchFamily="34" charset="-120"/>
+                <a:cs typeface="Amiri" pitchFamily="2" charset="-78"/>
               </a:rPr>
               <a:t>Our lesson today, step by step</a:t>
             </a:r>
@@ -33932,9 +33287,8 @@
                 <a:solidFill>
                   <a:srgbClr val="8A6D1E"/>
                 </a:solidFill>
-                <a:latin typeface="Amiri" pitchFamily="34" charset="0"/>
-                <a:ea typeface="Amiri" pitchFamily="34" charset="-122"/>
-                <a:cs typeface="Amiri" pitchFamily="34" charset="-120"/>
+                <a:latin typeface="Amiri" pitchFamily="2" charset="-78"/>
+                <a:cs typeface="Amiri" pitchFamily="2" charset="-78"/>
               </a:rPr>
               <a:t>خَرِيطَةُ الدَّرْسِ</a:t>
             </a:r>
@@ -33972,8 +33326,7 @@
                   <a:srgbClr val="8A93A0"/>
                 </a:solidFill>
                 <a:latin typeface="Calibri" pitchFamily="34" charset="0"/>
-                <a:ea typeface="Calibri" pitchFamily="34" charset="-122"/>
-                <a:cs typeface="Calibri" pitchFamily="34" charset="-120"/>
+                <a:cs typeface="Amiri" pitchFamily="2" charset="-78"/>
               </a:rPr>
               <a:t>Miftah Arabic · Progression P6 · IGCSE Bridge · P6-L09</a:t>
             </a:r>
@@ -34072,8 +33425,7 @@
                   <a:srgbClr val="FFFFFF"/>
                 </a:solidFill>
                 <a:latin typeface="Calibri" pitchFamily="34" charset="0"/>
-                <a:ea typeface="Calibri" pitchFamily="34" charset="-122"/>
-                <a:cs typeface="Calibri" pitchFamily="34" charset="-120"/>
+                <a:cs typeface="Amiri" pitchFamily="2" charset="-78"/>
               </a:rPr>
               <a:t>DO NOW</a:t>
             </a:r>
@@ -34111,8 +33463,7 @@
                   <a:srgbClr val="E8EDF5"/>
                 </a:solidFill>
                 <a:latin typeface="Calibri" pitchFamily="34" charset="0"/>
-                <a:ea typeface="Calibri" pitchFamily="34" charset="-122"/>
-                <a:cs typeface="Calibri" pitchFamily="34" charset="-120"/>
+                <a:cs typeface="Amiri" pitchFamily="2" charset="-78"/>
               </a:rPr>
               <a:t>4 min</a:t>
             </a:r>
@@ -34175,8 +33526,7 @@
                   <a:srgbClr val="1B3B6F"/>
                 </a:solidFill>
                 <a:latin typeface="Calibri" pitchFamily="34" charset="0"/>
-                <a:ea typeface="Calibri" pitchFamily="34" charset="-122"/>
-                <a:cs typeface="Calibri" pitchFamily="34" charset="-120"/>
+                <a:cs typeface="Amiri" pitchFamily="2" charset="-78"/>
               </a:rPr>
               <a:t>1</a:t>
             </a:r>
@@ -34214,8 +33564,7 @@
                   <a:srgbClr val="1F2A37"/>
                 </a:solidFill>
                 <a:latin typeface="Calibri" pitchFamily="34" charset="0"/>
-                <a:ea typeface="Calibri" pitchFamily="34" charset="-122"/>
-                <a:cs typeface="Calibri" pitchFamily="34" charset="-120"/>
+                <a:cs typeface="Amiri" pitchFamily="2" charset="-78"/>
               </a:rPr>
               <a:t>Retrieval: reading words and register.</a:t>
             </a:r>
@@ -34252,9 +33601,8 @@
                 <a:solidFill>
                   <a:srgbClr val="0E7C86"/>
                 </a:solidFill>
-                <a:latin typeface="Amiri" pitchFamily="34" charset="0"/>
-                <a:ea typeface="Amiri" pitchFamily="34" charset="-122"/>
-                <a:cs typeface="Amiri" pitchFamily="34" charset="-120"/>
+                <a:latin typeface="Amiri" pitchFamily="2" charset="-78"/>
+                <a:cs typeface="Amiri" pitchFamily="2" charset="-78"/>
               </a:rPr>
               <a:t>اِبْدَأِ الآنَ</a:t>
             </a:r>
@@ -34353,8 +33701,7 @@
                   <a:srgbClr val="FFFFFF"/>
                 </a:solidFill>
                 <a:latin typeface="Calibri" pitchFamily="34" charset="0"/>
-                <a:ea typeface="Calibri" pitchFamily="34" charset="-122"/>
-                <a:cs typeface="Calibri" pitchFamily="34" charset="-120"/>
+                <a:cs typeface="Amiri" pitchFamily="2" charset="-78"/>
               </a:rPr>
               <a:t>TEACHER INSTRUCTION</a:t>
             </a:r>
@@ -34392,8 +33739,7 @@
                   <a:srgbClr val="E8EDF5"/>
                 </a:solidFill>
                 <a:latin typeface="Calibri" pitchFamily="34" charset="0"/>
-                <a:ea typeface="Calibri" pitchFamily="34" charset="-122"/>
-                <a:cs typeface="Calibri" pitchFamily="34" charset="-120"/>
+                <a:cs typeface="Amiri" pitchFamily="2" charset="-78"/>
               </a:rPr>
               <a:t>2 min</a:t>
             </a:r>
@@ -34456,8 +33802,7 @@
                   <a:srgbClr val="1B3B6F"/>
                 </a:solidFill>
                 <a:latin typeface="Calibri" pitchFamily="34" charset="0"/>
-                <a:ea typeface="Calibri" pitchFamily="34" charset="-122"/>
-                <a:cs typeface="Calibri" pitchFamily="34" charset="-120"/>
+                <a:cs typeface="Amiri" pitchFamily="2" charset="-78"/>
               </a:rPr>
               <a:t>2</a:t>
             </a:r>
@@ -34495,8 +33840,7 @@
                   <a:srgbClr val="1F2A37"/>
                 </a:solidFill>
                 <a:latin typeface="Calibri" pitchFamily="34" charset="0"/>
-                <a:ea typeface="Calibri" pitchFamily="34" charset="-122"/>
-                <a:cs typeface="Calibri" pitchFamily="34" charset="-120"/>
+                <a:cs typeface="Amiri" pitchFamily="2" charset="-78"/>
               </a:rPr>
               <a:t>Exam conditions and timing.</a:t>
             </a:r>
@@ -34533,9 +33877,8 @@
                 <a:solidFill>
                   <a:srgbClr val="1B3B6F"/>
                 </a:solidFill>
-                <a:latin typeface="Amiri" pitchFamily="34" charset="0"/>
-                <a:ea typeface="Amiri" pitchFamily="34" charset="-122"/>
-                <a:cs typeface="Amiri" pitchFamily="34" charset="-120"/>
+                <a:latin typeface="Amiri" pitchFamily="2" charset="-78"/>
+                <a:cs typeface="Amiri" pitchFamily="2" charset="-78"/>
               </a:rPr>
               <a:t>ظُرُوفُ الامْتِحَانِ</a:t>
             </a:r>
@@ -34634,8 +33977,7 @@
                   <a:srgbClr val="FFFFFF"/>
                 </a:solidFill>
                 <a:latin typeface="Calibri" pitchFamily="34" charset="0"/>
-                <a:ea typeface="Calibri" pitchFamily="34" charset="-122"/>
-                <a:cs typeface="Calibri" pitchFamily="34" charset="-120"/>
+                <a:cs typeface="Amiri" pitchFamily="2" charset="-78"/>
               </a:rPr>
               <a:t>YOU DO</a:t>
             </a:r>
@@ -34673,8 +34015,7 @@
                   <a:srgbClr val="E8EDF5"/>
                 </a:solidFill>
                 <a:latin typeface="Calibri" pitchFamily="34" charset="0"/>
-                <a:ea typeface="Calibri" pitchFamily="34" charset="-122"/>
-                <a:cs typeface="Calibri" pitchFamily="34" charset="-120"/>
+                <a:cs typeface="Amiri" pitchFamily="2" charset="-78"/>
               </a:rPr>
               <a:t>20 min</a:t>
             </a:r>
@@ -34737,8 +34078,7 @@
                   <a:srgbClr val="1B3B6F"/>
                 </a:solidFill>
                 <a:latin typeface="Calibri" pitchFamily="34" charset="0"/>
-                <a:ea typeface="Calibri" pitchFamily="34" charset="-122"/>
-                <a:cs typeface="Calibri" pitchFamily="34" charset="-120"/>
+                <a:cs typeface="Amiri" pitchFamily="2" charset="-78"/>
               </a:rPr>
               <a:t>3</a:t>
             </a:r>
@@ -34776,8 +34116,7 @@
                   <a:srgbClr val="1F2A37"/>
                 </a:solidFill>
                 <a:latin typeface="Calibri" pitchFamily="34" charset="0"/>
-                <a:ea typeface="Calibri" pitchFamily="34" charset="-122"/>
-                <a:cs typeface="Calibri" pitchFamily="34" charset="-120"/>
+                <a:cs typeface="Amiri" pitchFamily="2" charset="-78"/>
               </a:rPr>
               <a:t>Paper 2 Reading: three texts.</a:t>
             </a:r>
@@ -34814,9 +34153,8 @@
                 <a:solidFill>
                   <a:srgbClr val="1E6B52"/>
                 </a:solidFill>
-                <a:latin typeface="Amiri" pitchFamily="34" charset="0"/>
-                <a:ea typeface="Amiri" pitchFamily="34" charset="-122"/>
-                <a:cs typeface="Amiri" pitchFamily="34" charset="-120"/>
+                <a:latin typeface="Amiri" pitchFamily="2" charset="-78"/>
+                <a:cs typeface="Amiri" pitchFamily="2" charset="-78"/>
               </a:rPr>
               <a:t>القِرَاءَةُ</a:t>
             </a:r>
@@ -34915,8 +34253,7 @@
                   <a:srgbClr val="FFFFFF"/>
                 </a:solidFill>
                 <a:latin typeface="Calibri" pitchFamily="34" charset="0"/>
-                <a:ea typeface="Calibri" pitchFamily="34" charset="-122"/>
-                <a:cs typeface="Calibri" pitchFamily="34" charset="-120"/>
+                <a:cs typeface="Amiri" pitchFamily="2" charset="-78"/>
               </a:rPr>
               <a:t>YOU DO</a:t>
             </a:r>
@@ -34954,8 +34291,7 @@
                   <a:srgbClr val="E8EDF5"/>
                 </a:solidFill>
                 <a:latin typeface="Calibri" pitchFamily="34" charset="0"/>
-                <a:ea typeface="Calibri" pitchFamily="34" charset="-122"/>
-                <a:cs typeface="Calibri" pitchFamily="34" charset="-120"/>
+                <a:cs typeface="Amiri" pitchFamily="2" charset="-78"/>
               </a:rPr>
               <a:t>20 min</a:t>
             </a:r>
@@ -35018,8 +34354,7 @@
                   <a:srgbClr val="1B3B6F"/>
                 </a:solidFill>
                 <a:latin typeface="Calibri" pitchFamily="34" charset="0"/>
-                <a:ea typeface="Calibri" pitchFamily="34" charset="-122"/>
-                <a:cs typeface="Calibri" pitchFamily="34" charset="-120"/>
+                <a:cs typeface="Amiri" pitchFamily="2" charset="-78"/>
               </a:rPr>
               <a:t>4</a:t>
             </a:r>
@@ -35057,8 +34392,7 @@
                   <a:srgbClr val="1F2A37"/>
                 </a:solidFill>
                 <a:latin typeface="Calibri" pitchFamily="34" charset="0"/>
-                <a:ea typeface="Calibri" pitchFamily="34" charset="-122"/>
-                <a:cs typeface="Calibri" pitchFamily="34" charset="-120"/>
+                <a:cs typeface="Amiri" pitchFamily="2" charset="-78"/>
               </a:rPr>
               <a:t>Paper 4 Q1: a formal email.</a:t>
             </a:r>
@@ -35095,9 +34429,8 @@
                 <a:solidFill>
                   <a:srgbClr val="1E6B52"/>
                 </a:solidFill>
-                <a:latin typeface="Amiri" pitchFamily="34" charset="0"/>
-                <a:ea typeface="Amiri" pitchFamily="34" charset="-122"/>
-                <a:cs typeface="Amiri" pitchFamily="34" charset="-120"/>
+                <a:latin typeface="Amiri" pitchFamily="2" charset="-78"/>
+                <a:cs typeface="Amiri" pitchFamily="2" charset="-78"/>
               </a:rPr>
               <a:t>الكِتَابَةُ</a:t>
             </a:r>
@@ -35196,8 +34529,7 @@
                   <a:srgbClr val="FFFFFF"/>
                 </a:solidFill>
                 <a:latin typeface="Calibri" pitchFamily="34" charset="0"/>
-                <a:ea typeface="Calibri" pitchFamily="34" charset="-122"/>
-                <a:cs typeface="Calibri" pitchFamily="34" charset="-120"/>
+                <a:cs typeface="Amiri" pitchFamily="2" charset="-78"/>
               </a:rPr>
               <a:t>FEEDBACK</a:t>
             </a:r>
@@ -35235,8 +34567,7 @@
                   <a:srgbClr val="E8EDF5"/>
                 </a:solidFill>
                 <a:latin typeface="Calibri" pitchFamily="34" charset="0"/>
-                <a:ea typeface="Calibri" pitchFamily="34" charset="-122"/>
-                <a:cs typeface="Calibri" pitchFamily="34" charset="-120"/>
+                <a:cs typeface="Amiri" pitchFamily="2" charset="-78"/>
               </a:rPr>
               <a:t>8 min</a:t>
             </a:r>
@@ -35299,8 +34630,7 @@
                   <a:srgbClr val="1B3B6F"/>
                 </a:solidFill>
                 <a:latin typeface="Calibri" pitchFamily="34" charset="0"/>
-                <a:ea typeface="Calibri" pitchFamily="34" charset="-122"/>
-                <a:cs typeface="Calibri" pitchFamily="34" charset="-120"/>
+                <a:cs typeface="Amiri" pitchFamily="2" charset="-78"/>
               </a:rPr>
               <a:t>5</a:t>
             </a:r>
@@ -35338,8 +34668,7 @@
                   <a:srgbClr val="1F2A37"/>
                 </a:solidFill>
                 <a:latin typeface="Calibri" pitchFamily="34" charset="0"/>
-                <a:ea typeface="Calibri" pitchFamily="34" charset="-122"/>
-                <a:cs typeface="Calibri" pitchFamily="34" charset="-120"/>
+                <a:cs typeface="Amiri" pitchFamily="2" charset="-78"/>
               </a:rPr>
               <a:t>Mark Paper 2, the Q1 model, scores.</a:t>
             </a:r>
@@ -35376,9 +34705,8 @@
                 <a:solidFill>
                   <a:srgbClr val="8A6D1E"/>
                 </a:solidFill>
-                <a:latin typeface="Amiri" pitchFamily="34" charset="0"/>
-                <a:ea typeface="Amiri" pitchFamily="34" charset="-122"/>
-                <a:cs typeface="Amiri" pitchFamily="34" charset="-120"/>
+                <a:latin typeface="Amiri" pitchFamily="2" charset="-78"/>
+                <a:cs typeface="Amiri" pitchFamily="2" charset="-78"/>
               </a:rPr>
               <a:t>صَحِّحْ</a:t>
             </a:r>
@@ -35477,8 +34805,7 @@
                   <a:srgbClr val="FFFFFF"/>
                 </a:solidFill>
                 <a:latin typeface="Calibri" pitchFamily="34" charset="0"/>
-                <a:ea typeface="Calibri" pitchFamily="34" charset="-122"/>
-                <a:cs typeface="Calibri" pitchFamily="34" charset="-120"/>
+                <a:cs typeface="Amiri" pitchFamily="2" charset="-78"/>
               </a:rPr>
               <a:t>PREPARATION</a:t>
             </a:r>
@@ -35516,8 +34843,7 @@
                   <a:srgbClr val="E8EDF5"/>
                 </a:solidFill>
                 <a:latin typeface="Calibri" pitchFamily="34" charset="0"/>
-                <a:ea typeface="Calibri" pitchFamily="34" charset="-122"/>
-                <a:cs typeface="Calibri" pitchFamily="34" charset="-120"/>
+                <a:cs typeface="Amiri" pitchFamily="2" charset="-78"/>
               </a:rPr>
               <a:t>2 min</a:t>
             </a:r>
@@ -35580,8 +34906,7 @@
                   <a:srgbClr val="1B3B6F"/>
                 </a:solidFill>
                 <a:latin typeface="Calibri" pitchFamily="34" charset="0"/>
-                <a:ea typeface="Calibri" pitchFamily="34" charset="-122"/>
-                <a:cs typeface="Calibri" pitchFamily="34" charset="-120"/>
+                <a:cs typeface="Amiri" pitchFamily="2" charset="-78"/>
               </a:rPr>
               <a:t>6</a:t>
             </a:r>
@@ -35619,8 +34944,7 @@
                   <a:srgbClr val="1F2A37"/>
                 </a:solidFill>
                 <a:latin typeface="Calibri" pitchFamily="34" charset="0"/>
-                <a:ea typeface="Calibri" pitchFamily="34" charset="-122"/>
-                <a:cs typeface="Calibri" pitchFamily="34" charset="-120"/>
+                <a:cs typeface="Amiri" pitchFamily="2" charset="-78"/>
               </a:rPr>
               <a:t>Q2 as timed homework; get ready for speaking.</a:t>
             </a:r>
@@ -35657,9 +34981,8 @@
                 <a:solidFill>
                   <a:srgbClr val="C45A3C"/>
                 </a:solidFill>
-                <a:latin typeface="Amiri" pitchFamily="34" charset="0"/>
-                <a:ea typeface="Amiri" pitchFamily="34" charset="-122"/>
-                <a:cs typeface="Amiri" pitchFamily="34" charset="-120"/>
+                <a:latin typeface="Amiri" pitchFamily="2" charset="-78"/>
+                <a:cs typeface="Amiri" pitchFamily="2" charset="-78"/>
               </a:rPr>
               <a:t>اِسْتَعِدَّ</a:t>
             </a:r>
@@ -35731,8 +35054,7 @@
                   <a:srgbClr val="1E6B52"/>
                 </a:solidFill>
                 <a:latin typeface="Calibri" pitchFamily="34" charset="0"/>
-                <a:ea typeface="Calibri" pitchFamily="34" charset="-122"/>
-                <a:cs typeface="Calibri" pitchFamily="34" charset="-120"/>
+                <a:cs typeface="Amiri" pitchFamily="2" charset="-78"/>
               </a:rPr>
               <a:t>IF ARABIC FEELS HARD TODAY</a:t>
             </a:r>
@@ -35770,8 +35092,7 @@
                   <a:srgbClr val="1F2A37"/>
                 </a:solidFill>
                 <a:latin typeface="Calibri" pitchFamily="34" charset="0"/>
-                <a:ea typeface="Calibri" pitchFamily="34" charset="-122"/>
-                <a:cs typeface="Calibri" pitchFamily="34" charset="-120"/>
+                <a:cs typeface="Amiri" pitchFamily="2" charset="-78"/>
               </a:rPr>
               <a:t>This is an exam-preparation lesson. Every task uses the real IGCSE format — Core students use the green boxes, frames and English support; nobody is expected to get everything right first time.</a:t>
             </a:r>
@@ -35809,8 +35130,7 @@
                   <a:srgbClr val="8A93A0"/>
                 </a:solidFill>
                 <a:latin typeface="Calibri" pitchFamily="34" charset="0"/>
-                <a:ea typeface="Calibri" pitchFamily="34" charset="-122"/>
-                <a:cs typeface="Calibri" pitchFamily="34" charset="-120"/>
+                <a:cs typeface="Amiri" pitchFamily="2" charset="-78"/>
               </a:rPr>
               <a:t>3 / 25</a:t>
             </a:r>
@@ -35904,9 +35224,8 @@
                 <a:solidFill>
                   <a:srgbClr val="D4AF37"/>
                 </a:solidFill>
-                <a:latin typeface="Amiri" pitchFamily="34" charset="0"/>
-                <a:ea typeface="Amiri" pitchFamily="34" charset="-122"/>
-                <a:cs typeface="Amiri" pitchFamily="34" charset="-120"/>
+                <a:latin typeface="Amiri" pitchFamily="2" charset="-78"/>
+                <a:cs typeface="Amiri" pitchFamily="2" charset="-78"/>
               </a:rPr>
               <a:t>م</a:t>
             </a:r>
@@ -35944,8 +35263,7 @@
                   <a:srgbClr val="1B3B6F"/>
                 </a:solidFill>
                 <a:latin typeface="Cambria" pitchFamily="34" charset="0"/>
-                <a:ea typeface="Cambria" pitchFamily="34" charset="-122"/>
-                <a:cs typeface="Cambria" pitchFamily="34" charset="-120"/>
+                <a:cs typeface="Amiri" pitchFamily="2" charset="-78"/>
               </a:rPr>
               <a:t>Al Madina Online School</a:t>
             </a:r>
@@ -35983,8 +35301,7 @@
                   <a:srgbClr val="8A6D1E"/>
                 </a:solidFill>
                 <a:latin typeface="Calibri" pitchFamily="34" charset="0"/>
-                <a:ea typeface="Calibri" pitchFamily="34" charset="-122"/>
-                <a:cs typeface="Calibri" pitchFamily="34" charset="-120"/>
+                <a:cs typeface="Amiri" pitchFamily="2" charset="-78"/>
               </a:rPr>
               <a:t>ARABIC DEPARTMENT · MIFTAH ARABIC · IGCSE 0544</a:t>
             </a:r>
@@ -36049,8 +35366,7 @@
                   <a:srgbClr val="FFFFFF"/>
                 </a:solidFill>
                 <a:latin typeface="Calibri" pitchFamily="34" charset="0"/>
-                <a:ea typeface="Calibri" pitchFamily="34" charset="-122"/>
-                <a:cs typeface="Calibri" pitchFamily="34" charset="-120"/>
+                <a:cs typeface="Amiri" pitchFamily="2" charset="-78"/>
               </a:rPr>
               <a:t>P6-L09 · IGCSE Bridge</a:t>
             </a:r>
@@ -36115,8 +35431,7 @@
                   <a:srgbClr val="FFFFFF"/>
                 </a:solidFill>
                 <a:latin typeface="Calibri" pitchFamily="34" charset="0"/>
-                <a:ea typeface="Calibri" pitchFamily="34" charset="-122"/>
-                <a:cs typeface="Calibri" pitchFamily="34" charset="-120"/>
+                <a:cs typeface="Amiri" pitchFamily="2" charset="-78"/>
               </a:rPr>
               <a:t>DO NOW · 5 MIN</a:t>
             </a:r>
@@ -36154,8 +35469,7 @@
                   <a:srgbClr val="0E7C86"/>
                 </a:solidFill>
                 <a:latin typeface="Calibri" pitchFamily="34" charset="0"/>
-                <a:ea typeface="Calibri" pitchFamily="34" charset="-122"/>
-                <a:cs typeface="Calibri" pitchFamily="34" charset="-120"/>
+                <a:cs typeface="Amiri" pitchFamily="2" charset="-78"/>
               </a:rPr>
               <a:t>DO NOW · ON YOUR OWN · 5 MINUTES</a:t>
             </a:r>
@@ -36193,8 +35507,7 @@
                   <a:srgbClr val="1B3B6F"/>
                 </a:solidFill>
                 <a:latin typeface="Cambria" pitchFamily="34" charset="0"/>
-                <a:ea typeface="Cambria" pitchFamily="34" charset="-122"/>
-                <a:cs typeface="Cambria" pitchFamily="34" charset="-120"/>
+                <a:cs typeface="Amiri" pitchFamily="2" charset="-78"/>
               </a:rPr>
               <a:t>Retrieval: what do you remember?</a:t>
             </a:r>
@@ -36231,9 +35544,8 @@
                 <a:solidFill>
                   <a:srgbClr val="8A6D1E"/>
                 </a:solidFill>
-                <a:latin typeface="Amiri" pitchFamily="34" charset="0"/>
-                <a:ea typeface="Amiri" pitchFamily="34" charset="-122"/>
-                <a:cs typeface="Amiri" pitchFamily="34" charset="-120"/>
+                <a:latin typeface="Amiri" pitchFamily="2" charset="-78"/>
+                <a:cs typeface="Amiri" pitchFamily="2" charset="-78"/>
               </a:rPr>
               <a:t>اِبْدَأِ الآنَ</a:t>
             </a:r>
@@ -36271,8 +35583,7 @@
                   <a:srgbClr val="8A93A0"/>
                 </a:solidFill>
                 <a:latin typeface="Calibri" pitchFamily="34" charset="0"/>
-                <a:ea typeface="Calibri" pitchFamily="34" charset="-122"/>
-                <a:cs typeface="Calibri" pitchFamily="34" charset="-120"/>
+                <a:cs typeface="Amiri" pitchFamily="2" charset="-78"/>
               </a:rPr>
               <a:t>Miftah Arabic · Progression P6 · IGCSE Bridge · P6-L09</a:t>
             </a:r>
@@ -36369,8 +35680,7 @@
                   <a:srgbClr val="FFFFFF"/>
                 </a:solidFill>
                 <a:latin typeface="Calibri" pitchFamily="34" charset="0"/>
-                <a:ea typeface="Calibri" pitchFamily="34" charset="-122"/>
-                <a:cs typeface="Calibri" pitchFamily="34" charset="-120"/>
+                <a:cs typeface="Amiri" pitchFamily="2" charset="-78"/>
               </a:rPr>
               <a:t>1</a:t>
             </a:r>
@@ -36408,8 +35718,7 @@
                   <a:srgbClr val="1B3B6F"/>
                 </a:solidFill>
                 <a:latin typeface="Calibri" pitchFamily="34" charset="0"/>
-                <a:ea typeface="Calibri" pitchFamily="34" charset="-122"/>
-                <a:cs typeface="Calibri" pitchFamily="34" charset="-120"/>
+                <a:cs typeface="Amiri" pitchFamily="2" charset="-78"/>
               </a:rPr>
               <a:t>What does </a:t>
             </a:r>
@@ -36421,9 +35730,8 @@
                 <a:solidFill>
                   <a:srgbClr val="1B3B6F"/>
                 </a:solidFill>
-                <a:latin typeface="Amiri" pitchFamily="34" charset="0"/>
-                <a:ea typeface="Amiri" pitchFamily="34" charset="-122"/>
-                <a:cs typeface="Amiri" pitchFamily="34" charset="-120"/>
+                <a:latin typeface="Amiri" pitchFamily="2" charset="-78"/>
+                <a:cs typeface="Amiri" pitchFamily="2" charset="-78"/>
               </a:rPr>
               <a:t>الأَدِلَّةُ النَّصِّيَّةُ</a:t>
             </a:r>
@@ -36436,8 +35744,7 @@
                   <a:srgbClr val="1B3B6F"/>
                 </a:solidFill>
                 <a:latin typeface="Calibri" pitchFamily="34" charset="0"/>
-                <a:ea typeface="Calibri" pitchFamily="34" charset="-122"/>
-                <a:cs typeface="Calibri" pitchFamily="34" charset="-120"/>
+                <a:cs typeface="Amiri" pitchFamily="2" charset="-78"/>
               </a:rPr>
               <a:t> mean?</a:t>
             </a:r>
@@ -36500,8 +35807,7 @@
                   <a:srgbClr val="1B3B6F"/>
                 </a:solidFill>
                 <a:latin typeface="Calibri" pitchFamily="34" charset="0"/>
-                <a:ea typeface="Calibri" pitchFamily="34" charset="-122"/>
-                <a:cs typeface="Calibri" pitchFamily="34" charset="-120"/>
+                <a:cs typeface="Amiri" pitchFamily="2" charset="-78"/>
               </a:rPr>
               <a:t>A</a:t>
             </a:r>
@@ -36539,8 +35845,7 @@
                   <a:srgbClr val="1F2A37"/>
                 </a:solidFill>
                 <a:latin typeface="Calibri" pitchFamily="34" charset="0"/>
-                <a:ea typeface="Calibri" pitchFamily="34" charset="-122"/>
-                <a:cs typeface="Calibri" pitchFamily="34" charset="-120"/>
+                <a:cs typeface="Amiri" pitchFamily="2" charset="-78"/>
               </a:rPr>
               <a:t>text messages</a:t>
             </a:r>
@@ -36603,8 +35908,7 @@
                   <a:srgbClr val="1B3B6F"/>
                 </a:solidFill>
                 <a:latin typeface="Calibri" pitchFamily="34" charset="0"/>
-                <a:ea typeface="Calibri" pitchFamily="34" charset="-122"/>
-                <a:cs typeface="Calibri" pitchFamily="34" charset="-120"/>
+                <a:cs typeface="Amiri" pitchFamily="2" charset="-78"/>
               </a:rPr>
               <a:t>B</a:t>
             </a:r>
@@ -36642,8 +35946,7 @@
                   <a:srgbClr val="1F2A37"/>
                 </a:solidFill>
                 <a:latin typeface="Calibri" pitchFamily="34" charset="0"/>
-                <a:ea typeface="Calibri" pitchFamily="34" charset="-122"/>
-                <a:cs typeface="Calibri" pitchFamily="34" charset="-120"/>
+                <a:cs typeface="Amiri" pitchFamily="2" charset="-78"/>
               </a:rPr>
               <a:t>textual evidence</a:t>
             </a:r>
@@ -36706,8 +36009,7 @@
                   <a:srgbClr val="1B3B6F"/>
                 </a:solidFill>
                 <a:latin typeface="Calibri" pitchFamily="34" charset="0"/>
-                <a:ea typeface="Calibri" pitchFamily="34" charset="-122"/>
-                <a:cs typeface="Calibri" pitchFamily="34" charset="-120"/>
+                <a:cs typeface="Amiri" pitchFamily="2" charset="-78"/>
               </a:rPr>
               <a:t>C</a:t>
             </a:r>
@@ -36745,8 +36047,7 @@
                   <a:srgbClr val="1F2A37"/>
                 </a:solidFill>
                 <a:latin typeface="Calibri" pitchFamily="34" charset="0"/>
-                <a:ea typeface="Calibri" pitchFamily="34" charset="-122"/>
-                <a:cs typeface="Calibri" pitchFamily="34" charset="-120"/>
+                <a:cs typeface="Amiri" pitchFamily="2" charset="-78"/>
               </a:rPr>
               <a:t>the final text</a:t>
             </a:r>
@@ -36843,8 +36144,7 @@
                   <a:srgbClr val="FFFFFF"/>
                 </a:solidFill>
                 <a:latin typeface="Calibri" pitchFamily="34" charset="0"/>
-                <a:ea typeface="Calibri" pitchFamily="34" charset="-122"/>
-                <a:cs typeface="Calibri" pitchFamily="34" charset="-120"/>
+                <a:cs typeface="Amiri" pitchFamily="2" charset="-78"/>
               </a:rPr>
               <a:t>2</a:t>
             </a:r>
@@ -36882,8 +36182,7 @@
                   <a:srgbClr val="1B3B6F"/>
                 </a:solidFill>
                 <a:latin typeface="Calibri" pitchFamily="34" charset="0"/>
-                <a:ea typeface="Calibri" pitchFamily="34" charset="-122"/>
-                <a:cs typeface="Calibri" pitchFamily="34" charset="-120"/>
+                <a:cs typeface="Amiri" pitchFamily="2" charset="-78"/>
               </a:rPr>
               <a:t>What does </a:t>
             </a:r>
@@ -36895,9 +36194,8 @@
                 <a:solidFill>
                   <a:srgbClr val="1B3B6F"/>
                 </a:solidFill>
-                <a:latin typeface="Amiri" pitchFamily="34" charset="0"/>
-                <a:ea typeface="Amiri" pitchFamily="34" charset="-122"/>
-                <a:cs typeface="Amiri" pitchFamily="34" charset="-120"/>
+                <a:latin typeface="Amiri" pitchFamily="2" charset="-78"/>
+                <a:cs typeface="Amiri" pitchFamily="2" charset="-78"/>
               </a:rPr>
               <a:t>اسْتِنْتَاجُ الكَلِمَاتِ المَجْهُولَةِ</a:t>
             </a:r>
@@ -36910,8 +36208,7 @@
                   <a:srgbClr val="1B3B6F"/>
                 </a:solidFill>
                 <a:latin typeface="Calibri" pitchFamily="34" charset="0"/>
-                <a:ea typeface="Calibri" pitchFamily="34" charset="-122"/>
-                <a:cs typeface="Calibri" pitchFamily="34" charset="-120"/>
+                <a:cs typeface="Amiri" pitchFamily="2" charset="-78"/>
               </a:rPr>
               <a:t> mean?</a:t>
             </a:r>
@@ -36974,8 +36271,7 @@
                   <a:srgbClr val="1B3B6F"/>
                 </a:solidFill>
                 <a:latin typeface="Calibri" pitchFamily="34" charset="0"/>
-                <a:ea typeface="Calibri" pitchFamily="34" charset="-122"/>
-                <a:cs typeface="Calibri" pitchFamily="34" charset="-120"/>
+                <a:cs typeface="Amiri" pitchFamily="2" charset="-78"/>
               </a:rPr>
               <a:t>A</a:t>
             </a:r>
@@ -37013,8 +36309,7 @@
                   <a:srgbClr val="1F2A37"/>
                 </a:solidFill>
                 <a:latin typeface="Calibri" pitchFamily="34" charset="0"/>
-                <a:ea typeface="Calibri" pitchFamily="34" charset="-122"/>
-                <a:cs typeface="Calibri" pitchFamily="34" charset="-120"/>
+                <a:cs typeface="Amiri" pitchFamily="2" charset="-78"/>
               </a:rPr>
               <a:t>deducing unknown words</a:t>
             </a:r>
@@ -37077,8 +36372,7 @@
                   <a:srgbClr val="1B3B6F"/>
                 </a:solidFill>
                 <a:latin typeface="Calibri" pitchFamily="34" charset="0"/>
-                <a:ea typeface="Calibri" pitchFamily="34" charset="-122"/>
-                <a:cs typeface="Calibri" pitchFamily="34" charset="-120"/>
+                <a:cs typeface="Amiri" pitchFamily="2" charset="-78"/>
               </a:rPr>
               <a:t>B</a:t>
             </a:r>
@@ -37116,8 +36410,7 @@
                   <a:srgbClr val="1F2A37"/>
                 </a:solidFill>
                 <a:latin typeface="Calibri" pitchFamily="34" charset="0"/>
-                <a:ea typeface="Calibri" pitchFamily="34" charset="-122"/>
-                <a:cs typeface="Calibri" pitchFamily="34" charset="-120"/>
+                <a:cs typeface="Amiri" pitchFamily="2" charset="-78"/>
               </a:rPr>
               <a:t>looking up words</a:t>
             </a:r>
@@ -37180,8 +36473,7 @@
                   <a:srgbClr val="1B3B6F"/>
                 </a:solidFill>
                 <a:latin typeface="Calibri" pitchFamily="34" charset="0"/>
-                <a:ea typeface="Calibri" pitchFamily="34" charset="-122"/>
-                <a:cs typeface="Calibri" pitchFamily="34" charset="-120"/>
+                <a:cs typeface="Amiri" pitchFamily="2" charset="-78"/>
               </a:rPr>
               <a:t>C</a:t>
             </a:r>
@@ -37219,8 +36511,7 @@
                   <a:srgbClr val="1F2A37"/>
                 </a:solidFill>
                 <a:latin typeface="Calibri" pitchFamily="34" charset="0"/>
-                <a:ea typeface="Calibri" pitchFamily="34" charset="-122"/>
-                <a:cs typeface="Calibri" pitchFamily="34" charset="-120"/>
+                <a:cs typeface="Amiri" pitchFamily="2" charset="-78"/>
               </a:rPr>
               <a:t>learning new words</a:t>
             </a:r>
@@ -37317,8 +36608,7 @@
                   <a:srgbClr val="FFFFFF"/>
                 </a:solidFill>
                 <a:latin typeface="Calibri" pitchFamily="34" charset="0"/>
-                <a:ea typeface="Calibri" pitchFamily="34" charset="-122"/>
-                <a:cs typeface="Calibri" pitchFamily="34" charset="-120"/>
+                <a:cs typeface="Amiri" pitchFamily="2" charset="-78"/>
               </a:rPr>
               <a:t>3</a:t>
             </a:r>
@@ -37356,8 +36646,7 @@
                   <a:srgbClr val="1B3B6F"/>
                 </a:solidFill>
                 <a:latin typeface="Calibri" pitchFamily="34" charset="0"/>
-                <a:ea typeface="Calibri" pitchFamily="34" charset="-122"/>
-                <a:cs typeface="Calibri" pitchFamily="34" charset="-120"/>
+                <a:cs typeface="Amiri" pitchFamily="2" charset="-78"/>
               </a:rPr>
               <a:t>What does </a:t>
             </a:r>
@@ -37369,9 +36658,8 @@
                 <a:solidFill>
                   <a:srgbClr val="1B3B6F"/>
                 </a:solidFill>
-                <a:latin typeface="Amiri" pitchFamily="34" charset="0"/>
-                <a:ea typeface="Amiri" pitchFamily="34" charset="-122"/>
-                <a:cs typeface="Amiri" pitchFamily="34" charset="-120"/>
+                <a:latin typeface="Amiri" pitchFamily="2" charset="-78"/>
+                <a:cs typeface="Amiri" pitchFamily="2" charset="-78"/>
               </a:rPr>
               <a:t>المَعْنَى العَامُّ</a:t>
             </a:r>
@@ -37384,8 +36672,7 @@
                   <a:srgbClr val="1B3B6F"/>
                 </a:solidFill>
                 <a:latin typeface="Calibri" pitchFamily="34" charset="0"/>
-                <a:ea typeface="Calibri" pitchFamily="34" charset="-122"/>
-                <a:cs typeface="Calibri" pitchFamily="34" charset="-120"/>
+                <a:cs typeface="Amiri" pitchFamily="2" charset="-78"/>
               </a:rPr>
               <a:t> mean?</a:t>
             </a:r>
@@ -37448,8 +36735,7 @@
                   <a:srgbClr val="1B3B6F"/>
                 </a:solidFill>
                 <a:latin typeface="Calibri" pitchFamily="34" charset="0"/>
-                <a:ea typeface="Calibri" pitchFamily="34" charset="-122"/>
-                <a:cs typeface="Calibri" pitchFamily="34" charset="-120"/>
+                <a:cs typeface="Amiri" pitchFamily="2" charset="-78"/>
               </a:rPr>
               <a:t>A</a:t>
             </a:r>
@@ -37487,8 +36773,7 @@
                   <a:srgbClr val="1F2A37"/>
                 </a:solidFill>
                 <a:latin typeface="Calibri" pitchFamily="34" charset="0"/>
-                <a:ea typeface="Calibri" pitchFamily="34" charset="-122"/>
-                <a:cs typeface="Calibri" pitchFamily="34" charset="-120"/>
+                <a:cs typeface="Amiri" pitchFamily="2" charset="-78"/>
               </a:rPr>
               <a:t>factual details (R2)</a:t>
             </a:r>
@@ -37551,8 +36836,7 @@
                   <a:srgbClr val="1B3B6F"/>
                 </a:solidFill>
                 <a:latin typeface="Calibri" pitchFamily="34" charset="0"/>
-                <a:ea typeface="Calibri" pitchFamily="34" charset="-122"/>
-                <a:cs typeface="Calibri" pitchFamily="34" charset="-120"/>
+                <a:cs typeface="Amiri" pitchFamily="2" charset="-78"/>
               </a:rPr>
               <a:t>B</a:t>
             </a:r>
@@ -37590,8 +36874,7 @@
                   <a:srgbClr val="1F2A37"/>
                 </a:solidFill>
                 <a:latin typeface="Calibri" pitchFamily="34" charset="0"/>
-                <a:ea typeface="Calibri" pitchFamily="34" charset="-122"/>
-                <a:cs typeface="Calibri" pitchFamily="34" charset="-120"/>
+                <a:cs typeface="Amiri" pitchFamily="2" charset="-78"/>
               </a:rPr>
               <a:t>the writer’s style (R3)</a:t>
             </a:r>
@@ -37654,8 +36937,7 @@
                   <a:srgbClr val="1B3B6F"/>
                 </a:solidFill>
                 <a:latin typeface="Calibri" pitchFamily="34" charset="0"/>
-                <a:ea typeface="Calibri" pitchFamily="34" charset="-122"/>
-                <a:cs typeface="Calibri" pitchFamily="34" charset="-120"/>
+                <a:cs typeface="Amiri" pitchFamily="2" charset="-78"/>
               </a:rPr>
               <a:t>C</a:t>
             </a:r>
@@ -37693,8 +36975,7 @@
                   <a:srgbClr val="1F2A37"/>
                 </a:solidFill>
                 <a:latin typeface="Calibri" pitchFamily="34" charset="0"/>
-                <a:ea typeface="Calibri" pitchFamily="34" charset="-122"/>
-                <a:cs typeface="Calibri" pitchFamily="34" charset="-120"/>
+                <a:cs typeface="Amiri" pitchFamily="2" charset="-78"/>
               </a:rPr>
               <a:t>general meaning (R1)</a:t>
             </a:r>
@@ -37791,8 +37072,7 @@
                   <a:srgbClr val="FFFFFF"/>
                 </a:solidFill>
                 <a:latin typeface="Calibri" pitchFamily="34" charset="0"/>
-                <a:ea typeface="Calibri" pitchFamily="34" charset="-122"/>
-                <a:cs typeface="Calibri" pitchFamily="34" charset="-120"/>
+                <a:cs typeface="Amiri" pitchFamily="2" charset="-78"/>
               </a:rPr>
               <a:t>4</a:t>
             </a:r>
@@ -37830,8 +37110,7 @@
                   <a:srgbClr val="1B3B6F"/>
                 </a:solidFill>
                 <a:latin typeface="Calibri" pitchFamily="34" charset="0"/>
-                <a:ea typeface="Calibri" pitchFamily="34" charset="-122"/>
-                <a:cs typeface="Calibri" pitchFamily="34" charset="-120"/>
+                <a:cs typeface="Amiri" pitchFamily="2" charset="-78"/>
               </a:rPr>
               <a:t>Which opening suits a formal email to a principal?</a:t>
             </a:r>
@@ -37894,8 +37173,7 @@
                   <a:srgbClr val="1B3B6F"/>
                 </a:solidFill>
                 <a:latin typeface="Calibri" pitchFamily="34" charset="0"/>
-                <a:ea typeface="Calibri" pitchFamily="34" charset="-122"/>
-                <a:cs typeface="Calibri" pitchFamily="34" charset="-120"/>
+                <a:cs typeface="Amiri" pitchFamily="2" charset="-78"/>
               </a:rPr>
               <a:t>A</a:t>
             </a:r>
@@ -37932,9 +37210,8 @@
                 <a:solidFill>
                   <a:srgbClr val="1F2A37"/>
                 </a:solidFill>
-                <a:latin typeface="Amiri" pitchFamily="34" charset="0"/>
-                <a:ea typeface="Amiri" pitchFamily="34" charset="-122"/>
-                <a:cs typeface="Amiri" pitchFamily="34" charset="-120"/>
+                <a:latin typeface="Amiri" pitchFamily="2" charset="-78"/>
+                <a:cs typeface="Amiri" pitchFamily="2" charset="-78"/>
               </a:rPr>
               <a:t>مَرْحَبًا يَا صَدِيقِي!</a:t>
             </a:r>
@@ -37997,8 +37274,7 @@
                   <a:srgbClr val="1B3B6F"/>
                 </a:solidFill>
                 <a:latin typeface="Calibri" pitchFamily="34" charset="0"/>
-                <a:ea typeface="Calibri" pitchFamily="34" charset="-122"/>
-                <a:cs typeface="Calibri" pitchFamily="34" charset="-120"/>
+                <a:cs typeface="Amiri" pitchFamily="2" charset="-78"/>
               </a:rPr>
               <a:t>B</a:t>
             </a:r>
@@ -38035,9 +37311,8 @@
                 <a:solidFill>
                   <a:srgbClr val="1F2A37"/>
                 </a:solidFill>
-                <a:latin typeface="Amiri" pitchFamily="34" charset="0"/>
-                <a:ea typeface="Amiri" pitchFamily="34" charset="-122"/>
-                <a:cs typeface="Amiri" pitchFamily="34" charset="-120"/>
+                <a:latin typeface="Amiri" pitchFamily="2" charset="-78"/>
+                <a:cs typeface="Amiri" pitchFamily="2" charset="-78"/>
               </a:rPr>
               <a:t>أَهْلًا وَسَهْلًا،</a:t>
             </a:r>
@@ -38100,8 +37375,7 @@
                   <a:srgbClr val="1B3B6F"/>
                 </a:solidFill>
                 <a:latin typeface="Calibri" pitchFamily="34" charset="0"/>
-                <a:ea typeface="Calibri" pitchFamily="34" charset="-122"/>
-                <a:cs typeface="Calibri" pitchFamily="34" charset="-120"/>
+                <a:cs typeface="Amiri" pitchFamily="2" charset="-78"/>
               </a:rPr>
               <a:t>C</a:t>
             </a:r>
@@ -38138,9 +37412,8 @@
                 <a:solidFill>
                   <a:srgbClr val="1F2A37"/>
                 </a:solidFill>
-                <a:latin typeface="Amiri" pitchFamily="34" charset="0"/>
-                <a:ea typeface="Amiri" pitchFamily="34" charset="-122"/>
-                <a:cs typeface="Amiri" pitchFamily="34" charset="-120"/>
+                <a:latin typeface="Amiri" pitchFamily="2" charset="-78"/>
+                <a:cs typeface="Amiri" pitchFamily="2" charset="-78"/>
               </a:rPr>
               <a:t>حَضْرَةَ مُدِيرِ المَدْرَسَةِ المُحْتَرَمِ،</a:t>
             </a:r>
@@ -38237,8 +37510,7 @@
                   <a:srgbClr val="FFFFFF"/>
                 </a:solidFill>
                 <a:latin typeface="Calibri" pitchFamily="34" charset="0"/>
-                <a:ea typeface="Calibri" pitchFamily="34" charset="-122"/>
-                <a:cs typeface="Calibri" pitchFamily="34" charset="-120"/>
+                <a:cs typeface="Amiri" pitchFamily="2" charset="-78"/>
               </a:rPr>
               <a:t>5</a:t>
             </a:r>
@@ -38276,8 +37548,7 @@
                   <a:srgbClr val="1B3B6F"/>
                 </a:solidFill>
                 <a:latin typeface="Calibri" pitchFamily="34" charset="0"/>
-                <a:ea typeface="Calibri" pitchFamily="34" charset="-122"/>
-                <a:cs typeface="Calibri" pitchFamily="34" charset="-120"/>
+                <a:cs typeface="Amiri" pitchFamily="2" charset="-78"/>
               </a:rPr>
               <a:t>How long should Q1 take, so that Q2 has enough time?</a:t>
             </a:r>
@@ -38340,8 +37611,7 @@
                   <a:srgbClr val="1B3B6F"/>
                 </a:solidFill>
                 <a:latin typeface="Calibri" pitchFamily="34" charset="0"/>
-                <a:ea typeface="Calibri" pitchFamily="34" charset="-122"/>
-                <a:cs typeface="Calibri" pitchFamily="34" charset="-120"/>
+                <a:cs typeface="Amiri" pitchFamily="2" charset="-78"/>
               </a:rPr>
               <a:t>A</a:t>
             </a:r>
@@ -38379,8 +37649,7 @@
                   <a:srgbClr val="1F2A37"/>
                 </a:solidFill>
                 <a:latin typeface="Calibri" pitchFamily="34" charset="0"/>
-                <a:ea typeface="Calibri" pitchFamily="34" charset="-122"/>
-                <a:cs typeface="Calibri" pitchFamily="34" charset="-120"/>
+                <a:cs typeface="Amiri" pitchFamily="2" charset="-78"/>
               </a:rPr>
               <a:t>about 20 minutes</a:t>
             </a:r>
@@ -38443,8 +37712,7 @@
                   <a:srgbClr val="1B3B6F"/>
                 </a:solidFill>
                 <a:latin typeface="Calibri" pitchFamily="34" charset="0"/>
-                <a:ea typeface="Calibri" pitchFamily="34" charset="-122"/>
-                <a:cs typeface="Calibri" pitchFamily="34" charset="-120"/>
+                <a:cs typeface="Amiri" pitchFamily="2" charset="-78"/>
               </a:rPr>
               <a:t>B</a:t>
             </a:r>
@@ -38482,8 +37750,7 @@
                   <a:srgbClr val="1F2A37"/>
                 </a:solidFill>
                 <a:latin typeface="Calibri" pitchFamily="34" charset="0"/>
-                <a:ea typeface="Calibri" pitchFamily="34" charset="-122"/>
-                <a:cs typeface="Calibri" pitchFamily="34" charset="-120"/>
+                <a:cs typeface="Amiri" pitchFamily="2" charset="-78"/>
               </a:rPr>
               <a:t>about 40 minutes</a:t>
             </a:r>
@@ -38546,8 +37813,7 @@
                   <a:srgbClr val="1B3B6F"/>
                 </a:solidFill>
                 <a:latin typeface="Calibri" pitchFamily="34" charset="0"/>
-                <a:ea typeface="Calibri" pitchFamily="34" charset="-122"/>
-                <a:cs typeface="Calibri" pitchFamily="34" charset="-120"/>
+                <a:cs typeface="Amiri" pitchFamily="2" charset="-78"/>
               </a:rPr>
               <a:t>C</a:t>
             </a:r>
@@ -38585,8 +37851,7 @@
                   <a:srgbClr val="1F2A37"/>
                 </a:solidFill>
                 <a:latin typeface="Calibri" pitchFamily="34" charset="0"/>
-                <a:ea typeface="Calibri" pitchFamily="34" charset="-122"/>
-                <a:cs typeface="Calibri" pitchFamily="34" charset="-120"/>
+                <a:cs typeface="Amiri" pitchFamily="2" charset="-78"/>
               </a:rPr>
               <a:t>about 5 minutes</a:t>
             </a:r>
@@ -38658,8 +37923,7 @@
                   <a:srgbClr val="0E7C86"/>
                 </a:solidFill>
                 <a:latin typeface="Calibri" pitchFamily="34" charset="0"/>
-                <a:ea typeface="Calibri" pitchFamily="34" charset="-122"/>
-                <a:cs typeface="Calibri" pitchFamily="34" charset="-120"/>
+                <a:cs typeface="Amiri" pitchFamily="2" charset="-78"/>
               </a:rPr>
               <a:t>HOW TO ANSWER</a:t>
             </a:r>
@@ -38697,8 +37961,7 @@
                   <a:srgbClr val="1F2A37"/>
                 </a:solidFill>
                 <a:latin typeface="Calibri" pitchFamily="34" charset="0"/>
-                <a:ea typeface="Calibri" pitchFamily="34" charset="-122"/>
-                <a:cs typeface="Calibri" pitchFamily="34" charset="-120"/>
+                <a:cs typeface="Amiri" pitchFamily="2" charset="-78"/>
               </a:rPr>
               <a:t>Work on your own in silence.</a:t>
             </a:r>
@@ -38714,8 +37977,7 @@
                   <a:srgbClr val="1F2A37"/>
                 </a:solidFill>
                 <a:latin typeface="Calibri" pitchFamily="34" charset="0"/>
-                <a:ea typeface="Calibri" pitchFamily="34" charset="-122"/>
-                <a:cs typeface="Calibri" pitchFamily="34" charset="-120"/>
+                <a:cs typeface="Amiri" pitchFamily="2" charset="-78"/>
               </a:rPr>
               <a:t>When the timer ends, type in the chat:</a:t>
             </a:r>
@@ -38753,8 +38015,7 @@
                   <a:srgbClr val="1B3B6F"/>
                 </a:solidFill>
                 <a:latin typeface="Consolas" pitchFamily="34" charset="0"/>
-                <a:ea typeface="Consolas" pitchFamily="34" charset="-122"/>
-                <a:cs typeface="Consolas" pitchFamily="34" charset="-120"/>
+                <a:cs typeface="Amiri" pitchFamily="2" charset="-78"/>
               </a:rPr>
               <a:t>1_  2_  3_  4_  5_</a:t>
             </a:r>
@@ -38792,8 +38053,7 @@
                   <a:srgbClr val="0E7C86"/>
                 </a:solidFill>
                 <a:latin typeface="Calibri" pitchFamily="34" charset="0"/>
-                <a:ea typeface="Calibri" pitchFamily="34" charset="-122"/>
-                <a:cs typeface="Calibri" pitchFamily="34" charset="-120"/>
+                <a:cs typeface="Amiri" pitchFamily="2" charset="-78"/>
               </a:rPr>
               <a:t>⏱  5 : 00</a:t>
             </a:r>
@@ -38831,8 +38091,7 @@
                   <a:srgbClr val="8A93A0"/>
                 </a:solidFill>
                 <a:latin typeface="Calibri" pitchFamily="34" charset="0"/>
-                <a:ea typeface="Calibri" pitchFamily="34" charset="-122"/>
-                <a:cs typeface="Calibri" pitchFamily="34" charset="-120"/>
+                <a:cs typeface="Amiri" pitchFamily="2" charset="-78"/>
               </a:rPr>
               <a:t>4 / 25</a:t>
             </a:r>
@@ -38926,9 +38185,8 @@
                 <a:solidFill>
                   <a:srgbClr val="D4AF37"/>
                 </a:solidFill>
-                <a:latin typeface="Amiri" pitchFamily="34" charset="0"/>
-                <a:ea typeface="Amiri" pitchFamily="34" charset="-122"/>
-                <a:cs typeface="Amiri" pitchFamily="34" charset="-120"/>
+                <a:latin typeface="Amiri" pitchFamily="2" charset="-78"/>
+                <a:cs typeface="Amiri" pitchFamily="2" charset="-78"/>
               </a:rPr>
               <a:t>م</a:t>
             </a:r>
@@ -38966,8 +38224,7 @@
                   <a:srgbClr val="1B3B6F"/>
                 </a:solidFill>
                 <a:latin typeface="Cambria" pitchFamily="34" charset="0"/>
-                <a:ea typeface="Cambria" pitchFamily="34" charset="-122"/>
-                <a:cs typeface="Cambria" pitchFamily="34" charset="-120"/>
+                <a:cs typeface="Amiri" pitchFamily="2" charset="-78"/>
               </a:rPr>
               <a:t>Al Madina Online School</a:t>
             </a:r>
@@ -39005,8 +38262,7 @@
                   <a:srgbClr val="8A6D1E"/>
                 </a:solidFill>
                 <a:latin typeface="Calibri" pitchFamily="34" charset="0"/>
-                <a:ea typeface="Calibri" pitchFamily="34" charset="-122"/>
-                <a:cs typeface="Calibri" pitchFamily="34" charset="-120"/>
+                <a:cs typeface="Amiri" pitchFamily="2" charset="-78"/>
               </a:rPr>
               <a:t>ARABIC DEPARTMENT · MIFTAH ARABIC · IGCSE 0544</a:t>
             </a:r>
@@ -39071,8 +38327,7 @@
                   <a:srgbClr val="FFFFFF"/>
                 </a:solidFill>
                 <a:latin typeface="Calibri" pitchFamily="34" charset="0"/>
-                <a:ea typeface="Calibri" pitchFamily="34" charset="-122"/>
-                <a:cs typeface="Calibri" pitchFamily="34" charset="-120"/>
+                <a:cs typeface="Amiri" pitchFamily="2" charset="-78"/>
               </a:rPr>
               <a:t>P6-L09 · IGCSE Bridge</a:t>
             </a:r>
@@ -39137,8 +38392,7 @@
                   <a:srgbClr val="FFFFFF"/>
                 </a:solidFill>
                 <a:latin typeface="Calibri" pitchFamily="34" charset="0"/>
-                <a:ea typeface="Calibri" pitchFamily="34" charset="-122"/>
-                <a:cs typeface="Calibri" pitchFamily="34" charset="-120"/>
+                <a:cs typeface="Amiri" pitchFamily="2" charset="-78"/>
               </a:rPr>
               <a:t>DO NOW · 2 MIN</a:t>
             </a:r>
@@ -39176,8 +38430,7 @@
                   <a:srgbClr val="0E7C86"/>
                 </a:solidFill>
                 <a:latin typeface="Calibri" pitchFamily="34" charset="0"/>
-                <a:ea typeface="Calibri" pitchFamily="34" charset="-122"/>
-                <a:cs typeface="Calibri" pitchFamily="34" charset="-120"/>
+                <a:cs typeface="Amiri" pitchFamily="2" charset="-78"/>
               </a:rPr>
               <a:t>DO NOW · ANSWERS AND REASONS</a:t>
             </a:r>
@@ -39215,8 +38468,7 @@
                   <a:srgbClr val="1B3B6F"/>
                 </a:solidFill>
                 <a:latin typeface="Cambria" pitchFamily="34" charset="0"/>
-                <a:ea typeface="Cambria" pitchFamily="34" charset="-122"/>
-                <a:cs typeface="Cambria" pitchFamily="34" charset="-120"/>
+                <a:cs typeface="Amiri" pitchFamily="2" charset="-78"/>
               </a:rPr>
               <a:t>Let’s check — and explain why</a:t>
             </a:r>
@@ -39253,9 +38505,8 @@
                 <a:solidFill>
                   <a:srgbClr val="8A6D1E"/>
                 </a:solidFill>
-                <a:latin typeface="Amiri" pitchFamily="34" charset="0"/>
-                <a:ea typeface="Amiri" pitchFamily="34" charset="-122"/>
-                <a:cs typeface="Amiri" pitchFamily="34" charset="-120"/>
+                <a:latin typeface="Amiri" pitchFamily="2" charset="-78"/>
+                <a:cs typeface="Amiri" pitchFamily="2" charset="-78"/>
               </a:rPr>
               <a:t>الإِجَابَاتُ وَالتَّعْلِيلُ</a:t>
             </a:r>
@@ -39293,8 +38544,7 @@
                   <a:srgbClr val="8A93A0"/>
                 </a:solidFill>
                 <a:latin typeface="Calibri" pitchFamily="34" charset="0"/>
-                <a:ea typeface="Calibri" pitchFamily="34" charset="-122"/>
-                <a:cs typeface="Calibri" pitchFamily="34" charset="-120"/>
+                <a:cs typeface="Amiri" pitchFamily="2" charset="-78"/>
               </a:rPr>
               <a:t>Miftah Arabic · Progression P6 · IGCSE Bridge · P6-L09</a:t>
             </a:r>
@@ -39391,8 +38641,7 @@
                   <a:srgbClr val="FFFFFF"/>
                 </a:solidFill>
                 <a:latin typeface="Calibri" pitchFamily="34" charset="0"/>
-                <a:ea typeface="Calibri" pitchFamily="34" charset="-122"/>
-                <a:cs typeface="Calibri" pitchFamily="34" charset="-120"/>
+                <a:cs typeface="Amiri" pitchFamily="2" charset="-78"/>
               </a:rPr>
               <a:t>1</a:t>
             </a:r>
@@ -39430,8 +38679,7 @@
                   <a:srgbClr val="1B3B6F"/>
                 </a:solidFill>
                 <a:latin typeface="Calibri" pitchFamily="34" charset="0"/>
-                <a:ea typeface="Calibri" pitchFamily="34" charset="-122"/>
-                <a:cs typeface="Calibri" pitchFamily="34" charset="-120"/>
+                <a:cs typeface="Amiri" pitchFamily="2" charset="-78"/>
               </a:rPr>
               <a:t>What does </a:t>
             </a:r>
@@ -39443,9 +38691,8 @@
                 <a:solidFill>
                   <a:srgbClr val="1B3B6F"/>
                 </a:solidFill>
-                <a:latin typeface="Amiri" pitchFamily="34" charset="0"/>
-                <a:ea typeface="Amiri" pitchFamily="34" charset="-122"/>
-                <a:cs typeface="Amiri" pitchFamily="34" charset="-120"/>
+                <a:latin typeface="Amiri" pitchFamily="2" charset="-78"/>
+                <a:cs typeface="Amiri" pitchFamily="2" charset="-78"/>
               </a:rPr>
               <a:t>الأَدِلَّةُ النَّصِّيَّةُ</a:t>
             </a:r>
@@ -39458,8 +38705,7 @@
                   <a:srgbClr val="1B3B6F"/>
                 </a:solidFill>
                 <a:latin typeface="Calibri" pitchFamily="34" charset="0"/>
-                <a:ea typeface="Calibri" pitchFamily="34" charset="-122"/>
-                <a:cs typeface="Calibri" pitchFamily="34" charset="-120"/>
+                <a:cs typeface="Amiri" pitchFamily="2" charset="-78"/>
               </a:rPr>
               <a:t> mean?</a:t>
             </a:r>
@@ -39522,8 +38768,7 @@
                   <a:srgbClr val="1B3B6F"/>
                 </a:solidFill>
                 <a:latin typeface="Calibri" pitchFamily="34" charset="0"/>
-                <a:ea typeface="Calibri" pitchFamily="34" charset="-122"/>
-                <a:cs typeface="Calibri" pitchFamily="34" charset="-120"/>
+                <a:cs typeface="Amiri" pitchFamily="2" charset="-78"/>
               </a:rPr>
               <a:t>A</a:t>
             </a:r>
@@ -39561,8 +38806,7 @@
                   <a:srgbClr val="9AA1AB"/>
                 </a:solidFill>
                 <a:latin typeface="Calibri" pitchFamily="34" charset="0"/>
-                <a:ea typeface="Calibri" pitchFamily="34" charset="-122"/>
-                <a:cs typeface="Calibri" pitchFamily="34" charset="-120"/>
+                <a:cs typeface="Amiri" pitchFamily="2" charset="-78"/>
               </a:rPr>
               <a:t>text messages</a:t>
             </a:r>
@@ -39652,8 +38896,7 @@
                   <a:srgbClr val="FFFFFF"/>
                 </a:solidFill>
                 <a:latin typeface="Calibri" pitchFamily="34" charset="0"/>
-                <a:ea typeface="Calibri" pitchFamily="34" charset="-122"/>
-                <a:cs typeface="Calibri" pitchFamily="34" charset="-120"/>
+                <a:cs typeface="Amiri" pitchFamily="2" charset="-78"/>
               </a:rPr>
               <a:t>B</a:t>
             </a:r>
@@ -39691,8 +38934,7 @@
                   <a:srgbClr val="1F2A37"/>
                 </a:solidFill>
                 <a:latin typeface="Calibri" pitchFamily="34" charset="0"/>
-                <a:ea typeface="Calibri" pitchFamily="34" charset="-122"/>
-                <a:cs typeface="Calibri" pitchFamily="34" charset="-120"/>
+                <a:cs typeface="Amiri" pitchFamily="2" charset="-78"/>
               </a:rPr>
               <a:t>textual evidence</a:t>
             </a:r>
@@ -39755,8 +38997,7 @@
                   <a:srgbClr val="1B3B6F"/>
                 </a:solidFill>
                 <a:latin typeface="Calibri" pitchFamily="34" charset="0"/>
-                <a:ea typeface="Calibri" pitchFamily="34" charset="-122"/>
-                <a:cs typeface="Calibri" pitchFamily="34" charset="-120"/>
+                <a:cs typeface="Amiri" pitchFamily="2" charset="-78"/>
               </a:rPr>
               <a:t>C</a:t>
             </a:r>
@@ -39794,8 +39035,7 @@
                   <a:srgbClr val="9AA1AB"/>
                 </a:solidFill>
                 <a:latin typeface="Calibri" pitchFamily="34" charset="0"/>
-                <a:ea typeface="Calibri" pitchFamily="34" charset="-122"/>
-                <a:cs typeface="Calibri" pitchFamily="34" charset="-120"/>
+                <a:cs typeface="Amiri" pitchFamily="2" charset="-78"/>
               </a:rPr>
               <a:t>the final text</a:t>
             </a:r>
@@ -39833,8 +39073,7 @@
                   <a:srgbClr val="8A6D1E"/>
                 </a:solidFill>
                 <a:latin typeface="Calibri" pitchFamily="34" charset="0"/>
-                <a:ea typeface="Calibri" pitchFamily="34" charset="-122"/>
-                <a:cs typeface="Calibri" pitchFamily="34" charset="-120"/>
+                <a:cs typeface="Amiri" pitchFamily="2" charset="-78"/>
               </a:rPr>
               <a:t>Prepared at home (P6-L08, from P6-L03).</a:t>
             </a:r>
@@ -39931,8 +39170,7 @@
                   <a:srgbClr val="FFFFFF"/>
                 </a:solidFill>
                 <a:latin typeface="Calibri" pitchFamily="34" charset="0"/>
-                <a:ea typeface="Calibri" pitchFamily="34" charset="-122"/>
-                <a:cs typeface="Calibri" pitchFamily="34" charset="-120"/>
+                <a:cs typeface="Amiri" pitchFamily="2" charset="-78"/>
               </a:rPr>
               <a:t>2</a:t>
             </a:r>
@@ -39970,8 +39208,7 @@
                   <a:srgbClr val="1B3B6F"/>
                 </a:solidFill>
                 <a:latin typeface="Calibri" pitchFamily="34" charset="0"/>
-                <a:ea typeface="Calibri" pitchFamily="34" charset="-122"/>
-                <a:cs typeface="Calibri" pitchFamily="34" charset="-120"/>
+                <a:cs typeface="Amiri" pitchFamily="2" charset="-78"/>
               </a:rPr>
               <a:t>What does </a:t>
             </a:r>
@@ -39983,9 +39220,8 @@
                 <a:solidFill>
                   <a:srgbClr val="1B3B6F"/>
                 </a:solidFill>
-                <a:latin typeface="Amiri" pitchFamily="34" charset="0"/>
-                <a:ea typeface="Amiri" pitchFamily="34" charset="-122"/>
-                <a:cs typeface="Amiri" pitchFamily="34" charset="-120"/>
+                <a:latin typeface="Amiri" pitchFamily="2" charset="-78"/>
+                <a:cs typeface="Amiri" pitchFamily="2" charset="-78"/>
               </a:rPr>
               <a:t>اسْتِنْتَاجُ الكَلِمَاتِ المَجْهُولَةِ</a:t>
             </a:r>
@@ -39998,8 +39234,7 @@
                   <a:srgbClr val="1B3B6F"/>
                 </a:solidFill>
                 <a:latin typeface="Calibri" pitchFamily="34" charset="0"/>
-                <a:ea typeface="Calibri" pitchFamily="34" charset="-122"/>
-                <a:cs typeface="Calibri" pitchFamily="34" charset="-120"/>
+                <a:cs typeface="Amiri" pitchFamily="2" charset="-78"/>
               </a:rPr>
               <a:t> mean?</a:t>
             </a:r>
@@ -40089,8 +39324,7 @@
                   <a:srgbClr val="FFFFFF"/>
                 </a:solidFill>
                 <a:latin typeface="Calibri" pitchFamily="34" charset="0"/>
-                <a:ea typeface="Calibri" pitchFamily="34" charset="-122"/>
-                <a:cs typeface="Calibri" pitchFamily="34" charset="-120"/>
+                <a:cs typeface="Amiri" pitchFamily="2" charset="-78"/>
               </a:rPr>
               <a:t>A</a:t>
             </a:r>
@@ -40128,8 +39362,7 @@
                   <a:srgbClr val="1F2A37"/>
                 </a:solidFill>
                 <a:latin typeface="Calibri" pitchFamily="34" charset="0"/>
-                <a:ea typeface="Calibri" pitchFamily="34" charset="-122"/>
-                <a:cs typeface="Calibri" pitchFamily="34" charset="-120"/>
+                <a:cs typeface="Amiri" pitchFamily="2" charset="-78"/>
               </a:rPr>
               <a:t>deducing unknown words</a:t>
             </a:r>
@@ -40192,8 +39425,7 @@
                   <a:srgbClr val="1B3B6F"/>
                 </a:solidFill>
                 <a:latin typeface="Calibri" pitchFamily="34" charset="0"/>
-                <a:ea typeface="Calibri" pitchFamily="34" charset="-122"/>
-                <a:cs typeface="Calibri" pitchFamily="34" charset="-120"/>
+                <a:cs typeface="Amiri" pitchFamily="2" charset="-78"/>
               </a:rPr>
               <a:t>B</a:t>
             </a:r>
@@ -40231,8 +39463,7 @@
                   <a:srgbClr val="9AA1AB"/>
                 </a:solidFill>
                 <a:latin typeface="Calibri" pitchFamily="34" charset="0"/>
-                <a:ea typeface="Calibri" pitchFamily="34" charset="-122"/>
-                <a:cs typeface="Calibri" pitchFamily="34" charset="-120"/>
+                <a:cs typeface="Amiri" pitchFamily="2" charset="-78"/>
               </a:rPr>
               <a:t>looking up words</a:t>
             </a:r>
@@ -40295,8 +39526,7 @@
                   <a:srgbClr val="1B3B6F"/>
                 </a:solidFill>
                 <a:latin typeface="Calibri" pitchFamily="34" charset="0"/>
-                <a:ea typeface="Calibri" pitchFamily="34" charset="-122"/>
-                <a:cs typeface="Calibri" pitchFamily="34" charset="-120"/>
+                <a:cs typeface="Amiri" pitchFamily="2" charset="-78"/>
               </a:rPr>
               <a:t>C</a:t>
             </a:r>
@@ -40334,8 +39564,7 @@
                   <a:srgbClr val="9AA1AB"/>
                 </a:solidFill>
                 <a:latin typeface="Calibri" pitchFamily="34" charset="0"/>
-                <a:ea typeface="Calibri" pitchFamily="34" charset="-122"/>
-                <a:cs typeface="Calibri" pitchFamily="34" charset="-120"/>
+                <a:cs typeface="Amiri" pitchFamily="2" charset="-78"/>
               </a:rPr>
               <a:t>learning new words</a:t>
             </a:r>
@@ -40373,8 +39602,7 @@
                   <a:srgbClr val="8A6D1E"/>
                 </a:solidFill>
                 <a:latin typeface="Calibri" pitchFamily="34" charset="0"/>
-                <a:ea typeface="Calibri" pitchFamily="34" charset="-122"/>
-                <a:cs typeface="Calibri" pitchFamily="34" charset="-120"/>
+                <a:cs typeface="Amiri" pitchFamily="2" charset="-78"/>
               </a:rPr>
               <a:t>Prepared at home (P6-L08, from P6-L03).</a:t>
             </a:r>
@@ -40471,8 +39699,7 @@
                   <a:srgbClr val="FFFFFF"/>
                 </a:solidFill>
                 <a:latin typeface="Calibri" pitchFamily="34" charset="0"/>
-                <a:ea typeface="Calibri" pitchFamily="34" charset="-122"/>
-                <a:cs typeface="Calibri" pitchFamily="34" charset="-120"/>
+                <a:cs typeface="Amiri" pitchFamily="2" charset="-78"/>
               </a:rPr>
               <a:t>3</a:t>
             </a:r>
@@ -40510,8 +39737,7 @@
                   <a:srgbClr val="1B3B6F"/>
                 </a:solidFill>
                 <a:latin typeface="Calibri" pitchFamily="34" charset="0"/>
-                <a:ea typeface="Calibri" pitchFamily="34" charset="-122"/>
-                <a:cs typeface="Calibri" pitchFamily="34" charset="-120"/>
+                <a:cs typeface="Amiri" pitchFamily="2" charset="-78"/>
               </a:rPr>
               <a:t>What does </a:t>
             </a:r>
@@ -40523,9 +39749,8 @@
                 <a:solidFill>
                   <a:srgbClr val="1B3B6F"/>
                 </a:solidFill>
-                <a:latin typeface="Amiri" pitchFamily="34" charset="0"/>
-                <a:ea typeface="Amiri" pitchFamily="34" charset="-122"/>
-                <a:cs typeface="Amiri" pitchFamily="34" charset="-120"/>
+                <a:latin typeface="Amiri" pitchFamily="2" charset="-78"/>
+                <a:cs typeface="Amiri" pitchFamily="2" charset="-78"/>
               </a:rPr>
               <a:t>المَعْنَى العَامُّ</a:t>
             </a:r>
@@ -40538,8 +39763,7 @@
                   <a:srgbClr val="1B3B6F"/>
                 </a:solidFill>
                 <a:latin typeface="Calibri" pitchFamily="34" charset="0"/>
-                <a:ea typeface="Calibri" pitchFamily="34" charset="-122"/>
-                <a:cs typeface="Calibri" pitchFamily="34" charset="-120"/>
+                <a:cs typeface="Amiri" pitchFamily="2" charset="-78"/>
               </a:rPr>
               <a:t> mean?</a:t>
             </a:r>
@@ -40602,8 +39826,7 @@
                   <a:srgbClr val="1B3B6F"/>
                 </a:solidFill>
                 <a:latin typeface="Calibri" pitchFamily="34" charset="0"/>
-                <a:ea typeface="Calibri" pitchFamily="34" charset="-122"/>
-                <a:cs typeface="Calibri" pitchFamily="34" charset="-120"/>
+                <a:cs typeface="Amiri" pitchFamily="2" charset="-78"/>
               </a:rPr>
               <a:t>A</a:t>
             </a:r>
@@ -40641,8 +39864,7 @@
                   <a:srgbClr val="9AA1AB"/>
                 </a:solidFill>
                 <a:latin typeface="Calibri" pitchFamily="34" charset="0"/>
-                <a:ea typeface="Calibri" pitchFamily="34" charset="-122"/>
-                <a:cs typeface="Calibri" pitchFamily="34" charset="-120"/>
+                <a:cs typeface="Amiri" pitchFamily="2" charset="-78"/>
               </a:rPr>
               <a:t>factual details (R2)</a:t>
             </a:r>
@@ -40705,8 +39927,7 @@
                   <a:srgbClr val="1B3B6F"/>
                 </a:solidFill>
                 <a:latin typeface="Calibri" pitchFamily="34" charset="0"/>
-                <a:ea typeface="Calibri" pitchFamily="34" charset="-122"/>
-                <a:cs typeface="Calibri" pitchFamily="34" charset="-120"/>
+                <a:cs typeface="Amiri" pitchFamily="2" charset="-78"/>
               </a:rPr>
               <a:t>B</a:t>
             </a:r>
@@ -40744,8 +39965,7 @@
                   <a:srgbClr val="9AA1AB"/>
                 </a:solidFill>
                 <a:latin typeface="Calibri" pitchFamily="34" charset="0"/>
-                <a:ea typeface="Calibri" pitchFamily="34" charset="-122"/>
-                <a:cs typeface="Calibri" pitchFamily="34" charset="-120"/>
+                <a:cs typeface="Amiri" pitchFamily="2" charset="-78"/>
               </a:rPr>
               <a:t>the writer’s style (R3)</a:t>
             </a:r>
@@ -40835,8 +40055,7 @@
                   <a:srgbClr val="FFFFFF"/>
                 </a:solidFill>
                 <a:latin typeface="Calibri" pitchFamily="34" charset="0"/>
-                <a:ea typeface="Calibri" pitchFamily="34" charset="-122"/>
-                <a:cs typeface="Calibri" pitchFamily="34" charset="-120"/>
+                <a:cs typeface="Amiri" pitchFamily="2" charset="-78"/>
               </a:rPr>
               <a:t>C</a:t>
             </a:r>
@@ -40874,8 +40093,7 @@
                   <a:srgbClr val="1F2A37"/>
                 </a:solidFill>
                 <a:latin typeface="Calibri" pitchFamily="34" charset="0"/>
-                <a:ea typeface="Calibri" pitchFamily="34" charset="-122"/>
-                <a:cs typeface="Calibri" pitchFamily="34" charset="-120"/>
+                <a:cs typeface="Amiri" pitchFamily="2" charset="-78"/>
               </a:rPr>
               <a:t>general meaning (R1)</a:t>
             </a:r>
@@ -40913,8 +40131,7 @@
                   <a:srgbClr val="8A6D1E"/>
                 </a:solidFill>
                 <a:latin typeface="Calibri" pitchFamily="34" charset="0"/>
-                <a:ea typeface="Calibri" pitchFamily="34" charset="-122"/>
-                <a:cs typeface="Calibri" pitchFamily="34" charset="-120"/>
+                <a:cs typeface="Amiri" pitchFamily="2" charset="-78"/>
               </a:rPr>
               <a:t>Prepared at home (P6-L08, from P6-L03).</a:t>
             </a:r>
@@ -41011,8 +40228,7 @@
                   <a:srgbClr val="FFFFFF"/>
                 </a:solidFill>
                 <a:latin typeface="Calibri" pitchFamily="34" charset="0"/>
-                <a:ea typeface="Calibri" pitchFamily="34" charset="-122"/>
-                <a:cs typeface="Calibri" pitchFamily="34" charset="-120"/>
+                <a:cs typeface="Amiri" pitchFamily="2" charset="-78"/>
               </a:rPr>
               <a:t>4</a:t>
             </a:r>
@@ -41050,8 +40266,7 @@
                   <a:srgbClr val="1B3B6F"/>
                 </a:solidFill>
                 <a:latin typeface="Calibri" pitchFamily="34" charset="0"/>
-                <a:ea typeface="Calibri" pitchFamily="34" charset="-122"/>
-                <a:cs typeface="Calibri" pitchFamily="34" charset="-120"/>
+                <a:cs typeface="Amiri" pitchFamily="2" charset="-78"/>
               </a:rPr>
               <a:t>Which opening suits a formal email to a principal?</a:t>
             </a:r>
@@ -41114,8 +40329,7 @@
                   <a:srgbClr val="1B3B6F"/>
                 </a:solidFill>
                 <a:latin typeface="Calibri" pitchFamily="34" charset="0"/>
-                <a:ea typeface="Calibri" pitchFamily="34" charset="-122"/>
-                <a:cs typeface="Calibri" pitchFamily="34" charset="-120"/>
+                <a:cs typeface="Amiri" pitchFamily="2" charset="-78"/>
               </a:rPr>
               <a:t>A</a:t>
             </a:r>
@@ -41152,9 +40366,8 @@
                 <a:solidFill>
                   <a:srgbClr val="9AA1AB"/>
                 </a:solidFill>
-                <a:latin typeface="Amiri" pitchFamily="34" charset="0"/>
-                <a:ea typeface="Amiri" pitchFamily="34" charset="-122"/>
-                <a:cs typeface="Amiri" pitchFamily="34" charset="-120"/>
+                <a:latin typeface="Amiri" pitchFamily="2" charset="-78"/>
+                <a:cs typeface="Amiri" pitchFamily="2" charset="-78"/>
               </a:rPr>
               <a:t>مَرْحَبًا يَا صَدِيقِي!</a:t>
             </a:r>
@@ -41217,8 +40430,7 @@
                   <a:srgbClr val="1B3B6F"/>
                 </a:solidFill>
                 <a:latin typeface="Calibri" pitchFamily="34" charset="0"/>
-                <a:ea typeface="Calibri" pitchFamily="34" charset="-122"/>
-                <a:cs typeface="Calibri" pitchFamily="34" charset="-120"/>
+                <a:cs typeface="Amiri" pitchFamily="2" charset="-78"/>
               </a:rPr>
               <a:t>B</a:t>
             </a:r>
@@ -41255,9 +40467,8 @@
                 <a:solidFill>
                   <a:srgbClr val="9AA1AB"/>
                 </a:solidFill>
-                <a:latin typeface="Amiri" pitchFamily="34" charset="0"/>
-                <a:ea typeface="Amiri" pitchFamily="34" charset="-122"/>
-                <a:cs typeface="Amiri" pitchFamily="34" charset="-120"/>
+                <a:latin typeface="Amiri" pitchFamily="2" charset="-78"/>
+                <a:cs typeface="Amiri" pitchFamily="2" charset="-78"/>
               </a:rPr>
               <a:t>أَهْلًا وَسَهْلًا،</a:t>
             </a:r>
@@ -41347,8 +40558,7 @@
                   <a:srgbClr val="FFFFFF"/>
                 </a:solidFill>
                 <a:latin typeface="Calibri" pitchFamily="34" charset="0"/>
-                <a:ea typeface="Calibri" pitchFamily="34" charset="-122"/>
-                <a:cs typeface="Calibri" pitchFamily="34" charset="-120"/>
+                <a:cs typeface="Amiri" pitchFamily="2" charset="-78"/>
               </a:rPr>
               <a:t>C</a:t>
             </a:r>
@@ -41385,9 +40595,8 @@
                 <a:solidFill>
                   <a:srgbClr val="1F2A37"/>
                 </a:solidFill>
-                <a:latin typeface="Amiri" pitchFamily="34" charset="0"/>
-                <a:ea typeface="Amiri" pitchFamily="34" charset="-122"/>
-                <a:cs typeface="Amiri" pitchFamily="34" charset="-120"/>
+                <a:latin typeface="Amiri" pitchFamily="2" charset="-78"/>
+                <a:cs typeface="Amiri" pitchFamily="2" charset="-78"/>
               </a:rPr>
               <a:t>حَضْرَةَ مُدِيرِ المَدْرَسَةِ المُحْتَرَمِ،</a:t>
             </a:r>
@@ -41425,8 +40634,7 @@
                   <a:srgbClr val="8A6D1E"/>
                 </a:solidFill>
                 <a:latin typeface="Calibri" pitchFamily="34" charset="0"/>
-                <a:ea typeface="Calibri" pitchFamily="34" charset="-122"/>
-                <a:cs typeface="Calibri" pitchFamily="34" charset="-120"/>
+                <a:cs typeface="Amiri" pitchFamily="2" charset="-78"/>
               </a:rPr>
               <a:t>Register from the first line (P6-L04).</a:t>
             </a:r>
@@ -41523,8 +40731,7 @@
                   <a:srgbClr val="FFFFFF"/>
                 </a:solidFill>
                 <a:latin typeface="Calibri" pitchFamily="34" charset="0"/>
-                <a:ea typeface="Calibri" pitchFamily="34" charset="-122"/>
-                <a:cs typeface="Calibri" pitchFamily="34" charset="-120"/>
+                <a:cs typeface="Amiri" pitchFamily="2" charset="-78"/>
               </a:rPr>
               <a:t>5</a:t>
             </a:r>
@@ -41562,8 +40769,7 @@
                   <a:srgbClr val="1B3B6F"/>
                 </a:solidFill>
                 <a:latin typeface="Calibri" pitchFamily="34" charset="0"/>
-                <a:ea typeface="Calibri" pitchFamily="34" charset="-122"/>
-                <a:cs typeface="Calibri" pitchFamily="34" charset="-120"/>
+                <a:cs typeface="Amiri" pitchFamily="2" charset="-78"/>
               </a:rPr>
               <a:t>How long should Q1 take, so that Q2 has enough time?</a:t>
             </a:r>
@@ -41653,8 +40859,7 @@
                   <a:srgbClr val="FFFFFF"/>
                 </a:solidFill>
                 <a:latin typeface="Calibri" pitchFamily="34" charset="0"/>
-                <a:ea typeface="Calibri" pitchFamily="34" charset="-122"/>
-                <a:cs typeface="Calibri" pitchFamily="34" charset="-120"/>
+                <a:cs typeface="Amiri" pitchFamily="2" charset="-78"/>
               </a:rPr>
               <a:t>A</a:t>
             </a:r>
@@ -41692,8 +40897,7 @@
                   <a:srgbClr val="1F2A37"/>
                 </a:solidFill>
                 <a:latin typeface="Calibri" pitchFamily="34" charset="0"/>
-                <a:ea typeface="Calibri" pitchFamily="34" charset="-122"/>
-                <a:cs typeface="Calibri" pitchFamily="34" charset="-120"/>
+                <a:cs typeface="Amiri" pitchFamily="2" charset="-78"/>
               </a:rPr>
               <a:t>about 20 minutes</a:t>
             </a:r>
@@ -41756,8 +40960,7 @@
                   <a:srgbClr val="1B3B6F"/>
                 </a:solidFill>
                 <a:latin typeface="Calibri" pitchFamily="34" charset="0"/>
-                <a:ea typeface="Calibri" pitchFamily="34" charset="-122"/>
-                <a:cs typeface="Calibri" pitchFamily="34" charset="-120"/>
+                <a:cs typeface="Amiri" pitchFamily="2" charset="-78"/>
               </a:rPr>
               <a:t>B</a:t>
             </a:r>
@@ -41795,8 +40998,7 @@
                   <a:srgbClr val="9AA1AB"/>
                 </a:solidFill>
                 <a:latin typeface="Calibri" pitchFamily="34" charset="0"/>
-                <a:ea typeface="Calibri" pitchFamily="34" charset="-122"/>
-                <a:cs typeface="Calibri" pitchFamily="34" charset="-120"/>
+                <a:cs typeface="Amiri" pitchFamily="2" charset="-78"/>
               </a:rPr>
               <a:t>about 40 minutes</a:t>
             </a:r>
@@ -41859,8 +41061,7 @@
                   <a:srgbClr val="1B3B6F"/>
                 </a:solidFill>
                 <a:latin typeface="Calibri" pitchFamily="34" charset="0"/>
-                <a:ea typeface="Calibri" pitchFamily="34" charset="-122"/>
-                <a:cs typeface="Calibri" pitchFamily="34" charset="-120"/>
+                <a:cs typeface="Amiri" pitchFamily="2" charset="-78"/>
               </a:rPr>
               <a:t>C</a:t>
             </a:r>
@@ -41898,8 +41099,7 @@
                   <a:srgbClr val="9AA1AB"/>
                 </a:solidFill>
                 <a:latin typeface="Calibri" pitchFamily="34" charset="0"/>
-                <a:ea typeface="Calibri" pitchFamily="34" charset="-122"/>
-                <a:cs typeface="Calibri" pitchFamily="34" charset="-120"/>
+                <a:cs typeface="Amiri" pitchFamily="2" charset="-78"/>
               </a:rPr>
               <a:t>about 5 minutes</a:t>
             </a:r>
@@ -41937,8 +41137,7 @@
                   <a:srgbClr val="8A6D1E"/>
                 </a:solidFill>
                 <a:latin typeface="Calibri" pitchFamily="34" charset="0"/>
-                <a:ea typeface="Calibri" pitchFamily="34" charset="-122"/>
-                <a:cs typeface="Calibri" pitchFamily="34" charset="-120"/>
+                <a:cs typeface="Amiri" pitchFamily="2" charset="-78"/>
               </a:rPr>
               <a:t>Q1 ≈ 20 · Q2 ≈ 35 · check 5.</a:t>
             </a:r>
@@ -42010,8 +41209,7 @@
                   <a:srgbClr val="8A6D1E"/>
                 </a:solidFill>
                 <a:latin typeface="Calibri" pitchFamily="34" charset="0"/>
-                <a:ea typeface="Calibri" pitchFamily="34" charset="-122"/>
-                <a:cs typeface="Calibri" pitchFamily="34" charset="-120"/>
+                <a:cs typeface="Amiri" pitchFamily="2" charset="-78"/>
               </a:rPr>
               <a:t>THE KEY IDEA FOR TODAY</a:t>
             </a:r>
@@ -42049,8 +41247,7 @@
                   <a:srgbClr val="1F2A37"/>
                 </a:solidFill>
                 <a:latin typeface="Calibri" pitchFamily="34" charset="0"/>
-                <a:ea typeface="Calibri" pitchFamily="34" charset="-122"/>
-                <a:cs typeface="Calibri" pitchFamily="34" charset="-120"/>
+                <a:cs typeface="Amiri" pitchFamily="2" charset="-78"/>
               </a:rPr>
               <a:t>Prove every reading answer from the text; write in the right register from the first line.</a:t>
             </a:r>
@@ -42087,9 +41284,8 @@
                 <a:solidFill>
                   <a:srgbClr val="1B3B6F"/>
                 </a:solidFill>
-                <a:latin typeface="Amiri" pitchFamily="34" charset="0"/>
-                <a:ea typeface="Amiri" pitchFamily="34" charset="-122"/>
-                <a:cs typeface="Amiri" pitchFamily="34" charset="-120"/>
+                <a:latin typeface="Amiri" pitchFamily="2" charset="-78"/>
+                <a:cs typeface="Amiri" pitchFamily="2" charset="-78"/>
               </a:rPr>
               <a:t>أَثْبِتْ إِجَابَتَكَ مِنَ النَّصِّ.</a:t>
             </a:r>
@@ -42127,8 +41323,7 @@
                   <a:srgbClr val="8A93A0"/>
                 </a:solidFill>
                 <a:latin typeface="Calibri" pitchFamily="34" charset="0"/>
-                <a:ea typeface="Calibri" pitchFamily="34" charset="-122"/>
-                <a:cs typeface="Calibri" pitchFamily="34" charset="-120"/>
+                <a:cs typeface="Amiri" pitchFamily="2" charset="-78"/>
               </a:rPr>
               <a:t>5 / 25</a:t>
             </a:r>
@@ -42222,9 +41417,8 @@
                 <a:solidFill>
                   <a:srgbClr val="D4AF37"/>
                 </a:solidFill>
-                <a:latin typeface="Amiri" pitchFamily="34" charset="0"/>
-                <a:ea typeface="Amiri" pitchFamily="34" charset="-122"/>
-                <a:cs typeface="Amiri" pitchFamily="34" charset="-120"/>
+                <a:latin typeface="Amiri" pitchFamily="2" charset="-78"/>
+                <a:cs typeface="Amiri" pitchFamily="2" charset="-78"/>
               </a:rPr>
               <a:t>م</a:t>
             </a:r>
@@ -42262,8 +41456,7 @@
                   <a:srgbClr val="1B3B6F"/>
                 </a:solidFill>
                 <a:latin typeface="Cambria" pitchFamily="34" charset="0"/>
-                <a:ea typeface="Cambria" pitchFamily="34" charset="-122"/>
-                <a:cs typeface="Cambria" pitchFamily="34" charset="-120"/>
+                <a:cs typeface="Amiri" pitchFamily="2" charset="-78"/>
               </a:rPr>
               <a:t>Al Madina Online School</a:t>
             </a:r>
@@ -42301,8 +41494,7 @@
                   <a:srgbClr val="8A6D1E"/>
                 </a:solidFill>
                 <a:latin typeface="Calibri" pitchFamily="34" charset="0"/>
-                <a:ea typeface="Calibri" pitchFamily="34" charset="-122"/>
-                <a:cs typeface="Calibri" pitchFamily="34" charset="-120"/>
+                <a:cs typeface="Amiri" pitchFamily="2" charset="-78"/>
               </a:rPr>
               <a:t>ARABIC DEPARTMENT · MIFTAH ARABIC · IGCSE 0544</a:t>
             </a:r>
@@ -42367,8 +41559,7 @@
                   <a:srgbClr val="FFFFFF"/>
                 </a:solidFill>
                 <a:latin typeface="Calibri" pitchFamily="34" charset="0"/>
-                <a:ea typeface="Calibri" pitchFamily="34" charset="-122"/>
-                <a:cs typeface="Calibri" pitchFamily="34" charset="-120"/>
+                <a:cs typeface="Amiri" pitchFamily="2" charset="-78"/>
               </a:rPr>
               <a:t>P6-L09 · IGCSE Bridge</a:t>
             </a:r>
@@ -42433,8 +41624,7 @@
                   <a:srgbClr val="FFFFFF"/>
                 </a:solidFill>
                 <a:latin typeface="Calibri" pitchFamily="34" charset="0"/>
-                <a:ea typeface="Calibri" pitchFamily="34" charset="-122"/>
-                <a:cs typeface="Calibri" pitchFamily="34" charset="-120"/>
+                <a:cs typeface="Amiri" pitchFamily="2" charset="-78"/>
               </a:rPr>
               <a:t>WELCOME · 1 MIN</a:t>
             </a:r>
@@ -42472,8 +41662,7 @@
                   <a:srgbClr val="5A6472"/>
                 </a:solidFill>
                 <a:latin typeface="Calibri" pitchFamily="34" charset="0"/>
-                <a:ea typeface="Calibri" pitchFamily="34" charset="-122"/>
-                <a:cs typeface="Calibri" pitchFamily="34" charset="-120"/>
+                <a:cs typeface="Amiri" pitchFamily="2" charset="-78"/>
               </a:rPr>
               <a:t>LESSON OBJECTIVES</a:t>
             </a:r>
@@ -42511,8 +41700,7 @@
                   <a:srgbClr val="1B3B6F"/>
                 </a:solidFill>
                 <a:latin typeface="Cambria" pitchFamily="34" charset="0"/>
-                <a:ea typeface="Cambria" pitchFamily="34" charset="-122"/>
-                <a:cs typeface="Cambria" pitchFamily="34" charset="-120"/>
+                <a:cs typeface="Amiri" pitchFamily="2" charset="-78"/>
               </a:rPr>
               <a:t>Objectives and success criteria</a:t>
             </a:r>
@@ -42549,9 +41737,8 @@
                 <a:solidFill>
                   <a:srgbClr val="8A6D1E"/>
                 </a:solidFill>
-                <a:latin typeface="Amiri" pitchFamily="34" charset="0"/>
-                <a:ea typeface="Amiri" pitchFamily="34" charset="-122"/>
-                <a:cs typeface="Amiri" pitchFamily="34" charset="-120"/>
+                <a:latin typeface="Amiri" pitchFamily="2" charset="-78"/>
+                <a:cs typeface="Amiri" pitchFamily="2" charset="-78"/>
               </a:rPr>
               <a:t>الأَهْدَافُ وَمَعَايِيرُ النَّجَاحِ</a:t>
             </a:r>
@@ -42589,8 +41776,7 @@
                   <a:srgbClr val="8A93A0"/>
                 </a:solidFill>
                 <a:latin typeface="Calibri" pitchFamily="34" charset="0"/>
-                <a:ea typeface="Calibri" pitchFamily="34" charset="-122"/>
-                <a:cs typeface="Calibri" pitchFamily="34" charset="-120"/>
+                <a:cs typeface="Amiri" pitchFamily="2" charset="-78"/>
               </a:rPr>
               <a:t>Miftah Arabic · Progression P6 · IGCSE Bridge · P6-L09</a:t>
             </a:r>
@@ -42662,8 +41848,7 @@
                   <a:srgbClr val="1B3B6F"/>
                 </a:solidFill>
                 <a:latin typeface="Calibri" pitchFamily="34" charset="0"/>
-                <a:ea typeface="Calibri" pitchFamily="34" charset="-122"/>
-                <a:cs typeface="Calibri" pitchFamily="34" charset="-120"/>
+                <a:cs typeface="Amiri" pitchFamily="2" charset="-78"/>
               </a:rPr>
               <a:t>TODAY YOU WILL</a:t>
             </a:r>
@@ -42700,9 +41885,8 @@
                 <a:solidFill>
                   <a:srgbClr val="8A6D1E"/>
                 </a:solidFill>
-                <a:latin typeface="Amiri" pitchFamily="34" charset="0"/>
-                <a:ea typeface="Amiri" pitchFamily="34" charset="-122"/>
-                <a:cs typeface="Amiri" pitchFamily="34" charset="-120"/>
+                <a:latin typeface="Amiri" pitchFamily="2" charset="-78"/>
+                <a:cs typeface="Amiri" pitchFamily="2" charset="-78"/>
               </a:rPr>
               <a:t>سَتَتَعَلَّمُ اليَوْمَ</a:t>
             </a:r>
@@ -42765,8 +41949,7 @@
                   <a:srgbClr val="D4AF37"/>
                 </a:solidFill>
                 <a:latin typeface="Calibri" pitchFamily="34" charset="0"/>
-                <a:ea typeface="Calibri" pitchFamily="34" charset="-122"/>
-                <a:cs typeface="Calibri" pitchFamily="34" charset="-120"/>
+                <a:cs typeface="Amiri" pitchFamily="2" charset="-78"/>
               </a:rPr>
               <a:t>1</a:t>
             </a:r>
@@ -42804,8 +41987,7 @@
                   <a:srgbClr val="1F2A37"/>
                 </a:solidFill>
                 <a:latin typeface="Calibri" pitchFamily="34" charset="0"/>
-                <a:ea typeface="Calibri" pitchFamily="34" charset="-122"/>
-                <a:cs typeface="Calibri" pitchFamily="34" charset="-120"/>
+                <a:cs typeface="Amiri" pitchFamily="2" charset="-78"/>
               </a:rPr>
               <a:t>Sit the mock Paper 2 Reading under exam conditions.</a:t>
             </a:r>
@@ -42868,8 +42050,7 @@
                   <a:srgbClr val="D4AF37"/>
                 </a:solidFill>
                 <a:latin typeface="Calibri" pitchFamily="34" charset="0"/>
-                <a:ea typeface="Calibri" pitchFamily="34" charset="-122"/>
-                <a:cs typeface="Calibri" pitchFamily="34" charset="-120"/>
+                <a:cs typeface="Amiri" pitchFamily="2" charset="-78"/>
               </a:rPr>
               <a:t>2</a:t>
             </a:r>
@@ -42907,8 +42088,7 @@
                   <a:srgbClr val="1F2A37"/>
                 </a:solidFill>
                 <a:latin typeface="Calibri" pitchFamily="34" charset="0"/>
-                <a:ea typeface="Calibri" pitchFamily="34" charset="-122"/>
-                <a:cs typeface="Calibri" pitchFamily="34" charset="-120"/>
+                <a:cs typeface="Amiri" pitchFamily="2" charset="-78"/>
               </a:rPr>
               <a:t>Sit the mock Paper 4 Writing (Q1 directed + Q2 essay) under exam conditions.</a:t>
             </a:r>
@@ -42971,8 +42151,7 @@
                   <a:srgbClr val="D4AF37"/>
                 </a:solidFill>
                 <a:latin typeface="Calibri" pitchFamily="34" charset="0"/>
-                <a:ea typeface="Calibri" pitchFamily="34" charset="-122"/>
-                <a:cs typeface="Calibri" pitchFamily="34" charset="-120"/>
+                <a:cs typeface="Amiri" pitchFamily="2" charset="-78"/>
               </a:rPr>
               <a:t>3</a:t>
             </a:r>
@@ -43010,8 +42189,7 @@
                   <a:srgbClr val="1F2A37"/>
                 </a:solidFill>
                 <a:latin typeface="Calibri" pitchFamily="34" charset="0"/>
-                <a:ea typeface="Calibri" pitchFamily="34" charset="-122"/>
-                <a:cs typeface="Calibri" pitchFamily="34" charset="-120"/>
+                <a:cs typeface="Amiri" pitchFamily="2" charset="-78"/>
               </a:rPr>
               <a:t>Manage the 45 + 60 minutes across the two papers efficiently.</a:t>
             </a:r>
@@ -43074,8 +42252,7 @@
                   <a:srgbClr val="D4AF37"/>
                 </a:solidFill>
                 <a:latin typeface="Calibri" pitchFamily="34" charset="0"/>
-                <a:ea typeface="Calibri" pitchFamily="34" charset="-122"/>
-                <a:cs typeface="Calibri" pitchFamily="34" charset="-120"/>
+                <a:cs typeface="Amiri" pitchFamily="2" charset="-78"/>
               </a:rPr>
               <a:t>4</a:t>
             </a:r>
@@ -43113,8 +42290,7 @@
                   <a:srgbClr val="1F2A37"/>
                 </a:solidFill>
                 <a:latin typeface="Calibri" pitchFamily="34" charset="0"/>
-                <a:ea typeface="Calibri" pitchFamily="34" charset="-122"/>
-                <a:cs typeface="Calibri" pitchFamily="34" charset="-120"/>
+                <a:cs typeface="Amiri" pitchFamily="2" charset="-78"/>
               </a:rPr>
               <a:t>Record your scores and identify targets for the final exam.</a:t>
             </a:r>
@@ -43206,8 +42382,7 @@
                   <a:srgbClr val="FFFFFF"/>
                 </a:solidFill>
                 <a:latin typeface="Calibri" pitchFamily="34" charset="0"/>
-                <a:ea typeface="Calibri" pitchFamily="34" charset="-122"/>
-                <a:cs typeface="Calibri" pitchFamily="34" charset="-120"/>
+                <a:cs typeface="Amiri" pitchFamily="2" charset="-78"/>
               </a:rPr>
               <a:t>CORE</a:t>
             </a:r>
@@ -43245,8 +42420,7 @@
                   <a:srgbClr val="2E8B57"/>
                 </a:solidFill>
                 <a:latin typeface="Calibri" pitchFamily="34" charset="0"/>
-                <a:ea typeface="Calibri" pitchFamily="34" charset="-122"/>
-                <a:cs typeface="Calibri" pitchFamily="34" charset="-120"/>
+                <a:cs typeface="Amiri" pitchFamily="2" charset="-78"/>
               </a:rPr>
               <a:t>Everyone</a:t>
             </a:r>
@@ -43284,8 +42458,7 @@
                   <a:srgbClr val="2E8B57"/>
                 </a:solidFill>
                 <a:latin typeface="Calibri" pitchFamily="34" charset="0"/>
-                <a:ea typeface="Calibri" pitchFamily="34" charset="-122"/>
-                <a:cs typeface="Calibri" pitchFamily="34" charset="-120"/>
+                <a:cs typeface="Amiri" pitchFamily="2" charset="-78"/>
               </a:rPr>
               <a:t>☐  I can answer every reading question — no blanks.</a:t>
             </a:r>
@@ -43323,8 +42496,7 @@
                   <a:srgbClr val="2E8B57"/>
                 </a:solidFill>
                 <a:latin typeface="Calibri" pitchFamily="34" charset="0"/>
-                <a:ea typeface="Calibri" pitchFamily="34" charset="-122"/>
-                <a:cs typeface="Calibri" pitchFamily="34" charset="-120"/>
+                <a:cs typeface="Amiri" pitchFamily="2" charset="-78"/>
               </a:rPr>
               <a:t>☐  I can open and close Q1 formally.</a:t>
             </a:r>
@@ -43416,8 +42588,7 @@
                   <a:srgbClr val="FFFFFF"/>
                 </a:solidFill>
                 <a:latin typeface="Calibri" pitchFamily="34" charset="0"/>
-                <a:ea typeface="Calibri" pitchFamily="34" charset="-122"/>
-                <a:cs typeface="Calibri" pitchFamily="34" charset="-120"/>
+                <a:cs typeface="Amiri" pitchFamily="2" charset="-78"/>
               </a:rPr>
               <a:t>DEVELOP</a:t>
             </a:r>
@@ -43455,8 +42626,7 @@
                   <a:srgbClr val="C9780A"/>
                 </a:solidFill>
                 <a:latin typeface="Calibri" pitchFamily="34" charset="0"/>
-                <a:ea typeface="Calibri" pitchFamily="34" charset="-122"/>
-                <a:cs typeface="Calibri" pitchFamily="34" charset="-120"/>
+                <a:cs typeface="Amiri" pitchFamily="2" charset="-78"/>
               </a:rPr>
               <a:t>Most of us</a:t>
             </a:r>
@@ -43494,8 +42664,7 @@
                   <a:srgbClr val="C9780A"/>
                 </a:solidFill>
                 <a:latin typeface="Calibri" pitchFamily="34" charset="0"/>
-                <a:ea typeface="Calibri" pitchFamily="34" charset="-122"/>
-                <a:cs typeface="Calibri" pitchFamily="34" charset="-120"/>
+                <a:cs typeface="Amiri" pitchFamily="2" charset="-78"/>
               </a:rPr>
               <a:t>☐  I can prove every reading answer from the text.</a:t>
             </a:r>
@@ -43533,8 +42702,7 @@
                   <a:srgbClr val="C9780A"/>
                 </a:solidFill>
                 <a:latin typeface="Calibri" pitchFamily="34" charset="0"/>
-                <a:ea typeface="Calibri" pitchFamily="34" charset="-122"/>
-                <a:cs typeface="Calibri" pitchFamily="34" charset="-120"/>
+                <a:cs typeface="Amiri" pitchFamily="2" charset="-78"/>
               </a:rPr>
               <a:t>☐  I can finish Q1 in 20 minutes.</a:t>
             </a:r>
@@ -43626,8 +42794,7 @@
                   <a:srgbClr val="FFFFFF"/>
                 </a:solidFill>
                 <a:latin typeface="Calibri" pitchFamily="34" charset="0"/>
-                <a:ea typeface="Calibri" pitchFamily="34" charset="-122"/>
-                <a:cs typeface="Calibri" pitchFamily="34" charset="-120"/>
+                <a:cs typeface="Amiri" pitchFamily="2" charset="-78"/>
               </a:rPr>
               <a:t>STRETCH</a:t>
             </a:r>
@@ -43665,8 +42832,7 @@
                   <a:srgbClr val="B83227"/>
                 </a:solidFill>
                 <a:latin typeface="Calibri" pitchFamily="34" charset="0"/>
-                <a:ea typeface="Calibri" pitchFamily="34" charset="-122"/>
-                <a:cs typeface="Calibri" pitchFamily="34" charset="-120"/>
+                <a:cs typeface="Amiri" pitchFamily="2" charset="-78"/>
               </a:rPr>
               <a:t>Aim high</a:t>
             </a:r>
@@ -43704,8 +42870,7 @@
                   <a:srgbClr val="B83227"/>
                 </a:solidFill>
                 <a:latin typeface="Calibri" pitchFamily="34" charset="0"/>
-                <a:ea typeface="Calibri" pitchFamily="34" charset="-122"/>
-                <a:cs typeface="Calibri" pitchFamily="34" charset="-120"/>
+                <a:cs typeface="Amiri" pitchFamily="2" charset="-78"/>
               </a:rPr>
               <a:t>☐  I can choose the right form in every gap-fill.</a:t>
             </a:r>
@@ -43743,8 +42908,7 @@
                   <a:srgbClr val="B83227"/>
                 </a:solidFill>
                 <a:latin typeface="Calibri" pitchFamily="34" charset="0"/>
-                <a:ea typeface="Calibri" pitchFamily="34" charset="-122"/>
-                <a:cs typeface="Calibri" pitchFamily="34" charset="-120"/>
+                <a:cs typeface="Amiri" pitchFamily="2" charset="-78"/>
               </a:rPr>
               <a:t>☐  I can give Q2 its full architecture.</a:t>
             </a:r>
@@ -43782,8 +42946,7 @@
                   <a:srgbClr val="8A93A0"/>
                 </a:solidFill>
                 <a:latin typeface="Calibri" pitchFamily="34" charset="0"/>
-                <a:ea typeface="Calibri" pitchFamily="34" charset="-122"/>
-                <a:cs typeface="Calibri" pitchFamily="34" charset="-120"/>
+                <a:cs typeface="Amiri" pitchFamily="2" charset="-78"/>
               </a:rPr>
               <a:t>6 / 25</a:t>
             </a:r>
@@ -43877,9 +43040,8 @@
                 <a:solidFill>
                   <a:srgbClr val="D4AF37"/>
                 </a:solidFill>
-                <a:latin typeface="Amiri" pitchFamily="34" charset="0"/>
-                <a:ea typeface="Amiri" pitchFamily="34" charset="-122"/>
-                <a:cs typeface="Amiri" pitchFamily="34" charset="-120"/>
+                <a:latin typeface="Amiri" pitchFamily="2" charset="-78"/>
+                <a:cs typeface="Amiri" pitchFamily="2" charset="-78"/>
               </a:rPr>
               <a:t>م</a:t>
             </a:r>
@@ -43917,8 +43079,7 @@
                   <a:srgbClr val="1B3B6F"/>
                 </a:solidFill>
                 <a:latin typeface="Cambria" pitchFamily="34" charset="0"/>
-                <a:ea typeface="Cambria" pitchFamily="34" charset="-122"/>
-                <a:cs typeface="Cambria" pitchFamily="34" charset="-120"/>
+                <a:cs typeface="Amiri" pitchFamily="2" charset="-78"/>
               </a:rPr>
               <a:t>Al Madina Online School</a:t>
             </a:r>
@@ -43956,8 +43117,7 @@
                   <a:srgbClr val="8A6D1E"/>
                 </a:solidFill>
                 <a:latin typeface="Calibri" pitchFamily="34" charset="0"/>
-                <a:ea typeface="Calibri" pitchFamily="34" charset="-122"/>
-                <a:cs typeface="Calibri" pitchFamily="34" charset="-120"/>
+                <a:cs typeface="Amiri" pitchFamily="2" charset="-78"/>
               </a:rPr>
               <a:t>ARABIC DEPARTMENT · MIFTAH ARABIC · IGCSE 0544</a:t>
             </a:r>
@@ -44022,8 +43182,7 @@
                   <a:srgbClr val="FFFFFF"/>
                 </a:solidFill>
                 <a:latin typeface="Calibri" pitchFamily="34" charset="0"/>
-                <a:ea typeface="Calibri" pitchFamily="34" charset="-122"/>
-                <a:cs typeface="Calibri" pitchFamily="34" charset="-120"/>
+                <a:cs typeface="Amiri" pitchFamily="2" charset="-78"/>
               </a:rPr>
               <a:t>P6-L09 · IGCSE Bridge</a:t>
             </a:r>
@@ -44088,8 +43247,7 @@
                   <a:srgbClr val="FFFFFF"/>
                 </a:solidFill>
                 <a:latin typeface="Calibri" pitchFamily="34" charset="0"/>
-                <a:ea typeface="Calibri" pitchFamily="34" charset="-122"/>
-                <a:cs typeface="Calibri" pitchFamily="34" charset="-120"/>
+                <a:cs typeface="Amiri" pitchFamily="2" charset="-78"/>
               </a:rPr>
               <a:t>TEACHER INSTRUCTION · 2 MIN</a:t>
             </a:r>
@@ -44127,8 +43285,7 @@
                   <a:srgbClr val="1B3B6F"/>
                 </a:solidFill>
                 <a:latin typeface="Calibri" pitchFamily="34" charset="0"/>
-                <a:ea typeface="Calibri" pitchFamily="34" charset="-122"/>
-                <a:cs typeface="Calibri" pitchFamily="34" charset="-120"/>
+                <a:cs typeface="Amiri" pitchFamily="2" charset="-78"/>
               </a:rPr>
               <a:t>TEACH · EXAM CONDITIONS (WEBSITE) · TIMING</a:t>
             </a:r>
@@ -44166,8 +43323,7 @@
                   <a:srgbClr val="1B3B6F"/>
                 </a:solidFill>
                 <a:latin typeface="Cambria" pitchFamily="34" charset="0"/>
-                <a:ea typeface="Cambria" pitchFamily="34" charset="-122"/>
-                <a:cs typeface="Cambria" pitchFamily="34" charset="-120"/>
+                <a:cs typeface="Amiri" pitchFamily="2" charset="-78"/>
               </a:rPr>
               <a:t>Before you begin</a:t>
             </a:r>
@@ -44204,9 +43360,8 @@
                 <a:solidFill>
                   <a:srgbClr val="8A6D1E"/>
                 </a:solidFill>
-                <a:latin typeface="Amiri" pitchFamily="34" charset="0"/>
-                <a:ea typeface="Amiri" pitchFamily="34" charset="-122"/>
-                <a:cs typeface="Amiri" pitchFamily="34" charset="-120"/>
+                <a:latin typeface="Amiri" pitchFamily="2" charset="-78"/>
+                <a:cs typeface="Amiri" pitchFamily="2" charset="-78"/>
               </a:rPr>
               <a:t>ظُرُوفُ الامْتِحَانِ</a:t>
             </a:r>
@@ -44244,8 +43399,7 @@
                   <a:srgbClr val="8A93A0"/>
                 </a:solidFill>
                 <a:latin typeface="Calibri" pitchFamily="34" charset="0"/>
-                <a:ea typeface="Calibri" pitchFamily="34" charset="-122"/>
-                <a:cs typeface="Calibri" pitchFamily="34" charset="-120"/>
+                <a:cs typeface="Amiri" pitchFamily="2" charset="-78"/>
               </a:rPr>
               <a:t>Miftah Arabic · Progression P6 · IGCSE Bridge · P6-L09</a:t>
             </a:r>
@@ -44317,8 +43471,7 @@
                   <a:srgbClr val="1B3B6F"/>
                 </a:solidFill>
                 <a:latin typeface="Calibri" pitchFamily="34" charset="0"/>
-                <a:ea typeface="Calibri" pitchFamily="34" charset="-122"/>
-                <a:cs typeface="Calibri" pitchFamily="34" charset="-120"/>
+                <a:cs typeface="Amiri" pitchFamily="2" charset="-78"/>
               </a:rPr>
               <a:t>WHAT YOU NEED TO KNOW</a:t>
             </a:r>
@@ -44381,8 +43534,7 @@
                   <a:srgbClr val="D4AF37"/>
                 </a:solidFill>
                 <a:latin typeface="Calibri" pitchFamily="34" charset="0"/>
-                <a:ea typeface="Calibri" pitchFamily="34" charset="-122"/>
-                <a:cs typeface="Calibri" pitchFamily="34" charset="-120"/>
+                <a:cs typeface="Amiri" pitchFamily="2" charset="-78"/>
               </a:rPr>
               <a:t>1</a:t>
             </a:r>
@@ -44420,8 +43572,7 @@
                   <a:srgbClr val="1F2A37"/>
                 </a:solidFill>
                 <a:latin typeface="Calibri" pitchFamily="34" charset="0"/>
-                <a:ea typeface="Calibri" pitchFamily="34" charset="-122"/>
-                <a:cs typeface="Calibri" pitchFamily="34" charset="-120"/>
+                <a:cs typeface="Amiri" pitchFamily="2" charset="-78"/>
               </a:rPr>
               <a:t>Paper 2 Reading is about 45 minutes for 45 marks; Paper 4 Writing is 60 minutes for 30 marks (Q1 in about 20, Q2 in about 35, with 5 to check).</a:t>
             </a:r>
@@ -44484,8 +43635,7 @@
                   <a:srgbClr val="D4AF37"/>
                 </a:solidFill>
                 <a:latin typeface="Calibri" pitchFamily="34" charset="0"/>
-                <a:ea typeface="Calibri" pitchFamily="34" charset="-122"/>
-                <a:cs typeface="Calibri" pitchFamily="34" charset="-120"/>
+                <a:cs typeface="Amiri" pitchFamily="2" charset="-78"/>
               </a:rPr>
               <a:t>2</a:t>
             </a:r>
@@ -44523,8 +43673,7 @@
                   <a:srgbClr val="1F2A37"/>
                 </a:solidFill>
                 <a:latin typeface="Calibri" pitchFamily="34" charset="0"/>
-                <a:ea typeface="Calibri" pitchFamily="34" charset="-122"/>
-                <a:cs typeface="Calibri" pitchFamily="34" charset="-120"/>
+                <a:cs typeface="Amiri" pitchFamily="2" charset="-78"/>
               </a:rPr>
               <a:t>Work silently, without notes. Prove every reading answer from the text; write both Paper 4 answers to length in the correct register.</a:t>
             </a:r>
@@ -44587,8 +43736,7 @@
                   <a:srgbClr val="D4AF37"/>
                 </a:solidFill>
                 <a:latin typeface="Calibri" pitchFamily="34" charset="0"/>
-                <a:ea typeface="Calibri" pitchFamily="34" charset="-122"/>
-                <a:cs typeface="Calibri" pitchFamily="34" charset="-120"/>
+                <a:cs typeface="Amiri" pitchFamily="2" charset="-78"/>
               </a:rPr>
               <a:t>3</a:t>
             </a:r>
@@ -44626,8 +43774,7 @@
                   <a:srgbClr val="1F2A37"/>
                 </a:solidFill>
                 <a:latin typeface="Calibri" pitchFamily="34" charset="0"/>
-                <a:ea typeface="Calibri" pitchFamily="34" charset="-122"/>
-                <a:cs typeface="Calibri" pitchFamily="34" charset="-120"/>
+                <a:cs typeface="Amiri" pitchFamily="2" charset="-78"/>
               </a:rPr>
               <a:t>Today: Paper 2 and Q1 in class; Q2 is timed homework (35 minutes) under the same conditions.</a:t>
             </a:r>
@@ -44699,8 +43846,7 @@
                   <a:srgbClr val="8A6D1E"/>
                 </a:solidFill>
                 <a:latin typeface="Calibri" pitchFamily="34" charset="0"/>
-                <a:ea typeface="Calibri" pitchFamily="34" charset="-122"/>
-                <a:cs typeface="Calibri" pitchFamily="34" charset="-120"/>
+                <a:cs typeface="Amiri" pitchFamily="2" charset="-78"/>
               </a:rPr>
               <a:t>THE TIMING</a:t>
             </a:r>
@@ -44737,9 +43883,8 @@
                 <a:solidFill>
                   <a:srgbClr val="1B3B6F"/>
                 </a:solidFill>
-                <a:latin typeface="Amiri" pitchFamily="34" charset="0"/>
-                <a:ea typeface="Amiri" pitchFamily="34" charset="-122"/>
-                <a:cs typeface="Amiri" pitchFamily="34" charset="-120"/>
+                <a:latin typeface="Amiri" pitchFamily="2" charset="-78"/>
+                <a:cs typeface="Amiri" pitchFamily="2" charset="-78"/>
               </a:rPr>
               <a:t>القِرَاءَةُ: ٢٠ دَقِيقَةً</a:t>
             </a:r>
@@ -44777,8 +43922,7 @@
                   <a:srgbClr val="5A6472"/>
                 </a:solidFill>
                 <a:latin typeface="Calibri" pitchFamily="34" charset="0"/>
-                <a:ea typeface="Calibri" pitchFamily="34" charset="-122"/>
-                <a:cs typeface="Calibri" pitchFamily="34" charset="-120"/>
+                <a:cs typeface="Amiri" pitchFamily="2" charset="-78"/>
               </a:rPr>
               <a:t>Paper 2 — 3 texts · 16 marks</a:t>
             </a:r>
@@ -44838,9 +43982,8 @@
                 <a:solidFill>
                   <a:srgbClr val="1B3B6F"/>
                 </a:solidFill>
-                <a:latin typeface="Amiri" pitchFamily="34" charset="0"/>
-                <a:ea typeface="Amiri" pitchFamily="34" charset="-122"/>
-                <a:cs typeface="Amiri" pitchFamily="34" charset="-120"/>
+                <a:latin typeface="Amiri" pitchFamily="2" charset="-78"/>
+                <a:cs typeface="Amiri" pitchFamily="2" charset="-78"/>
               </a:rPr>
               <a:t>السُّؤَالُ الأَوَّلُ: ٢٠ دَقِيقَةً</a:t>
             </a:r>
@@ -44878,8 +44021,7 @@
                   <a:srgbClr val="5A6472"/>
                 </a:solidFill>
                 <a:latin typeface="Calibri" pitchFamily="34" charset="0"/>
-                <a:ea typeface="Calibri" pitchFamily="34" charset="-122"/>
-                <a:cs typeface="Calibri" pitchFamily="34" charset="-120"/>
+                <a:cs typeface="Amiri" pitchFamily="2" charset="-78"/>
               </a:rPr>
               <a:t>Paper 4 Q1 — a formal email · 15 marks</a:t>
             </a:r>
@@ -44939,9 +44081,8 @@
                 <a:solidFill>
                   <a:srgbClr val="1B3B6F"/>
                 </a:solidFill>
-                <a:latin typeface="Amiri" pitchFamily="34" charset="0"/>
-                <a:ea typeface="Amiri" pitchFamily="34" charset="-122"/>
-                <a:cs typeface="Amiri" pitchFamily="34" charset="-120"/>
+                <a:latin typeface="Amiri" pitchFamily="2" charset="-78"/>
+                <a:cs typeface="Amiri" pitchFamily="2" charset="-78"/>
               </a:rPr>
               <a:t>السُّؤَالُ الثَّانِي: ٣٥ دَقِيقَةً</a:t>
             </a:r>
@@ -44979,8 +44120,7 @@
                   <a:srgbClr val="5A6472"/>
                 </a:solidFill>
                 <a:latin typeface="Calibri" pitchFamily="34" charset="0"/>
-                <a:ea typeface="Calibri" pitchFamily="34" charset="-122"/>
-                <a:cs typeface="Calibri" pitchFamily="34" charset="-120"/>
+                <a:cs typeface="Amiri" pitchFamily="2" charset="-78"/>
               </a:rPr>
               <a:t>Paper 4 Q2 — an essay · 15 marks (homework)</a:t>
             </a:r>
@@ -45018,8 +44158,7 @@
                   <a:srgbClr val="8A93A0"/>
                 </a:solidFill>
                 <a:latin typeface="Calibri" pitchFamily="34" charset="0"/>
-                <a:ea typeface="Calibri" pitchFamily="34" charset="-122"/>
-                <a:cs typeface="Calibri" pitchFamily="34" charset="-120"/>
+                <a:cs typeface="Amiri" pitchFamily="2" charset="-78"/>
               </a:rPr>
               <a:t>7 / 25</a:t>
             </a:r>
@@ -45113,9 +44252,8 @@
                 <a:solidFill>
                   <a:srgbClr val="D4AF37"/>
                 </a:solidFill>
-                <a:latin typeface="Amiri" pitchFamily="34" charset="0"/>
-                <a:ea typeface="Amiri" pitchFamily="34" charset="-122"/>
-                <a:cs typeface="Amiri" pitchFamily="34" charset="-120"/>
+                <a:latin typeface="Amiri" pitchFamily="2" charset="-78"/>
+                <a:cs typeface="Amiri" pitchFamily="2" charset="-78"/>
               </a:rPr>
               <a:t>م</a:t>
             </a:r>
@@ -45153,8 +44291,7 @@
                   <a:srgbClr val="1B3B6F"/>
                 </a:solidFill>
                 <a:latin typeface="Cambria" pitchFamily="34" charset="0"/>
-                <a:ea typeface="Cambria" pitchFamily="34" charset="-122"/>
-                <a:cs typeface="Cambria" pitchFamily="34" charset="-120"/>
+                <a:cs typeface="Amiri" pitchFamily="2" charset="-78"/>
               </a:rPr>
               <a:t>Al Madina Online School</a:t>
             </a:r>
@@ -45192,8 +44329,7 @@
                   <a:srgbClr val="8A6D1E"/>
                 </a:solidFill>
                 <a:latin typeface="Calibri" pitchFamily="34" charset="0"/>
-                <a:ea typeface="Calibri" pitchFamily="34" charset="-122"/>
-                <a:cs typeface="Calibri" pitchFamily="34" charset="-120"/>
+                <a:cs typeface="Amiri" pitchFamily="2" charset="-78"/>
               </a:rPr>
               <a:t>ARABIC DEPARTMENT · MIFTAH ARABIC · IGCSE 0544</a:t>
             </a:r>
@@ -45258,8 +44394,7 @@
                   <a:srgbClr val="FFFFFF"/>
                 </a:solidFill>
                 <a:latin typeface="Calibri" pitchFamily="34" charset="0"/>
-                <a:ea typeface="Calibri" pitchFamily="34" charset="-122"/>
-                <a:cs typeface="Calibri" pitchFamily="34" charset="-120"/>
+                <a:cs typeface="Amiri" pitchFamily="2" charset="-78"/>
               </a:rPr>
               <a:t>P6-L09 · IGCSE Bridge</a:t>
             </a:r>
@@ -45324,8 +44459,7 @@
                   <a:srgbClr val="FFFFFF"/>
                 </a:solidFill>
                 <a:latin typeface="Calibri" pitchFamily="34" charset="0"/>
-                <a:ea typeface="Calibri" pitchFamily="34" charset="-122"/>
-                <a:cs typeface="Calibri" pitchFamily="34" charset="-120"/>
+                <a:cs typeface="Amiri" pitchFamily="2" charset="-78"/>
               </a:rPr>
               <a:t>YOU DO · 2 MIN</a:t>
             </a:r>
@@ -45363,8 +44497,7 @@
                   <a:srgbClr val="1E6B52"/>
                 </a:solidFill>
                 <a:latin typeface="Calibri" pitchFamily="34" charset="0"/>
-                <a:ea typeface="Calibri" pitchFamily="34" charset="-122"/>
-                <a:cs typeface="Calibri" pitchFamily="34" charset="-120"/>
+                <a:cs typeface="Amiri" pitchFamily="2" charset="-78"/>
               </a:rPr>
               <a:t>MOCK · Q GROUPS 1–2 · READ THE TEXT</a:t>
             </a:r>
@@ -45402,8 +44535,7 @@
                   <a:srgbClr val="1B3B6F"/>
                 </a:solidFill>
                 <a:latin typeface="Cambria" pitchFamily="34" charset="0"/>
-                <a:ea typeface="Cambria" pitchFamily="34" charset="-122"/>
-                <a:cs typeface="Cambria" pitchFamily="34" charset="-120"/>
+                <a:cs typeface="Amiri" pitchFamily="2" charset="-78"/>
               </a:rPr>
               <a:t>Paper 2 · Text 1 — Notices</a:t>
             </a:r>
@@ -45440,9 +44572,8 @@
                 <a:solidFill>
                   <a:srgbClr val="8A6D1E"/>
                 </a:solidFill>
-                <a:latin typeface="Amiri" pitchFamily="34" charset="0"/>
-                <a:ea typeface="Amiri" pitchFamily="34" charset="-122"/>
-                <a:cs typeface="Amiri" pitchFamily="34" charset="-120"/>
+                <a:latin typeface="Amiri" pitchFamily="2" charset="-78"/>
+                <a:cs typeface="Amiri" pitchFamily="2" charset="-78"/>
               </a:rPr>
               <a:t>النَّصُّ</a:t>
             </a:r>
@@ -45480,8 +44611,7 @@
                   <a:srgbClr val="8A93A0"/>
                 </a:solidFill>
                 <a:latin typeface="Calibri" pitchFamily="34" charset="0"/>
-                <a:ea typeface="Calibri" pitchFamily="34" charset="-122"/>
-                <a:cs typeface="Calibri" pitchFamily="34" charset="-120"/>
+                <a:cs typeface="Amiri" pitchFamily="2" charset="-78"/>
               </a:rPr>
               <a:t>Miftah Arabic · Progression P6 · IGCSE Bridge · P6-L09</a:t>
             </a:r>
@@ -45555,9 +44685,8 @@
                 <a:solidFill>
                   <a:srgbClr val="1F2A37"/>
                 </a:solidFill>
-                <a:latin typeface="Amiri" pitchFamily="34" charset="0"/>
-                <a:ea typeface="Amiri" pitchFamily="34" charset="-122"/>
-                <a:cs typeface="Amiri" pitchFamily="34" charset="-120"/>
+                <a:latin typeface="Amiri" pitchFamily="2" charset="-78"/>
+                <a:cs typeface="Amiri" pitchFamily="2" charset="-78"/>
               </a:rPr>
               <a:t>إِعْلَانٌ: يُفْتَتَحُ المَرْكَزُ الرِّيَاضِيُّ فِي السَّاعَةِ السَّادِسَةِ صَبَاحًا. يُشْتَرَطُ حَجْزُ المَلْعَبِ مُسْبَقًا. تُقَامُ دُرُوسُ السِّبَاحَةِ لِلْمُبْتَدِئِينَ يَوْمَ السَّبْتِ. وَيُمْنَعُ اسْتِخْدَامُ الهَاتِفِ فِي قَاعَةِ التَّدْرِيبِ.</a:t>
             </a:r>
@@ -45595,8 +44724,7 @@
                   <a:srgbClr val="8A93A0"/>
                 </a:solidFill>
                 <a:latin typeface="Calibri" pitchFamily="34" charset="0"/>
-                <a:ea typeface="Calibri" pitchFamily="34" charset="-122"/>
-                <a:cs typeface="Calibri" pitchFamily="34" charset="-120"/>
+                <a:cs typeface="Amiri" pitchFamily="2" charset="-78"/>
               </a:rPr>
               <a:t>8 / 25</a:t>
             </a:r>
@@ -45690,9 +44818,8 @@
                 <a:solidFill>
                   <a:srgbClr val="D4AF37"/>
                 </a:solidFill>
-                <a:latin typeface="Amiri" pitchFamily="34" charset="0"/>
-                <a:ea typeface="Amiri" pitchFamily="34" charset="-122"/>
-                <a:cs typeface="Amiri" pitchFamily="34" charset="-120"/>
+                <a:latin typeface="Amiri" pitchFamily="2" charset="-78"/>
+                <a:cs typeface="Amiri" pitchFamily="2" charset="-78"/>
               </a:rPr>
               <a:t>م</a:t>
             </a:r>
@@ -45730,8 +44857,7 @@
                   <a:srgbClr val="1B3B6F"/>
                 </a:solidFill>
                 <a:latin typeface="Cambria" pitchFamily="34" charset="0"/>
-                <a:ea typeface="Cambria" pitchFamily="34" charset="-122"/>
-                <a:cs typeface="Cambria" pitchFamily="34" charset="-120"/>
+                <a:cs typeface="Amiri" pitchFamily="2" charset="-78"/>
               </a:rPr>
               <a:t>Al Madina Online School</a:t>
             </a:r>
@@ -45769,8 +44895,7 @@
                   <a:srgbClr val="8A6D1E"/>
                 </a:solidFill>
                 <a:latin typeface="Calibri" pitchFamily="34" charset="0"/>
-                <a:ea typeface="Calibri" pitchFamily="34" charset="-122"/>
-                <a:cs typeface="Calibri" pitchFamily="34" charset="-120"/>
+                <a:cs typeface="Amiri" pitchFamily="2" charset="-78"/>
               </a:rPr>
               <a:t>ARABIC DEPARTMENT · MIFTAH ARABIC · IGCSE 0544</a:t>
             </a:r>
@@ -45835,8 +44960,7 @@
                   <a:srgbClr val="FFFFFF"/>
                 </a:solidFill>
                 <a:latin typeface="Calibri" pitchFamily="34" charset="0"/>
-                <a:ea typeface="Calibri" pitchFamily="34" charset="-122"/>
-                <a:cs typeface="Calibri" pitchFamily="34" charset="-120"/>
+                <a:cs typeface="Amiri" pitchFamily="2" charset="-78"/>
               </a:rPr>
               <a:t>P6-L09 · IGCSE Bridge</a:t>
             </a:r>
@@ -45901,8 +45025,7 @@
                   <a:srgbClr val="FFFFFF"/>
                 </a:solidFill>
                 <a:latin typeface="Calibri" pitchFamily="34" charset="0"/>
-                <a:ea typeface="Calibri" pitchFamily="34" charset="-122"/>
-                <a:cs typeface="Calibri" pitchFamily="34" charset="-120"/>
+                <a:cs typeface="Amiri" pitchFamily="2" charset="-78"/>
               </a:rPr>
               <a:t>YOU DO · 4 MIN</a:t>
             </a:r>
@@ -45940,8 +45063,7 @@
                   <a:srgbClr val="1E6B52"/>
                 </a:solidFill>
                 <a:latin typeface="Calibri" pitchFamily="34" charset="0"/>
-                <a:ea typeface="Calibri" pitchFamily="34" charset="-122"/>
-                <a:cs typeface="Calibri" pitchFamily="34" charset="-120"/>
+                <a:cs typeface="Amiri" pitchFamily="2" charset="-78"/>
               </a:rPr>
               <a:t>MOCK · PAPER 2 · TEXT 1 — NOTICES (4 MARKS)</a:t>
             </a:r>
@@ -45979,8 +45101,7 @@
                   <a:srgbClr val="1B3B6F"/>
                 </a:solidFill>
                 <a:latin typeface="Cambria" pitchFamily="34" charset="0"/>
-                <a:ea typeface="Cambria" pitchFamily="34" charset="-122"/>
-                <a:cs typeface="Cambria" pitchFamily="34" charset="-120"/>
+                <a:cs typeface="Amiri" pitchFamily="2" charset="-78"/>
               </a:rPr>
               <a:t>Factual comprehension</a:t>
             </a:r>
@@ -46017,9 +45138,8 @@
                 <a:solidFill>
                   <a:srgbClr val="8A6D1E"/>
                 </a:solidFill>
-                <a:latin typeface="Amiri" pitchFamily="34" charset="0"/>
-                <a:ea typeface="Amiri" pitchFamily="34" charset="-122"/>
-                <a:cs typeface="Amiri" pitchFamily="34" charset="-120"/>
+                <a:latin typeface="Amiri" pitchFamily="2" charset="-78"/>
+                <a:cs typeface="Amiri" pitchFamily="2" charset="-78"/>
               </a:rPr>
               <a:t>أَسْئِلَةُ القِرَاءَةِ</a:t>
             </a:r>
@@ -46057,8 +45177,7 @@
                   <a:srgbClr val="8A93A0"/>
                 </a:solidFill>
                 <a:latin typeface="Calibri" pitchFamily="34" charset="0"/>
-                <a:ea typeface="Calibri" pitchFamily="34" charset="-122"/>
-                <a:cs typeface="Calibri" pitchFamily="34" charset="-120"/>
+                <a:cs typeface="Amiri" pitchFamily="2" charset="-78"/>
               </a:rPr>
               <a:t>Miftah Arabic · Progression P6 · IGCSE Bridge · P6-L09</a:t>
             </a:r>
@@ -46155,8 +45274,7 @@
                   <a:srgbClr val="FFFFFF"/>
                 </a:solidFill>
                 <a:latin typeface="Calibri" pitchFamily="34" charset="0"/>
-                <a:ea typeface="Calibri" pitchFamily="34" charset="-122"/>
-                <a:cs typeface="Calibri" pitchFamily="34" charset="-120"/>
+                <a:cs typeface="Amiri" pitchFamily="2" charset="-78"/>
               </a:rPr>
               <a:t>1</a:t>
             </a:r>
@@ -46194,8 +45312,7 @@
                   <a:srgbClr val="1B3B6F"/>
                 </a:solidFill>
                 <a:latin typeface="Calibri" pitchFamily="34" charset="0"/>
-                <a:ea typeface="Calibri" pitchFamily="34" charset="-122"/>
-                <a:cs typeface="Calibri" pitchFamily="34" charset="-120"/>
+                <a:cs typeface="Amiri" pitchFamily="2" charset="-78"/>
               </a:rPr>
               <a:t>When does the sports centre open?</a:t>
             </a:r>
@@ -46258,8 +45375,7 @@
                   <a:srgbClr val="1B3B6F"/>
                 </a:solidFill>
                 <a:latin typeface="Calibri" pitchFamily="34" charset="0"/>
-                <a:ea typeface="Calibri" pitchFamily="34" charset="-122"/>
-                <a:cs typeface="Calibri" pitchFamily="34" charset="-120"/>
+                <a:cs typeface="Amiri" pitchFamily="2" charset="-78"/>
               </a:rPr>
               <a:t>A</a:t>
             </a:r>
@@ -46297,8 +45413,7 @@
                   <a:srgbClr val="1F2A37"/>
                 </a:solidFill>
                 <a:latin typeface="Calibri" pitchFamily="34" charset="0"/>
-                <a:ea typeface="Calibri" pitchFamily="34" charset="-122"/>
-                <a:cs typeface="Calibri" pitchFamily="34" charset="-120"/>
+                <a:cs typeface="Amiri" pitchFamily="2" charset="-78"/>
               </a:rPr>
               <a:t>At 6 p.m.</a:t>
             </a:r>
@@ -46361,8 +45476,7 @@
                   <a:srgbClr val="1B3B6F"/>
                 </a:solidFill>
                 <a:latin typeface="Calibri" pitchFamily="34" charset="0"/>
-                <a:ea typeface="Calibri" pitchFamily="34" charset="-122"/>
-                <a:cs typeface="Calibri" pitchFamily="34" charset="-120"/>
+                <a:cs typeface="Amiri" pitchFamily="2" charset="-78"/>
               </a:rPr>
               <a:t>B</a:t>
             </a:r>
@@ -46400,8 +45514,7 @@
                   <a:srgbClr val="1F2A37"/>
                 </a:solidFill>
                 <a:latin typeface="Calibri" pitchFamily="34" charset="0"/>
-                <a:ea typeface="Calibri" pitchFamily="34" charset="-122"/>
-                <a:cs typeface="Calibri" pitchFamily="34" charset="-120"/>
+                <a:cs typeface="Amiri" pitchFamily="2" charset="-78"/>
               </a:rPr>
               <a:t>It does not open</a:t>
             </a:r>
@@ -46464,8 +45577,7 @@
                   <a:srgbClr val="1B3B6F"/>
                 </a:solidFill>
                 <a:latin typeface="Calibri" pitchFamily="34" charset="0"/>
-                <a:ea typeface="Calibri" pitchFamily="34" charset="-122"/>
-                <a:cs typeface="Calibri" pitchFamily="34" charset="-120"/>
+                <a:cs typeface="Amiri" pitchFamily="2" charset="-78"/>
               </a:rPr>
               <a:t>C</a:t>
             </a:r>
@@ -46503,8 +45615,7 @@
                   <a:srgbClr val="1F2A37"/>
                 </a:solidFill>
                 <a:latin typeface="Calibri" pitchFamily="34" charset="0"/>
-                <a:ea typeface="Calibri" pitchFamily="34" charset="-122"/>
-                <a:cs typeface="Calibri" pitchFamily="34" charset="-120"/>
+                <a:cs typeface="Amiri" pitchFamily="2" charset="-78"/>
               </a:rPr>
               <a:t>At 6 a.m.</a:t>
             </a:r>
@@ -46601,8 +45712,7 @@
                   <a:srgbClr val="FFFFFF"/>
                 </a:solidFill>
                 <a:latin typeface="Calibri" pitchFamily="34" charset="0"/>
-                <a:ea typeface="Calibri" pitchFamily="34" charset="-122"/>
-                <a:cs typeface="Calibri" pitchFamily="34" charset="-120"/>
+                <a:cs typeface="Amiri" pitchFamily="2" charset="-78"/>
               </a:rPr>
               <a:t>2</a:t>
             </a:r>
@@ -46640,8 +45750,7 @@
                   <a:srgbClr val="1B3B6F"/>
                 </a:solidFill>
                 <a:latin typeface="Calibri" pitchFamily="34" charset="0"/>
-                <a:ea typeface="Calibri" pitchFamily="34" charset="-122"/>
-                <a:cs typeface="Calibri" pitchFamily="34" charset="-120"/>
+                <a:cs typeface="Amiri" pitchFamily="2" charset="-78"/>
               </a:rPr>
               <a:t>What is required to use the pitch?</a:t>
             </a:r>
@@ -46704,8 +45813,7 @@
                   <a:srgbClr val="1B3B6F"/>
                 </a:solidFill>
                 <a:latin typeface="Calibri" pitchFamily="34" charset="0"/>
-                <a:ea typeface="Calibri" pitchFamily="34" charset="-122"/>
-                <a:cs typeface="Calibri" pitchFamily="34" charset="-120"/>
+                <a:cs typeface="Amiri" pitchFamily="2" charset="-78"/>
               </a:rPr>
               <a:t>A</a:t>
             </a:r>
@@ -46743,8 +45851,7 @@
                   <a:srgbClr val="1F2A37"/>
                 </a:solidFill>
                 <a:latin typeface="Calibri" pitchFamily="34" charset="0"/>
-                <a:ea typeface="Calibri" pitchFamily="34" charset="-122"/>
-                <a:cs typeface="Calibri" pitchFamily="34" charset="-120"/>
+                <a:cs typeface="Amiri" pitchFamily="2" charset="-78"/>
               </a:rPr>
               <a:t>Paying at the door</a:t>
             </a:r>
@@ -46807,8 +45914,7 @@
                   <a:srgbClr val="1B3B6F"/>
                 </a:solidFill>
                 <a:latin typeface="Calibri" pitchFamily="34" charset="0"/>
-                <a:ea typeface="Calibri" pitchFamily="34" charset="-122"/>
-                <a:cs typeface="Calibri" pitchFamily="34" charset="-120"/>
+                <a:cs typeface="Amiri" pitchFamily="2" charset="-78"/>
               </a:rPr>
               <a:t>B</a:t>
             </a:r>
@@ -46846,8 +45952,7 @@
                   <a:srgbClr val="1F2A37"/>
                 </a:solidFill>
                 <a:latin typeface="Calibri" pitchFamily="34" charset="0"/>
-                <a:ea typeface="Calibri" pitchFamily="34" charset="-122"/>
-                <a:cs typeface="Calibri" pitchFamily="34" charset="-120"/>
+                <a:cs typeface="Amiri" pitchFamily="2" charset="-78"/>
               </a:rPr>
               <a:t>Booking in advance</a:t>
             </a:r>
@@ -46910,8 +46015,7 @@
                   <a:srgbClr val="1B3B6F"/>
                 </a:solidFill>
                 <a:latin typeface="Calibri" pitchFamily="34" charset="0"/>
-                <a:ea typeface="Calibri" pitchFamily="34" charset="-122"/>
-                <a:cs typeface="Calibri" pitchFamily="34" charset="-120"/>
+                <a:cs typeface="Amiri" pitchFamily="2" charset="-78"/>
               </a:rPr>
               <a:t>C</a:t>
             </a:r>
@@ -46949,8 +46053,7 @@
                   <a:srgbClr val="1F2A37"/>
                 </a:solidFill>
                 <a:latin typeface="Calibri" pitchFamily="34" charset="0"/>
-                <a:ea typeface="Calibri" pitchFamily="34" charset="-122"/>
-                <a:cs typeface="Calibri" pitchFamily="34" charset="-120"/>
+                <a:cs typeface="Amiri" pitchFamily="2" charset="-78"/>
               </a:rPr>
               <a:t>Nothing</a:t>
             </a:r>
@@ -47047,8 +46150,7 @@
                   <a:srgbClr val="FFFFFF"/>
                 </a:solidFill>
                 <a:latin typeface="Calibri" pitchFamily="34" charset="0"/>
-                <a:ea typeface="Calibri" pitchFamily="34" charset="-122"/>
-                <a:cs typeface="Calibri" pitchFamily="34" charset="-120"/>
+                <a:cs typeface="Amiri" pitchFamily="2" charset="-78"/>
               </a:rPr>
               <a:t>3</a:t>
             </a:r>
@@ -47086,8 +46188,7 @@
                   <a:srgbClr val="1B3B6F"/>
                 </a:solidFill>
                 <a:latin typeface="Calibri" pitchFamily="34" charset="0"/>
-                <a:ea typeface="Calibri" pitchFamily="34" charset="-122"/>
-                <a:cs typeface="Calibri" pitchFamily="34" charset="-120"/>
+                <a:cs typeface="Amiri" pitchFamily="2" charset="-78"/>
               </a:rPr>
               <a:t>When are beginners' swimming lessons?</a:t>
             </a:r>
@@ -47150,8 +46251,7 @@
                   <a:srgbClr val="1B3B6F"/>
                 </a:solidFill>
                 <a:latin typeface="Calibri" pitchFamily="34" charset="0"/>
-                <a:ea typeface="Calibri" pitchFamily="34" charset="-122"/>
-                <a:cs typeface="Calibri" pitchFamily="34" charset="-120"/>
+                <a:cs typeface="Amiri" pitchFamily="2" charset="-78"/>
               </a:rPr>
               <a:t>A</a:t>
             </a:r>
@@ -47189,8 +46289,7 @@
                   <a:srgbClr val="1F2A37"/>
                 </a:solidFill>
                 <a:latin typeface="Calibri" pitchFamily="34" charset="0"/>
-                <a:ea typeface="Calibri" pitchFamily="34" charset="-122"/>
-                <a:cs typeface="Calibri" pitchFamily="34" charset="-120"/>
+                <a:cs typeface="Amiri" pitchFamily="2" charset="-78"/>
               </a:rPr>
               <a:t>On Sunday</a:t>
             </a:r>
@@ -47253,8 +46352,7 @@
                   <a:srgbClr val="1B3B6F"/>
                 </a:solidFill>
                 <a:latin typeface="Calibri" pitchFamily="34" charset="0"/>
-                <a:ea typeface="Calibri" pitchFamily="34" charset="-122"/>
-                <a:cs typeface="Calibri" pitchFamily="34" charset="-120"/>
+                <a:cs typeface="Amiri" pitchFamily="2" charset="-78"/>
               </a:rPr>
               <a:t>B</a:t>
             </a:r>
@@ -47292,8 +46390,7 @@
                   <a:srgbClr val="1F2A37"/>
                 </a:solidFill>
                 <a:latin typeface="Calibri" pitchFamily="34" charset="0"/>
-                <a:ea typeface="Calibri" pitchFamily="34" charset="-122"/>
-                <a:cs typeface="Calibri" pitchFamily="34" charset="-120"/>
+                <a:cs typeface="Amiri" pitchFamily="2" charset="-78"/>
               </a:rPr>
               <a:t>On Saturday</a:t>
             </a:r>
@@ -47356,8 +46453,7 @@
                   <a:srgbClr val="1B3B6F"/>
                 </a:solidFill>
                 <a:latin typeface="Calibri" pitchFamily="34" charset="0"/>
-                <a:ea typeface="Calibri" pitchFamily="34" charset="-122"/>
-                <a:cs typeface="Calibri" pitchFamily="34" charset="-120"/>
+                <a:cs typeface="Amiri" pitchFamily="2" charset="-78"/>
               </a:rPr>
               <a:t>C</a:t>
             </a:r>
@@ -47395,8 +46491,7 @@
                   <a:srgbClr val="1F2A37"/>
                 </a:solidFill>
                 <a:latin typeface="Calibri" pitchFamily="34" charset="0"/>
-                <a:ea typeface="Calibri" pitchFamily="34" charset="-122"/>
-                <a:cs typeface="Calibri" pitchFamily="34" charset="-120"/>
+                <a:cs typeface="Amiri" pitchFamily="2" charset="-78"/>
               </a:rPr>
               <a:t>Every day</a:t>
             </a:r>
@@ -47493,8 +46588,7 @@
                   <a:srgbClr val="FFFFFF"/>
                 </a:solidFill>
                 <a:latin typeface="Calibri" pitchFamily="34" charset="0"/>
-                <a:ea typeface="Calibri" pitchFamily="34" charset="-122"/>
-                <a:cs typeface="Calibri" pitchFamily="34" charset="-120"/>
+                <a:cs typeface="Amiri" pitchFamily="2" charset="-78"/>
               </a:rPr>
               <a:t>4</a:t>
             </a:r>
@@ -47532,8 +46626,7 @@
                   <a:srgbClr val="1B3B6F"/>
                 </a:solidFill>
                 <a:latin typeface="Calibri" pitchFamily="34" charset="0"/>
-                <a:ea typeface="Calibri" pitchFamily="34" charset="-122"/>
-                <a:cs typeface="Calibri" pitchFamily="34" charset="-120"/>
+                <a:cs typeface="Amiri" pitchFamily="2" charset="-78"/>
               </a:rPr>
               <a:t>What is forbidden in the training hall?</a:t>
             </a:r>
@@ -47596,8 +46689,7 @@
                   <a:srgbClr val="1B3B6F"/>
                 </a:solidFill>
                 <a:latin typeface="Calibri" pitchFamily="34" charset="0"/>
-                <a:ea typeface="Calibri" pitchFamily="34" charset="-122"/>
-                <a:cs typeface="Calibri" pitchFamily="34" charset="-120"/>
+                <a:cs typeface="Amiri" pitchFamily="2" charset="-78"/>
               </a:rPr>
               <a:t>A</a:t>
             </a:r>
@@ -47635,8 +46727,7 @@
                   <a:srgbClr val="1F2A37"/>
                 </a:solidFill>
                 <a:latin typeface="Calibri" pitchFamily="34" charset="0"/>
-                <a:ea typeface="Calibri" pitchFamily="34" charset="-122"/>
-                <a:cs typeface="Calibri" pitchFamily="34" charset="-120"/>
+                <a:cs typeface="Amiri" pitchFamily="2" charset="-78"/>
               </a:rPr>
               <a:t>Drinking water</a:t>
             </a:r>
@@ -47699,8 +46790,7 @@
                   <a:srgbClr val="1B3B6F"/>
                 </a:solidFill>
                 <a:latin typeface="Calibri" pitchFamily="34" charset="0"/>
-                <a:ea typeface="Calibri" pitchFamily="34" charset="-122"/>
-                <a:cs typeface="Calibri" pitchFamily="34" charset="-120"/>
+                <a:cs typeface="Amiri" pitchFamily="2" charset="-78"/>
               </a:rPr>
               <a:t>B</a:t>
             </a:r>
@@ -47738,8 +46828,7 @@
                   <a:srgbClr val="1F2A37"/>
                 </a:solidFill>
                 <a:latin typeface="Calibri" pitchFamily="34" charset="0"/>
-                <a:ea typeface="Calibri" pitchFamily="34" charset="-122"/>
-                <a:cs typeface="Calibri" pitchFamily="34" charset="-120"/>
+                <a:cs typeface="Amiri" pitchFamily="2" charset="-78"/>
               </a:rPr>
               <a:t>Wearing shoes</a:t>
             </a:r>
@@ -47802,8 +46891,7 @@
                   <a:srgbClr val="1B3B6F"/>
                 </a:solidFill>
                 <a:latin typeface="Calibri" pitchFamily="34" charset="0"/>
-                <a:ea typeface="Calibri" pitchFamily="34" charset="-122"/>
-                <a:cs typeface="Calibri" pitchFamily="34" charset="-120"/>
+                <a:cs typeface="Amiri" pitchFamily="2" charset="-78"/>
               </a:rPr>
               <a:t>C</a:t>
             </a:r>
@@ -47841,8 +46929,7 @@
                   <a:srgbClr val="1F2A37"/>
                 </a:solidFill>
                 <a:latin typeface="Calibri" pitchFamily="34" charset="0"/>
-                <a:ea typeface="Calibri" pitchFamily="34" charset="-122"/>
-                <a:cs typeface="Calibri" pitchFamily="34" charset="-120"/>
+                <a:cs typeface="Amiri" pitchFamily="2" charset="-78"/>
               </a:rPr>
               <a:t>Using the phone</a:t>
             </a:r>
@@ -47880,8 +46967,7 @@
                   <a:srgbClr val="8A93A0"/>
                 </a:solidFill>
                 <a:latin typeface="Calibri" pitchFamily="34" charset="0"/>
-                <a:ea typeface="Calibri" pitchFamily="34" charset="-122"/>
-                <a:cs typeface="Calibri" pitchFamily="34" charset="-120"/>
+                <a:cs typeface="Amiri" pitchFamily="2" charset="-78"/>
               </a:rPr>
               <a:t>9 / 25</a:t>
             </a:r>

--- a/Progression_P6/P6-L09_Mock_Papers_2_and_4.pptx
+++ b/Progression_P6/P6-L09_Mock_Papers_2_and_4.pptx
@@ -1423,7 +1423,11 @@
           <a:lstStyle/>
           <a:p>
             <a:r>
-              <a:rPr lang="en-US" dirty="0"/>
+              <a:rPr lang="ar-SA" dirty="0">
+                <a:latin typeface="Amiri" pitchFamily="2" charset="-78"/>
+                <a:ea typeface="Amiri" pitchFamily="2" charset="-78"/>
+                <a:cs typeface="Amiri" pitchFamily="2" charset="-78"/>
+              </a:rPr>
               <a:t>MOCK — EXAM CONDITIONS: cameras on, mics muted, chat closed, no notes or dictionaries. Reading answers on paper (1A, 2C …); writing on paper or in a blank document with spell-check OFF. Photograph / upload at the end.
 Q2 — 35 minutes. TIMING IN A 60-MINUTE LESSON: Paper 2 (≈20 min) + Q1 (20 min) fit in the lesson; Q2 is sat as TIMED HOMEWORK under the same conditions (camera-on study session, or a 35-minute timer at home) — or run this as a double lesson. The Q2 model is shown in P6-L10’s Do Now or when the essays are returned.
 Website task: Choose ONE title and write an argumentative essay (130–150 words): (A) “السَّفَرُ أَفْضَلُ مُعَلِّمٍ — هَلْ تُوَافِقُ؟”  (B) “المُدُنُ الكُبْرَى أَفْضَلُ لِلْعَيْشِ مِنَ القُرَى — هَلْ تُوَافِقُ؟”  (C) “عَلَى الشَّبَابِ أَنْ يَخْدُمُوا مُجْتَمَعَهُمْ قَبْلَ أَنْفُسِهِمْ — هَلْ تُوَافِقُ؟”
@@ -1514,7 +1518,11 @@
           <a:lstStyle/>
           <a:p>
             <a:r>
-              <a:rPr lang="en-US" dirty="0"/>
+              <a:rPr lang="ar-SA" dirty="0">
+                <a:latin typeface="Amiri" pitchFamily="2" charset="-78"/>
+                <a:ea typeface="Amiri" pitchFamily="2" charset="-78"/>
+                <a:cs typeface="Amiri" pitchFamily="2" charset="-78"/>
+              </a:rPr>
               <a:t>WELCOME (1 min) — while students join.
 • Greet each student by name as they arrive: السَّلَامُ عَلَيْكُمْ. Take the register (Pastoral Tracker: attendance 0/1).
 • 2-MINUTE CHECK-IN (SEND training): a private chat to any student who seemed unsettled last lesson — “Are you okay today? 👍 / 👎”.
@@ -1607,7 +1615,11 @@
           <a:lstStyle/>
           <a:p>
             <a:r>
-              <a:rPr lang="en-US" dirty="0"/>
+              <a:rPr lang="ar-SA" dirty="0">
+                <a:latin typeface="Amiri" pitchFamily="2" charset="-78"/>
+                <a:ea typeface="Amiri" pitchFamily="2" charset="-78"/>
+                <a:cs typeface="Amiri" pitchFamily="2" charset="-78"/>
+              </a:rPr>
               <a:t>MODEL (website) — show AFTER students have written. Students find the four items on the chips, then choose ONE thing to add to their own answer.
 The website model is about 65 words: thesis · cited evidence · concession-refutation · Type 2 and Type 1 conditionals · conclusion with a subjunctive and لِكَيْ. A full answer (130–150 words) adds one example to each body point.</a:t>
             </a:r>
@@ -3166,6 +3178,7 @@
                   <a:srgbClr val="D4AF37"/>
                 </a:solidFill>
                 <a:latin typeface="Amiri" pitchFamily="2" charset="-78"/>
+                <a:ea typeface="Amiri" pitchFamily="2" charset="-78"/>
                 <a:cs typeface="Amiri" pitchFamily="2" charset="-78"/>
               </a:rPr>
               <a:t>م</a:t>
@@ -3372,6 +3385,7 @@
                   <a:srgbClr val="D4AF37"/>
                 </a:solidFill>
                 <a:latin typeface="Amiri" pitchFamily="2" charset="-78"/>
+                <a:ea typeface="Amiri" pitchFamily="2" charset="-78"/>
                 <a:cs typeface="Amiri" pitchFamily="2" charset="-78"/>
               </a:rPr>
               <a:t>امْتِحَانُ المُحَاكَاةِ — الوَرَقَتَانِ الثَّانِيَةُ وَالرَّابِعَةُ</a:t>
@@ -3829,6 +3843,7 @@
                   <a:srgbClr val="D4AF37"/>
                 </a:solidFill>
                 <a:latin typeface="Amiri" pitchFamily="2" charset="-78"/>
+                <a:ea typeface="Amiri" pitchFamily="2" charset="-78"/>
                 <a:cs typeface="Amiri" pitchFamily="2" charset="-78"/>
               </a:rPr>
               <a:t>م</a:t>
@@ -4149,6 +4164,7 @@
                   <a:srgbClr val="8A6D1E"/>
                 </a:solidFill>
                 <a:latin typeface="Amiri" pitchFamily="2" charset="-78"/>
+                <a:ea typeface="Amiri" pitchFamily="2" charset="-78"/>
                 <a:cs typeface="Amiri" pitchFamily="2" charset="-78"/>
               </a:rPr>
               <a:t>النَّصُّ</a:t>
@@ -4262,6 +4278,7 @@
                   <a:srgbClr val="1F2A37"/>
                 </a:solidFill>
                 <a:latin typeface="Amiri" pitchFamily="2" charset="-78"/>
+                <a:ea typeface="Amiri" pitchFamily="2" charset="-78"/>
                 <a:cs typeface="Amiri" pitchFamily="2" charset="-78"/>
               </a:rPr>
               <a:t>يُشَارُ إِلَى أَنَّ القِرَاءَةَ عَادَةٌ تُثْرِي العَقْلَ. صَحِيحٌ أَنَّ الحَيَاةَ مَشْغُولَةٌ، غَيْرَ أَنَّ عَشْرَ دَقَائِقَ يَوْمِيًّا تَبْنِي عَادَةً رَاسِخَةً. وَيَتَطَلَّبُ الأَمْرُ أَنْ تُخَصِّصَ الأُسَرُ وَقْتًا لِلْقِرَاءَةِ. وَلَوْ قَرَأَ كُلُّ طِفْلٍ كِتَابًا شَهْرِيًّا، لَاتَّسَعَتْ مَدَارِكُهُ.</a:t>
@@ -4395,6 +4412,7 @@
                   <a:srgbClr val="D4AF37"/>
                 </a:solidFill>
                 <a:latin typeface="Amiri" pitchFamily="2" charset="-78"/>
+                <a:ea typeface="Amiri" pitchFamily="2" charset="-78"/>
                 <a:cs typeface="Amiri" pitchFamily="2" charset="-78"/>
               </a:rPr>
               <a:t>م</a:t>
@@ -4715,6 +4733,7 @@
                   <a:srgbClr val="8A6D1E"/>
                 </a:solidFill>
                 <a:latin typeface="Amiri" pitchFamily="2" charset="-78"/>
+                <a:ea typeface="Amiri" pitchFamily="2" charset="-78"/>
                 <a:cs typeface="Amiri" pitchFamily="2" charset="-78"/>
               </a:rPr>
               <a:t>أَسْئِلَةُ القِرَاءَةِ</a:t>
@@ -5777,6 +5796,7 @@
                   <a:srgbClr val="1B3B6F"/>
                 </a:solidFill>
                 <a:latin typeface="Amiri" pitchFamily="2" charset="-78"/>
+                <a:ea typeface="Amiri" pitchFamily="2" charset="-78"/>
                 <a:cs typeface="Amiri" pitchFamily="2" charset="-78"/>
               </a:rPr>
               <a:t>صَحِيحٌ أَنَّ الحَيَاةَ مَشْغُولَةٌ</a:t>
@@ -6241,6 +6261,7 @@
                   <a:srgbClr val="1B3B6F"/>
                 </a:solidFill>
                 <a:latin typeface="Amiri" pitchFamily="2" charset="-78"/>
+                <a:ea typeface="Amiri" pitchFamily="2" charset="-78"/>
                 <a:cs typeface="Amiri" pitchFamily="2" charset="-78"/>
               </a:rPr>
               <a:t>صَحِيحٌ أَنَّ الحَيَاةَ</a:t>
@@ -6355,6 +6376,7 @@
                   <a:srgbClr val="1F2A37"/>
                 </a:solidFill>
                 <a:latin typeface="Amiri" pitchFamily="2" charset="-78"/>
+                <a:ea typeface="Amiri" pitchFamily="2" charset="-78"/>
                 <a:cs typeface="Amiri" pitchFamily="2" charset="-78"/>
               </a:rPr>
               <a:t>تَكُونَ مَشْغُولَةً</a:t>
@@ -6456,6 +6478,7 @@
                   <a:srgbClr val="1F2A37"/>
                 </a:solidFill>
                 <a:latin typeface="Amiri" pitchFamily="2" charset="-78"/>
+                <a:ea typeface="Amiri" pitchFamily="2" charset="-78"/>
                 <a:cs typeface="Amiri" pitchFamily="2" charset="-78"/>
               </a:rPr>
               <a:t>مَشْغُولَةٌ</a:t>
@@ -6557,6 +6580,7 @@
                   <a:srgbClr val="1F2A37"/>
                 </a:solidFill>
                 <a:latin typeface="Amiri" pitchFamily="2" charset="-78"/>
+                <a:ea typeface="Amiri" pitchFamily="2" charset="-78"/>
                 <a:cs typeface="Amiri" pitchFamily="2" charset="-78"/>
               </a:rPr>
               <a:t>كَانَتْ مَشْغُولَةً</a:t>
@@ -6705,6 +6729,7 @@
                   <a:srgbClr val="1B3B6F"/>
                 </a:solidFill>
                 <a:latin typeface="Amiri" pitchFamily="2" charset="-78"/>
+                <a:ea typeface="Amiri" pitchFamily="2" charset="-78"/>
                 <a:cs typeface="Amiri" pitchFamily="2" charset="-78"/>
               </a:rPr>
               <a:t>يَتَطَلَّبُ الأَمْرُ أَنْ</a:t>
@@ -6731,6 +6756,7 @@
                   <a:srgbClr val="1B3B6F"/>
                 </a:solidFill>
                 <a:latin typeface="Amiri" pitchFamily="2" charset="-78"/>
+                <a:ea typeface="Amiri" pitchFamily="2" charset="-78"/>
                 <a:cs typeface="Amiri" pitchFamily="2" charset="-78"/>
               </a:rPr>
               <a:t>الأُسَرُ وَقْتًا</a:t>
@@ -6845,6 +6871,7 @@
                   <a:srgbClr val="1F2A37"/>
                 </a:solidFill>
                 <a:latin typeface="Amiri" pitchFamily="2" charset="-78"/>
+                <a:ea typeface="Amiri" pitchFamily="2" charset="-78"/>
                 <a:cs typeface="Amiri" pitchFamily="2" charset="-78"/>
               </a:rPr>
               <a:t>تُخَصِّصَ</a:t>
@@ -6946,6 +6973,7 @@
                   <a:srgbClr val="1F2A37"/>
                 </a:solidFill>
                 <a:latin typeface="Amiri" pitchFamily="2" charset="-78"/>
+                <a:ea typeface="Amiri" pitchFamily="2" charset="-78"/>
                 <a:cs typeface="Amiri" pitchFamily="2" charset="-78"/>
               </a:rPr>
               <a:t>تُخَصِّصُ</a:t>
@@ -7047,6 +7075,7 @@
                   <a:srgbClr val="1F2A37"/>
                 </a:solidFill>
                 <a:latin typeface="Amiri" pitchFamily="2" charset="-78"/>
+                <a:ea typeface="Amiri" pitchFamily="2" charset="-78"/>
                 <a:cs typeface="Amiri" pitchFamily="2" charset="-78"/>
               </a:rPr>
               <a:t>خَصَّصَتْ</a:t>
@@ -7195,6 +7224,7 @@
                   <a:srgbClr val="1B3B6F"/>
                 </a:solidFill>
                 <a:latin typeface="Amiri" pitchFamily="2" charset="-78"/>
+                <a:ea typeface="Amiri" pitchFamily="2" charset="-78"/>
                 <a:cs typeface="Amiri" pitchFamily="2" charset="-78"/>
               </a:rPr>
               <a:t>لَوْ قَرَأَ كُلُّ طِفْلٍ كِتَابًا،</a:t>
@@ -7221,6 +7251,7 @@
                   <a:srgbClr val="1B3B6F"/>
                 </a:solidFill>
                 <a:latin typeface="Amiri" pitchFamily="2" charset="-78"/>
+                <a:ea typeface="Amiri" pitchFamily="2" charset="-78"/>
                 <a:cs typeface="Amiri" pitchFamily="2" charset="-78"/>
               </a:rPr>
               <a:t>مَدَارِكُهُ</a:t>
@@ -7335,6 +7366,7 @@
                   <a:srgbClr val="1F2A37"/>
                 </a:solidFill>
                 <a:latin typeface="Amiri" pitchFamily="2" charset="-78"/>
+                <a:ea typeface="Amiri" pitchFamily="2" charset="-78"/>
                 <a:cs typeface="Amiri" pitchFamily="2" charset="-78"/>
               </a:rPr>
               <a:t>سَتَتَّسِعُ</a:t>
@@ -7436,6 +7468,7 @@
                   <a:srgbClr val="1F2A37"/>
                 </a:solidFill>
                 <a:latin typeface="Amiri" pitchFamily="2" charset="-78"/>
+                <a:ea typeface="Amiri" pitchFamily="2" charset="-78"/>
                 <a:cs typeface="Amiri" pitchFamily="2" charset="-78"/>
               </a:rPr>
               <a:t>تَتَّسِعُ</a:t>
@@ -7537,6 +7570,7 @@
                   <a:srgbClr val="1F2A37"/>
                 </a:solidFill>
                 <a:latin typeface="Amiri" pitchFamily="2" charset="-78"/>
+                <a:ea typeface="Amiri" pitchFamily="2" charset="-78"/>
                 <a:cs typeface="Amiri" pitchFamily="2" charset="-78"/>
               </a:rPr>
               <a:t>لَاتَّسَعَتْ</a:t>
@@ -7670,6 +7704,7 @@
                   <a:srgbClr val="D4AF37"/>
                 </a:solidFill>
                 <a:latin typeface="Amiri" pitchFamily="2" charset="-78"/>
+                <a:ea typeface="Amiri" pitchFamily="2" charset="-78"/>
                 <a:cs typeface="Amiri" pitchFamily="2" charset="-78"/>
               </a:rPr>
               <a:t>م</a:t>
@@ -7990,6 +8025,7 @@
                   <a:srgbClr val="8A6D1E"/>
                 </a:solidFill>
                 <a:latin typeface="Amiri" pitchFamily="2" charset="-78"/>
+                <a:ea typeface="Amiri" pitchFamily="2" charset="-78"/>
                 <a:cs typeface="Amiri" pitchFamily="2" charset="-78"/>
               </a:rPr>
               <a:t>النَّصُّ</a:t>
@@ -8103,6 +8139,7 @@
                   <a:srgbClr val="1F2A37"/>
                 </a:solidFill>
                 <a:latin typeface="Amiri" pitchFamily="2" charset="-78"/>
+                <a:ea typeface="Amiri" pitchFamily="2" charset="-78"/>
                 <a:cs typeface="Amiri" pitchFamily="2" charset="-78"/>
               </a:rPr>
               <a:t>يَرَى الكَاتِبُ أَنَّ العَمَلَ التَّطَوُّعِيَّ يَبْنِي شَخْصِيَّةَ الشَّبَابِ. لَا يُمْكِنُ إِنْكَارُ أَنَّ الوَقْتَ ثَمِينٌ، غَيْرَ أَنَّ العَطَاءَ يَمْنَحُ مَعْنًى لَا يُشْتَرَى. وَبِنَاءً عَلَى مَا سَبَقَ، يَنْبَغِي أَنْ تُشَجِّعَ المَدَارِسُ التَّطَوُّعَ.</a:t>
@@ -8236,6 +8273,7 @@
                   <a:srgbClr val="D4AF37"/>
                 </a:solidFill>
                 <a:latin typeface="Amiri" pitchFamily="2" charset="-78"/>
+                <a:ea typeface="Amiri" pitchFamily="2" charset="-78"/>
                 <a:cs typeface="Amiri" pitchFamily="2" charset="-78"/>
               </a:rPr>
               <a:t>م</a:t>
@@ -8556,6 +8594,7 @@
                   <a:srgbClr val="8A6D1E"/>
                 </a:solidFill>
                 <a:latin typeface="Amiri" pitchFamily="2" charset="-78"/>
+                <a:ea typeface="Amiri" pitchFamily="2" charset="-78"/>
                 <a:cs typeface="Amiri" pitchFamily="2" charset="-78"/>
               </a:rPr>
               <a:t>أَسْئِلَةُ القِرَاءَةِ</a:t>
@@ -9180,6 +9219,7 @@
                   <a:srgbClr val="1B3B6F"/>
                 </a:solidFill>
                 <a:latin typeface="Amiri" pitchFamily="2" charset="-78"/>
+                <a:ea typeface="Amiri" pitchFamily="2" charset="-78"/>
                 <a:cs typeface="Amiri" pitchFamily="2" charset="-78"/>
               </a:rPr>
               <a:t>لَا يُمْكِنُ إِنْكَارُ أَنَّ</a:t>
@@ -9644,6 +9684,7 @@
                   <a:srgbClr val="1B3B6F"/>
                 </a:solidFill>
                 <a:latin typeface="Amiri" pitchFamily="2" charset="-78"/>
+                <a:ea typeface="Amiri" pitchFamily="2" charset="-78"/>
                 <a:cs typeface="Amiri" pitchFamily="2" charset="-78"/>
               </a:rPr>
               <a:t>وَبِنَاءً عَلَى مَا سَبَقَ</a:t>
@@ -11407,6 +11448,7 @@
                   <a:srgbClr val="D4AF37"/>
                 </a:solidFill>
                 <a:latin typeface="Amiri" pitchFamily="2" charset="-78"/>
+                <a:ea typeface="Amiri" pitchFamily="2" charset="-78"/>
                 <a:cs typeface="Amiri" pitchFamily="2" charset="-78"/>
               </a:rPr>
               <a:t>م</a:t>
@@ -11727,6 +11769,7 @@
                   <a:srgbClr val="8A6D1E"/>
                 </a:solidFill>
                 <a:latin typeface="Amiri" pitchFamily="2" charset="-78"/>
+                <a:ea typeface="Amiri" pitchFamily="2" charset="-78"/>
                 <a:cs typeface="Amiri" pitchFamily="2" charset="-78"/>
               </a:rPr>
               <a:t>الكِتَابَةُ المُوَجَّهَةُ</a:t>
@@ -12164,6 +12207,7 @@
                   <a:srgbClr val="1B3B6F"/>
                 </a:solidFill>
                 <a:latin typeface="Amiri" pitchFamily="2" charset="-78"/>
+                <a:ea typeface="Amiri" pitchFamily="2" charset="-78"/>
                 <a:cs typeface="Amiri" pitchFamily="2" charset="-78"/>
               </a:rPr>
               <a:t>حَضْرَةَ مُدِيرِ المَدْرَسَةِ المُحْتَرَمِ،</a:t>
@@ -12240,6 +12284,7 @@
                   <a:srgbClr val="1B3B6F"/>
                 </a:solidFill>
                 <a:latin typeface="Amiri" pitchFamily="2" charset="-78"/>
+                <a:ea typeface="Amiri" pitchFamily="2" charset="-78"/>
                 <a:cs typeface="Amiri" pitchFamily="2" charset="-78"/>
               </a:rPr>
               <a:t>أَتَشَرَّفُ بِأَنْ أَقْتَرِحَ …</a:t>
@@ -12316,6 +12361,7 @@
                   <a:srgbClr val="1B3B6F"/>
                 </a:solidFill>
                 <a:latin typeface="Amiri" pitchFamily="2" charset="-78"/>
+                <a:ea typeface="Amiri" pitchFamily="2" charset="-78"/>
                 <a:cs typeface="Amiri" pitchFamily="2" charset="-78"/>
               </a:rPr>
               <a:t>وَتَفَضَّلُوا بِقَبُولِ الاحْتِرَامِ.</a:t>
@@ -12487,6 +12533,7 @@
                   <a:srgbClr val="D4AF37"/>
                 </a:solidFill>
                 <a:latin typeface="Amiri" pitchFamily="2" charset="-78"/>
+                <a:ea typeface="Amiri" pitchFamily="2" charset="-78"/>
                 <a:cs typeface="Amiri" pitchFamily="2" charset="-78"/>
               </a:rPr>
               <a:t>م</a:t>
@@ -12807,6 +12854,7 @@
                   <a:srgbClr val="8A6D1E"/>
                 </a:solidFill>
                 <a:latin typeface="Amiri" pitchFamily="2" charset="-78"/>
+                <a:ea typeface="Amiri" pitchFamily="2" charset="-78"/>
                 <a:cs typeface="Amiri" pitchFamily="2" charset="-78"/>
               </a:rPr>
               <a:t>الإِجَابَاتُ</a:t>
@@ -13348,6 +13396,7 @@
                   <a:srgbClr val="8A6D1E"/>
                 </a:solidFill>
                 <a:latin typeface="Amiri" pitchFamily="2" charset="-78"/>
+                <a:ea typeface="Amiri" pitchFamily="2" charset="-78"/>
                 <a:cs typeface="Amiri" pitchFamily="2" charset="-78"/>
               </a:rPr>
               <a:t>يُفْتَتَحُ المَرْكَزُ الرِّيَاضِيُّ فِي السَّاعَةِ السَّادِسَةِ صَبَاحًا.</a:t>
@@ -13851,6 +13900,7 @@
                   <a:srgbClr val="8A6D1E"/>
                 </a:solidFill>
                 <a:latin typeface="Amiri" pitchFamily="2" charset="-78"/>
+                <a:ea typeface="Amiri" pitchFamily="2" charset="-78"/>
                 <a:cs typeface="Amiri" pitchFamily="2" charset="-78"/>
               </a:rPr>
               <a:t>يُشْتَرَطُ حَجْزُ المَلْعَبِ مُسْبَقًا.</a:t>
@@ -14354,6 +14404,7 @@
                   <a:srgbClr val="8A6D1E"/>
                 </a:solidFill>
                 <a:latin typeface="Amiri" pitchFamily="2" charset="-78"/>
+                <a:ea typeface="Amiri" pitchFamily="2" charset="-78"/>
                 <a:cs typeface="Amiri" pitchFamily="2" charset="-78"/>
               </a:rPr>
               <a:t>تُقَامُ دُرُوسُ السِّبَاحَةِ لِلْمُبْتَدِئِينَ يَوْمَ السَّبْتِ.</a:t>
@@ -14857,6 +14908,7 @@
                   <a:srgbClr val="8A6D1E"/>
                 </a:solidFill>
                 <a:latin typeface="Amiri" pitchFamily="2" charset="-78"/>
+                <a:ea typeface="Amiri" pitchFamily="2" charset="-78"/>
                 <a:cs typeface="Amiri" pitchFamily="2" charset="-78"/>
               </a:rPr>
               <a:t>يُمْنَعُ اسْتِخْدَامُ الهَاتِفِ فِي قَاعَةِ التَّدْرِيبِ.</a:t>
@@ -14990,6 +15042,7 @@
                   <a:srgbClr val="D4AF37"/>
                 </a:solidFill>
                 <a:latin typeface="Amiri" pitchFamily="2" charset="-78"/>
+                <a:ea typeface="Amiri" pitchFamily="2" charset="-78"/>
                 <a:cs typeface="Amiri" pitchFamily="2" charset="-78"/>
               </a:rPr>
               <a:t>م</a:t>
@@ -15310,6 +15363,7 @@
                   <a:srgbClr val="8A6D1E"/>
                 </a:solidFill>
                 <a:latin typeface="Amiri" pitchFamily="2" charset="-78"/>
+                <a:ea typeface="Amiri" pitchFamily="2" charset="-78"/>
                 <a:cs typeface="Amiri" pitchFamily="2" charset="-78"/>
               </a:rPr>
               <a:t>الإِجَابَاتُ</a:t>
@@ -15851,6 +15905,7 @@
                   <a:srgbClr val="8A6D1E"/>
                 </a:solidFill>
                 <a:latin typeface="Amiri" pitchFamily="2" charset="-78"/>
+                <a:ea typeface="Amiri" pitchFamily="2" charset="-78"/>
                 <a:cs typeface="Amiri" pitchFamily="2" charset="-78"/>
               </a:rPr>
               <a:t>يُشَارُ إِلَى أَنَّ القِرَاءَةَ عَادَةٌ تُثْرِي العَقْلَ.</a:t>
@@ -16354,6 +16409,7 @@
                   <a:srgbClr val="8A6D1E"/>
                 </a:solidFill>
                 <a:latin typeface="Amiri" pitchFamily="2" charset="-78"/>
+                <a:ea typeface="Amiri" pitchFamily="2" charset="-78"/>
                 <a:cs typeface="Amiri" pitchFamily="2" charset="-78"/>
               </a:rPr>
               <a:t>عَشْرَ دَقَائِقَ يَوْمِيًّا تَبْنِي عَادَةً رَاسِخَةً.</a:t>
@@ -16502,6 +16558,7 @@
                   <a:srgbClr val="1B3B6F"/>
                 </a:solidFill>
                 <a:latin typeface="Amiri" pitchFamily="2" charset="-78"/>
+                <a:ea typeface="Amiri" pitchFamily="2" charset="-78"/>
                 <a:cs typeface="Amiri" pitchFamily="2" charset="-78"/>
               </a:rPr>
               <a:t>صَحِيحٌ أَنَّ الحَيَاةَ مَشْغُولَةٌ</a:t>
@@ -17031,6 +17088,7 @@
                   <a:srgbClr val="1B3B6F"/>
                 </a:solidFill>
                 <a:latin typeface="Amiri" pitchFamily="2" charset="-78"/>
+                <a:ea typeface="Amiri" pitchFamily="2" charset="-78"/>
                 <a:cs typeface="Amiri" pitchFamily="2" charset="-78"/>
               </a:rPr>
               <a:t>صَحِيحٌ أَنَّ الحَيَاةَ</a:t>
@@ -17145,6 +17203,7 @@
                   <a:srgbClr val="9AA1AB"/>
                 </a:solidFill>
                 <a:latin typeface="Amiri" pitchFamily="2" charset="-78"/>
+                <a:ea typeface="Amiri" pitchFamily="2" charset="-78"/>
                 <a:cs typeface="Amiri" pitchFamily="2" charset="-78"/>
               </a:rPr>
               <a:t>تَكُونَ مَشْغُولَةً</a:t>
@@ -17273,6 +17332,7 @@
                   <a:srgbClr val="1F2A37"/>
                 </a:solidFill>
                 <a:latin typeface="Amiri" pitchFamily="2" charset="-78"/>
+                <a:ea typeface="Amiri" pitchFamily="2" charset="-78"/>
                 <a:cs typeface="Amiri" pitchFamily="2" charset="-78"/>
               </a:rPr>
               <a:t>مَشْغُولَةٌ</a:t>
@@ -17374,6 +17434,7 @@
                   <a:srgbClr val="9AA1AB"/>
                 </a:solidFill>
                 <a:latin typeface="Amiri" pitchFamily="2" charset="-78"/>
+                <a:ea typeface="Amiri" pitchFamily="2" charset="-78"/>
                 <a:cs typeface="Amiri" pitchFamily="2" charset="-78"/>
               </a:rPr>
               <a:t>كَانَتْ مَشْغُولَةً</a:t>
@@ -17425,6 +17486,7 @@
                   <a:srgbClr val="8A6D1E"/>
                 </a:solidFill>
                 <a:latin typeface="Amiri" pitchFamily="2" charset="-78"/>
+                <a:ea typeface="Amiri" pitchFamily="2" charset="-78"/>
                 <a:cs typeface="Amiri" pitchFamily="2" charset="-78"/>
               </a:rPr>
               <a:t>صَحِيحٌ أَنَّ</a:t>
@@ -17586,6 +17648,7 @@
                   <a:srgbClr val="1B3B6F"/>
                 </a:solidFill>
                 <a:latin typeface="Amiri" pitchFamily="2" charset="-78"/>
+                <a:ea typeface="Amiri" pitchFamily="2" charset="-78"/>
                 <a:cs typeface="Amiri" pitchFamily="2" charset="-78"/>
               </a:rPr>
               <a:t>يَتَطَلَّبُ الأَمْرُ أَنْ</a:t>
@@ -17612,6 +17675,7 @@
                   <a:srgbClr val="1B3B6F"/>
                 </a:solidFill>
                 <a:latin typeface="Amiri" pitchFamily="2" charset="-78"/>
+                <a:ea typeface="Amiri" pitchFamily="2" charset="-78"/>
                 <a:cs typeface="Amiri" pitchFamily="2" charset="-78"/>
               </a:rPr>
               <a:t>الأُسَرُ وَقْتًا</a:t>
@@ -17753,6 +17817,7 @@
                   <a:srgbClr val="1F2A37"/>
                 </a:solidFill>
                 <a:latin typeface="Amiri" pitchFamily="2" charset="-78"/>
+                <a:ea typeface="Amiri" pitchFamily="2" charset="-78"/>
                 <a:cs typeface="Amiri" pitchFamily="2" charset="-78"/>
               </a:rPr>
               <a:t>تُخَصِّصَ</a:t>
@@ -17854,6 +17919,7 @@
                   <a:srgbClr val="9AA1AB"/>
                 </a:solidFill>
                 <a:latin typeface="Amiri" pitchFamily="2" charset="-78"/>
+                <a:ea typeface="Amiri" pitchFamily="2" charset="-78"/>
                 <a:cs typeface="Amiri" pitchFamily="2" charset="-78"/>
               </a:rPr>
               <a:t>تُخَصِّصُ</a:t>
@@ -17955,6 +18021,7 @@
                   <a:srgbClr val="9AA1AB"/>
                 </a:solidFill>
                 <a:latin typeface="Amiri" pitchFamily="2" charset="-78"/>
+                <a:ea typeface="Amiri" pitchFamily="2" charset="-78"/>
                 <a:cs typeface="Amiri" pitchFamily="2" charset="-78"/>
               </a:rPr>
               <a:t>خَصَّصَتْ</a:t>
@@ -18006,6 +18073,7 @@
                   <a:srgbClr val="8A6D1E"/>
                 </a:solidFill>
                 <a:latin typeface="Amiri" pitchFamily="2" charset="-78"/>
+                <a:ea typeface="Amiri" pitchFamily="2" charset="-78"/>
                 <a:cs typeface="Amiri" pitchFamily="2" charset="-78"/>
               </a:rPr>
               <a:t>أَنْ</a:t>
@@ -18032,6 +18100,7 @@
                   <a:srgbClr val="8A6D1E"/>
                 </a:solidFill>
                 <a:latin typeface="Amiri" pitchFamily="2" charset="-78"/>
+                <a:ea typeface="Amiri" pitchFamily="2" charset="-78"/>
                 <a:cs typeface="Amiri" pitchFamily="2" charset="-78"/>
               </a:rPr>
               <a:t>يَتَطَلَّبُ</a:t>
@@ -18058,6 +18127,7 @@
                   <a:srgbClr val="8A6D1E"/>
                 </a:solidFill>
                 <a:latin typeface="Amiri" pitchFamily="2" charset="-78"/>
+                <a:ea typeface="Amiri" pitchFamily="2" charset="-78"/>
                 <a:cs typeface="Amiri" pitchFamily="2" charset="-78"/>
               </a:rPr>
               <a:t>تُخَصِّصَ</a:t>
@@ -18219,6 +18289,7 @@
                   <a:srgbClr val="1B3B6F"/>
                 </a:solidFill>
                 <a:latin typeface="Amiri" pitchFamily="2" charset="-78"/>
+                <a:ea typeface="Amiri" pitchFamily="2" charset="-78"/>
                 <a:cs typeface="Amiri" pitchFamily="2" charset="-78"/>
               </a:rPr>
               <a:t>لَوْ قَرَأَ كُلُّ طِفْلٍ كِتَابًا،</a:t>
@@ -18245,6 +18316,7 @@
                   <a:srgbClr val="1B3B6F"/>
                 </a:solidFill>
                 <a:latin typeface="Amiri" pitchFamily="2" charset="-78"/>
+                <a:ea typeface="Amiri" pitchFamily="2" charset="-78"/>
                 <a:cs typeface="Amiri" pitchFamily="2" charset="-78"/>
               </a:rPr>
               <a:t>مَدَارِكُهُ</a:t>
@@ -18359,6 +18431,7 @@
                   <a:srgbClr val="9AA1AB"/>
                 </a:solidFill>
                 <a:latin typeface="Amiri" pitchFamily="2" charset="-78"/>
+                <a:ea typeface="Amiri" pitchFamily="2" charset="-78"/>
                 <a:cs typeface="Amiri" pitchFamily="2" charset="-78"/>
               </a:rPr>
               <a:t>سَتَتَّسِعُ</a:t>
@@ -18460,6 +18533,7 @@
                   <a:srgbClr val="9AA1AB"/>
                 </a:solidFill>
                 <a:latin typeface="Amiri" pitchFamily="2" charset="-78"/>
+                <a:ea typeface="Amiri" pitchFamily="2" charset="-78"/>
                 <a:cs typeface="Amiri" pitchFamily="2" charset="-78"/>
               </a:rPr>
               <a:t>تَتَّسِعُ</a:t>
@@ -18588,6 +18662,7 @@
                   <a:srgbClr val="1F2A37"/>
                 </a:solidFill>
                 <a:latin typeface="Amiri" pitchFamily="2" charset="-78"/>
+                <a:ea typeface="Amiri" pitchFamily="2" charset="-78"/>
                 <a:cs typeface="Amiri" pitchFamily="2" charset="-78"/>
               </a:rPr>
               <a:t>لَاتَّسَعَتْ</a:t>
@@ -18639,6 +18714,7 @@
                   <a:srgbClr val="8A6D1E"/>
                 </a:solidFill>
                 <a:latin typeface="Amiri" pitchFamily="2" charset="-78"/>
+                <a:ea typeface="Amiri" pitchFamily="2" charset="-78"/>
                 <a:cs typeface="Amiri" pitchFamily="2" charset="-78"/>
               </a:rPr>
               <a:t>لَوْ</a:t>
@@ -18665,6 +18741,7 @@
                   <a:srgbClr val="8A6D1E"/>
                 </a:solidFill>
                 <a:latin typeface="Amiri" pitchFamily="2" charset="-78"/>
+                <a:ea typeface="Amiri" pitchFamily="2" charset="-78"/>
                 <a:cs typeface="Amiri" pitchFamily="2" charset="-78"/>
               </a:rPr>
               <a:t>لَـ</a:t>
@@ -18691,6 +18768,7 @@
                   <a:srgbClr val="8A6D1E"/>
                 </a:solidFill>
                 <a:latin typeface="Amiri" pitchFamily="2" charset="-78"/>
+                <a:ea typeface="Amiri" pitchFamily="2" charset="-78"/>
                 <a:cs typeface="Amiri" pitchFamily="2" charset="-78"/>
               </a:rPr>
               <a:t>لَاتَّسَعَتْ</a:t>
@@ -18837,6 +18915,7 @@
                   <a:srgbClr val="D4AF37"/>
                 </a:solidFill>
                 <a:latin typeface="Amiri" pitchFamily="2" charset="-78"/>
+                <a:ea typeface="Amiri" pitchFamily="2" charset="-78"/>
                 <a:cs typeface="Amiri" pitchFamily="2" charset="-78"/>
               </a:rPr>
               <a:t>م</a:t>
@@ -19157,6 +19236,7 @@
                   <a:srgbClr val="8A6D1E"/>
                 </a:solidFill>
                 <a:latin typeface="Amiri" pitchFamily="2" charset="-78"/>
+                <a:ea typeface="Amiri" pitchFamily="2" charset="-78"/>
                 <a:cs typeface="Amiri" pitchFamily="2" charset="-78"/>
               </a:rPr>
               <a:t>الإِجَابَاتُ</a:t>
@@ -19698,6 +19778,7 @@
                   <a:srgbClr val="8A6D1E"/>
                 </a:solidFill>
                 <a:latin typeface="Amiri" pitchFamily="2" charset="-78"/>
+                <a:ea typeface="Amiri" pitchFamily="2" charset="-78"/>
                 <a:cs typeface="Amiri" pitchFamily="2" charset="-78"/>
               </a:rPr>
               <a:t>غَيْرَ أَنَّ العَطَاءَ يَمْنَحُ مَعْنًى لَا يُشْتَرَى.</a:t>
@@ -19846,6 +19927,7 @@
                   <a:srgbClr val="1B3B6F"/>
                 </a:solidFill>
                 <a:latin typeface="Amiri" pitchFamily="2" charset="-78"/>
+                <a:ea typeface="Amiri" pitchFamily="2" charset="-78"/>
                 <a:cs typeface="Amiri" pitchFamily="2" charset="-78"/>
               </a:rPr>
               <a:t>لَا يُمْكِنُ إِنْكَارُ أَنَّ</a:t>
@@ -20375,6 +20457,7 @@
                   <a:srgbClr val="1B3B6F"/>
                 </a:solidFill>
                 <a:latin typeface="Amiri" pitchFamily="2" charset="-78"/>
+                <a:ea typeface="Amiri" pitchFamily="2" charset="-78"/>
                 <a:cs typeface="Amiri" pitchFamily="2" charset="-78"/>
               </a:rPr>
               <a:t>وَبِنَاءً عَلَى مَا سَبَقَ</a:t>
@@ -20756,6 +20839,7 @@
                   <a:srgbClr val="8A6D1E"/>
                 </a:solidFill>
                 <a:latin typeface="Amiri" pitchFamily="2" charset="-78"/>
+                <a:ea typeface="Amiri" pitchFamily="2" charset="-78"/>
                 <a:cs typeface="Amiri" pitchFamily="2" charset="-78"/>
               </a:rPr>
               <a:t>وَبِنَاءً عَلَى مَا سَبَقَ</a:t>
@@ -21285,6 +21369,7 @@
                   <a:srgbClr val="8A6D1E"/>
                 </a:solidFill>
                 <a:latin typeface="Amiri" pitchFamily="2" charset="-78"/>
+                <a:ea typeface="Amiri" pitchFamily="2" charset="-78"/>
                 <a:cs typeface="Amiri" pitchFamily="2" charset="-78"/>
               </a:rPr>
               <a:t>العَمَلُ التَّطَوُّعِيُّ يَبْنِي شَخْصِيَّةَ الشَّبَابِ</a:t>
@@ -21814,6 +21899,7 @@
                   <a:srgbClr val="8A6D1E"/>
                 </a:solidFill>
                 <a:latin typeface="Amiri" pitchFamily="2" charset="-78"/>
+                <a:ea typeface="Amiri" pitchFamily="2" charset="-78"/>
                 <a:cs typeface="Amiri" pitchFamily="2" charset="-78"/>
               </a:rPr>
               <a:t>عَشْرَ دَقَائِقَ يَوْمِيًّا تَبْنِي عَادَةً</a:t>
@@ -22343,6 +22429,7 @@
                   <a:srgbClr val="8A6D1E"/>
                 </a:solidFill>
                 <a:latin typeface="Amiri" pitchFamily="2" charset="-78"/>
+                <a:ea typeface="Amiri" pitchFamily="2" charset="-78"/>
                 <a:cs typeface="Amiri" pitchFamily="2" charset="-78"/>
               </a:rPr>
               <a:t>يُفْتَتَحُ المَرْكَزُ الرِّيَاضِيُّ فِي السَّادِسَةِ صَبَاحًا</a:t>
@@ -22489,6 +22576,7 @@
                   <a:srgbClr val="D4AF37"/>
                 </a:solidFill>
                 <a:latin typeface="Amiri" pitchFamily="2" charset="-78"/>
+                <a:ea typeface="Amiri" pitchFamily="2" charset="-78"/>
                 <a:cs typeface="Amiri" pitchFamily="2" charset="-78"/>
               </a:rPr>
               <a:t>م</a:t>
@@ -22809,6 +22897,7 @@
                   <a:srgbClr val="8A6D1E"/>
                 </a:solidFill>
                 <a:latin typeface="Amiri" pitchFamily="2" charset="-78"/>
+                <a:ea typeface="Amiri" pitchFamily="2" charset="-78"/>
                 <a:cs typeface="Amiri" pitchFamily="2" charset="-78"/>
               </a:rPr>
               <a:t>نَمُوذَجُ الإِجَابَةِ</a:t>
@@ -22922,6 +23011,7 @@
                   <a:srgbClr val="1F2A37"/>
                 </a:solidFill>
                 <a:latin typeface="Amiri" pitchFamily="2" charset="-78"/>
+                <a:ea typeface="Amiri" pitchFamily="2" charset="-78"/>
                 <a:cs typeface="Amiri" pitchFamily="2" charset="-78"/>
               </a:rPr>
               <a:t>حَضْرَةَ مُدِيرِ المَدْرَسَةِ المُحْتَرَمِ، أَتَشَرَّفُ بِأَنْ أَقْتَرِحَ إِنْشَاءَ نَادٍ لِلْبِرْمَجَةِ بَعْدَ الدَّوَامِ. يُشَارُ إِلَى أَنَّ المَهَارَاتِ الرَّقْمِيَّةَ بَاتَتْ ضَرُورِيَّةً. صَحِيحٌ أَنَّ الوَقْتَ مَحْدُودٌ، غَيْرَ أَنَّ سَاعَةً أُسْبُوعِيَّةً تَكْفِي. وَيَتَطَلَّبُ الأَمْرُ أَنْ تُوَفِّرَ المَدْرَسَةُ قَاعَةً وَمُشْرِفًا. وَإِذَا وَافَقْتُمْ، سَيَسْتَفِيدُ عَدَدٌ كَبِيرٌ مِنَ الطُّلَّابِ. أَرْجُو أَنْ تَتَكَرَّمُوا بِالمُوَافَقَةِ، وَتَفَضَّلُوا بِقَبُولِ الاحْتِرَامِ.</a:t>
@@ -23085,11 +23175,12 @@
               <a:buNone/>
             </a:pPr>
             <a:r>
-              <a:rPr lang="en-US" sz="950" b="1" dirty="0">
+              <a:rPr lang="ar-SA" sz="950" b="1" dirty="0">
                 <a:solidFill>
                   <a:srgbClr val="FFFFFF"/>
                 </a:solidFill>
                 <a:latin typeface="Calibri" pitchFamily="34" charset="0"/>
+                <a:ea typeface="Amiri" pitchFamily="2" charset="-78"/>
                 <a:cs typeface="Amiri" pitchFamily="2" charset="-78"/>
               </a:rPr>
               <a:t>أَتَشَرَّفُ بِأَنْ</a:t>
@@ -23150,11 +23241,12 @@
               <a:buNone/>
             </a:pPr>
             <a:r>
-              <a:rPr lang="en-US" sz="950" b="1" dirty="0">
+              <a:rPr lang="ar-SA" sz="950" b="1" dirty="0">
                 <a:solidFill>
                   <a:srgbClr val="FFFFFF"/>
                 </a:solidFill>
                 <a:latin typeface="Calibri" pitchFamily="34" charset="0"/>
+                <a:ea typeface="Amiri" pitchFamily="2" charset="-78"/>
                 <a:cs typeface="Amiri" pitchFamily="2" charset="-78"/>
               </a:rPr>
               <a:t>صَحِيحٌ أَنَّ … غَيْرَ أَنَّ</a:t>
@@ -23215,11 +23307,12 @@
               <a:buNone/>
             </a:pPr>
             <a:r>
-              <a:rPr lang="en-US" sz="950" b="1" dirty="0">
+              <a:rPr lang="ar-SA" sz="950" b="1" dirty="0">
                 <a:solidFill>
                   <a:srgbClr val="FFFFFF"/>
                 </a:solidFill>
                 <a:latin typeface="Calibri" pitchFamily="34" charset="0"/>
+                <a:ea typeface="Amiri" pitchFamily="2" charset="-78"/>
                 <a:cs typeface="Amiri" pitchFamily="2" charset="-78"/>
               </a:rPr>
               <a:t>يَتَطَلَّبُ الأَمْرُ أَنْ</a:t>
@@ -23280,11 +23373,12 @@
               <a:buNone/>
             </a:pPr>
             <a:r>
-              <a:rPr lang="en-US" sz="950" b="1" dirty="0">
+              <a:rPr lang="ar-SA" sz="950" b="1" dirty="0">
                 <a:solidFill>
                   <a:srgbClr val="FFFFFF"/>
                 </a:solidFill>
                 <a:latin typeface="Calibri" pitchFamily="34" charset="0"/>
+                <a:ea typeface="Amiri" pitchFamily="2" charset="-78"/>
                 <a:cs typeface="Amiri" pitchFamily="2" charset="-78"/>
               </a:rPr>
               <a:t>إِذَا وَافَقْتُمْ</a:t>
@@ -23418,6 +23512,7 @@
                   <a:srgbClr val="D4AF37"/>
                 </a:solidFill>
                 <a:latin typeface="Amiri" pitchFamily="2" charset="-78"/>
+                <a:ea typeface="Amiri" pitchFamily="2" charset="-78"/>
                 <a:cs typeface="Amiri" pitchFamily="2" charset="-78"/>
               </a:rPr>
               <a:t>م</a:t>
@@ -23738,6 +23833,7 @@
                   <a:srgbClr val="8A6D1E"/>
                 </a:solidFill>
                 <a:latin typeface="Amiri" pitchFamily="2" charset="-78"/>
+                <a:ea typeface="Amiri" pitchFamily="2" charset="-78"/>
                 <a:cs typeface="Amiri" pitchFamily="2" charset="-78"/>
               </a:rPr>
               <a:t>الكِتَابَةُ المُمْتَدَّةُ</a:t>
@@ -24002,6 +24098,7 @@
                   <a:srgbClr val="1F2A37"/>
                 </a:solidFill>
                 <a:latin typeface="Amiri" pitchFamily="2" charset="-78"/>
+                <a:ea typeface="Amiri" pitchFamily="2" charset="-78"/>
                 <a:cs typeface="Amiri" pitchFamily="2" charset="-78"/>
               </a:rPr>
               <a:t>صَحِيحٌ أَنَّ</a:t>
@@ -24028,6 +24125,7 @@
                   <a:srgbClr val="1F2A37"/>
                 </a:solidFill>
                 <a:latin typeface="Amiri" pitchFamily="2" charset="-78"/>
+                <a:ea typeface="Amiri" pitchFamily="2" charset="-78"/>
                 <a:cs typeface="Amiri" pitchFamily="2" charset="-78"/>
               </a:rPr>
               <a:t>غَيْرَ أَنَّ</a:t>
@@ -24227,6 +24325,7 @@
                   <a:srgbClr val="1B3B6F"/>
                 </a:solidFill>
                 <a:latin typeface="Amiri" pitchFamily="2" charset="-78"/>
+                <a:ea typeface="Amiri" pitchFamily="2" charset="-78"/>
                 <a:cs typeface="Amiri" pitchFamily="2" charset="-78"/>
               </a:rPr>
               <a:t>السَّفَرُ أَفْضَلُ مُعَلِّمٍ — هَلْ تُوَافِقُ؟</a:t>
@@ -24303,6 +24402,7 @@
                   <a:srgbClr val="1B3B6F"/>
                 </a:solidFill>
                 <a:latin typeface="Amiri" pitchFamily="2" charset="-78"/>
+                <a:ea typeface="Amiri" pitchFamily="2" charset="-78"/>
                 <a:cs typeface="Amiri" pitchFamily="2" charset="-78"/>
               </a:rPr>
               <a:t>المُدُنُ الكُبْرَى أَفْضَلُ لِلْعَيْشِ مِنَ القُرَى — هَلْ تُوَافِقُ؟</a:t>
@@ -24379,6 +24479,7 @@
                   <a:srgbClr val="1B3B6F"/>
                 </a:solidFill>
                 <a:latin typeface="Amiri" pitchFamily="2" charset="-78"/>
+                <a:ea typeface="Amiri" pitchFamily="2" charset="-78"/>
                 <a:cs typeface="Amiri" pitchFamily="2" charset="-78"/>
               </a:rPr>
               <a:t>عَلَى الشَّبَابِ أَنْ يَخْدُمُوا مُجْتَمَعَهُمْ قَبْلَ أَنْفُسِهِمْ — هَلْ تُوَافِقُ؟</a:t>
@@ -24550,6 +24651,7 @@
                   <a:srgbClr val="D4AF37"/>
                 </a:solidFill>
                 <a:latin typeface="Amiri" pitchFamily="2" charset="-78"/>
+                <a:ea typeface="Amiri" pitchFamily="2" charset="-78"/>
                 <a:cs typeface="Amiri" pitchFamily="2" charset="-78"/>
               </a:rPr>
               <a:t>م</a:t>
@@ -24870,6 +24972,7 @@
                   <a:srgbClr val="8A6D1E"/>
                 </a:solidFill>
                 <a:latin typeface="Amiri" pitchFamily="2" charset="-78"/>
+                <a:ea typeface="Amiri" pitchFamily="2" charset="-78"/>
                 <a:cs typeface="Amiri" pitchFamily="2" charset="-78"/>
               </a:rPr>
               <a:t>آدَابُ الصَّفِّ</a:t>
@@ -26401,6 +26504,7 @@
                   <a:srgbClr val="D4AF37"/>
                 </a:solidFill>
                 <a:latin typeface="Amiri" pitchFamily="2" charset="-78"/>
+                <a:ea typeface="Amiri" pitchFamily="2" charset="-78"/>
                 <a:cs typeface="Amiri" pitchFamily="2" charset="-78"/>
               </a:rPr>
               <a:t>م</a:t>
@@ -26721,6 +26825,7 @@
                   <a:srgbClr val="8A6D1E"/>
                 </a:solidFill>
                 <a:latin typeface="Amiri" pitchFamily="2" charset="-78"/>
+                <a:ea typeface="Amiri" pitchFamily="2" charset="-78"/>
                 <a:cs typeface="Amiri" pitchFamily="2" charset="-78"/>
               </a:rPr>
               <a:t>نَمُوذَجُ الإِجَابَةِ</a:t>
@@ -26834,6 +26939,7 @@
                   <a:srgbClr val="1F2A37"/>
                 </a:solidFill>
                 <a:latin typeface="Amiri" pitchFamily="2" charset="-78"/>
+                <a:ea typeface="Amiri" pitchFamily="2" charset="-78"/>
                 <a:cs typeface="Amiri" pitchFamily="2" charset="-78"/>
               </a:rPr>
               <a:t>يُشَارُ إِلَى أَنَّ السَّفَرَ مِنْ أَعْظَمِ مَصَادِرِ التَّعَلُّمِ. أَكَّدَ التَّرْبَوِيُّونَ أَنَّ الاحْتِكَاكَ بِالثَّقَافَاتِ يُنَمِّي الوَعْيَ. صَحِيحٌ أَنَّ الكُتُبَ تُعَلِّمُ الكَثِيرَ، غَيْرَ أَنَّ التَّجْرِبَةَ المُبَاشِرَةَ تَتْرُكُ أَثَرًا أَعْمَقَ. وَلَوْ سَافَرَ كُلُّ طَالِبٍ مَرَّةً، لَتَغَيَّرَتْ نَظْرَتُهُ إِلَى العَالَمِ. وَإِذَا أُتِيحَتِ الفُرَصُ، سَيَتَعَلَّمُ الشَّبَابُ التَّسَامُحَ. وَبِنَاءً عَلَى مَا سَبَقَ، يَنْبَغِي أَنْ نُشَجِّعَ السَّفَرَ التَّعْلِيمِيَّ لِكَيْ نَبْنِيَ جِيلًا مُنْفَتِحًا.</a:t>
@@ -26997,11 +27103,12 @@
               <a:buNone/>
             </a:pPr>
             <a:r>
-              <a:rPr lang="en-US" sz="950" b="1" dirty="0">
+              <a:rPr lang="ar-SA" sz="950" b="1" dirty="0">
                 <a:solidFill>
                   <a:srgbClr val="FFFFFF"/>
                 </a:solidFill>
                 <a:latin typeface="Calibri" pitchFamily="34" charset="0"/>
+                <a:ea typeface="Amiri" pitchFamily="2" charset="-78"/>
                 <a:cs typeface="Amiri" pitchFamily="2" charset="-78"/>
               </a:rPr>
               <a:t>أَكَّدَ التَّرْبَوِيُّونَ أَنَّ</a:t>
@@ -27062,11 +27169,12 @@
               <a:buNone/>
             </a:pPr>
             <a:r>
-              <a:rPr lang="en-US" sz="950" b="1" dirty="0">
+              <a:rPr lang="ar-SA" sz="950" b="1" dirty="0">
                 <a:solidFill>
                   <a:srgbClr val="FFFFFF"/>
                 </a:solidFill>
                 <a:latin typeface="Calibri" pitchFamily="34" charset="0"/>
+                <a:ea typeface="Amiri" pitchFamily="2" charset="-78"/>
                 <a:cs typeface="Amiri" pitchFamily="2" charset="-78"/>
               </a:rPr>
               <a:t>لَوْ سَافَرَ … لَتَغَيَّرَتْ</a:t>
@@ -27127,11 +27235,12 @@
               <a:buNone/>
             </a:pPr>
             <a:r>
-              <a:rPr lang="en-US" sz="950" b="1" dirty="0">
+              <a:rPr lang="ar-SA" sz="950" b="1" dirty="0">
                 <a:solidFill>
                   <a:srgbClr val="FFFFFF"/>
                 </a:solidFill>
                 <a:latin typeface="Calibri" pitchFamily="34" charset="0"/>
+                <a:ea typeface="Amiri" pitchFamily="2" charset="-78"/>
                 <a:cs typeface="Amiri" pitchFamily="2" charset="-78"/>
               </a:rPr>
               <a:t>إِذَا أُتِيحَتِ الفُرَصُ</a:t>
@@ -27192,11 +27301,12 @@
               <a:buNone/>
             </a:pPr>
             <a:r>
-              <a:rPr lang="en-US" sz="950" b="1" dirty="0">
+              <a:rPr lang="ar-SA" sz="950" b="1" dirty="0">
                 <a:solidFill>
                   <a:srgbClr val="FFFFFF"/>
                 </a:solidFill>
                 <a:latin typeface="Calibri" pitchFamily="34" charset="0"/>
+                <a:ea typeface="Amiri" pitchFamily="2" charset="-78"/>
                 <a:cs typeface="Amiri" pitchFamily="2" charset="-78"/>
               </a:rPr>
               <a:t>وَبِنَاءً عَلَى مَا سَبَقَ</a:t>
@@ -27330,6 +27440,7 @@
                   <a:srgbClr val="D4AF37"/>
                 </a:solidFill>
                 <a:latin typeface="Amiri" pitchFamily="2" charset="-78"/>
+                <a:ea typeface="Amiri" pitchFamily="2" charset="-78"/>
                 <a:cs typeface="Amiri" pitchFamily="2" charset="-78"/>
               </a:rPr>
               <a:t>م</a:t>
@@ -27650,6 +27761,7 @@
                   <a:srgbClr val="8A6D1E"/>
                 </a:solidFill>
                 <a:latin typeface="Amiri" pitchFamily="2" charset="-78"/>
+                <a:ea typeface="Amiri" pitchFamily="2" charset="-78"/>
                 <a:cs typeface="Amiri" pitchFamily="2" charset="-78"/>
               </a:rPr>
               <a:t>سَجِّلْ نَتِيجَتَكَ</a:t>
@@ -28692,6 +28804,7 @@
                   <a:srgbClr val="D4AF37"/>
                 </a:solidFill>
                 <a:latin typeface="Amiri" pitchFamily="2" charset="-78"/>
+                <a:ea typeface="Amiri" pitchFamily="2" charset="-78"/>
                 <a:cs typeface="Amiri" pitchFamily="2" charset="-78"/>
               </a:rPr>
               <a:t>م</a:t>
@@ -29012,6 +29125,7 @@
                   <a:srgbClr val="8A6D1E"/>
                 </a:solidFill>
                 <a:latin typeface="Amiri" pitchFamily="2" charset="-78"/>
+                <a:ea typeface="Amiri" pitchFamily="2" charset="-78"/>
                 <a:cs typeface="Amiri" pitchFamily="2" charset="-78"/>
               </a:rPr>
               <a:t>التَّأَمُّلُ</a:t>
@@ -29642,6 +29756,7 @@
                   <a:srgbClr val="D4AF37"/>
                 </a:solidFill>
                 <a:latin typeface="Amiri" pitchFamily="2" charset="-78"/>
+                <a:ea typeface="Amiri" pitchFamily="2" charset="-78"/>
                 <a:cs typeface="Amiri" pitchFamily="2" charset="-78"/>
               </a:rPr>
               <a:t>م</a:t>
@@ -29962,6 +30077,7 @@
                   <a:srgbClr val="8A6D1E"/>
                 </a:solidFill>
                 <a:latin typeface="Amiri" pitchFamily="2" charset="-78"/>
+                <a:ea typeface="Amiri" pitchFamily="2" charset="-78"/>
                 <a:cs typeface="Amiri" pitchFamily="2" charset="-78"/>
               </a:rPr>
               <a:t>قَيِّمْ عَمَلَكَ</a:t>
@@ -30957,6 +31073,7 @@
                   <a:srgbClr val="D4AF37"/>
                 </a:solidFill>
                 <a:latin typeface="Amiri" pitchFamily="2" charset="-78"/>
+                <a:ea typeface="Amiri" pitchFamily="2" charset="-78"/>
                 <a:cs typeface="Amiri" pitchFamily="2" charset="-78"/>
               </a:rPr>
               <a:t>م</a:t>
@@ -31277,6 +31394,7 @@
                   <a:srgbClr val="8A6D1E"/>
                 </a:solidFill>
                 <a:latin typeface="Amiri" pitchFamily="2" charset="-78"/>
+                <a:ea typeface="Amiri" pitchFamily="2" charset="-78"/>
                 <a:cs typeface="Amiri" pitchFamily="2" charset="-78"/>
               </a:rPr>
               <a:t>التَّحْضِيرُ لِلدَّرْسِ القَادِمِ</a:t>
@@ -31490,6 +31608,7 @@
                   <a:srgbClr val="1B3B6F"/>
                 </a:solidFill>
                 <a:latin typeface="Amiri" pitchFamily="2" charset="-78"/>
+                <a:ea typeface="Amiri" pitchFamily="2" charset="-78"/>
                 <a:cs typeface="Amiri" pitchFamily="2" charset="-78"/>
               </a:rPr>
               <a:t>تَمْثِيلُ الدَّوْرِ</a:t>
@@ -31579,6 +31698,7 @@
                   <a:srgbClr val="1B3B6F"/>
                 </a:solidFill>
                 <a:latin typeface="Amiri" pitchFamily="2" charset="-78"/>
+                <a:ea typeface="Amiri" pitchFamily="2" charset="-78"/>
                 <a:cs typeface="Amiri" pitchFamily="2" charset="-78"/>
               </a:rPr>
               <a:t>المُحَادَثَةُ المَوْضُوعِيَّةُ</a:t>
@@ -31668,6 +31788,7 @@
                   <a:srgbClr val="1B3B6F"/>
                 </a:solidFill>
                 <a:latin typeface="Amiri" pitchFamily="2" charset="-78"/>
+                <a:ea typeface="Amiri" pitchFamily="2" charset="-78"/>
                 <a:cs typeface="Amiri" pitchFamily="2" charset="-78"/>
               </a:rPr>
               <a:t>التَّوْسِيعُ فِي الإِجَابَةِ</a:t>
@@ -31757,6 +31878,7 @@
                   <a:srgbClr val="1B3B6F"/>
                 </a:solidFill>
                 <a:latin typeface="Amiri" pitchFamily="2" charset="-78"/>
+                <a:ea typeface="Amiri" pitchFamily="2" charset="-78"/>
                 <a:cs typeface="Amiri" pitchFamily="2" charset="-78"/>
               </a:rPr>
               <a:t>لُغَةُ التَّوَقُّفِ وَالتَّفْكِيرِ</a:t>
@@ -31846,6 +31968,7 @@
                   <a:srgbClr val="1B3B6F"/>
                 </a:solidFill>
                 <a:latin typeface="Amiri" pitchFamily="2" charset="-78"/>
+                <a:ea typeface="Amiri" pitchFamily="2" charset="-78"/>
                 <a:cs typeface="Amiri" pitchFamily="2" charset="-78"/>
               </a:rPr>
               <a:t>التَّحَدُّثُ بِثِقَةٍ</a:t>
@@ -32014,6 +32137,7 @@
                   <a:srgbClr val="1B3B6F"/>
                 </a:solidFill>
                 <a:latin typeface="Amiri" pitchFamily="2" charset="-78"/>
+                <a:ea typeface="Amiri" pitchFamily="2" charset="-78"/>
                 <a:cs typeface="Amiri" pitchFamily="2" charset="-78"/>
               </a:rPr>
               <a:t>يُشَارُ إِلَى أَنَّ ______ ، وَإِذَا ______ ، سَوْفَ ______ .</a:t>
@@ -32683,6 +32807,7 @@
                   <a:srgbClr val="FFFFFF"/>
                 </a:solidFill>
                 <a:latin typeface="Amiri" pitchFamily="2" charset="-78"/>
+                <a:ea typeface="Amiri" pitchFamily="2" charset="-78"/>
                 <a:cs typeface="Amiri" pitchFamily="2" charset="-78"/>
               </a:rPr>
               <a:t>أَحْسَنْتُمْ! إِلَى اللِّقَاءِ</a:t>
@@ -32835,6 +32960,7 @@
                   <a:srgbClr val="D4AF37"/>
                 </a:solidFill>
                 <a:latin typeface="Amiri" pitchFamily="2" charset="-78"/>
+                <a:ea typeface="Amiri" pitchFamily="2" charset="-78"/>
                 <a:cs typeface="Amiri" pitchFamily="2" charset="-78"/>
               </a:rPr>
               <a:t>امْتِحَانُ المُحَاكَاةِ — الوَرَقَةُ الثَّالِثَةُ: التَّحَدُّثُ</a:t>
@@ -32968,6 +33094,7 @@
                   <a:srgbClr val="D4AF37"/>
                 </a:solidFill>
                 <a:latin typeface="Amiri" pitchFamily="2" charset="-78"/>
+                <a:ea typeface="Amiri" pitchFamily="2" charset="-78"/>
                 <a:cs typeface="Amiri" pitchFamily="2" charset="-78"/>
               </a:rPr>
               <a:t>م</a:t>
@@ -33288,6 +33415,7 @@
                   <a:srgbClr val="8A6D1E"/>
                 </a:solidFill>
                 <a:latin typeface="Amiri" pitchFamily="2" charset="-78"/>
+                <a:ea typeface="Amiri" pitchFamily="2" charset="-78"/>
                 <a:cs typeface="Amiri" pitchFamily="2" charset="-78"/>
               </a:rPr>
               <a:t>خَرِيطَةُ الدَّرْسِ</a:t>
@@ -33602,6 +33730,7 @@
                   <a:srgbClr val="0E7C86"/>
                 </a:solidFill>
                 <a:latin typeface="Amiri" pitchFamily="2" charset="-78"/>
+                <a:ea typeface="Amiri" pitchFamily="2" charset="-78"/>
                 <a:cs typeface="Amiri" pitchFamily="2" charset="-78"/>
               </a:rPr>
               <a:t>اِبْدَأِ الآنَ</a:t>
@@ -33878,6 +34007,7 @@
                   <a:srgbClr val="1B3B6F"/>
                 </a:solidFill>
                 <a:latin typeface="Amiri" pitchFamily="2" charset="-78"/>
+                <a:ea typeface="Amiri" pitchFamily="2" charset="-78"/>
                 <a:cs typeface="Amiri" pitchFamily="2" charset="-78"/>
               </a:rPr>
               <a:t>ظُرُوفُ الامْتِحَانِ</a:t>
@@ -34154,6 +34284,7 @@
                   <a:srgbClr val="1E6B52"/>
                 </a:solidFill>
                 <a:latin typeface="Amiri" pitchFamily="2" charset="-78"/>
+                <a:ea typeface="Amiri" pitchFamily="2" charset="-78"/>
                 <a:cs typeface="Amiri" pitchFamily="2" charset="-78"/>
               </a:rPr>
               <a:t>القِرَاءَةُ</a:t>
@@ -34430,6 +34561,7 @@
                   <a:srgbClr val="1E6B52"/>
                 </a:solidFill>
                 <a:latin typeface="Amiri" pitchFamily="2" charset="-78"/>
+                <a:ea typeface="Amiri" pitchFamily="2" charset="-78"/>
                 <a:cs typeface="Amiri" pitchFamily="2" charset="-78"/>
               </a:rPr>
               <a:t>الكِتَابَةُ</a:t>
@@ -34706,6 +34838,7 @@
                   <a:srgbClr val="8A6D1E"/>
                 </a:solidFill>
                 <a:latin typeface="Amiri" pitchFamily="2" charset="-78"/>
+                <a:ea typeface="Amiri" pitchFamily="2" charset="-78"/>
                 <a:cs typeface="Amiri" pitchFamily="2" charset="-78"/>
               </a:rPr>
               <a:t>صَحِّحْ</a:t>
@@ -34982,6 +35115,7 @@
                   <a:srgbClr val="C45A3C"/>
                 </a:solidFill>
                 <a:latin typeface="Amiri" pitchFamily="2" charset="-78"/>
+                <a:ea typeface="Amiri" pitchFamily="2" charset="-78"/>
                 <a:cs typeface="Amiri" pitchFamily="2" charset="-78"/>
               </a:rPr>
               <a:t>اِسْتَعِدَّ</a:t>
@@ -35225,6 +35359,7 @@
                   <a:srgbClr val="D4AF37"/>
                 </a:solidFill>
                 <a:latin typeface="Amiri" pitchFamily="2" charset="-78"/>
+                <a:ea typeface="Amiri" pitchFamily="2" charset="-78"/>
                 <a:cs typeface="Amiri" pitchFamily="2" charset="-78"/>
               </a:rPr>
               <a:t>م</a:t>
@@ -35545,6 +35680,7 @@
                   <a:srgbClr val="8A6D1E"/>
                 </a:solidFill>
                 <a:latin typeface="Amiri" pitchFamily="2" charset="-78"/>
+                <a:ea typeface="Amiri" pitchFamily="2" charset="-78"/>
                 <a:cs typeface="Amiri" pitchFamily="2" charset="-78"/>
               </a:rPr>
               <a:t>اِبْدَأِ الآنَ</a:t>
@@ -35731,6 +35867,7 @@
                   <a:srgbClr val="1B3B6F"/>
                 </a:solidFill>
                 <a:latin typeface="Amiri" pitchFamily="2" charset="-78"/>
+                <a:ea typeface="Amiri" pitchFamily="2" charset="-78"/>
                 <a:cs typeface="Amiri" pitchFamily="2" charset="-78"/>
               </a:rPr>
               <a:t>الأَدِلَّةُ النَّصِّيَّةُ</a:t>
@@ -36195,6 +36332,7 @@
                   <a:srgbClr val="1B3B6F"/>
                 </a:solidFill>
                 <a:latin typeface="Amiri" pitchFamily="2" charset="-78"/>
+                <a:ea typeface="Amiri" pitchFamily="2" charset="-78"/>
                 <a:cs typeface="Amiri" pitchFamily="2" charset="-78"/>
               </a:rPr>
               <a:t>اسْتِنْتَاجُ الكَلِمَاتِ المَجْهُولَةِ</a:t>
@@ -36659,6 +36797,7 @@
                   <a:srgbClr val="1B3B6F"/>
                 </a:solidFill>
                 <a:latin typeface="Amiri" pitchFamily="2" charset="-78"/>
+                <a:ea typeface="Amiri" pitchFamily="2" charset="-78"/>
                 <a:cs typeface="Amiri" pitchFamily="2" charset="-78"/>
               </a:rPr>
               <a:t>المَعْنَى العَامُّ</a:t>
@@ -37211,6 +37350,7 @@
                   <a:srgbClr val="1F2A37"/>
                 </a:solidFill>
                 <a:latin typeface="Amiri" pitchFamily="2" charset="-78"/>
+                <a:ea typeface="Amiri" pitchFamily="2" charset="-78"/>
                 <a:cs typeface="Amiri" pitchFamily="2" charset="-78"/>
               </a:rPr>
               <a:t>مَرْحَبًا يَا صَدِيقِي!</a:t>
@@ -37312,6 +37452,7 @@
                   <a:srgbClr val="1F2A37"/>
                 </a:solidFill>
                 <a:latin typeface="Amiri" pitchFamily="2" charset="-78"/>
+                <a:ea typeface="Amiri" pitchFamily="2" charset="-78"/>
                 <a:cs typeface="Amiri" pitchFamily="2" charset="-78"/>
               </a:rPr>
               <a:t>أَهْلًا وَسَهْلًا،</a:t>
@@ -37413,6 +37554,7 @@
                   <a:srgbClr val="1F2A37"/>
                 </a:solidFill>
                 <a:latin typeface="Amiri" pitchFamily="2" charset="-78"/>
+                <a:ea typeface="Amiri" pitchFamily="2" charset="-78"/>
                 <a:cs typeface="Amiri" pitchFamily="2" charset="-78"/>
               </a:rPr>
               <a:t>حَضْرَةَ مُدِيرِ المَدْرَسَةِ المُحْتَرَمِ،</a:t>
@@ -38186,6 +38328,7 @@
                   <a:srgbClr val="D4AF37"/>
                 </a:solidFill>
                 <a:latin typeface="Amiri" pitchFamily="2" charset="-78"/>
+                <a:ea typeface="Amiri" pitchFamily="2" charset="-78"/>
                 <a:cs typeface="Amiri" pitchFamily="2" charset="-78"/>
               </a:rPr>
               <a:t>م</a:t>
@@ -38506,6 +38649,7 @@
                   <a:srgbClr val="8A6D1E"/>
                 </a:solidFill>
                 <a:latin typeface="Amiri" pitchFamily="2" charset="-78"/>
+                <a:ea typeface="Amiri" pitchFamily="2" charset="-78"/>
                 <a:cs typeface="Amiri" pitchFamily="2" charset="-78"/>
               </a:rPr>
               <a:t>الإِجَابَاتُ وَالتَّعْلِيلُ</a:t>
@@ -38692,6 +38836,7 @@
                   <a:srgbClr val="1B3B6F"/>
                 </a:solidFill>
                 <a:latin typeface="Amiri" pitchFamily="2" charset="-78"/>
+                <a:ea typeface="Amiri" pitchFamily="2" charset="-78"/>
                 <a:cs typeface="Amiri" pitchFamily="2" charset="-78"/>
               </a:rPr>
               <a:t>الأَدِلَّةُ النَّصِّيَّةُ</a:t>
@@ -39221,6 +39366,7 @@
                   <a:srgbClr val="1B3B6F"/>
                 </a:solidFill>
                 <a:latin typeface="Amiri" pitchFamily="2" charset="-78"/>
+                <a:ea typeface="Amiri" pitchFamily="2" charset="-78"/>
                 <a:cs typeface="Amiri" pitchFamily="2" charset="-78"/>
               </a:rPr>
               <a:t>اسْتِنْتَاجُ الكَلِمَاتِ المَجْهُولَةِ</a:t>
@@ -39750,6 +39896,7 @@
                   <a:srgbClr val="1B3B6F"/>
                 </a:solidFill>
                 <a:latin typeface="Amiri" pitchFamily="2" charset="-78"/>
+                <a:ea typeface="Amiri" pitchFamily="2" charset="-78"/>
                 <a:cs typeface="Amiri" pitchFamily="2" charset="-78"/>
               </a:rPr>
               <a:t>المَعْنَى العَامُّ</a:t>
@@ -40367,6 +40514,7 @@
                   <a:srgbClr val="9AA1AB"/>
                 </a:solidFill>
                 <a:latin typeface="Amiri" pitchFamily="2" charset="-78"/>
+                <a:ea typeface="Amiri" pitchFamily="2" charset="-78"/>
                 <a:cs typeface="Amiri" pitchFamily="2" charset="-78"/>
               </a:rPr>
               <a:t>مَرْحَبًا يَا صَدِيقِي!</a:t>
@@ -40468,6 +40616,7 @@
                   <a:srgbClr val="9AA1AB"/>
                 </a:solidFill>
                 <a:latin typeface="Amiri" pitchFamily="2" charset="-78"/>
+                <a:ea typeface="Amiri" pitchFamily="2" charset="-78"/>
                 <a:cs typeface="Amiri" pitchFamily="2" charset="-78"/>
               </a:rPr>
               <a:t>أَهْلًا وَسَهْلًا،</a:t>
@@ -40596,6 +40745,7 @@
                   <a:srgbClr val="1F2A37"/>
                 </a:solidFill>
                 <a:latin typeface="Amiri" pitchFamily="2" charset="-78"/>
+                <a:ea typeface="Amiri" pitchFamily="2" charset="-78"/>
                 <a:cs typeface="Amiri" pitchFamily="2" charset="-78"/>
               </a:rPr>
               <a:t>حَضْرَةَ مُدِيرِ المَدْرَسَةِ المُحْتَرَمِ،</a:t>
@@ -41285,6 +41435,7 @@
                   <a:srgbClr val="1B3B6F"/>
                 </a:solidFill>
                 <a:latin typeface="Amiri" pitchFamily="2" charset="-78"/>
+                <a:ea typeface="Amiri" pitchFamily="2" charset="-78"/>
                 <a:cs typeface="Amiri" pitchFamily="2" charset="-78"/>
               </a:rPr>
               <a:t>أَثْبِتْ إِجَابَتَكَ مِنَ النَّصِّ.</a:t>
@@ -41418,6 +41569,7 @@
                   <a:srgbClr val="D4AF37"/>
                 </a:solidFill>
                 <a:latin typeface="Amiri" pitchFamily="2" charset="-78"/>
+                <a:ea typeface="Amiri" pitchFamily="2" charset="-78"/>
                 <a:cs typeface="Amiri" pitchFamily="2" charset="-78"/>
               </a:rPr>
               <a:t>م</a:t>
@@ -41738,6 +41890,7 @@
                   <a:srgbClr val="8A6D1E"/>
                 </a:solidFill>
                 <a:latin typeface="Amiri" pitchFamily="2" charset="-78"/>
+                <a:ea typeface="Amiri" pitchFamily="2" charset="-78"/>
                 <a:cs typeface="Amiri" pitchFamily="2" charset="-78"/>
               </a:rPr>
               <a:t>الأَهْدَافُ وَمَعَايِيرُ النَّجَاحِ</a:t>
@@ -41886,6 +42039,7 @@
                   <a:srgbClr val="8A6D1E"/>
                 </a:solidFill>
                 <a:latin typeface="Amiri" pitchFamily="2" charset="-78"/>
+                <a:ea typeface="Amiri" pitchFamily="2" charset="-78"/>
                 <a:cs typeface="Amiri" pitchFamily="2" charset="-78"/>
               </a:rPr>
               <a:t>سَتَتَعَلَّمُ اليَوْمَ</a:t>
@@ -43041,6 +43195,7 @@
                   <a:srgbClr val="D4AF37"/>
                 </a:solidFill>
                 <a:latin typeface="Amiri" pitchFamily="2" charset="-78"/>
+                <a:ea typeface="Amiri" pitchFamily="2" charset="-78"/>
                 <a:cs typeface="Amiri" pitchFamily="2" charset="-78"/>
               </a:rPr>
               <a:t>م</a:t>
@@ -43361,6 +43516,7 @@
                   <a:srgbClr val="8A6D1E"/>
                 </a:solidFill>
                 <a:latin typeface="Amiri" pitchFamily="2" charset="-78"/>
+                <a:ea typeface="Amiri" pitchFamily="2" charset="-78"/>
                 <a:cs typeface="Amiri" pitchFamily="2" charset="-78"/>
               </a:rPr>
               <a:t>ظُرُوفُ الامْتِحَانِ</a:t>
@@ -43884,6 +44040,7 @@
                   <a:srgbClr val="1B3B6F"/>
                 </a:solidFill>
                 <a:latin typeface="Amiri" pitchFamily="2" charset="-78"/>
+                <a:ea typeface="Amiri" pitchFamily="2" charset="-78"/>
                 <a:cs typeface="Amiri" pitchFamily="2" charset="-78"/>
               </a:rPr>
               <a:t>القِرَاءَةُ: ٢٠ دَقِيقَةً</a:t>
@@ -43983,6 +44140,7 @@
                   <a:srgbClr val="1B3B6F"/>
                 </a:solidFill>
                 <a:latin typeface="Amiri" pitchFamily="2" charset="-78"/>
+                <a:ea typeface="Amiri" pitchFamily="2" charset="-78"/>
                 <a:cs typeface="Amiri" pitchFamily="2" charset="-78"/>
               </a:rPr>
               <a:t>السُّؤَالُ الأَوَّلُ: ٢٠ دَقِيقَةً</a:t>
@@ -44082,6 +44240,7 @@
                   <a:srgbClr val="1B3B6F"/>
                 </a:solidFill>
                 <a:latin typeface="Amiri" pitchFamily="2" charset="-78"/>
+                <a:ea typeface="Amiri" pitchFamily="2" charset="-78"/>
                 <a:cs typeface="Amiri" pitchFamily="2" charset="-78"/>
               </a:rPr>
               <a:t>السُّؤَالُ الثَّانِي: ٣٥ دَقِيقَةً</a:t>
@@ -44253,6 +44412,7 @@
                   <a:srgbClr val="D4AF37"/>
                 </a:solidFill>
                 <a:latin typeface="Amiri" pitchFamily="2" charset="-78"/>
+                <a:ea typeface="Amiri" pitchFamily="2" charset="-78"/>
                 <a:cs typeface="Amiri" pitchFamily="2" charset="-78"/>
               </a:rPr>
               <a:t>م</a:t>
@@ -44573,6 +44733,7 @@
                   <a:srgbClr val="8A6D1E"/>
                 </a:solidFill>
                 <a:latin typeface="Amiri" pitchFamily="2" charset="-78"/>
+                <a:ea typeface="Amiri" pitchFamily="2" charset="-78"/>
                 <a:cs typeface="Amiri" pitchFamily="2" charset="-78"/>
               </a:rPr>
               <a:t>النَّصُّ</a:t>
@@ -44686,6 +44847,7 @@
                   <a:srgbClr val="1F2A37"/>
                 </a:solidFill>
                 <a:latin typeface="Amiri" pitchFamily="2" charset="-78"/>
+                <a:ea typeface="Amiri" pitchFamily="2" charset="-78"/>
                 <a:cs typeface="Amiri" pitchFamily="2" charset="-78"/>
               </a:rPr>
               <a:t>إِعْلَانٌ: يُفْتَتَحُ المَرْكَزُ الرِّيَاضِيُّ فِي السَّاعَةِ السَّادِسَةِ صَبَاحًا. يُشْتَرَطُ حَجْزُ المَلْعَبِ مُسْبَقًا. تُقَامُ دُرُوسُ السِّبَاحَةِ لِلْمُبْتَدِئِينَ يَوْمَ السَّبْتِ. وَيُمْنَعُ اسْتِخْدَامُ الهَاتِفِ فِي قَاعَةِ التَّدْرِيبِ.</a:t>
@@ -44819,6 +44981,7 @@
                   <a:srgbClr val="D4AF37"/>
                 </a:solidFill>
                 <a:latin typeface="Amiri" pitchFamily="2" charset="-78"/>
+                <a:ea typeface="Amiri" pitchFamily="2" charset="-78"/>
                 <a:cs typeface="Amiri" pitchFamily="2" charset="-78"/>
               </a:rPr>
               <a:t>م</a:t>
@@ -45139,6 +45302,7 @@
                   <a:srgbClr val="8A6D1E"/>
                 </a:solidFill>
                 <a:latin typeface="Amiri" pitchFamily="2" charset="-78"/>
+                <a:ea typeface="Amiri" pitchFamily="2" charset="-78"/>
                 <a:cs typeface="Amiri" pitchFamily="2" charset="-78"/>
               </a:rPr>
               <a:t>أَسْئِلَةُ القِرَاءَةِ</a:t>
@@ -47027,13 +47191,9 @@
     <a:fontScheme name="Office">
       <a:majorFont>
         <a:latin typeface="Calibri Light" panose="020F0302020204030204"/>
-        <a:ea typeface=""/>
-        <a:cs typeface=""/>
-        <a:font script="Jpan" typeface="游ゴシック Light"/>
-        <a:font script="Hang" typeface="맑은 고딕"/>
-        <a:font script="Hans" typeface="等线 Light"/>
-        <a:font script="Hant" typeface="新細明體"/>
-        <a:font script="Arab" typeface="Times New Roman"/>
+        <a:ea typeface="Amiri" pitchFamily="2" charset="-78"/>
+        <a:cs typeface="Amiri" pitchFamily="2" charset="-78"/>
+        <a:font script="Arab" typeface="Amiri"/>
         <a:font script="Hebr" typeface="Times New Roman"/>
         <a:font script="Thai" typeface="Angsana New"/>
         <a:font script="Ethi" typeface="Nyala"/>
@@ -47079,13 +47239,9 @@
       </a:majorFont>
       <a:minorFont>
         <a:latin typeface="Calibri" panose="020F0502020204030204"/>
-        <a:ea typeface=""/>
-        <a:cs typeface=""/>
-        <a:font script="Jpan" typeface="游ゴシック"/>
-        <a:font script="Hang" typeface="맑은 고딕"/>
-        <a:font script="Hans" typeface="等线"/>
-        <a:font script="Hant" typeface="新細明體"/>
-        <a:font script="Arab" typeface="Arial"/>
+        <a:ea typeface="Amiri" pitchFamily="2" charset="-78"/>
+        <a:cs typeface="Amiri" pitchFamily="2" charset="-78"/>
+        <a:font script="Arab" typeface="Amiri"/>
         <a:font script="Hebr" typeface="Arial"/>
         <a:font script="Thai" typeface="Cordia New"/>
         <a:font script="Ethi" typeface="Nyala"/>

--- a/Progression_P6/P6-L09_Mock_Papers_2_and_4.pptx
+++ b/Progression_P6/P6-L09_Mock_Papers_2_and_4.pptx
@@ -23179,7 +23179,7 @@
                 <a:solidFill>
                   <a:srgbClr val="FFFFFF"/>
                 </a:solidFill>
-                <a:latin typeface="Calibri" pitchFamily="34" charset="0"/>
+                <a:latin typeface="Amiri" pitchFamily="2" charset="-78"/>
                 <a:ea typeface="Amiri" pitchFamily="2" charset="-78"/>
                 <a:cs typeface="Amiri" pitchFamily="2" charset="-78"/>
               </a:rPr>
@@ -23245,7 +23245,7 @@
                 <a:solidFill>
                   <a:srgbClr val="FFFFFF"/>
                 </a:solidFill>
-                <a:latin typeface="Calibri" pitchFamily="34" charset="0"/>
+                <a:latin typeface="Amiri" pitchFamily="2" charset="-78"/>
                 <a:ea typeface="Amiri" pitchFamily="2" charset="-78"/>
                 <a:cs typeface="Amiri" pitchFamily="2" charset="-78"/>
               </a:rPr>
@@ -23311,7 +23311,7 @@
                 <a:solidFill>
                   <a:srgbClr val="FFFFFF"/>
                 </a:solidFill>
-                <a:latin typeface="Calibri" pitchFamily="34" charset="0"/>
+                <a:latin typeface="Amiri" pitchFamily="2" charset="-78"/>
                 <a:ea typeface="Amiri" pitchFamily="2" charset="-78"/>
                 <a:cs typeface="Amiri" pitchFamily="2" charset="-78"/>
               </a:rPr>
@@ -23377,7 +23377,7 @@
                 <a:solidFill>
                   <a:srgbClr val="FFFFFF"/>
                 </a:solidFill>
-                <a:latin typeface="Calibri" pitchFamily="34" charset="0"/>
+                <a:latin typeface="Amiri" pitchFamily="2" charset="-78"/>
                 <a:ea typeface="Amiri" pitchFamily="2" charset="-78"/>
                 <a:cs typeface="Amiri" pitchFamily="2" charset="-78"/>
               </a:rPr>
@@ -27107,7 +27107,7 @@
                 <a:solidFill>
                   <a:srgbClr val="FFFFFF"/>
                 </a:solidFill>
-                <a:latin typeface="Calibri" pitchFamily="34" charset="0"/>
+                <a:latin typeface="Amiri" pitchFamily="2" charset="-78"/>
                 <a:ea typeface="Amiri" pitchFamily="2" charset="-78"/>
                 <a:cs typeface="Amiri" pitchFamily="2" charset="-78"/>
               </a:rPr>
@@ -27173,7 +27173,7 @@
                 <a:solidFill>
                   <a:srgbClr val="FFFFFF"/>
                 </a:solidFill>
-                <a:latin typeface="Calibri" pitchFamily="34" charset="0"/>
+                <a:latin typeface="Amiri" pitchFamily="2" charset="-78"/>
                 <a:ea typeface="Amiri" pitchFamily="2" charset="-78"/>
                 <a:cs typeface="Amiri" pitchFamily="2" charset="-78"/>
               </a:rPr>
@@ -27239,7 +27239,7 @@
                 <a:solidFill>
                   <a:srgbClr val="FFFFFF"/>
                 </a:solidFill>
-                <a:latin typeface="Calibri" pitchFamily="34" charset="0"/>
+                <a:latin typeface="Amiri" pitchFamily="2" charset="-78"/>
                 <a:ea typeface="Amiri" pitchFamily="2" charset="-78"/>
                 <a:cs typeface="Amiri" pitchFamily="2" charset="-78"/>
               </a:rPr>
@@ -27305,7 +27305,7 @@
                 <a:solidFill>
                   <a:srgbClr val="FFFFFF"/>
                 </a:solidFill>
-                <a:latin typeface="Calibri" pitchFamily="34" charset="0"/>
+                <a:latin typeface="Amiri" pitchFamily="2" charset="-78"/>
                 <a:ea typeface="Amiri" pitchFamily="2" charset="-78"/>
                 <a:cs typeface="Amiri" pitchFamily="2" charset="-78"/>
               </a:rPr>
